--- a/disciplina-01-estado-governo-mercado/materiais/04_Unidade_4_Modelos_de_Estado_e_Brasil.pptx
+++ b/disciplina-01-estado-governo-mercado/materiais/04_Unidade_4_Modelos_de_Estado_e_Brasil.pptx
@@ -1763,8 +1763,8 @@
         </p:nvSpPr>
         <p:spPr>
           <a:xfrm>
-            <a:off x="1188720" y="1828800"/>
-            <a:ext cx="7223760" cy="1463040"/>
+            <a:off x="1188720" y="1810512"/>
+            <a:ext cx="7223760" cy="365760"/>
           </a:xfrm>
           <a:prstGeom prst="rect">
             <a:avLst/>
@@ -1783,37 +1783,17 @@
               <a:buNone/>
             </a:pPr>
             <a:r>
-              <a:rPr lang="en-US" sz="4600" b="1" dirty="0">
-                <a:solidFill>
-                  <a:srgbClr val="13294B"/>
-                </a:solidFill>
-                <a:latin typeface="Calibri" pitchFamily="34" charset="0"/>
-                <a:ea typeface="Calibri" pitchFamily="34" charset="-122"/>
-                <a:cs typeface="Calibri" pitchFamily="34" charset="-120"/>
-              </a:rPr>
-              <a:t>Especialização em</a:t>
-            </a:r>
-            <a:endParaRPr lang="en-US" sz="4600" dirty="0"/>
-          </a:p>
-          <a:p>
-            <a:pPr algn="l" indent="0" marL="0">
-              <a:lnSpc>
-                <a:spcPct val="100000"/>
-              </a:lnSpc>
-              <a:buNone/>
-            </a:pPr>
-            <a:r>
-              <a:rPr lang="en-US" sz="4600" b="1" dirty="0">
-                <a:solidFill>
-                  <a:srgbClr val="13294B"/>
-                </a:solidFill>
-                <a:latin typeface="Calibri" pitchFamily="34" charset="0"/>
-                <a:ea typeface="Calibri" pitchFamily="34" charset="-122"/>
-                <a:cs typeface="Calibri" pitchFamily="34" charset="-120"/>
-              </a:rPr>
-              <a:t>Gestão Pública</a:t>
-            </a:r>
-            <a:endParaRPr lang="en-US" sz="4600" dirty="0"/>
+              <a:rPr lang="en-US" sz="2000" b="1" dirty="0">
+                <a:solidFill>
+                  <a:srgbClr val="2A8C85"/>
+                </a:solidFill>
+                <a:latin typeface="Calibri" pitchFamily="34" charset="0"/>
+                <a:ea typeface="Calibri" pitchFamily="34" charset="-122"/>
+                <a:cs typeface="Calibri" pitchFamily="34" charset="-120"/>
+              </a:rPr>
+              <a:t>Especialização em Gestão Pública</a:t>
+            </a:r>
+            <a:endParaRPr lang="en-US" sz="2000" dirty="0"/>
           </a:p>
         </p:txBody>
       </p:sp>
@@ -1825,8 +1805,92 @@
         </p:nvSpPr>
         <p:spPr>
           <a:xfrm>
-            <a:off x="1243584" y="3456432"/>
-            <a:ext cx="3017520" cy="420624"/>
+            <a:off x="1188720" y="2157984"/>
+            <a:ext cx="7223760" cy="786384"/>
+          </a:xfrm>
+          <a:prstGeom prst="rect">
+            <a:avLst/>
+          </a:prstGeom>
+          <a:noFill/>
+          <a:ln/>
+        </p:spPr>
+        <p:txBody>
+          <a:bodyPr wrap="square" lIns="0" tIns="0" rIns="0" bIns="0" rtlCol="0" anchor="ctr"/>
+          <a:lstStyle/>
+          <a:p>
+            <a:pPr algn="l" indent="0" marL="0">
+              <a:lnSpc>
+                <a:spcPct val="100000"/>
+              </a:lnSpc>
+              <a:buNone/>
+            </a:pPr>
+            <a:r>
+              <a:rPr lang="en-US" sz="4800" b="1" dirty="0">
+                <a:solidFill>
+                  <a:srgbClr val="13294B"/>
+                </a:solidFill>
+                <a:latin typeface="Calibri" pitchFamily="34" charset="0"/>
+                <a:ea typeface="Calibri" pitchFamily="34" charset="-122"/>
+                <a:cs typeface="Calibri" pitchFamily="34" charset="-120"/>
+              </a:rPr>
+              <a:t>Estado, Governo e Mercado</a:t>
+            </a:r>
+            <a:endParaRPr lang="en-US" sz="4800" dirty="0"/>
+          </a:p>
+        </p:txBody>
+      </p:sp>
+      <p:sp>
+        <p:nvSpPr>
+          <p:cNvPr id="7" name="Text 2"/>
+          <p:cNvSpPr txBox="1"/>
+          <p:nvPr/>
+        </p:nvSpPr>
+        <p:spPr>
+          <a:xfrm>
+            <a:off x="1188720" y="2926080"/>
+            <a:ext cx="7223760" cy="384048"/>
+          </a:xfrm>
+          <a:prstGeom prst="rect">
+            <a:avLst/>
+          </a:prstGeom>
+          <a:noFill/>
+          <a:ln/>
+        </p:spPr>
+        <p:txBody>
+          <a:bodyPr wrap="square" lIns="0" tIns="0" rIns="0" bIns="0" rtlCol="0" anchor="ctr"/>
+          <a:lstStyle/>
+          <a:p>
+            <a:pPr algn="l" indent="0" marL="0">
+              <a:lnSpc>
+                <a:spcPct val="100000"/>
+              </a:lnSpc>
+              <a:buNone/>
+            </a:pPr>
+            <a:r>
+              <a:rPr lang="en-US" sz="1900" dirty="0">
+                <a:solidFill>
+                  <a:srgbClr val="1F2A37"/>
+                </a:solidFill>
+                <a:latin typeface="Calibri" pitchFamily="34" charset="0"/>
+                <a:ea typeface="Calibri" pitchFamily="34" charset="-122"/>
+                <a:cs typeface="Calibri" pitchFamily="34" charset="-120"/>
+              </a:rPr>
+              <a:t>Unidade 4 · Os modelos de Estado e o Estado brasileiro</a:t>
+            </a:r>
+            <a:endParaRPr lang="en-US" sz="1900" dirty="0"/>
+          </a:p>
+        </p:txBody>
+      </p:sp>
+      <p:sp>
+        <p:nvSpPr>
+          <p:cNvPr id="8" name="Text 3"/>
+          <p:cNvSpPr txBox="1"/>
+          <p:nvPr/>
+        </p:nvSpPr>
+        <p:spPr>
+          <a:xfrm>
+            <a:off x="1243584" y="3474720"/>
+            <a:ext cx="4572000" cy="420624"/>
           </a:xfrm>
           <a:prstGeom prst="roundRect">
             <a:avLst>
@@ -1857,7 +1921,7 @@
                 <a:ea typeface="Calibri" pitchFamily="34" charset="-122"/>
                 <a:cs typeface="Calibri" pitchFamily="34" charset="-120"/>
               </a:rPr>
-              <a:t>DEAD · UAB · Turma 2026/2</a:t>
+              <a:t>DEAD · UAB · Turma 2026/2 · Prof. Dr. Cleiton Franco</a:t>
             </a:r>
             <a:endParaRPr lang="en-US" sz="1500" dirty="0"/>
           </a:p>
@@ -2890,6 +2954,48 @@
           </a:p>
         </p:txBody>
       </p:sp>
+      <p:sp>
+        <p:nvSpPr>
+          <p:cNvPr id="6" name="Text 3"/>
+          <p:cNvSpPr txBox="1"/>
+          <p:nvPr/>
+        </p:nvSpPr>
+        <p:spPr>
+          <a:xfrm>
+            <a:off x="4206240" y="36576"/>
+            <a:ext cx="4800600" cy="219456"/>
+          </a:xfrm>
+          <a:prstGeom prst="rect">
+            <a:avLst/>
+          </a:prstGeom>
+          <a:noFill/>
+          <a:ln/>
+        </p:spPr>
+        <p:txBody>
+          <a:bodyPr wrap="square" lIns="0" tIns="0" rIns="0" bIns="0" rtlCol="0" anchor="ctr"/>
+          <a:lstStyle/>
+          <a:p>
+            <a:pPr algn="r" indent="0" marL="0">
+              <a:lnSpc>
+                <a:spcPct val="100000"/>
+              </a:lnSpc>
+              <a:buNone/>
+            </a:pPr>
+            <a:r>
+              <a:rPr lang="en-US" sz="950" dirty="0">
+                <a:solidFill>
+                  <a:srgbClr val="5B6770"/>
+                </a:solidFill>
+                <a:latin typeface="Calibri" pitchFamily="34" charset="0"/>
+                <a:ea typeface="Calibri" pitchFamily="34" charset="-122"/>
+                <a:cs typeface="Calibri" pitchFamily="34" charset="-120"/>
+              </a:rPr>
+              <a:t>Estado, Governo e Mercado · Unidade 4</a:t>
+            </a:r>
+            <a:endParaRPr lang="en-US" sz="950" dirty="0"/>
+          </a:p>
+        </p:txBody>
+      </p:sp>
     </p:spTree>
   </p:cSld>
   <p:clrMapOvr>
@@ -2965,7 +3071,7 @@
                 <a:ea typeface="Calibri" pitchFamily="34" charset="-122"/>
                 <a:cs typeface="Calibri" pitchFamily="34" charset="-120"/>
               </a:rPr>
-              <a:t>Unidade 4</a:t>
+              <a:t>Estado, Governo e Mercado</a:t>
             </a:r>
             <a:endParaRPr lang="en-US" sz="3200" dirty="0"/>
           </a:p>
@@ -2979,8 +3085,8 @@
         </p:nvSpPr>
         <p:spPr>
           <a:xfrm>
-            <a:off x="1920240" y="969264"/>
-            <a:ext cx="5303520" cy="402336"/>
+            <a:off x="1371600" y="969264"/>
+            <a:ext cx="6400800" cy="402336"/>
           </a:xfrm>
           <a:prstGeom prst="roundRect">
             <a:avLst>
@@ -3011,7 +3117,7 @@
                 <a:ea typeface="Calibri" pitchFamily="34" charset="-122"/>
                 <a:cs typeface="Calibri" pitchFamily="34" charset="-120"/>
               </a:rPr>
-              <a:t>Os modelos de Estado e o Estado brasileiro</a:t>
+              <a:t>Unidade 4 · Os modelos de Estado e o Estado brasileiro</a:t>
             </a:r>
             <a:endParaRPr lang="en-US" sz="1500" dirty="0"/>
           </a:p>
@@ -3914,6 +4020,48 @@
           </a:p>
         </p:txBody>
       </p:sp>
+      <p:sp>
+        <p:nvSpPr>
+          <p:cNvPr id="5" name="Text 3"/>
+          <p:cNvSpPr txBox="1"/>
+          <p:nvPr/>
+        </p:nvSpPr>
+        <p:spPr>
+          <a:xfrm>
+            <a:off x="4206240" y="36576"/>
+            <a:ext cx="4800600" cy="219456"/>
+          </a:xfrm>
+          <a:prstGeom prst="rect">
+            <a:avLst/>
+          </a:prstGeom>
+          <a:noFill/>
+          <a:ln/>
+        </p:spPr>
+        <p:txBody>
+          <a:bodyPr wrap="square" lIns="0" tIns="0" rIns="0" bIns="0" rtlCol="0" anchor="ctr"/>
+          <a:lstStyle/>
+          <a:p>
+            <a:pPr algn="r" indent="0" marL="0">
+              <a:lnSpc>
+                <a:spcPct val="100000"/>
+              </a:lnSpc>
+              <a:buNone/>
+            </a:pPr>
+            <a:r>
+              <a:rPr lang="en-US" sz="950" dirty="0">
+                <a:solidFill>
+                  <a:srgbClr val="5B6770"/>
+                </a:solidFill>
+                <a:latin typeface="Calibri" pitchFamily="34" charset="0"/>
+                <a:ea typeface="Calibri" pitchFamily="34" charset="-122"/>
+                <a:cs typeface="Calibri" pitchFamily="34" charset="-120"/>
+              </a:rPr>
+              <a:t>Estado, Governo e Mercado · Unidade 4</a:t>
+            </a:r>
+            <a:endParaRPr lang="en-US" sz="950" dirty="0"/>
+          </a:p>
+        </p:txBody>
+      </p:sp>
     </p:spTree>
   </p:cSld>
   <p:clrMapOvr>
@@ -4283,6 +4431,48 @@
           </a:p>
         </p:txBody>
       </p:sp>
+      <p:sp>
+        <p:nvSpPr>
+          <p:cNvPr id="6" name="Text 4"/>
+          <p:cNvSpPr txBox="1"/>
+          <p:nvPr/>
+        </p:nvSpPr>
+        <p:spPr>
+          <a:xfrm>
+            <a:off x="4206240" y="36576"/>
+            <a:ext cx="4800600" cy="219456"/>
+          </a:xfrm>
+          <a:prstGeom prst="rect">
+            <a:avLst/>
+          </a:prstGeom>
+          <a:noFill/>
+          <a:ln/>
+        </p:spPr>
+        <p:txBody>
+          <a:bodyPr wrap="square" lIns="0" tIns="0" rIns="0" bIns="0" rtlCol="0" anchor="ctr"/>
+          <a:lstStyle/>
+          <a:p>
+            <a:pPr algn="r" indent="0" marL="0">
+              <a:lnSpc>
+                <a:spcPct val="100000"/>
+              </a:lnSpc>
+              <a:buNone/>
+            </a:pPr>
+            <a:r>
+              <a:rPr lang="en-US" sz="950" dirty="0">
+                <a:solidFill>
+                  <a:srgbClr val="5B6770"/>
+                </a:solidFill>
+                <a:latin typeface="Calibri" pitchFamily="34" charset="0"/>
+                <a:ea typeface="Calibri" pitchFamily="34" charset="-122"/>
+                <a:cs typeface="Calibri" pitchFamily="34" charset="-120"/>
+              </a:rPr>
+              <a:t>Estado, Governo e Mercado · Unidade 4</a:t>
+            </a:r>
+            <a:endParaRPr lang="en-US" sz="950" dirty="0"/>
+          </a:p>
+        </p:txBody>
+      </p:sp>
     </p:spTree>
   </p:cSld>
   <p:clrMapOvr>
@@ -4740,6 +4930,48 @@
           </a:p>
         </p:txBody>
       </p:sp>
+      <p:sp>
+        <p:nvSpPr>
+          <p:cNvPr id="8" name="Text 6"/>
+          <p:cNvSpPr txBox="1"/>
+          <p:nvPr/>
+        </p:nvSpPr>
+        <p:spPr>
+          <a:xfrm>
+            <a:off x="4206240" y="36576"/>
+            <a:ext cx="4800600" cy="219456"/>
+          </a:xfrm>
+          <a:prstGeom prst="rect">
+            <a:avLst/>
+          </a:prstGeom>
+          <a:noFill/>
+          <a:ln/>
+        </p:spPr>
+        <p:txBody>
+          <a:bodyPr wrap="square" lIns="0" tIns="0" rIns="0" bIns="0" rtlCol="0" anchor="ctr"/>
+          <a:lstStyle/>
+          <a:p>
+            <a:pPr algn="r" indent="0" marL="0">
+              <a:lnSpc>
+                <a:spcPct val="100000"/>
+              </a:lnSpc>
+              <a:buNone/>
+            </a:pPr>
+            <a:r>
+              <a:rPr lang="en-US" sz="950" dirty="0">
+                <a:solidFill>
+                  <a:srgbClr val="5B6770"/>
+                </a:solidFill>
+                <a:latin typeface="Calibri" pitchFamily="34" charset="0"/>
+                <a:ea typeface="Calibri" pitchFamily="34" charset="-122"/>
+                <a:cs typeface="Calibri" pitchFamily="34" charset="-120"/>
+              </a:rPr>
+              <a:t>Estado, Governo e Mercado · Unidade 4</a:t>
+            </a:r>
+            <a:endParaRPr lang="en-US" sz="950" dirty="0"/>
+          </a:p>
+        </p:txBody>
+      </p:sp>
     </p:spTree>
   </p:cSld>
   <p:clrMapOvr>
@@ -5055,6 +5287,48 @@
               <a:t>O Estado passa de produtor a regulador.</a:t>
             </a:r>
             <a:endParaRPr lang="en-US" sz="1200" dirty="0"/>
+          </a:p>
+        </p:txBody>
+      </p:sp>
+      <p:sp>
+        <p:nvSpPr>
+          <p:cNvPr id="5" name="Text 3"/>
+          <p:cNvSpPr txBox="1"/>
+          <p:nvPr/>
+        </p:nvSpPr>
+        <p:spPr>
+          <a:xfrm>
+            <a:off x="4206240" y="36576"/>
+            <a:ext cx="4800600" cy="219456"/>
+          </a:xfrm>
+          <a:prstGeom prst="rect">
+            <a:avLst/>
+          </a:prstGeom>
+          <a:noFill/>
+          <a:ln/>
+        </p:spPr>
+        <p:txBody>
+          <a:bodyPr wrap="square" lIns="0" tIns="0" rIns="0" bIns="0" rtlCol="0" anchor="ctr"/>
+          <a:lstStyle/>
+          <a:p>
+            <a:pPr algn="r" indent="0" marL="0">
+              <a:lnSpc>
+                <a:spcPct val="100000"/>
+              </a:lnSpc>
+              <a:buNone/>
+            </a:pPr>
+            <a:r>
+              <a:rPr lang="en-US" sz="950" dirty="0">
+                <a:solidFill>
+                  <a:srgbClr val="5B6770"/>
+                </a:solidFill>
+                <a:latin typeface="Calibri" pitchFamily="34" charset="0"/>
+                <a:ea typeface="Calibri" pitchFamily="34" charset="-122"/>
+                <a:cs typeface="Calibri" pitchFamily="34" charset="-120"/>
+              </a:rPr>
+              <a:t>Estado, Governo e Mercado · Unidade 4</a:t>
+            </a:r>
+            <a:endParaRPr lang="en-US" sz="950" dirty="0"/>
           </a:p>
         </p:txBody>
       </p:sp>
@@ -6541,6 +6815,48 @@
           </a:graphicData>
         </a:graphic>
       </p:graphicFrame>
+      <p:sp>
+        <p:nvSpPr>
+          <p:cNvPr id="4" name="Text 1"/>
+          <p:cNvSpPr txBox="1"/>
+          <p:nvPr/>
+        </p:nvSpPr>
+        <p:spPr>
+          <a:xfrm>
+            <a:off x="4206240" y="36576"/>
+            <a:ext cx="4800600" cy="219456"/>
+          </a:xfrm>
+          <a:prstGeom prst="rect">
+            <a:avLst/>
+          </a:prstGeom>
+          <a:noFill/>
+          <a:ln/>
+        </p:spPr>
+        <p:txBody>
+          <a:bodyPr wrap="square" lIns="0" tIns="0" rIns="0" bIns="0" rtlCol="0" anchor="ctr"/>
+          <a:lstStyle/>
+          <a:p>
+            <a:pPr algn="r" indent="0" marL="0">
+              <a:lnSpc>
+                <a:spcPct val="100000"/>
+              </a:lnSpc>
+              <a:buNone/>
+            </a:pPr>
+            <a:r>
+              <a:rPr lang="en-US" sz="950" dirty="0">
+                <a:solidFill>
+                  <a:srgbClr val="5B6770"/>
+                </a:solidFill>
+                <a:latin typeface="Calibri" pitchFamily="34" charset="0"/>
+                <a:ea typeface="Calibri" pitchFamily="34" charset="-122"/>
+                <a:cs typeface="Calibri" pitchFamily="34" charset="-120"/>
+              </a:rPr>
+              <a:t>Estado, Governo e Mercado · Unidade 4</a:t>
+            </a:r>
+            <a:endParaRPr lang="en-US" sz="950" dirty="0"/>
+          </a:p>
+        </p:txBody>
+      </p:sp>
     </p:spTree>
   </p:cSld>
   <p:clrMapOvr>
@@ -6910,6 +7226,48 @@
           </a:p>
         </p:txBody>
       </p:sp>
+      <p:sp>
+        <p:nvSpPr>
+          <p:cNvPr id="6" name="Text 4"/>
+          <p:cNvSpPr txBox="1"/>
+          <p:nvPr/>
+        </p:nvSpPr>
+        <p:spPr>
+          <a:xfrm>
+            <a:off x="4206240" y="36576"/>
+            <a:ext cx="4800600" cy="219456"/>
+          </a:xfrm>
+          <a:prstGeom prst="rect">
+            <a:avLst/>
+          </a:prstGeom>
+          <a:noFill/>
+          <a:ln/>
+        </p:spPr>
+        <p:txBody>
+          <a:bodyPr wrap="square" lIns="0" tIns="0" rIns="0" bIns="0" rtlCol="0" anchor="ctr"/>
+          <a:lstStyle/>
+          <a:p>
+            <a:pPr algn="r" indent="0" marL="0">
+              <a:lnSpc>
+                <a:spcPct val="100000"/>
+              </a:lnSpc>
+              <a:buNone/>
+            </a:pPr>
+            <a:r>
+              <a:rPr lang="en-US" sz="950" dirty="0">
+                <a:solidFill>
+                  <a:srgbClr val="5B6770"/>
+                </a:solidFill>
+                <a:latin typeface="Calibri" pitchFamily="34" charset="0"/>
+                <a:ea typeface="Calibri" pitchFamily="34" charset="-122"/>
+                <a:cs typeface="Calibri" pitchFamily="34" charset="-120"/>
+              </a:rPr>
+              <a:t>Estado, Governo e Mercado · Unidade 4</a:t>
+            </a:r>
+            <a:endParaRPr lang="en-US" sz="950" dirty="0"/>
+          </a:p>
+        </p:txBody>
+      </p:sp>
     </p:spTree>
   </p:cSld>
   <p:clrMapOvr>
@@ -7375,6 +7733,48 @@
               <a:t>Escolha uma política pública do seu município. Que falha de mercado ela corrige? Qual função do Estado cumpre? Em qual modelo de Estado ela se inspira?</a:t>
             </a:r>
             <a:endParaRPr lang="en-US" sz="1600" dirty="0"/>
+          </a:p>
+        </p:txBody>
+      </p:sp>
+      <p:sp>
+        <p:nvSpPr>
+          <p:cNvPr id="13" name="Text 9"/>
+          <p:cNvSpPr txBox="1"/>
+          <p:nvPr/>
+        </p:nvSpPr>
+        <p:spPr>
+          <a:xfrm>
+            <a:off x="4206240" y="36576"/>
+            <a:ext cx="4800600" cy="219456"/>
+          </a:xfrm>
+          <a:prstGeom prst="rect">
+            <a:avLst/>
+          </a:prstGeom>
+          <a:noFill/>
+          <a:ln/>
+        </p:spPr>
+        <p:txBody>
+          <a:bodyPr wrap="square" lIns="0" tIns="0" rIns="0" bIns="0" rtlCol="0" anchor="ctr"/>
+          <a:lstStyle/>
+          <a:p>
+            <a:pPr algn="r" indent="0" marL="0">
+              <a:lnSpc>
+                <a:spcPct val="100000"/>
+              </a:lnSpc>
+              <a:buNone/>
+            </a:pPr>
+            <a:r>
+              <a:rPr lang="en-US" sz="950" dirty="0">
+                <a:solidFill>
+                  <a:srgbClr val="5B6770"/>
+                </a:solidFill>
+                <a:latin typeface="Calibri" pitchFamily="34" charset="0"/>
+                <a:ea typeface="Calibri" pitchFamily="34" charset="-122"/>
+                <a:cs typeface="Calibri" pitchFamily="34" charset="-120"/>
+              </a:rPr>
+              <a:t>Estado, Governo e Mercado · Unidade 4</a:t>
+            </a:r>
+            <a:endParaRPr lang="en-US" sz="950" dirty="0"/>
           </a:p>
         </p:txBody>
       </p:sp>

--- a/disciplina-01-estado-governo-mercado/materiais/04_Unidade_4_Modelos_de_Estado_e_Brasil.pptx
+++ b/disciplina-01-estado-governo-mercado/materiais/04_Unidade_4_Modelos_de_Estado_e_Brasil.pptx
@@ -9906,7 +9906,7 @@
                           <a:ea typeface="Calibri" pitchFamily="34" charset="-122"/>
                           <a:cs typeface="Calibri" pitchFamily="34" charset="-120"/>
                         </a:rPr>
-                        <a:t>04/11 (qua)</a:t>
+                        <a:t>até 08/11</a:t>
                       </a:r>
                       <a:endParaRPr lang="en-US" sz="1350" dirty="0">
                         <a:latin typeface="Calibri" charset="0"/>
@@ -9974,7 +9974,7 @@
                           <a:ea typeface="Calibri" pitchFamily="34" charset="-122"/>
                           <a:cs typeface="Calibri" pitchFamily="34" charset="-120"/>
                         </a:rPr>
-                        <a:t>4ª webaula, às 19h</a:t>
+                        <a:t>Exercícios de fixação 2 e Avaliação A2 no SIGAA (Unidades 3 e 4), 23h55</a:t>
                       </a:r>
                       <a:endParaRPr lang="en-US" sz="1350" dirty="0">
                         <a:latin typeface="Calibri" charset="0"/>
@@ -10044,7 +10044,7 @@
                           <a:ea typeface="Calibri" pitchFamily="34" charset="-122"/>
                           <a:cs typeface="Calibri" pitchFamily="34" charset="-120"/>
                         </a:rPr>
-                        <a:t>até 08/11</a:t>
+                        <a:t>09/11 a 15/11</a:t>
                       </a:r>
                       <a:endParaRPr lang="en-US" sz="1350" dirty="0">
                         <a:latin typeface="Calibri" charset="0"/>
@@ -10112,7 +10112,7 @@
                           <a:ea typeface="Calibri" pitchFamily="34" charset="-122"/>
                           <a:cs typeface="Calibri" pitchFamily="34" charset="-120"/>
                         </a:rPr>
-                        <a:t>Exercícios de fixação 2 e Avaliação A2 no SIGAA (Unidades 3 e 4), 23h55</a:t>
+                        <a:t>Semana de revisão (fórum de dúvidas e gravação do encontro síncrono)</a:t>
                       </a:r>
                       <a:endParaRPr lang="en-US" sz="1350" dirty="0">
                         <a:latin typeface="Calibri" charset="0"/>
@@ -10182,7 +10182,7 @@
                           <a:ea typeface="Calibri" pitchFamily="34" charset="-122"/>
                           <a:cs typeface="Calibri" pitchFamily="34" charset="-120"/>
                         </a:rPr>
-                        <a:t>11/11 (qua)</a:t>
+                        <a:t>até 15/11</a:t>
                       </a:r>
                       <a:endParaRPr lang="en-US" sz="1350" dirty="0">
                         <a:latin typeface="Calibri" charset="0"/>
@@ -10250,7 +10250,7 @@
                           <a:ea typeface="Calibri" pitchFamily="34" charset="-122"/>
                           <a:cs typeface="Calibri" pitchFamily="34" charset="-120"/>
                         </a:rPr>
-                        <a:t>5ª webaula: revisão para a A3</a:t>
+                        <a:t>Avaliação A3: 10 objetivas + estudo de caso (todo o conteúdo), 23h55</a:t>
                       </a:r>
                       <a:endParaRPr lang="en-US" sz="1350" dirty="0">
                         <a:latin typeface="Calibri" charset="0"/>
@@ -10302,144 +10302,6 @@
                   </a:tcPr>
                 </a:tc>
               </a:tr>
-              <a:tr h="0">
-                <a:tc>
-                  <a:txBody>
-                    <a:bodyPr/>
-                    <a:lstStyle/>
-                    <a:p>
-                      <a:pPr indent="0" marL="0">
-                        <a:buNone/>
-                      </a:pPr>
-                      <a:r>
-                        <a:rPr lang="en-US" sz="1350" dirty="0">
-                          <a:solidFill>
-                            <a:srgbClr val="1F2A37"/>
-                          </a:solidFill>
-                          <a:latin typeface="Calibri" pitchFamily="34" charset="0"/>
-                          <a:ea typeface="Calibri" pitchFamily="34" charset="-122"/>
-                          <a:cs typeface="Calibri" pitchFamily="34" charset="-120"/>
-                        </a:rPr>
-                        <a:t>até 15/11</a:t>
-                      </a:r>
-                      <a:endParaRPr lang="en-US" sz="1350" dirty="0">
-                        <a:latin typeface="Calibri" charset="0"/>
-                        <a:ea typeface="Calibri" charset="0"/>
-                        <a:cs typeface="Calibri" charset="0"/>
-                      </a:endParaRPr>
-                    </a:p>
-                  </a:txBody>
-                  <a:tcPr marL="50800" marR="50800" marT="50800" marB="50800" anchor="ctr">
-                    <a:lnL w="9525" cap="flat" cmpd="sng" algn="ctr">
-                      <a:solidFill>
-                        <a:srgbClr val="DCD5C1"/>
-                      </a:solidFill>
-                      <a:prstDash val="solid"/>
-                      <a:round/>
-                      <a:headEnd type="none" w="med" len="med"/>
-                      <a:tailEnd type="none" w="med" len="med"/>
-                    </a:lnL>
-                    <a:lnR w="9525" cap="flat" cmpd="sng" algn="ctr">
-                      <a:solidFill>
-                        <a:srgbClr val="DCD5C1"/>
-                      </a:solidFill>
-                      <a:prstDash val="solid"/>
-                      <a:round/>
-                      <a:headEnd type="none" w="med" len="med"/>
-                      <a:tailEnd type="none" w="med" len="med"/>
-                    </a:lnR>
-                    <a:lnT w="9525" cap="flat" cmpd="sng" algn="ctr">
-                      <a:solidFill>
-                        <a:srgbClr val="DCD5C1"/>
-                      </a:solidFill>
-                      <a:prstDash val="solid"/>
-                      <a:round/>
-                      <a:headEnd type="none" w="med" len="med"/>
-                      <a:tailEnd type="none" w="med" len="med"/>
-                    </a:lnT>
-                    <a:lnB w="9525" cap="flat" cmpd="sng" algn="ctr">
-                      <a:solidFill>
-                        <a:srgbClr val="DCD5C1"/>
-                      </a:solidFill>
-                      <a:prstDash val="solid"/>
-                      <a:round/>
-                      <a:headEnd type="none" w="med" len="med"/>
-                      <a:tailEnd type="none" w="med" len="med"/>
-                    </a:lnB>
-                    <a:solidFill>
-                      <a:srgbClr val="FFFFFF"/>
-                    </a:solidFill>
-                  </a:tcPr>
-                </a:tc>
-                <a:tc>
-                  <a:txBody>
-                    <a:bodyPr/>
-                    <a:lstStyle/>
-                    <a:p>
-                      <a:pPr indent="0" marL="0">
-                        <a:buNone/>
-                      </a:pPr>
-                      <a:r>
-                        <a:rPr lang="en-US" sz="1350" dirty="0">
-                          <a:solidFill>
-                            <a:srgbClr val="1F2A37"/>
-                          </a:solidFill>
-                          <a:latin typeface="Calibri" pitchFamily="34" charset="0"/>
-                          <a:ea typeface="Calibri" pitchFamily="34" charset="-122"/>
-                          <a:cs typeface="Calibri" pitchFamily="34" charset="-120"/>
-                        </a:rPr>
-                        <a:t>Avaliação A3: 10 objetivas + estudo de caso (todo o conteúdo), 23h55</a:t>
-                      </a:r>
-                      <a:endParaRPr lang="en-US" sz="1350" dirty="0">
-                        <a:latin typeface="Calibri" charset="0"/>
-                        <a:ea typeface="Calibri" charset="0"/>
-                        <a:cs typeface="Calibri" charset="0"/>
-                      </a:endParaRPr>
-                    </a:p>
-                  </a:txBody>
-                  <a:tcPr marL="50800" marR="50800" marT="50800" marB="50800" anchor="ctr">
-                    <a:lnL w="9525" cap="flat" cmpd="sng" algn="ctr">
-                      <a:solidFill>
-                        <a:srgbClr val="DCD5C1"/>
-                      </a:solidFill>
-                      <a:prstDash val="solid"/>
-                      <a:round/>
-                      <a:headEnd type="none" w="med" len="med"/>
-                      <a:tailEnd type="none" w="med" len="med"/>
-                    </a:lnL>
-                    <a:lnR w="9525" cap="flat" cmpd="sng" algn="ctr">
-                      <a:solidFill>
-                        <a:srgbClr val="DCD5C1"/>
-                      </a:solidFill>
-                      <a:prstDash val="solid"/>
-                      <a:round/>
-                      <a:headEnd type="none" w="med" len="med"/>
-                      <a:tailEnd type="none" w="med" len="med"/>
-                    </a:lnR>
-                    <a:lnT w="9525" cap="flat" cmpd="sng" algn="ctr">
-                      <a:solidFill>
-                        <a:srgbClr val="DCD5C1"/>
-                      </a:solidFill>
-                      <a:prstDash val="solid"/>
-                      <a:round/>
-                      <a:headEnd type="none" w="med" len="med"/>
-                      <a:tailEnd type="none" w="med" len="med"/>
-                    </a:lnT>
-                    <a:lnB w="9525" cap="flat" cmpd="sng" algn="ctr">
-                      <a:solidFill>
-                        <a:srgbClr val="DCD5C1"/>
-                      </a:solidFill>
-                      <a:prstDash val="solid"/>
-                      <a:round/>
-                      <a:headEnd type="none" w="med" len="med"/>
-                      <a:tailEnd type="none" w="med" len="med"/>
-                    </a:lnB>
-                    <a:solidFill>
-                      <a:srgbClr val="FFFFFF"/>
-                    </a:solidFill>
-                  </a:tcPr>
-                </a:tc>
-              </a:tr>
             </a:tbl>
           </a:graphicData>
         </a:graphic>
@@ -11470,7 +11332,7 @@
                 <a:ea typeface="Calibri" pitchFamily="34" charset="-122"/>
                 <a:cs typeface="Calibri" pitchFamily="34" charset="-120"/>
               </a:rPr>
-              <a:t>Página de conteúdos: Unidades 7 e 8 · Webaulas: 04/11 e 11/11 · A2 até 08/11 · A3 até 15/11</a:t>
+              <a:t>Página de conteúdos: Unidades 7 e 8 · A2 até 08/11 · A3 até 15/11</a:t>
             </a:r>
             <a:endParaRPr lang="en-US" sz="1500" dirty="0"/>
           </a:p>

--- a/disciplina-01-estado-governo-mercado/materiais/04_Unidade_4_Modelos_de_Estado_e_Brasil.pptx
+++ b/disciplina-01-estado-governo-mercado/materiais/04_Unidade_4_Modelos_de_Estado_e_Brasil.pptx
@@ -1566,7 +1566,7 @@
           <a:p>
             <a:r>
               <a:rPr lang="en-US" dirty="0"/>
-              <a:t/>
+              <a:t>Olá, turma! Chegamos à Unidade 4, a última da disciplina: os modelos de Estado e o Estado brasileiro. Aqui juntamos tudo o que vimos, as falhas de mercado, o pêndulo e as matrizes liberal e marxista, para entender os grandes modelos de Estado do século XX e a trajetória do Estado no Brasil.</a:t>
             </a:r>
             <a:endParaRPr lang="en-US" dirty="0"/>
           </a:p>
@@ -1654,7 +1654,7 @@
           <a:p>
             <a:r>
               <a:rPr lang="en-US" dirty="0"/>
-              <a:t/>
+              <a:t>Este gráfico compara o gasto social público de quatro países da OCDE, em proporção do PIB, em 2019. [Apontar para as barras.] Alemanha e Suécia gastam cerca de 25% a 26% do PIB; Reino Unido e Estados Unidos, os dois de regime liberal, gastam menos, entre 19% e 21%, e deixam mais espaço para o mercado. Mas atenção: o volume não diz tudo. Alemanha e Suécia gastam parecido, mas de formas diferentes: na Suécia, o acesso é universal; na Alemanha, está mais ligado às contribuições. Os valores são aproximados.</a:t>
             </a:r>
             <a:endParaRPr lang="en-US" dirty="0"/>
           </a:p>
@@ -1742,7 +1742,7 @@
           <a:p>
             <a:r>
               <a:rPr lang="en-US" dirty="0"/>
-              <a:t/>
+              <a:t>Por que o Estado de bem-estar entrou em crise nos anos 1970? Primeiro, os choques do petróleo, em 1973 e 1979, que fizeram custos e preços dispararem. Segundo, a estagflação: estagnação e inflação ao mesmo tempo, algo que o receituário keynesiano não conseguia resolver. Terceiro, a crise fiscal: os gastos cresciam mais do que a arrecadação, e a dívida aumentava. E quarto, a globalização: com o capital mais móvel, ficou mais difícil para cada país manter impostos e regulações elevados.</a:t>
             </a:r>
             <a:endParaRPr lang="en-US" dirty="0"/>
           </a:p>
@@ -1830,7 +1830,7 @@
           <a:p>
             <a:r>
               <a:rPr lang="en-US" dirty="0"/>
-              <a:t/>
+              <a:t>Da crise nasce o Estado neoliberal. As ideias vêm de Hayek, com O Caminho da Servidão, de 1944, e de Milton Friedman, com o monetarismo. Os governos que as aplicam são os de Margaret Thatcher, no Reino Unido, a partir de 1979, e de Ronald Reagan, nos Estados Unidos, a partir de 1981. Em 1989, o Consenso de Washington resume a agenda: disciplina fiscal, reforma tributária, privatizações, desregulamentação, abertura comercial e financeira e respeito à propriedade. A síntese é esta: o Estado passa de produtor a regulador.</a:t>
             </a:r>
             <a:endParaRPr lang="en-US" dirty="0"/>
           </a:p>
@@ -1918,7 +1918,7 @@
           <a:p>
             <a:r>
               <a:rPr lang="en-US" dirty="0"/>
-              <a:t/>
+              <a:t>Este quadro resume os quatro modelos. O liberal, do século XIX até 1929, com um Estado mínimo que garante segurança, justiça e contratos, inspirado em Locke e Smith. O socialista, de 1917 a 1991, com o Estado proprietário e planejador central, inspirado em Marx e Lênin. O de bem-estar, de 1945 a 1973, com o Estado indutor da demanda e provedor de direitos, inspirado em Keynes e Beveridge. E o neoliberal, de 1979 a 2008, com o Estado regulador e enxuto, inspirado em Hayek e Friedman. Sugiro copiar este quadro no caderno: é um excelente resumo da disciplina.</a:t>
             </a:r>
             <a:endParaRPr lang="en-US" dirty="0"/>
           </a:p>
@@ -2006,7 +2006,7 @@
           <a:p>
             <a:r>
               <a:rPr lang="en-US" dirty="0"/>
-              <a:t/>
+              <a:t>Parte 2: o Estado brasileiro. Vamos ver como esses modelos aparecem na nossa história, do desenvolvimentismo às reformas e à proteção social.</a:t>
             </a:r>
             <a:endParaRPr lang="en-US" dirty="0"/>
           </a:p>
@@ -2094,7 +2094,7 @@
           <a:p>
             <a:r>
               <a:rPr lang="en-US" dirty="0"/>
-              <a:t/>
+              <a:t>No Brasil, de 1930 a 1980, predomina o Estado desenvolvimentista: Vargas, Juscelino e o regime militar criam estatais como a CSN e a Petrobras, o BNDE, em 1952, e o Plano de Metas. Em 1988, a Constituição Cidadã cria a seguridade social universal, com o SUS, a previdência e a assistência social. E entre 1990 e 2000 vêm as reformas do Estado: desestatização, o Plano Diretor de 1995, as agências reguladoras e a Lei de Responsabilidade Fiscal, em 2000.</a:t>
             </a:r>
             <a:endParaRPr lang="en-US" dirty="0"/>
           </a:p>
@@ -2182,7 +2182,7 @@
           <a:p>
             <a:r>
               <a:rPr lang="en-US" dirty="0"/>
-              <a:t/>
+              <a:t>Uma forma de medir o tamanho do Estado é a carga tributária, ou seja, a arrecadação em proporção do PIB. [Apontar para as colunas.] Ela mais que dobrou entre 1947 e 1970, no auge do Estado desenvolvimentista. Depois de 1988, cresceu de novo, para financiar a seguridade social criada pela Constituição, e passou dos 30% do PIB. Um detalhe interessante: as reformas dos anos 1990 mudaram o papel do Estado, de produtor para regulador, mas não reduziram a arrecadação. Os valores são aproximados e servem para mostrar a tendência.</a:t>
             </a:r>
             <a:endParaRPr lang="en-US" dirty="0"/>
           </a:p>
@@ -2270,7 +2270,7 @@
           <a:p>
             <a:r>
               <a:rPr lang="en-US" dirty="0"/>
-              <a:t/>
+              <a:t>O Plano Diretor da Reforma do Aparelho do Estado, de 1995, identificou três modelos de administração pública. O patrimonialista, em que o público e o privado se confundem e os cargos são distribuídos como favor, típico do Brasil colonial, imperial e da República Velha. O burocrático, baseado no mérito, na impessoalidade, em normas e no controle de procedimentos, que chega com o DASP, em 1938, na Era Vargas. E o gerencial, com foco em resultados, eficiência e no cidadão, proposto pelo Plano Diretor e pela Emenda Constitucional 19, de 1998. Na prática, os três convivem até hoje. O desafio é superar o patrimonialismo sem perder os controles da burocracia.</a:t>
             </a:r>
             <a:endParaRPr lang="en-US" dirty="0"/>
           </a:p>
@@ -2358,7 +2358,7 @@
           <a:p>
             <a:r>
               <a:rPr lang="en-US" dirty="0"/>
-              <a:t/>
+              <a:t>Os anos 1990 constroem o Estado regulador brasileiro. Em 1990, o Programa Nacional de Desestatização. Entre 1996 e 1997, as agências reguladoras: a ANEEL, para energia, a ANATEL, para telecomunicações, e a ANP, para petróleo. Em 1998, a Emenda Constitucional 19, com a reforma administrativa e o princípio da eficiência. E em 2000, a Lei de Responsabilidade Fiscal, com limites para o gasto com pessoal e para a dívida. Um exemplo do dia a dia: na conta de luz, a distribuidora é privada, mas a tarifa e a qualidade são reguladas pela ANEEL. O Estado deixa de produzir e passa a regular.</a:t>
             </a:r>
             <a:endParaRPr lang="en-US" dirty="0"/>
           </a:p>
@@ -2446,7 +2446,7 @@
           <a:p>
             <a:r>
               <a:rPr lang="en-US" dirty="0"/>
-              <a:t/>
+              <a:t>Ao mesmo tempo, depois de 1988, o Brasil constrói uma ampla rede de proteção social. O SUS, pela Lei 8.080, de 1990, com saúde universal e gratuita, direito de todos e dever do Estado. O BPC, criado pela LOAS em 1993, que paga um salário mínimo a idosos e pessoas com deficiência de baixa renda. O Bolsa Família, em 2003, com transferência de renda e condicionalidades em saúde e educação. E o auxílio emergencial, em 2020, que mostrou o Estado cumprindo a função estabilizadora na pandemia.</a:t>
             </a:r>
             <a:endParaRPr lang="en-US" dirty="0"/>
           </a:p>
@@ -2534,7 +2534,7 @@
           <a:p>
             <a:r>
               <a:rPr lang="en-US" dirty="0"/>
-              <a:t/>
+              <a:t>Esta unidade vai de 2 a 15 de novembro. A leitura é o livro de Coelho e o texto de Leite Júnior, de 2009, junto com as Unidades 7 e 8 da página de conteúdos. Dois prazos importantes: a A2, até 8 de novembro, e a A3, até 15 de novembro, sempre às 23h55.</a:t>
             </a:r>
             <a:endParaRPr lang="en-US" dirty="0"/>
           </a:p>
@@ -2622,7 +2622,7 @@
           <a:p>
             <a:r>
               <a:rPr lang="en-US" dirty="0"/>
-              <a:t/>
+              <a:t>O gráfico mostra a expansão do Bolsa Família em número de famílias atendidas. [Apontar para as colunas.] O programa começou com cerca de 6,6 milhões de famílias em 2004 e cresceu rapidamente, passando de 12 milhões em 2010. Em 2023, o novo Bolsa Família absorveu o público do Auxílio Brasil e chegou a cerca de 21 milhões de famílias. Um ponto importante para quem trabalha no município: todo esse público passa pelo CadÚnico, que é operado pelas prefeituras. Os valores são aproximados.</a:t>
             </a:r>
             <a:endParaRPr lang="en-US" dirty="0"/>
           </a:p>
@@ -2710,7 +2710,7 @@
           <a:p>
             <a:r>
               <a:rPr lang="en-US" dirty="0"/>
-              <a:t/>
+              <a:t>E no século XXI? A crise de 2008 trouxe resgates bancários e estímulos fiscais em vários países. A pandemia de 2020 trouxe o auxílio emergencial e mostrou a importância do SUS. A pergunta atual não é mais “Estado ou mercado”, mas que Estado e que mercado. Deixo uma reflexão: escolha uma política pública do seu município. Que falha de mercado ela corrige? Que função do Estado ela cumpre? Em qual modelo de Estado ela se inspira? Se você conseguir responder a essas três perguntas, terá dominado o essencial da disciplina.</a:t>
             </a:r>
             <a:endParaRPr lang="en-US" dirty="0"/>
           </a:p>
@@ -2798,7 +2798,7 @@
           <a:p>
             <a:r>
               <a:rPr lang="en-US" dirty="0"/>
-              <a:t/>
+              <a:t>Vamos às atividades finais. A partir de 2 de novembro, esta videoaula e a leitura. Até 8 de novembro, os Exercícios de fixação 2 e a Avaliação A2, sobre as Unidades 3 e 4. De 9 a 15 de novembro, a semana de revisão, com o fórum de dúvidas e a gravação do encontro síncrono. E até 15 de novembro, a A3: dez questões objetivas e um estudo de caso, sobre todo o conteúdo. Lembre que a nota final é a média de A1 e A2 com peso 0,4, mais a A3 com peso 0,6, e que a aprovação exige nota 7,0.</a:t>
             </a:r>
             <a:endParaRPr lang="en-US" dirty="0"/>
           </a:p>
@@ -2886,7 +2886,7 @@
           <a:p>
             <a:r>
               <a:rPr lang="en-US" dirty="0"/>
-              <a:t/>
+              <a:t>Para encerrar, o último quiz: cinco perguntas sobre a Unidade 4. Pause, responda e confira. Depois, é só revisar e fazer as avaliações com calma.</a:t>
             </a:r>
             <a:endParaRPr lang="en-US" dirty="0"/>
           </a:p>
@@ -2974,7 +2974,7 @@
           <a:p>
             <a:r>
               <a:rPr lang="en-US" dirty="0"/>
-              <a:t/>
+              <a:t>Pergunta 1. Numa recessão, o que Keynes recomendaria ao governo? Letra a: Cortar gastos para equilibrar o orçamento. Letra b: Aumentar o gasto e o investimento para compensar a queda da demanda. Letra c: Elevar os juros para conter o consumo. Letra d: Não intervir e esperar o ajuste do mercado. Pause o vídeo e escolha a sua resposta.</a:t>
             </a:r>
             <a:endParaRPr lang="en-US" dirty="0"/>
           </a:p>
@@ -3062,7 +3062,7 @@
           <a:p>
             <a:r>
               <a:rPr lang="en-US" dirty="0"/>
-              <a:t/>
+              <a:t>A resposta correta é a letra b: Aumentar o gasto e o investimento para compensar a queda da demanda. Para Keynes, a crise vem da falta de demanda efetiva; o gasto público (G) sustenta a produção e, pelo multiplicador, a renda.</a:t>
             </a:r>
             <a:endParaRPr lang="en-US" dirty="0"/>
           </a:p>
@@ -3150,7 +3150,7 @@
           <a:p>
             <a:r>
               <a:rPr lang="en-US" dirty="0"/>
-              <a:t/>
+              <a:t>Pergunta 2. Direitos universais financiados por impostos, como na Suécia, caracterizam o regime de bem-estar: Letra a: Liberal. Letra b: Conservador-corporativo. Letra c: Social-democrata. Letra d: Neoliberal. Pause o vídeo e escolha a sua resposta.</a:t>
             </a:r>
             <a:endParaRPr lang="en-US" dirty="0"/>
           </a:p>
@@ -3238,7 +3238,7 @@
           <a:p>
             <a:r>
               <a:rPr lang="en-US" dirty="0"/>
-              <a:t/>
+              <a:t>A resposta correta é a letra c: Social-democrata. No regime social-democrata (Esping-Andersen), a proteção é universal e financiada por tributos.</a:t>
             </a:r>
             <a:endParaRPr lang="en-US" dirty="0"/>
           </a:p>
@@ -3326,7 +3326,7 @@
           <a:p>
             <a:r>
               <a:rPr lang="en-US" dirty="0"/>
-              <a:t/>
+              <a:t>Pergunta 3. O que é estagflação? Letra a: Crescimento com preços estáveis. Letra b: Estagnação econômica com inflação alta. Letra c: Queda de preços com pleno emprego. Letra d: Crescimento acelerado com desemprego zero. Pause o vídeo e escolha a sua resposta.</a:t>
             </a:r>
             <a:endParaRPr lang="en-US" dirty="0"/>
           </a:p>
@@ -3414,7 +3414,7 @@
           <a:p>
             <a:r>
               <a:rPr lang="en-US" dirty="0"/>
-              <a:t/>
+              <a:t>A resposta correta é a letra b: Estagnação econômica com inflação alta. Nos anos 1970, estagnação e inflação ocorreram juntas, o que abalou o receituário keynesiano e abriu espaço ao neoliberalismo.</a:t>
             </a:r>
             <a:endParaRPr lang="en-US" dirty="0"/>
           </a:p>
@@ -3502,7 +3502,7 @@
           <a:p>
             <a:r>
               <a:rPr lang="en-US" dirty="0"/>
-              <a:t/>
+              <a:t>Parte 1: os modelos de Estado no século XX. Vamos estudar quatro: o liberal, o socialista, o de bem-estar e o neoliberal.</a:t>
             </a:r>
             <a:endParaRPr lang="en-US" dirty="0"/>
           </a:p>
@@ -3590,7 +3590,7 @@
           <a:p>
             <a:r>
               <a:rPr lang="en-US" dirty="0"/>
-              <a:t/>
+              <a:t>Pergunta 4. O Plano Diretor da Reforma do Aparelho do Estado (1995) propôs a passagem da administração: Letra a: Gerencial para patrimonialista. Letra b: Patrimonialista para socialista. Letra c: Gerencial para burocrática. Letra d: Burocrática para gerencial. Pause o vídeo e escolha a sua resposta.</a:t>
             </a:r>
             <a:endParaRPr lang="en-US" dirty="0"/>
           </a:p>
@@ -3678,7 +3678,7 @@
           <a:p>
             <a:r>
               <a:rPr lang="en-US" dirty="0"/>
-              <a:t/>
+              <a:t>A resposta correta é a letra d: Burocrática para gerencial. A reforma de 1995 (Bresser-Pereira) buscou a administração gerencial, com foco em resultados e no cidadão.</a:t>
             </a:r>
             <a:endParaRPr lang="en-US" dirty="0"/>
           </a:p>
@@ -3766,7 +3766,7 @@
           <a:p>
             <a:r>
               <a:rPr lang="en-US" dirty="0"/>
-              <a:t/>
+              <a:t>Pergunta 5. A criação da ANEEL, da ANATEL e da ANP, nos anos 1990, expressa qual papel do Estado? Letra a: Estado regulador. Letra b: Estado produtor. Letra c: Planejamento central. Letra d: Estado mínimo guarda-noturno. Pause o vídeo e escolha a sua resposta.</a:t>
             </a:r>
             <a:endParaRPr lang="en-US" dirty="0"/>
           </a:p>
@@ -3854,7 +3854,7 @@
           <a:p>
             <a:r>
               <a:rPr lang="en-US" dirty="0"/>
-              <a:t/>
+              <a:t>A resposta correta é a letra a: Estado regulador. Com as privatizações e concessões, o Estado deixa de produzir diretamente e passa a regular os serviços por meio de agências. Com isso, encerramos a Unidade 4 e a disciplina Estado, Governo e Mercado. Obrigado pela dedicação ao longo destas semanas. Bons estudos, boas avaliações e até a próxima disciplina!</a:t>
             </a:r>
             <a:endParaRPr lang="en-US" dirty="0"/>
           </a:p>
@@ -3942,7 +3942,7 @@
           <a:p>
             <a:r>
               <a:rPr lang="en-US" dirty="0"/>
-              <a:t/>
+              <a:t>O Estado liberal, herdado do século XIX, tinha quatro marcas: Estado mínimo, orçamento equilibrado, padrão-ouro com livre comércio e pouca proteção social. Esse modelo entra em crise em 1929, com a Grande Depressão: a quebra da Bolsa de Nova York, falências em cadeia e desemprego em massa. A confiança na autorregulação do mercado é profundamente abalada, e o pêndulo começa a ir em direção ao Estado.</a:t>
             </a:r>
             <a:endParaRPr lang="en-US" dirty="0"/>
           </a:p>
@@ -4030,7 +4030,7 @@
           <a:p>
             <a:r>
               <a:rPr lang="en-US" dirty="0"/>
-              <a:t/>
+              <a:t>O primeiro modelo alternativo é o Estado socialista, de 1917 a 1991. Suas características: a Revolução Russa de 1917, a propriedade estatal, o planejamento central, com os planos quinquenais a partir de 1928, e o partido único. Entre os resultados, uma industrialização acelerada da União Soviética. Mas também limites graves: ineficiência, escassez de bens de consumo e falta de liberdades. O modelo entra em colapso com a queda do Muro de Berlim, em 1989, e o fim da URSS, em 1991.</a:t>
             </a:r>
             <a:endParaRPr lang="en-US" dirty="0"/>
           </a:p>
@@ -4118,7 +4118,7 @@
           <a:p>
             <a:r>
               <a:rPr lang="en-US" dirty="0"/>
-              <a:t/>
+              <a:t>O segundo modelo é o Estado de bem-estar social, cujo auge vai de 1945 a 1973, os anos dourados. Três referências o constroem. O New Deal, nos Estados Unidos, a partir de 1933, com obras públicas, regulação bancária e seguridade social. Keynes, em 1936, que explica o desemprego pela falta de demanda efetiva e defende que o Estado gaste e invista, mesmo com déficit. E o Relatório Beveridge, de 1942, no Reino Unido, com a proteção social universal “do berço ao túmulo”. O resultado, nos países centrais, foi crescimento, pleno emprego e direitos sociais universais.</a:t>
             </a:r>
             <a:endParaRPr lang="en-US" dirty="0"/>
           </a:p>
@@ -4206,7 +4206,7 @@
           <a:p>
             <a:r>
               <a:rPr lang="en-US" dirty="0"/>
-              <a:t/>
+              <a:t>Vamos entender melhor o raciocínio de Keynes. A demanda agregada é a soma do consumo, do investimento, do gasto do governo e das exportações líquidas. Numa recessão, o consumo e o investimento caem: as empresas vendem menos e demitem. O papel do governo é compensar essa queda com mais gasto, sustentando a produção e o emprego. E há o multiplicador: cada real gasto vira renda de alguém, que também gasta, e a renda total cresce mais que o gasto inicial. Um exemplo recente é o auxílio emergencial de 2020, que sustentou o consumo das famílias na pandemia. Repare que Keynes contesta diretamente a lei de Say, que vimos na Unidade 2.</a:t>
             </a:r>
             <a:endParaRPr lang="en-US" dirty="0"/>
           </a:p>
@@ -4294,7 +4294,7 @@
           <a:p>
             <a:r>
               <a:rPr lang="en-US" dirty="0"/>
-              <a:t/>
+              <a:t>O gráfico mostra o multiplicador em ação. [Apontar para as barras, da primeira à última.] O governo gasta 100 milhões de reais. Quem recebe esse dinheiro gasta 80% e poupa 20%: são 80 milhões de nova renda na segunda rodada. Quem recebe esses 80 gasta 64, depois 51, e assim por diante. Somando todas as rodadas, a renda cresce até 500 milhões, ou seja, 100 dividido por 1 menos 0,8. O multiplicador é 5. É um exemplo simplificado, mas mostra por que o gasto público pode ter um efeito maior do que o valor inicial.</a:t>
             </a:r>
             <a:endParaRPr lang="en-US" dirty="0"/>
           </a:p>
@@ -4382,7 +4382,7 @@
           <a:p>
             <a:r>
               <a:rPr lang="en-US" dirty="0"/>
-              <a:t/>
+              <a:t>Nem todo Estado de bem-estar é igual. Gøsta Esping-Andersen, em 1990, identificou três regimes. O liberal, como nos Estados Unidos e no Reino Unido, com benefícios focalizados nos mais pobres e um forte papel do mercado, como os planos privados. O conservador-corporativo, como na Alemanha e na França, com seguros sociais ligados ao emprego e às contribuições. E o social-democrata, como na Suécia e na Dinamarca, com direitos universais financiados por impostos. O Brasil combina traços dos três: a previdência é contributiva, como no corporativo; o SUS é universal, como no social-democrata; e programas como o Bolsa Família são focalizados, como no liberal.</a:t>
             </a:r>
             <a:endParaRPr lang="en-US" dirty="0"/>
           </a:p>

--- a/disciplina-01-estado-governo-mercado/materiais/04_Unidade_4_Modelos_de_Estado_e_Brasil.pptx
+++ b/disciplina-01-estado-governo-mercado/materiais/04_Unidade_4_Modelos_de_Estado_e_Brasil.pptx
@@ -40,9 +40,10 @@
     <p:sldId id="288" r:id="rId34"/>
     <p:sldId id="289" r:id="rId35"/>
     <p:sldId id="290" r:id="rId36"/>
+    <p:sldId id="291" r:id="rId37"/>
   </p:sldIdLst>
   <p:notesMasterIdLst>
-    <p:notesMasterId r:id="rId37"/>
+    <p:notesMasterId r:id="rId38"/>
   </p:notesMasterIdLst>
   <p:sldSz cx="9144000" cy="5143500"/>
   <p:notesSz cx="5143500" cy="9144000"/>
@@ -4032,7 +4033,7 @@
           <a:p>
             <a:r>
               <a:rPr lang="en-US" dirty="0"/>
-              <a:t>A resposta correta é a letra a: Estado regulador. Com as privatizações e concessões, o Estado deixa de produzir diretamente e passa a regular os serviços por meio de agências. Com isso, encerramos a Unidade 4 e a disciplina Estado, Governo e Mercado. Obrigado pela dedicação ao longo destas semanas. Bons estudos, boas avaliações e até a próxima disciplina!</a:t>
+              <a:t>A resposta correta é a letra a: Estado regulador. Com as privatizações e concessões, o Estado deixa de produzir diretamente e passa a regular os serviços por meio de agências.</a:t>
             </a:r>
             <a:endParaRPr lang="en-US" dirty="0"/>
           </a:p>
@@ -4056,6 +4057,94 @@
             <a:fld id="{F7021451-1387-4CA6-816F-3879F97B5CBC}" type="slidenum">
               <a:rPr lang="en-US"/>
               <a:t>35</a:t>
+            </a:fld>
+            <a:endParaRPr lang="en-US"/>
+          </a:p>
+        </p:txBody>
+      </p:sp>
+    </p:spTree>
+    <p:extLst>
+      <p:ext uri="{BB962C8B-B14F-4D97-AF65-F5344CB8AC3E}">
+        <p14:creationId xmlns:p14="http://schemas.microsoft.com/office/powerpoint/2010/main" val="1024086991"/>
+      </p:ext>
+    </p:extLst>
+  </p:cSld>
+  <p:clrMapOvr>
+    <a:masterClrMapping/>
+  </p:clrMapOvr>
+</p:notes>
+</file>
+
+<file path=ppt/notesSlides/notesSlide36.xml><?xml version="1.0" encoding="utf-8"?>
+<p:notes xmlns:a="http://schemas.openxmlformats.org/drawingml/2006/main" xmlns:r="http://schemas.openxmlformats.org/officeDocument/2006/relationships" xmlns:p="http://schemas.openxmlformats.org/presentationml/2006/main">
+  <p:cSld>
+    <p:spTree>
+      <p:nvGrpSpPr>
+        <p:cNvPr id="1" name=""/>
+        <p:cNvGrpSpPr/>
+        <p:nvPr/>
+      </p:nvGrpSpPr>
+      <p:grpSpPr>
+        <a:xfrm>
+          <a:off x="0" y="0"/>
+          <a:ext cx="0" cy="0"/>
+          <a:chOff x="0" y="0"/>
+          <a:chExt cx="0" cy="0"/>
+        </a:xfrm>
+      </p:grpSpPr>
+      <p:sp>
+        <p:nvSpPr>
+          <p:cNvPr id="2" name="Slide Image Placeholder 1"/>
+          <p:cNvSpPr>
+            <a:spLocks noGrp="1" noRot="1" noChangeAspect="1"/>
+          </p:cNvSpPr>
+          <p:nvPr>
+            <p:ph type="sldImg"/>
+          </p:nvPr>
+        </p:nvSpPr>
+        <p:spPr/>
+      </p:sp>
+      <p:sp>
+        <p:nvSpPr>
+          <p:cNvPr id="3" name="Notes Placeholder 2"/>
+          <p:cNvSpPr>
+            <a:spLocks noGrp="1"/>
+          </p:cNvSpPr>
+          <p:nvPr>
+            <p:ph type="body" idx="1"/>
+          </p:nvPr>
+        </p:nvSpPr>
+        <p:spPr/>
+        <p:txBody>
+          <a:bodyPr/>
+          <a:lstStyle/>
+          <a:p>
+            <a:r>
+              <a:rPr lang="en-US" dirty="0"/>
+              <a:t>Para fechar a Unidade 4 e a disciplina, vamos recapitular. [Apontar para o quadro da esquerda.] No tópico 7, vimos os quatro modelos de Estado do século XX: o liberal, que entrou em crise em 1929; o socialista, com planejamento central, de 1917 a 1991; o de bem-estar social, com Keynes, o New Deal, Beveridge e os três regimes de Esping-Andersen; e, depois da crise dos anos 1970, o neoliberal, com Hayek, Friedman e o Consenso de Washington. [Apontar para o quadro da direita.] No tópico 8, vimos o Estado desenvolvimentista brasileiro, de 1930 a 1980, e a tensão entre a Constituição de 1988, com a seguridade universal, e as reformas dos anos 1990, com o Estado gerencial, as agências reguladoras e a LRF. Vimos também que patrimonialismo, burocracia e gerencialismo ainda convivem, e que, no século XXI, a pergunta é que Estado e que mercado queremos. Lembre: A2 até 8 de novembro e A3 até 15 de novembro, às 23h55. Obrigado pela dedicação ao longo destas semanas. Bons estudos, boas avaliações e até a próxima disciplina!</a:t>
+            </a:r>
+            <a:endParaRPr lang="en-US" dirty="0"/>
+          </a:p>
+        </p:txBody>
+      </p:sp>
+      <p:sp>
+        <p:nvSpPr>
+          <p:cNvPr id="4" name="Slide Number Placeholder 3"/>
+          <p:cNvSpPr>
+            <a:spLocks noGrp="1"/>
+          </p:cNvSpPr>
+          <p:nvPr>
+            <p:ph type="sldNum" sz="quarter" idx="10"/>
+          </p:nvPr>
+        </p:nvSpPr>
+        <p:spPr/>
+        <p:txBody>
+          <a:bodyPr/>
+          <a:lstStyle/>
+          <a:p>
+            <a:fld id="{F7021451-1387-4CA6-816F-3879F97B5CBC}" type="slidenum">
+              <a:rPr lang="en-US"/>
+              <a:t>36</a:t>
             </a:fld>
             <a:endParaRPr lang="en-US"/>
           </a:p>
@@ -22590,6 +22679,557 @@
 </p:sld>
 </file>
 
+<file path=ppt/slides/slide36.xml><?xml version="1.0" encoding="utf-8"?>
+<p:sld xmlns:a="http://schemas.openxmlformats.org/drawingml/2006/main" xmlns:r="http://schemas.openxmlformats.org/officeDocument/2006/relationships" xmlns:p="http://schemas.openxmlformats.org/presentationml/2006/main">
+  <p:cSld name="Slide 36">
+    <p:bg>
+      <p:bgPr>
+        <a:blipFill dpi="0" rotWithShape="1">
+          <a:blip r:embed="rId1">
+            <a:lum/>
+          </a:blip>
+          <a:srcRect/>
+          <a:stretch>
+            <a:fillRect/>
+          </a:stretch>
+        </a:blipFill>
+        <a:effectLst/>
+      </p:bgPr>
+    </p:bg>
+    <p:spTree>
+      <p:nvGrpSpPr>
+        <p:cNvPr id="1" name=""/>
+        <p:cNvGrpSpPr/>
+        <p:nvPr/>
+      </p:nvGrpSpPr>
+      <p:grpSpPr>
+        <a:xfrm>
+          <a:off x="0" y="0"/>
+          <a:ext cx="0" cy="0"/>
+          <a:chOff x="0" y="0"/>
+          <a:chExt cx="0" cy="0"/>
+        </a:xfrm>
+      </p:grpSpPr>
+      <p:sp>
+        <p:nvSpPr>
+          <p:cNvPr id="2" name="Text 0"/>
+          <p:cNvSpPr txBox="1"/>
+          <p:nvPr/>
+        </p:nvSpPr>
+        <p:spPr>
+          <a:xfrm>
+            <a:off x="731520" y="256032"/>
+            <a:ext cx="7680960" cy="566928"/>
+          </a:xfrm>
+          <a:prstGeom prst="rect">
+            <a:avLst/>
+          </a:prstGeom>
+          <a:noFill/>
+          <a:ln/>
+        </p:spPr>
+        <p:txBody>
+          <a:bodyPr wrap="square" lIns="0" tIns="0" rIns="0" bIns="0" rtlCol="0" anchor="ctr"/>
+          <a:lstStyle/>
+          <a:p>
+            <a:pPr algn="ctr" indent="0" marL="0">
+              <a:lnSpc>
+                <a:spcPct val="100000"/>
+              </a:lnSpc>
+              <a:buNone/>
+            </a:pPr>
+            <a:r>
+              <a:rPr lang="en-US" sz="2800" b="1" dirty="0">
+                <a:solidFill>
+                  <a:srgbClr val="13294B"/>
+                </a:solidFill>
+                <a:latin typeface="Calibri" pitchFamily="34" charset="0"/>
+                <a:ea typeface="Calibri" pitchFamily="34" charset="-122"/>
+                <a:cs typeface="Calibri" pitchFamily="34" charset="-120"/>
+              </a:rPr>
+              <a:t>Resumo da Unidade 4</a:t>
+            </a:r>
+            <a:endParaRPr lang="en-US" sz="2800" dirty="0"/>
+          </a:p>
+        </p:txBody>
+      </p:sp>
+      <p:sp>
+        <p:nvSpPr>
+          <p:cNvPr id="3" name="Text 1"/>
+          <p:cNvSpPr txBox="1"/>
+          <p:nvPr/>
+        </p:nvSpPr>
+        <p:spPr>
+          <a:xfrm>
+            <a:off x="1005840" y="804672"/>
+            <a:ext cx="7132320" cy="329184"/>
+          </a:xfrm>
+          <a:prstGeom prst="rect">
+            <a:avLst/>
+          </a:prstGeom>
+          <a:noFill/>
+          <a:ln/>
+        </p:spPr>
+        <p:txBody>
+          <a:bodyPr wrap="square" lIns="0" tIns="0" rIns="0" bIns="0" rtlCol="0" anchor="ctr"/>
+          <a:lstStyle/>
+          <a:p>
+            <a:pPr algn="ctr" indent="0" marL="0">
+              <a:lnSpc>
+                <a:spcPct val="100000"/>
+              </a:lnSpc>
+              <a:buNone/>
+            </a:pPr>
+            <a:r>
+              <a:rPr lang="en-US" sz="1400" dirty="0">
+                <a:solidFill>
+                  <a:srgbClr val="5B6770"/>
+                </a:solidFill>
+                <a:latin typeface="Calibri" pitchFamily="34" charset="0"/>
+                <a:ea typeface="Calibri" pitchFamily="34" charset="-122"/>
+                <a:cs typeface="Calibri" pitchFamily="34" charset="-120"/>
+              </a:rPr>
+              <a:t>O que discutimos nesta unidade</a:t>
+            </a:r>
+            <a:endParaRPr lang="en-US" sz="1400" dirty="0"/>
+          </a:p>
+        </p:txBody>
+      </p:sp>
+      <p:sp>
+        <p:nvSpPr>
+          <p:cNvPr id="4" name="Text 2"/>
+          <p:cNvSpPr txBox="1"/>
+          <p:nvPr/>
+        </p:nvSpPr>
+        <p:spPr>
+          <a:xfrm>
+            <a:off x="685800" y="1170432"/>
+            <a:ext cx="3794760" cy="2743200"/>
+          </a:xfrm>
+          <a:prstGeom prst="roundRect">
+            <a:avLst>
+              <a:gd name="adj" fmla="val 2000"/>
+            </a:avLst>
+          </a:prstGeom>
+          <a:solidFill>
+            <a:srgbClr val="FFFFFF"/>
+          </a:solidFill>
+          <a:ln w="12700">
+            <a:solidFill>
+              <a:srgbClr val="DCD5C1"/>
+            </a:solidFill>
+          </a:ln>
+        </p:spPr>
+        <p:txBody>
+          <a:bodyPr wrap="square" lIns="114300" tIns="114300" rIns="114300" bIns="114300" rtlCol="0" anchor="t"/>
+          <a:lstStyle/>
+          <a:p>
+            <a:pPr algn="l" indent="0" marL="0">
+              <a:lnSpc>
+                <a:spcPct val="100000"/>
+              </a:lnSpc>
+              <a:spcAft>
+                <a:spcPts val="200"/>
+              </a:spcAft>
+              <a:buNone/>
+            </a:pPr>
+            <a:r>
+              <a:rPr lang="en-US" sz="1100" b="1" dirty="0">
+                <a:solidFill>
+                  <a:srgbClr val="2A8C85"/>
+                </a:solidFill>
+                <a:latin typeface="Calibri" pitchFamily="34" charset="0"/>
+                <a:ea typeface="Calibri" pitchFamily="34" charset="-122"/>
+                <a:cs typeface="Calibri" pitchFamily="34" charset="-120"/>
+              </a:rPr>
+              <a:t>PARTE 1 · TÓPICO 7</a:t>
+            </a:r>
+            <a:endParaRPr lang="en-US" sz="1100" dirty="0"/>
+          </a:p>
+          <a:p>
+            <a:pPr algn="l" indent="0" marL="0">
+              <a:lnSpc>
+                <a:spcPct val="100000"/>
+              </a:lnSpc>
+              <a:spcAft>
+                <a:spcPts val="400"/>
+              </a:spcAft>
+              <a:buNone/>
+            </a:pPr>
+            <a:r>
+              <a:rPr lang="en-US" sz="1450" b="1" dirty="0">
+                <a:solidFill>
+                  <a:srgbClr val="13294B"/>
+                </a:solidFill>
+                <a:latin typeface="Calibri" pitchFamily="34" charset="0"/>
+                <a:ea typeface="Calibri" pitchFamily="34" charset="-122"/>
+                <a:cs typeface="Calibri" pitchFamily="34" charset="-120"/>
+              </a:rPr>
+              <a:t>Os modelos de Estado no século XX</a:t>
+            </a:r>
+            <a:endParaRPr lang="en-US" sz="1100" dirty="0"/>
+          </a:p>
+          <a:p>
+            <a:pPr algn="l" marL="177800" indent="-177800">
+              <a:lnSpc>
+                <a:spcPct val="100000"/>
+              </a:lnSpc>
+              <a:spcAft>
+                <a:spcPts val="300"/>
+              </a:spcAft>
+              <a:buSzPct val="100000"/>
+              <a:buChar char="•"/>
+            </a:pPr>
+            <a:r>
+              <a:rPr lang="en-US" sz="1200" dirty="0">
+                <a:solidFill>
+                  <a:srgbClr val="1F2A37"/>
+                </a:solidFill>
+                <a:latin typeface="Calibri" pitchFamily="34" charset="0"/>
+                <a:ea typeface="Calibri" pitchFamily="34" charset="-122"/>
+                <a:cs typeface="Calibri" pitchFamily="34" charset="-120"/>
+              </a:rPr>
+              <a:t>Estado liberal e a crise de 1929.</a:t>
+            </a:r>
+            <a:endParaRPr lang="en-US" sz="1100" dirty="0"/>
+          </a:p>
+          <a:p>
+            <a:pPr algn="l" marL="177800" indent="-177800">
+              <a:lnSpc>
+                <a:spcPct val="100000"/>
+              </a:lnSpc>
+              <a:spcAft>
+                <a:spcPts val="300"/>
+              </a:spcAft>
+              <a:buSzPct val="100000"/>
+              <a:buChar char="•"/>
+            </a:pPr>
+            <a:r>
+              <a:rPr lang="en-US" sz="1200" dirty="0">
+                <a:solidFill>
+                  <a:srgbClr val="1F2A37"/>
+                </a:solidFill>
+                <a:latin typeface="Calibri" pitchFamily="34" charset="0"/>
+                <a:ea typeface="Calibri" pitchFamily="34" charset="-122"/>
+                <a:cs typeface="Calibri" pitchFamily="34" charset="-120"/>
+              </a:rPr>
+              <a:t>Estado socialista: planejamento central (1917–1991).</a:t>
+            </a:r>
+            <a:endParaRPr lang="en-US" sz="1100" dirty="0"/>
+          </a:p>
+          <a:p>
+            <a:pPr algn="l" marL="177800" indent="-177800">
+              <a:lnSpc>
+                <a:spcPct val="100000"/>
+              </a:lnSpc>
+              <a:spcAft>
+                <a:spcPts val="300"/>
+              </a:spcAft>
+              <a:buSzPct val="100000"/>
+              <a:buChar char="•"/>
+            </a:pPr>
+            <a:r>
+              <a:rPr lang="en-US" sz="1200" dirty="0">
+                <a:solidFill>
+                  <a:srgbClr val="1F2A37"/>
+                </a:solidFill>
+                <a:latin typeface="Calibri" pitchFamily="34" charset="0"/>
+                <a:ea typeface="Calibri" pitchFamily="34" charset="-122"/>
+                <a:cs typeface="Calibri" pitchFamily="34" charset="-120"/>
+              </a:rPr>
+              <a:t>Bem-estar: Keynes, New Deal, Beveridge; três regimes (Esping-Andersen).</a:t>
+            </a:r>
+            <a:endParaRPr lang="en-US" sz="1100" dirty="0"/>
+          </a:p>
+          <a:p>
+            <a:pPr algn="l" marL="177800" indent="-177800">
+              <a:lnSpc>
+                <a:spcPct val="100000"/>
+              </a:lnSpc>
+              <a:spcAft>
+                <a:spcPts val="300"/>
+              </a:spcAft>
+              <a:buSzPct val="100000"/>
+              <a:buChar char="•"/>
+            </a:pPr>
+            <a:r>
+              <a:rPr lang="en-US" sz="1200" dirty="0">
+                <a:solidFill>
+                  <a:srgbClr val="1F2A37"/>
+                </a:solidFill>
+                <a:latin typeface="Calibri" pitchFamily="34" charset="0"/>
+                <a:ea typeface="Calibri" pitchFamily="34" charset="-122"/>
+                <a:cs typeface="Calibri" pitchFamily="34" charset="-120"/>
+              </a:rPr>
+              <a:t>Crise dos anos 1970 e Estado neoliberal: Hayek, Friedman e Consenso de Washington.</a:t>
+            </a:r>
+            <a:endParaRPr lang="en-US" sz="1100" dirty="0"/>
+          </a:p>
+        </p:txBody>
+      </p:sp>
+      <p:sp>
+        <p:nvSpPr>
+          <p:cNvPr id="5" name="Text 3"/>
+          <p:cNvSpPr txBox="1"/>
+          <p:nvPr/>
+        </p:nvSpPr>
+        <p:spPr>
+          <a:xfrm>
+            <a:off x="4663440" y="1170432"/>
+            <a:ext cx="3794760" cy="2743200"/>
+          </a:xfrm>
+          <a:prstGeom prst="roundRect">
+            <a:avLst>
+              <a:gd name="adj" fmla="val 2000"/>
+            </a:avLst>
+          </a:prstGeom>
+          <a:solidFill>
+            <a:srgbClr val="E6F2F0"/>
+          </a:solidFill>
+          <a:ln/>
+        </p:spPr>
+        <p:txBody>
+          <a:bodyPr wrap="square" lIns="114300" tIns="114300" rIns="114300" bIns="114300" rtlCol="0" anchor="t"/>
+          <a:lstStyle/>
+          <a:p>
+            <a:pPr algn="l" indent="0" marL="0">
+              <a:lnSpc>
+                <a:spcPct val="100000"/>
+              </a:lnSpc>
+              <a:spcAft>
+                <a:spcPts val="200"/>
+              </a:spcAft>
+              <a:buNone/>
+            </a:pPr>
+            <a:r>
+              <a:rPr lang="en-US" sz="1100" b="1" dirty="0">
+                <a:solidFill>
+                  <a:srgbClr val="2A8C85"/>
+                </a:solidFill>
+                <a:latin typeface="Calibri" pitchFamily="34" charset="0"/>
+                <a:ea typeface="Calibri" pitchFamily="34" charset="-122"/>
+                <a:cs typeface="Calibri" pitchFamily="34" charset="-120"/>
+              </a:rPr>
+              <a:t>PARTE 2 · TÓPICO 8</a:t>
+            </a:r>
+            <a:endParaRPr lang="en-US" sz="1100" dirty="0"/>
+          </a:p>
+          <a:p>
+            <a:pPr algn="l" indent="0" marL="0">
+              <a:lnSpc>
+                <a:spcPct val="100000"/>
+              </a:lnSpc>
+              <a:spcAft>
+                <a:spcPts val="400"/>
+              </a:spcAft>
+              <a:buNone/>
+            </a:pPr>
+            <a:r>
+              <a:rPr lang="en-US" sz="1450" b="1" dirty="0">
+                <a:solidFill>
+                  <a:srgbClr val="13294B"/>
+                </a:solidFill>
+                <a:latin typeface="Calibri" pitchFamily="34" charset="0"/>
+                <a:ea typeface="Calibri" pitchFamily="34" charset="-122"/>
+                <a:cs typeface="Calibri" pitchFamily="34" charset="-120"/>
+              </a:rPr>
+              <a:t>Estado e capital no Brasil e no século XXI</a:t>
+            </a:r>
+            <a:endParaRPr lang="en-US" sz="1100" dirty="0"/>
+          </a:p>
+          <a:p>
+            <a:pPr algn="l" marL="177800" indent="-177800">
+              <a:lnSpc>
+                <a:spcPct val="100000"/>
+              </a:lnSpc>
+              <a:spcAft>
+                <a:spcPts val="300"/>
+              </a:spcAft>
+              <a:buSzPct val="100000"/>
+              <a:buChar char="•"/>
+            </a:pPr>
+            <a:r>
+              <a:rPr lang="en-US" sz="1200" dirty="0">
+                <a:solidFill>
+                  <a:srgbClr val="1F2A37"/>
+                </a:solidFill>
+                <a:latin typeface="Calibri" pitchFamily="34" charset="0"/>
+                <a:ea typeface="Calibri" pitchFamily="34" charset="-122"/>
+                <a:cs typeface="Calibri" pitchFamily="34" charset="-120"/>
+              </a:rPr>
+              <a:t>Estado desenvolvimentista (1930–1980).</a:t>
+            </a:r>
+            <a:endParaRPr lang="en-US" sz="1100" dirty="0"/>
+          </a:p>
+          <a:p>
+            <a:pPr algn="l" marL="177800" indent="-177800">
+              <a:lnSpc>
+                <a:spcPct val="100000"/>
+              </a:lnSpc>
+              <a:spcAft>
+                <a:spcPts val="300"/>
+              </a:spcAft>
+              <a:buSzPct val="100000"/>
+              <a:buChar char="•"/>
+            </a:pPr>
+            <a:r>
+              <a:rPr lang="en-US" sz="1200" dirty="0">
+                <a:solidFill>
+                  <a:srgbClr val="1F2A37"/>
+                </a:solidFill>
+                <a:latin typeface="Calibri" pitchFamily="34" charset="0"/>
+                <a:ea typeface="Calibri" pitchFamily="34" charset="-122"/>
+                <a:cs typeface="Calibri" pitchFamily="34" charset="-120"/>
+              </a:rPr>
+              <a:t>Constituição de 1988 (seguridade universal) × reformas dos anos 1990 (gerencial, regulador, LRF).</a:t>
+            </a:r>
+            <a:endParaRPr lang="en-US" sz="1100" dirty="0"/>
+          </a:p>
+          <a:p>
+            <a:pPr algn="l" marL="177800" indent="-177800">
+              <a:lnSpc>
+                <a:spcPct val="100000"/>
+              </a:lnSpc>
+              <a:spcAft>
+                <a:spcPts val="300"/>
+              </a:spcAft>
+              <a:buSzPct val="100000"/>
+              <a:buChar char="•"/>
+            </a:pPr>
+            <a:r>
+              <a:rPr lang="en-US" sz="1200" dirty="0">
+                <a:solidFill>
+                  <a:srgbClr val="1F2A37"/>
+                </a:solidFill>
+                <a:latin typeface="Calibri" pitchFamily="34" charset="0"/>
+                <a:ea typeface="Calibri" pitchFamily="34" charset="-122"/>
+                <a:cs typeface="Calibri" pitchFamily="34" charset="-120"/>
+              </a:rPr>
+              <a:t>Patrimonialismo, burocracia e gerencialismo ainda convivem.</a:t>
+            </a:r>
+            <a:endParaRPr lang="en-US" sz="1100" dirty="0"/>
+          </a:p>
+          <a:p>
+            <a:pPr algn="l" marL="177800" indent="-177800">
+              <a:lnSpc>
+                <a:spcPct val="100000"/>
+              </a:lnSpc>
+              <a:spcAft>
+                <a:spcPts val="300"/>
+              </a:spcAft>
+              <a:buSzPct val="100000"/>
+              <a:buChar char="•"/>
+            </a:pPr>
+            <a:r>
+              <a:rPr lang="en-US" sz="1200" dirty="0">
+                <a:solidFill>
+                  <a:srgbClr val="1F2A37"/>
+                </a:solidFill>
+                <a:latin typeface="Calibri" pitchFamily="34" charset="0"/>
+                <a:ea typeface="Calibri" pitchFamily="34" charset="-122"/>
+                <a:cs typeface="Calibri" pitchFamily="34" charset="-120"/>
+              </a:rPr>
+              <a:t>Século XXI: 2008 e a pandemia; que Estado e que mercado?</a:t>
+            </a:r>
+            <a:endParaRPr lang="en-US" sz="1100" dirty="0"/>
+          </a:p>
+        </p:txBody>
+      </p:sp>
+      <p:sp>
+        <p:nvSpPr>
+          <p:cNvPr id="6" name="Text 4"/>
+          <p:cNvSpPr txBox="1"/>
+          <p:nvPr/>
+        </p:nvSpPr>
+        <p:spPr>
+          <a:xfrm>
+            <a:off x="685800" y="3995928"/>
+            <a:ext cx="7772400" cy="484632"/>
+          </a:xfrm>
+          <a:prstGeom prst="roundRect">
+            <a:avLst>
+              <a:gd name="adj" fmla="val 15094"/>
+            </a:avLst>
+          </a:prstGeom>
+          <a:solidFill>
+            <a:srgbClr val="E6F2F0"/>
+          </a:solidFill>
+          <a:ln/>
+        </p:spPr>
+        <p:txBody>
+          <a:bodyPr wrap="square" lIns="127000" tIns="127000" rIns="127000" bIns="127000" rtlCol="0" anchor="ctr"/>
+          <a:lstStyle/>
+          <a:p>
+            <a:pPr algn="ctr" indent="0" marL="0">
+              <a:lnSpc>
+                <a:spcPct val="100000"/>
+              </a:lnSpc>
+              <a:buNone/>
+            </a:pPr>
+            <a:r>
+              <a:rPr lang="en-US" sz="1300" b="1" dirty="0">
+                <a:solidFill>
+                  <a:srgbClr val="13294B"/>
+                </a:solidFill>
+                <a:latin typeface="Calibri" pitchFamily="34" charset="0"/>
+                <a:ea typeface="Calibri" pitchFamily="34" charset="-122"/>
+                <a:cs typeface="Calibri" pitchFamily="34" charset="-120"/>
+              </a:rPr>
+              <a:t>Avaliações: A2 até 08/11 e A3 até 15/11, às 23h55. Bons estudos!</a:t>
+            </a:r>
+            <a:endParaRPr lang="en-US" sz="1300" dirty="0"/>
+          </a:p>
+        </p:txBody>
+      </p:sp>
+      <p:sp>
+        <p:nvSpPr>
+          <p:cNvPr id="7" name="Text 5"/>
+          <p:cNvSpPr txBox="1"/>
+          <p:nvPr/>
+        </p:nvSpPr>
+        <p:spPr>
+          <a:xfrm>
+            <a:off x="4206240" y="36576"/>
+            <a:ext cx="4800600" cy="219456"/>
+          </a:xfrm>
+          <a:prstGeom prst="rect">
+            <a:avLst/>
+          </a:prstGeom>
+          <a:noFill/>
+          <a:ln/>
+        </p:spPr>
+        <p:txBody>
+          <a:bodyPr wrap="square" lIns="0" tIns="0" rIns="0" bIns="0" rtlCol="0" anchor="ctr"/>
+          <a:lstStyle/>
+          <a:p>
+            <a:pPr algn="r" indent="0" marL="0">
+              <a:lnSpc>
+                <a:spcPct val="100000"/>
+              </a:lnSpc>
+              <a:buNone/>
+            </a:pPr>
+            <a:r>
+              <a:rPr lang="en-US" sz="950" dirty="0">
+                <a:solidFill>
+                  <a:srgbClr val="5B6770"/>
+                </a:solidFill>
+                <a:latin typeface="Calibri" pitchFamily="34" charset="0"/>
+                <a:ea typeface="Calibri" pitchFamily="34" charset="-122"/>
+                <a:cs typeface="Calibri" pitchFamily="34" charset="-120"/>
+              </a:rPr>
+              <a:t>Estado, Governo e Mercado · Unidade 4</a:t>
+            </a:r>
+            <a:endParaRPr lang="en-US" sz="950" dirty="0"/>
+          </a:p>
+        </p:txBody>
+      </p:sp>
+    </p:spTree>
+  </p:cSld>
+  <p:clrMapOvr>
+    <a:masterClrMapping/>
+  </p:clrMapOvr>
+</p:sld>
+</file>
+
 <file path=ppt/slides/slide4.xml><?xml version="1.0" encoding="utf-8"?>
 <p:sld xmlns:a="http://schemas.openxmlformats.org/drawingml/2006/main" xmlns:r="http://schemas.openxmlformats.org/officeDocument/2006/relationships" xmlns:p="http://schemas.openxmlformats.org/presentationml/2006/main">
   <p:cSld name="Slide 4">

--- a/disciplina-01-estado-governo-mercado/materiais/04_Unidade_4_Modelos_de_Estado_e_Brasil.pptx
+++ b/disciplina-01-estado-governo-mercado/materiais/04_Unidade_4_Modelos_de_Estado_e_Brasil.pptx
@@ -142,511 +142,7 @@
 </p:presentation>
 </file>
 
-<file path=ppt/charts/chart6.xml><?xml version="1.0" encoding="utf-8"?>
-<c:chartSpace xmlns:c="http://schemas.openxmlformats.org/drawingml/2006/chart" xmlns:a="http://schemas.openxmlformats.org/drawingml/2006/main" xmlns:r="http://schemas.openxmlformats.org/officeDocument/2006/relationships">
-  <c:date1904 val="0"/>
-  <c:roundedCorners val="1"/>
-  <c:chart>
-    <c:autoTitleDeleted val="1"/>
-    <c:plotArea>
-      <c:layout/>
-      <c:barChart>
-        <c:barDir val="col"/>
-        <c:grouping val="clustered"/>
-        <c:varyColors val="0"/>
-        <c:ser>
-          <c:idx val="0"/>
-          <c:order val="0"/>
-          <c:tx>
-            <c:strRef>
-              <c:f>Sheet1!$B$1</c:f>
-              <c:strCache>
-                <c:ptCount val="1"/>
-                <c:pt idx="0">
-                  <c:v>Renda</c:v>
-                </c:pt>
-              </c:strCache>
-            </c:strRef>
-          </c:tx>
-          <c:spPr>
-            <a:solidFill>
-              <a:srgbClr val="13294B"/>
-            </a:solidFill>
-            <a:effectLst/>
-          </c:spPr>
-          <c:invertIfNegative val="0"/>
-          <c:dLbls>
-            <c:numFmt formatCode="0" sourceLinked="0"/>
-            <c:txPr>
-              <a:bodyPr/>
-              <a:lstStyle/>
-              <a:p>
-                <a:pPr>
-                  <a:defRPr b="0" i="0" strike="noStrike" sz="1050" u="none">
-                    <a:solidFill>
-                      <a:srgbClr val="1F2A37"/>
-                    </a:solidFill>
-                    <a:latin typeface="Calibri"/>
-                  </a:defRPr>
-                </a:pPr>
-              </a:p>
-            </c:txPr>
-            <c:showLegendKey val="0"/>
-            <c:showVal val="1"/>
-            <c:showCatName val="0"/>
-            <c:showSerName val="0"/>
-            <c:showPercent val="0"/>
-            <c:showBubbleSize val="0"/>
-            <c:showLeaderLines val="0"/>
-          </c:dLbls>
-          <c:cat>
-            <c:multiLvlStrRef>
-              <c:f>Sheet1!$A$2:$A$7</c:f>
-              <c:multiLvlStrCache>
-                <c:ptCount val="6"/>
-                <c:lvl>
-                  <c:pt idx="0">
-                    <c:v>1ª</c:v>
-                  </c:pt>
-                  <c:pt idx="1">
-                    <c:v>2ª</c:v>
-                  </c:pt>
-                  <c:pt idx="2">
-                    <c:v>3ª</c:v>
-                  </c:pt>
-                  <c:pt idx="3">
-                    <c:v>4ª</c:v>
-                  </c:pt>
-                  <c:pt idx="4">
-                    <c:v>5ª</c:v>
-                  </c:pt>
-                  <c:pt idx="5">
-                    <c:v>6ª</c:v>
-                  </c:pt>
-                </c:lvl>
-              </c:multiLvlStrCache>
-            </c:multiLvlStrRef>
-          </c:cat>
-          <c:val>
-            <c:numRef>
-              <c:f>Sheet1!$B$2:$B$7</c:f>
-              <c:numCache>
-                <c:formatCode>General</c:formatCode>
-                <c:ptCount val="6"/>
-                <c:pt idx="0">
-                  <c:v>100</c:v>
-                </c:pt>
-                <c:pt idx="1">
-                  <c:v>80</c:v>
-                </c:pt>
-                <c:pt idx="2">
-                  <c:v>64</c:v>
-                </c:pt>
-                <c:pt idx="3">
-                  <c:v>51</c:v>
-                </c:pt>
-                <c:pt idx="4">
-                  <c:v>41</c:v>
-                </c:pt>
-                <c:pt idx="5">
-                  <c:v>33</c:v>
-                </c:pt>
-              </c:numCache>
-            </c:numRef>
-          </c:val>
-        </c:ser>
-        <c:dLbls>
-          <c:numFmt formatCode="0" sourceLinked="0"/>
-          <c:txPr>
-            <a:bodyPr/>
-            <a:lstStyle/>
-            <a:p>
-              <a:pPr>
-                <a:defRPr b="0" i="0" strike="noStrike" sz="1050" u="none">
-                  <a:solidFill>
-                    <a:srgbClr val="1F2A37"/>
-                  </a:solidFill>
-                  <a:latin typeface="Calibri"/>
-                </a:defRPr>
-              </a:pPr>
-            </a:p>
-          </c:txPr>
-          <c:showLegendKey val="0"/>
-          <c:showVal val="1"/>
-          <c:showCatName val="0"/>
-          <c:showSerName val="0"/>
-          <c:showPercent val="0"/>
-          <c:showBubbleSize val="0"/>
-          <c:showLeaderLines val="0"/>
-        </c:dLbls>
-        <c:gapWidth val="60"/>
-        <c:overlap val="0"/>
-        <c:axId val="2094734554"/>
-        <c:axId val="2094734552"/>
-        <c:axId val="2094734556"/>
-      </c:barChart>
-      <c:catAx>
-        <c:axId val="2094734554"/>
-        <c:scaling>
-          <c:orientation val="minMax"/>
-        </c:scaling>
-        <c:delete val="0"/>
-        <c:axPos val="b"/>
-        <c:numFmt formatCode="General" sourceLinked="1"/>
-        <c:majorTickMark val="out"/>
-        <c:minorTickMark val="none"/>
-        <c:tickLblPos val="low"/>
-        <c:spPr>
-          <a:ln w="12700" cap="flat">
-            <a:solidFill>
-              <a:srgbClr val="888888"/>
-            </a:solidFill>
-            <a:prstDash val="solid"/>
-            <a:round/>
-          </a:ln>
-        </c:spPr>
-        <c:txPr>
-          <a:bodyPr/>
-          <a:lstStyle/>
-          <a:p>
-            <a:pPr>
-              <a:defRPr sz="1100" b="0" i="0" u="none" strike="noStrike">
-                <a:solidFill>
-                  <a:srgbClr val="1F2A37"/>
-                </a:solidFill>
-                <a:latin typeface="Calibri"/>
-              </a:defRPr>
-            </a:pPr>
-            <a:endParaRPr lang="en-US"/>
-          </a:p>
-        </c:txPr>
-        <c:crossAx val="2094734552"/>
-        <c:crosses val="autoZero"/>
-        <c:auto val="1"/>
-        <c:lblAlgn val="ctr"/>
-        <c:noMultiLvlLbl val="1"/>
-      </c:catAx>
-      <c:valAx>
-        <c:axId val="2094734552"/>
-        <c:scaling>
-          <c:orientation val="minMax"/>
-          <c:max val="120"/>
-          <c:min val="0"/>
-        </c:scaling>
-        <c:delete val="0"/>
-        <c:axPos val="l"/>
-        <c:majorGridlines>
-          <c:spPr>
-            <a:ln w="6350" cap="flat">
-              <a:solidFill>
-                <a:srgbClr val="E3E3E3"/>
-              </a:solidFill>
-              <a:prstDash val="solid"/>
-              <a:round/>
-            </a:ln>
-          </c:spPr>
-        </c:majorGridlines>
-        <c:numFmt formatCode="0" sourceLinked="0"/>
-        <c:majorTickMark val="out"/>
-        <c:minorTickMark val="none"/>
-        <c:tickLblPos val="nextTo"/>
-        <c:spPr>
-          <a:ln w="12700" cap="flat">
-            <a:noFill/>
-            <a:prstDash val="solid"/>
-            <a:round/>
-          </a:ln>
-        </c:spPr>
-        <c:txPr>
-          <a:bodyPr/>
-          <a:lstStyle/>
-          <a:p>
-            <a:pPr>
-              <a:defRPr sz="1000" b="0" i="0" u="none" strike="noStrike">
-                <a:solidFill>
-                  <a:srgbClr val="5B6770"/>
-                </a:solidFill>
-                <a:latin typeface="Calibri"/>
-              </a:defRPr>
-            </a:pPr>
-            <a:endParaRPr lang="en-US"/>
-          </a:p>
-        </c:txPr>
-        <c:crossAx val="2094734554"/>
-        <c:crosses val="autoZero"/>
-        <c:crossBetween val="between"/>
-      </c:valAx>
-      <c:spPr>
-        <a:noFill/>
-        <a:ln>
-          <a:noFill/>
-        </a:ln>
-        <a:effectLst/>
-      </c:spPr>
-    </c:plotArea>
-    <c:plotVisOnly val="1"/>
-    <c:dispBlanksAs val="span"/>
-  </c:chart>
-  <c:spPr>
-    <a:noFill/>
-    <a:ln>
-      <a:noFill/>
-    </a:ln>
-    <a:effectLst/>
-  </c:spPr>
-  <c:externalData r:id="rId1">
-    <c:autoUpdate val="0"/>
-  </c:externalData>
-</c:chartSpace>
-</file>
-
-<file path=ppt/charts/chart7.xml><?xml version="1.0" encoding="utf-8"?>
-<c:chartSpace xmlns:c="http://schemas.openxmlformats.org/drawingml/2006/chart" xmlns:a="http://schemas.openxmlformats.org/drawingml/2006/main" xmlns:r="http://schemas.openxmlformats.org/officeDocument/2006/relationships">
-  <c:date1904 val="0"/>
-  <c:roundedCorners val="1"/>
-  <c:chart>
-    <c:autoTitleDeleted val="1"/>
-    <c:plotArea>
-      <c:layout/>
-      <c:barChart>
-        <c:barDir val="bar"/>
-        <c:grouping val="clustered"/>
-        <c:varyColors val="0"/>
-        <c:ser>
-          <c:idx val="0"/>
-          <c:order val="0"/>
-          <c:tx>
-            <c:strRef>
-              <c:f>Sheet1!$B$1</c:f>
-              <c:strCache>
-                <c:ptCount val="1"/>
-                <c:pt idx="0">
-                  <c:v>Gasto social</c:v>
-                </c:pt>
-              </c:strCache>
-            </c:strRef>
-          </c:tx>
-          <c:spPr>
-            <a:solidFill>
-              <a:srgbClr val="2A8C85"/>
-            </a:solidFill>
-            <a:effectLst/>
-          </c:spPr>
-          <c:invertIfNegative val="0"/>
-          <c:dLbls>
-            <c:numFmt formatCode="0.0" sourceLinked="0"/>
-            <c:txPr>
-              <a:bodyPr/>
-              <a:lstStyle/>
-              <a:p>
-                <a:pPr>
-                  <a:defRPr b="0" i="0" strike="noStrike" sz="1050" u="none">
-                    <a:solidFill>
-                      <a:srgbClr val="1F2A37"/>
-                    </a:solidFill>
-                    <a:latin typeface="Calibri"/>
-                  </a:defRPr>
-                </a:pPr>
-              </a:p>
-            </c:txPr>
-            <c:showLegendKey val="0"/>
-            <c:showVal val="1"/>
-            <c:showCatName val="0"/>
-            <c:showSerName val="0"/>
-            <c:showPercent val="0"/>
-            <c:showBubbleSize val="0"/>
-            <c:showLeaderLines val="0"/>
-          </c:dLbls>
-          <c:cat>
-            <c:multiLvlStrRef>
-              <c:f>Sheet1!$A$2:$A$5</c:f>
-              <c:multiLvlStrCache>
-                <c:ptCount val="4"/>
-                <c:lvl>
-                  <c:pt idx="0">
-                    <c:v>Alemanha (conservador)</c:v>
-                  </c:pt>
-                  <c:pt idx="1">
-                    <c:v>Suécia (social-democrata)</c:v>
-                  </c:pt>
-                  <c:pt idx="2">
-                    <c:v>Reino Unido (liberal)</c:v>
-                  </c:pt>
-                  <c:pt idx="3">
-                    <c:v>Estados Unidos (liberal)</c:v>
-                  </c:pt>
-                </c:lvl>
-              </c:multiLvlStrCache>
-            </c:multiLvlStrRef>
-          </c:cat>
-          <c:val>
-            <c:numRef>
-              <c:f>Sheet1!$B$2:$B$5</c:f>
-              <c:numCache>
-                <c:formatCode>General</c:formatCode>
-                <c:ptCount val="4"/>
-                <c:pt idx="0">
-                  <c:v>25.9</c:v>
-                </c:pt>
-                <c:pt idx="1">
-                  <c:v>25.5</c:v>
-                </c:pt>
-                <c:pt idx="2">
-                  <c:v>20.6</c:v>
-                </c:pt>
-                <c:pt idx="3">
-                  <c:v>18.7</c:v>
-                </c:pt>
-              </c:numCache>
-            </c:numRef>
-          </c:val>
-        </c:ser>
-        <c:dLbls>
-          <c:numFmt formatCode="0.0" sourceLinked="0"/>
-          <c:txPr>
-            <a:bodyPr/>
-            <a:lstStyle/>
-            <a:p>
-              <a:pPr>
-                <a:defRPr b="0" i="0" strike="noStrike" sz="1050" u="none">
-                  <a:solidFill>
-                    <a:srgbClr val="1F2A37"/>
-                  </a:solidFill>
-                  <a:latin typeface="Calibri"/>
-                </a:defRPr>
-              </a:pPr>
-            </a:p>
-          </c:txPr>
-          <c:showLegendKey val="0"/>
-          <c:showVal val="1"/>
-          <c:showCatName val="0"/>
-          <c:showSerName val="0"/>
-          <c:showPercent val="0"/>
-          <c:showBubbleSize val="0"/>
-          <c:showLeaderLines val="0"/>
-        </c:dLbls>
-        <c:gapWidth val="60"/>
-        <c:overlap val="0"/>
-        <c:axId val="2094734554"/>
-        <c:axId val="2094734552"/>
-        <c:axId val="2094734556"/>
-      </c:barChart>
-      <c:catAx>
-        <c:axId val="2094734554"/>
-        <c:scaling>
-          <c:orientation val="maxMin"/>
-        </c:scaling>
-        <c:delete val="0"/>
-        <c:axPos val="l"/>
-        <c:numFmt formatCode="General" sourceLinked="1"/>
-        <c:majorTickMark val="out"/>
-        <c:minorTickMark val="none"/>
-        <c:tickLblPos val="nextTo"/>
-        <c:spPr>
-          <a:ln w="12700" cap="flat">
-            <a:solidFill>
-              <a:srgbClr val="888888"/>
-            </a:solidFill>
-            <a:prstDash val="solid"/>
-            <a:round/>
-          </a:ln>
-        </c:spPr>
-        <c:txPr>
-          <a:bodyPr/>
-          <a:lstStyle/>
-          <a:p>
-            <a:pPr>
-              <a:defRPr sz="1100" b="0" i="0" u="none" strike="noStrike">
-                <a:solidFill>
-                  <a:srgbClr val="1F2A37"/>
-                </a:solidFill>
-                <a:latin typeface="Calibri"/>
-              </a:defRPr>
-            </a:pPr>
-            <a:endParaRPr lang="en-US"/>
-          </a:p>
-        </c:txPr>
-        <c:crossAx val="2094734552"/>
-        <c:crosses val="autoZero"/>
-        <c:auto val="1"/>
-        <c:lblAlgn val="ctr"/>
-        <c:noMultiLvlLbl val="1"/>
-      </c:catAx>
-      <c:valAx>
-        <c:axId val="2094734552"/>
-        <c:scaling>
-          <c:orientation val="minMax"/>
-          <c:max val="30"/>
-          <c:min val="0"/>
-        </c:scaling>
-        <c:delete val="0"/>
-        <c:axPos val="b"/>
-        <c:majorGridlines>
-          <c:spPr>
-            <a:ln w="6350" cap="flat">
-              <a:solidFill>
-                <a:srgbClr val="E3E3E3"/>
-              </a:solidFill>
-              <a:prstDash val="solid"/>
-              <a:round/>
-            </a:ln>
-          </c:spPr>
-        </c:majorGridlines>
-        <c:numFmt formatCode="0.0" sourceLinked="0"/>
-        <c:majorTickMark val="out"/>
-        <c:minorTickMark val="none"/>
-        <c:tickLblPos val="low"/>
-        <c:spPr>
-          <a:ln w="12700" cap="flat">
-            <a:noFill/>
-            <a:prstDash val="solid"/>
-            <a:round/>
-          </a:ln>
-        </c:spPr>
-        <c:txPr>
-          <a:bodyPr/>
-          <a:lstStyle/>
-          <a:p>
-            <a:pPr>
-              <a:defRPr sz="1000" b="0" i="0" u="none" strike="noStrike">
-                <a:solidFill>
-                  <a:srgbClr val="5B6770"/>
-                </a:solidFill>
-                <a:latin typeface="Calibri"/>
-              </a:defRPr>
-            </a:pPr>
-            <a:endParaRPr lang="en-US"/>
-          </a:p>
-        </c:txPr>
-        <c:crossAx val="2094734554"/>
-        <c:crosses val="autoZero"/>
-        <c:crossBetween val="between"/>
-      </c:valAx>
-      <c:spPr>
-        <a:noFill/>
-        <a:ln>
-          <a:noFill/>
-        </a:ln>
-        <a:effectLst/>
-      </c:spPr>
-    </c:plotArea>
-    <c:plotVisOnly val="1"/>
-    <c:dispBlanksAs val="span"/>
-  </c:chart>
-  <c:spPr>
-    <a:noFill/>
-    <a:ln>
-      <a:noFill/>
-    </a:ln>
-    <a:effectLst/>
-  </c:spPr>
-  <c:externalData r:id="rId1">
-    <c:autoUpdate val="0"/>
-  </c:externalData>
-</c:chartSpace>
-</file>
-
-<file path=ppt/charts/chart8.xml><?xml version="1.0" encoding="utf-8"?>
+<file path=ppt/charts/chart10.xml><?xml version="1.0" encoding="utf-8"?>
 <c:chartSpace xmlns:c="http://schemas.openxmlformats.org/drawingml/2006/chart" xmlns:a="http://schemas.openxmlformats.org/drawingml/2006/main" xmlns:r="http://schemas.openxmlformats.org/officeDocument/2006/relationships">
   <c:date1904 val="0"/>
   <c:roundedCorners val="1"/>
@@ -916,7 +412,7 @@
 </c:chartSpace>
 </file>
 
-<file path=ppt/charts/chart9.xml><?xml version="1.0" encoding="utf-8"?>
+<file path=ppt/charts/chart11.xml><?xml version="1.0" encoding="utf-8"?>
 <c:chartSpace xmlns:c="http://schemas.openxmlformats.org/drawingml/2006/chart" xmlns:a="http://schemas.openxmlformats.org/drawingml/2006/main" xmlns:r="http://schemas.openxmlformats.org/officeDocument/2006/relationships">
   <c:date1904 val="0"/>
   <c:roundedCorners val="1"/>
@@ -1124,6 +620,510 @@
         <c:majorTickMark val="out"/>
         <c:minorTickMark val="none"/>
         <c:tickLblPos val="nextTo"/>
+        <c:spPr>
+          <a:ln w="12700" cap="flat">
+            <a:noFill/>
+            <a:prstDash val="solid"/>
+            <a:round/>
+          </a:ln>
+        </c:spPr>
+        <c:txPr>
+          <a:bodyPr/>
+          <a:lstStyle/>
+          <a:p>
+            <a:pPr>
+              <a:defRPr sz="1000" b="0" i="0" u="none" strike="noStrike">
+                <a:solidFill>
+                  <a:srgbClr val="5B6770"/>
+                </a:solidFill>
+                <a:latin typeface="Calibri"/>
+              </a:defRPr>
+            </a:pPr>
+            <a:endParaRPr lang="en-US"/>
+          </a:p>
+        </c:txPr>
+        <c:crossAx val="2094734554"/>
+        <c:crosses val="autoZero"/>
+        <c:crossBetween val="between"/>
+      </c:valAx>
+      <c:spPr>
+        <a:noFill/>
+        <a:ln>
+          <a:noFill/>
+        </a:ln>
+        <a:effectLst/>
+      </c:spPr>
+    </c:plotArea>
+    <c:plotVisOnly val="1"/>
+    <c:dispBlanksAs val="span"/>
+  </c:chart>
+  <c:spPr>
+    <a:noFill/>
+    <a:ln>
+      <a:noFill/>
+    </a:ln>
+    <a:effectLst/>
+  </c:spPr>
+  <c:externalData r:id="rId1">
+    <c:autoUpdate val="0"/>
+  </c:externalData>
+</c:chartSpace>
+</file>
+
+<file path=ppt/charts/chart8.xml><?xml version="1.0" encoding="utf-8"?>
+<c:chartSpace xmlns:c="http://schemas.openxmlformats.org/drawingml/2006/chart" xmlns:a="http://schemas.openxmlformats.org/drawingml/2006/main" xmlns:r="http://schemas.openxmlformats.org/officeDocument/2006/relationships">
+  <c:date1904 val="0"/>
+  <c:roundedCorners val="1"/>
+  <c:chart>
+    <c:autoTitleDeleted val="1"/>
+    <c:plotArea>
+      <c:layout/>
+      <c:barChart>
+        <c:barDir val="col"/>
+        <c:grouping val="clustered"/>
+        <c:varyColors val="0"/>
+        <c:ser>
+          <c:idx val="0"/>
+          <c:order val="0"/>
+          <c:tx>
+            <c:strRef>
+              <c:f>Sheet1!$B$1</c:f>
+              <c:strCache>
+                <c:ptCount val="1"/>
+                <c:pt idx="0">
+                  <c:v>Renda</c:v>
+                </c:pt>
+              </c:strCache>
+            </c:strRef>
+          </c:tx>
+          <c:spPr>
+            <a:solidFill>
+              <a:srgbClr val="13294B"/>
+            </a:solidFill>
+            <a:effectLst/>
+          </c:spPr>
+          <c:invertIfNegative val="0"/>
+          <c:dLbls>
+            <c:numFmt formatCode="0" sourceLinked="0"/>
+            <c:txPr>
+              <a:bodyPr/>
+              <a:lstStyle/>
+              <a:p>
+                <a:pPr>
+                  <a:defRPr b="0" i="0" strike="noStrike" sz="1050" u="none">
+                    <a:solidFill>
+                      <a:srgbClr val="1F2A37"/>
+                    </a:solidFill>
+                    <a:latin typeface="Calibri"/>
+                  </a:defRPr>
+                </a:pPr>
+              </a:p>
+            </c:txPr>
+            <c:showLegendKey val="0"/>
+            <c:showVal val="1"/>
+            <c:showCatName val="0"/>
+            <c:showSerName val="0"/>
+            <c:showPercent val="0"/>
+            <c:showBubbleSize val="0"/>
+            <c:showLeaderLines val="0"/>
+          </c:dLbls>
+          <c:cat>
+            <c:multiLvlStrRef>
+              <c:f>Sheet1!$A$2:$A$7</c:f>
+              <c:multiLvlStrCache>
+                <c:ptCount val="6"/>
+                <c:lvl>
+                  <c:pt idx="0">
+                    <c:v>1ª</c:v>
+                  </c:pt>
+                  <c:pt idx="1">
+                    <c:v>2ª</c:v>
+                  </c:pt>
+                  <c:pt idx="2">
+                    <c:v>3ª</c:v>
+                  </c:pt>
+                  <c:pt idx="3">
+                    <c:v>4ª</c:v>
+                  </c:pt>
+                  <c:pt idx="4">
+                    <c:v>5ª</c:v>
+                  </c:pt>
+                  <c:pt idx="5">
+                    <c:v>6ª</c:v>
+                  </c:pt>
+                </c:lvl>
+              </c:multiLvlStrCache>
+            </c:multiLvlStrRef>
+          </c:cat>
+          <c:val>
+            <c:numRef>
+              <c:f>Sheet1!$B$2:$B$7</c:f>
+              <c:numCache>
+                <c:formatCode>General</c:formatCode>
+                <c:ptCount val="6"/>
+                <c:pt idx="0">
+                  <c:v>100</c:v>
+                </c:pt>
+                <c:pt idx="1">
+                  <c:v>80</c:v>
+                </c:pt>
+                <c:pt idx="2">
+                  <c:v>64</c:v>
+                </c:pt>
+                <c:pt idx="3">
+                  <c:v>51</c:v>
+                </c:pt>
+                <c:pt idx="4">
+                  <c:v>41</c:v>
+                </c:pt>
+                <c:pt idx="5">
+                  <c:v>33</c:v>
+                </c:pt>
+              </c:numCache>
+            </c:numRef>
+          </c:val>
+        </c:ser>
+        <c:dLbls>
+          <c:numFmt formatCode="0" sourceLinked="0"/>
+          <c:txPr>
+            <a:bodyPr/>
+            <a:lstStyle/>
+            <a:p>
+              <a:pPr>
+                <a:defRPr b="0" i="0" strike="noStrike" sz="1050" u="none">
+                  <a:solidFill>
+                    <a:srgbClr val="1F2A37"/>
+                  </a:solidFill>
+                  <a:latin typeface="Calibri"/>
+                </a:defRPr>
+              </a:pPr>
+            </a:p>
+          </c:txPr>
+          <c:showLegendKey val="0"/>
+          <c:showVal val="1"/>
+          <c:showCatName val="0"/>
+          <c:showSerName val="0"/>
+          <c:showPercent val="0"/>
+          <c:showBubbleSize val="0"/>
+          <c:showLeaderLines val="0"/>
+        </c:dLbls>
+        <c:gapWidth val="60"/>
+        <c:overlap val="0"/>
+        <c:axId val="2094734554"/>
+        <c:axId val="2094734552"/>
+        <c:axId val="2094734556"/>
+      </c:barChart>
+      <c:catAx>
+        <c:axId val="2094734554"/>
+        <c:scaling>
+          <c:orientation val="minMax"/>
+        </c:scaling>
+        <c:delete val="0"/>
+        <c:axPos val="b"/>
+        <c:numFmt formatCode="General" sourceLinked="1"/>
+        <c:majorTickMark val="out"/>
+        <c:minorTickMark val="none"/>
+        <c:tickLblPos val="low"/>
+        <c:spPr>
+          <a:ln w="12700" cap="flat">
+            <a:solidFill>
+              <a:srgbClr val="888888"/>
+            </a:solidFill>
+            <a:prstDash val="solid"/>
+            <a:round/>
+          </a:ln>
+        </c:spPr>
+        <c:txPr>
+          <a:bodyPr/>
+          <a:lstStyle/>
+          <a:p>
+            <a:pPr>
+              <a:defRPr sz="1100" b="0" i="0" u="none" strike="noStrike">
+                <a:solidFill>
+                  <a:srgbClr val="1F2A37"/>
+                </a:solidFill>
+                <a:latin typeface="Calibri"/>
+              </a:defRPr>
+            </a:pPr>
+            <a:endParaRPr lang="en-US"/>
+          </a:p>
+        </c:txPr>
+        <c:crossAx val="2094734552"/>
+        <c:crosses val="autoZero"/>
+        <c:auto val="1"/>
+        <c:lblAlgn val="ctr"/>
+        <c:noMultiLvlLbl val="1"/>
+      </c:catAx>
+      <c:valAx>
+        <c:axId val="2094734552"/>
+        <c:scaling>
+          <c:orientation val="minMax"/>
+          <c:max val="120"/>
+          <c:min val="0"/>
+        </c:scaling>
+        <c:delete val="0"/>
+        <c:axPos val="l"/>
+        <c:majorGridlines>
+          <c:spPr>
+            <a:ln w="6350" cap="flat">
+              <a:solidFill>
+                <a:srgbClr val="E3E3E3"/>
+              </a:solidFill>
+              <a:prstDash val="solid"/>
+              <a:round/>
+            </a:ln>
+          </c:spPr>
+        </c:majorGridlines>
+        <c:numFmt formatCode="0" sourceLinked="0"/>
+        <c:majorTickMark val="out"/>
+        <c:minorTickMark val="none"/>
+        <c:tickLblPos val="nextTo"/>
+        <c:spPr>
+          <a:ln w="12700" cap="flat">
+            <a:noFill/>
+            <a:prstDash val="solid"/>
+            <a:round/>
+          </a:ln>
+        </c:spPr>
+        <c:txPr>
+          <a:bodyPr/>
+          <a:lstStyle/>
+          <a:p>
+            <a:pPr>
+              <a:defRPr sz="1000" b="0" i="0" u="none" strike="noStrike">
+                <a:solidFill>
+                  <a:srgbClr val="5B6770"/>
+                </a:solidFill>
+                <a:latin typeface="Calibri"/>
+              </a:defRPr>
+            </a:pPr>
+            <a:endParaRPr lang="en-US"/>
+          </a:p>
+        </c:txPr>
+        <c:crossAx val="2094734554"/>
+        <c:crosses val="autoZero"/>
+        <c:crossBetween val="between"/>
+      </c:valAx>
+      <c:spPr>
+        <a:noFill/>
+        <a:ln>
+          <a:noFill/>
+        </a:ln>
+        <a:effectLst/>
+      </c:spPr>
+    </c:plotArea>
+    <c:plotVisOnly val="1"/>
+    <c:dispBlanksAs val="span"/>
+  </c:chart>
+  <c:spPr>
+    <a:noFill/>
+    <a:ln>
+      <a:noFill/>
+    </a:ln>
+    <a:effectLst/>
+  </c:spPr>
+  <c:externalData r:id="rId1">
+    <c:autoUpdate val="0"/>
+  </c:externalData>
+</c:chartSpace>
+</file>
+
+<file path=ppt/charts/chart9.xml><?xml version="1.0" encoding="utf-8"?>
+<c:chartSpace xmlns:c="http://schemas.openxmlformats.org/drawingml/2006/chart" xmlns:a="http://schemas.openxmlformats.org/drawingml/2006/main" xmlns:r="http://schemas.openxmlformats.org/officeDocument/2006/relationships">
+  <c:date1904 val="0"/>
+  <c:roundedCorners val="1"/>
+  <c:chart>
+    <c:autoTitleDeleted val="1"/>
+    <c:plotArea>
+      <c:layout/>
+      <c:barChart>
+        <c:barDir val="bar"/>
+        <c:grouping val="clustered"/>
+        <c:varyColors val="0"/>
+        <c:ser>
+          <c:idx val="0"/>
+          <c:order val="0"/>
+          <c:tx>
+            <c:strRef>
+              <c:f>Sheet1!$B$1</c:f>
+              <c:strCache>
+                <c:ptCount val="1"/>
+                <c:pt idx="0">
+                  <c:v>Gasto social</c:v>
+                </c:pt>
+              </c:strCache>
+            </c:strRef>
+          </c:tx>
+          <c:spPr>
+            <a:solidFill>
+              <a:srgbClr val="2A8C85"/>
+            </a:solidFill>
+            <a:effectLst/>
+          </c:spPr>
+          <c:invertIfNegative val="0"/>
+          <c:dLbls>
+            <c:numFmt formatCode="0.0" sourceLinked="0"/>
+            <c:txPr>
+              <a:bodyPr/>
+              <a:lstStyle/>
+              <a:p>
+                <a:pPr>
+                  <a:defRPr b="0" i="0" strike="noStrike" sz="1050" u="none">
+                    <a:solidFill>
+                      <a:srgbClr val="1F2A37"/>
+                    </a:solidFill>
+                    <a:latin typeface="Calibri"/>
+                  </a:defRPr>
+                </a:pPr>
+              </a:p>
+            </c:txPr>
+            <c:showLegendKey val="0"/>
+            <c:showVal val="1"/>
+            <c:showCatName val="0"/>
+            <c:showSerName val="0"/>
+            <c:showPercent val="0"/>
+            <c:showBubbleSize val="0"/>
+            <c:showLeaderLines val="0"/>
+          </c:dLbls>
+          <c:cat>
+            <c:multiLvlStrRef>
+              <c:f>Sheet1!$A$2:$A$5</c:f>
+              <c:multiLvlStrCache>
+                <c:ptCount val="4"/>
+                <c:lvl>
+                  <c:pt idx="0">
+                    <c:v>Alemanha (conservador)</c:v>
+                  </c:pt>
+                  <c:pt idx="1">
+                    <c:v>Suécia (social-democrata)</c:v>
+                  </c:pt>
+                  <c:pt idx="2">
+                    <c:v>Reino Unido (liberal)</c:v>
+                  </c:pt>
+                  <c:pt idx="3">
+                    <c:v>Estados Unidos (liberal)</c:v>
+                  </c:pt>
+                </c:lvl>
+              </c:multiLvlStrCache>
+            </c:multiLvlStrRef>
+          </c:cat>
+          <c:val>
+            <c:numRef>
+              <c:f>Sheet1!$B$2:$B$5</c:f>
+              <c:numCache>
+                <c:formatCode>General</c:formatCode>
+                <c:ptCount val="4"/>
+                <c:pt idx="0">
+                  <c:v>25.9</c:v>
+                </c:pt>
+                <c:pt idx="1">
+                  <c:v>25.5</c:v>
+                </c:pt>
+                <c:pt idx="2">
+                  <c:v>20.6</c:v>
+                </c:pt>
+                <c:pt idx="3">
+                  <c:v>18.7</c:v>
+                </c:pt>
+              </c:numCache>
+            </c:numRef>
+          </c:val>
+        </c:ser>
+        <c:dLbls>
+          <c:numFmt formatCode="0.0" sourceLinked="0"/>
+          <c:txPr>
+            <a:bodyPr/>
+            <a:lstStyle/>
+            <a:p>
+              <a:pPr>
+                <a:defRPr b="0" i="0" strike="noStrike" sz="1050" u="none">
+                  <a:solidFill>
+                    <a:srgbClr val="1F2A37"/>
+                  </a:solidFill>
+                  <a:latin typeface="Calibri"/>
+                </a:defRPr>
+              </a:pPr>
+            </a:p>
+          </c:txPr>
+          <c:showLegendKey val="0"/>
+          <c:showVal val="1"/>
+          <c:showCatName val="0"/>
+          <c:showSerName val="0"/>
+          <c:showPercent val="0"/>
+          <c:showBubbleSize val="0"/>
+          <c:showLeaderLines val="0"/>
+        </c:dLbls>
+        <c:gapWidth val="60"/>
+        <c:overlap val="0"/>
+        <c:axId val="2094734554"/>
+        <c:axId val="2094734552"/>
+        <c:axId val="2094734556"/>
+      </c:barChart>
+      <c:catAx>
+        <c:axId val="2094734554"/>
+        <c:scaling>
+          <c:orientation val="maxMin"/>
+        </c:scaling>
+        <c:delete val="0"/>
+        <c:axPos val="l"/>
+        <c:numFmt formatCode="General" sourceLinked="1"/>
+        <c:majorTickMark val="out"/>
+        <c:minorTickMark val="none"/>
+        <c:tickLblPos val="nextTo"/>
+        <c:spPr>
+          <a:ln w="12700" cap="flat">
+            <a:solidFill>
+              <a:srgbClr val="888888"/>
+            </a:solidFill>
+            <a:prstDash val="solid"/>
+            <a:round/>
+          </a:ln>
+        </c:spPr>
+        <c:txPr>
+          <a:bodyPr/>
+          <a:lstStyle/>
+          <a:p>
+            <a:pPr>
+              <a:defRPr sz="1100" b="0" i="0" u="none" strike="noStrike">
+                <a:solidFill>
+                  <a:srgbClr val="1F2A37"/>
+                </a:solidFill>
+                <a:latin typeface="Calibri"/>
+              </a:defRPr>
+            </a:pPr>
+            <a:endParaRPr lang="en-US"/>
+          </a:p>
+        </c:txPr>
+        <c:crossAx val="2094734552"/>
+        <c:crosses val="autoZero"/>
+        <c:auto val="1"/>
+        <c:lblAlgn val="ctr"/>
+        <c:noMultiLvlLbl val="1"/>
+      </c:catAx>
+      <c:valAx>
+        <c:axId val="2094734552"/>
+        <c:scaling>
+          <c:orientation val="minMax"/>
+          <c:max val="30"/>
+          <c:min val="0"/>
+        </c:scaling>
+        <c:delete val="0"/>
+        <c:axPos val="b"/>
+        <c:majorGridlines>
+          <c:spPr>
+            <a:ln w="6350" cap="flat">
+              <a:solidFill>
+                <a:srgbClr val="E3E3E3"/>
+              </a:solidFill>
+              <a:prstDash val="solid"/>
+              <a:round/>
+            </a:ln>
+          </c:spPr>
+        </c:majorGridlines>
+        <c:numFmt formatCode="0.0" sourceLinked="0"/>
+        <c:majorTickMark val="out"/>
+        <c:minorTickMark val="none"/>
+        <c:tickLblPos val="low"/>
         <c:spPr>
           <a:ln w="12700" cap="flat">
             <a:noFill/>

--- a/disciplina-01-estado-governo-mercado/materiais/04_Unidade_4_Modelos_de_Estado_e_Brasil.pptx
+++ b/disciplina-01-estado-governo-mercado/materiais/04_Unidade_4_Modelos_de_Estado_e_Brasil.pptx
@@ -30,20 +30,9 @@
     <p:sldId id="278" r:id="rId24"/>
     <p:sldId id="279" r:id="rId25"/>
     <p:sldId id="280" r:id="rId26"/>
-    <p:sldId id="281" r:id="rId27"/>
-    <p:sldId id="282" r:id="rId28"/>
-    <p:sldId id="283" r:id="rId29"/>
-    <p:sldId id="284" r:id="rId30"/>
-    <p:sldId id="285" r:id="rId31"/>
-    <p:sldId id="286" r:id="rId32"/>
-    <p:sldId id="287" r:id="rId33"/>
-    <p:sldId id="288" r:id="rId34"/>
-    <p:sldId id="289" r:id="rId35"/>
-    <p:sldId id="290" r:id="rId36"/>
-    <p:sldId id="291" r:id="rId37"/>
   </p:sldIdLst>
   <p:notesMasterIdLst>
-    <p:notesMasterId r:id="rId38"/>
+    <p:notesMasterId r:id="rId27"/>
   </p:notesMasterIdLst>
   <p:sldSz cx="9144000" cy="5143500"/>
   <p:notesSz cx="5143500" cy="9144000"/>
@@ -2977,7 +2966,7 @@
           <a:p>
             <a:r>
               <a:rPr lang="en-US" dirty="0"/>
-              <a:t>Vamos às atividades finais. A partir de 2 de novembro, esta videoaula e a leitura. Até 8 de novembro, os Exercícios de fixação 2 e a Avaliação A2, sobre as Unidades 3 e 4. De 9 a 15 de novembro, a semana de revisão, com o fórum de dúvidas e a gravação do encontro síncrono. E até 15 de novembro, a A3: dez questões objetivas e um estudo de caso, sobre todo o conteúdo. Lembre que a nota final é a média de A1 e A2 com peso 0,4, mais a A3 com peso 0,6, e que a aprovação exige nota 7,0.</a:t>
+              <a:t>Vamos às atividades finais. A partir de 2 de novembro, esta videoaula e a leitura. Até 8 de novembro, os Exercícios de fixação 2 e a Avaliação A2, sobre as Unidades 3 e 4. De 9 a 15 de novembro, a semana de revisão, com o fórum de dúvidas e a gravação do encontro síncrono. E até 15 de novembro, a A3: dez questões objetivas e um estudo de caso, sobre todo o conteúdo. Lembre que a nota final é a média de A1 e A2 com peso 0,4, mais a A3 com peso 0,6, e que a aprovação exige nota 7,0. E, para revisar, faça o quiz da Unidade 4 na página de conteúdos da disciplina: cinco perguntas com resposta comentada, sem nota.</a:t>
             </a:r>
             <a:endParaRPr lang="en-US" dirty="0"/>
           </a:p>
@@ -3065,7 +3054,7 @@
           <a:p>
             <a:r>
               <a:rPr lang="en-US" dirty="0"/>
-              <a:t>Para encerrar, o último quiz: cinco perguntas sobre a Unidade 4. Pause, responda e confira. Depois, é só revisar e fazer as avaliações com calma.</a:t>
+              <a:t>Para fechar a Unidade 4 e a disciplina, vamos recapitular. [Apontar para o quadro da esquerda.] No tópico 7, vimos os quatro modelos de Estado do século XX: o liberal, que entrou em crise em 1929; o socialista, com planejamento central, de 1917 a 1991; o de bem-estar social, com Keynes, o New Deal, Beveridge e os três regimes de Esping-Andersen; e, depois da crise dos anos 1970, o neoliberal, com Hayek, Friedman e o Consenso de Washington. [Apontar para o quadro da direita.] No tópico 8, vimos o Estado desenvolvimentista brasileiro, de 1930 a 1980, e a tensão entre a Constituição de 1988, com a seguridade universal, e as reformas dos anos 1990, com o Estado gerencial, as agências reguladoras e a LRF. Vimos também que patrimonialismo, burocracia e gerencialismo ainda convivem, e que, no século XXI, a pergunta é que Estado e que mercado queremos. Lembre: A2 até 8 de novembro e A3 até 15 de novembro, às 23h55. Obrigado pela dedicação ao longo destas semanas. Bons estudos, boas avaliações e até a próxima disciplina!</a:t>
             </a:r>
             <a:endParaRPr lang="en-US" dirty="0"/>
           </a:p>
@@ -3089,358 +3078,6 @@
             <a:fld id="{F7021451-1387-4CA6-816F-3879F97B5CBC}" type="slidenum">
               <a:rPr lang="en-US"/>
               <a:t>25</a:t>
-            </a:fld>
-            <a:endParaRPr lang="en-US"/>
-          </a:p>
-        </p:txBody>
-      </p:sp>
-    </p:spTree>
-    <p:extLst>
-      <p:ext uri="{BB962C8B-B14F-4D97-AF65-F5344CB8AC3E}">
-        <p14:creationId xmlns:p14="http://schemas.microsoft.com/office/powerpoint/2010/main" val="1024086991"/>
-      </p:ext>
-    </p:extLst>
-  </p:cSld>
-  <p:clrMapOvr>
-    <a:masterClrMapping/>
-  </p:clrMapOvr>
-</p:notes>
-</file>
-
-<file path=ppt/notesSlides/notesSlide26.xml><?xml version="1.0" encoding="utf-8"?>
-<p:notes xmlns:a="http://schemas.openxmlformats.org/drawingml/2006/main" xmlns:r="http://schemas.openxmlformats.org/officeDocument/2006/relationships" xmlns:p="http://schemas.openxmlformats.org/presentationml/2006/main">
-  <p:cSld>
-    <p:spTree>
-      <p:nvGrpSpPr>
-        <p:cNvPr id="1" name=""/>
-        <p:cNvGrpSpPr/>
-        <p:nvPr/>
-      </p:nvGrpSpPr>
-      <p:grpSpPr>
-        <a:xfrm>
-          <a:off x="0" y="0"/>
-          <a:ext cx="0" cy="0"/>
-          <a:chOff x="0" y="0"/>
-          <a:chExt cx="0" cy="0"/>
-        </a:xfrm>
-      </p:grpSpPr>
-      <p:sp>
-        <p:nvSpPr>
-          <p:cNvPr id="2" name="Slide Image Placeholder 1"/>
-          <p:cNvSpPr>
-            <a:spLocks noGrp="1" noRot="1" noChangeAspect="1"/>
-          </p:cNvSpPr>
-          <p:nvPr>
-            <p:ph type="sldImg"/>
-          </p:nvPr>
-        </p:nvSpPr>
-        <p:spPr/>
-      </p:sp>
-      <p:sp>
-        <p:nvSpPr>
-          <p:cNvPr id="3" name="Notes Placeholder 2"/>
-          <p:cNvSpPr>
-            <a:spLocks noGrp="1"/>
-          </p:cNvSpPr>
-          <p:nvPr>
-            <p:ph type="body" idx="1"/>
-          </p:nvPr>
-        </p:nvSpPr>
-        <p:spPr/>
-        <p:txBody>
-          <a:bodyPr/>
-          <a:lstStyle/>
-          <a:p>
-            <a:r>
-              <a:rPr lang="en-US" dirty="0"/>
-              <a:t>Pergunta 1. Numa recessão, o que Keynes recomendaria ao governo? Letra a: Cortar gastos para equilibrar o orçamento. Letra b: Aumentar o gasto e o investimento para compensar a queda da demanda. Letra c: Elevar os juros para conter o consumo. Letra d: Não intervir e esperar o ajuste do mercado. Pause o vídeo e escolha a sua resposta.</a:t>
-            </a:r>
-            <a:endParaRPr lang="en-US" dirty="0"/>
-          </a:p>
-        </p:txBody>
-      </p:sp>
-      <p:sp>
-        <p:nvSpPr>
-          <p:cNvPr id="4" name="Slide Number Placeholder 3"/>
-          <p:cNvSpPr>
-            <a:spLocks noGrp="1"/>
-          </p:cNvSpPr>
-          <p:nvPr>
-            <p:ph type="sldNum" sz="quarter" idx="10"/>
-          </p:nvPr>
-        </p:nvSpPr>
-        <p:spPr/>
-        <p:txBody>
-          <a:bodyPr/>
-          <a:lstStyle/>
-          <a:p>
-            <a:fld id="{F7021451-1387-4CA6-816F-3879F97B5CBC}" type="slidenum">
-              <a:rPr lang="en-US"/>
-              <a:t>26</a:t>
-            </a:fld>
-            <a:endParaRPr lang="en-US"/>
-          </a:p>
-        </p:txBody>
-      </p:sp>
-    </p:spTree>
-    <p:extLst>
-      <p:ext uri="{BB962C8B-B14F-4D97-AF65-F5344CB8AC3E}">
-        <p14:creationId xmlns:p14="http://schemas.microsoft.com/office/powerpoint/2010/main" val="1024086991"/>
-      </p:ext>
-    </p:extLst>
-  </p:cSld>
-  <p:clrMapOvr>
-    <a:masterClrMapping/>
-  </p:clrMapOvr>
-</p:notes>
-</file>
-
-<file path=ppt/notesSlides/notesSlide27.xml><?xml version="1.0" encoding="utf-8"?>
-<p:notes xmlns:a="http://schemas.openxmlformats.org/drawingml/2006/main" xmlns:r="http://schemas.openxmlformats.org/officeDocument/2006/relationships" xmlns:p="http://schemas.openxmlformats.org/presentationml/2006/main">
-  <p:cSld>
-    <p:spTree>
-      <p:nvGrpSpPr>
-        <p:cNvPr id="1" name=""/>
-        <p:cNvGrpSpPr/>
-        <p:nvPr/>
-      </p:nvGrpSpPr>
-      <p:grpSpPr>
-        <a:xfrm>
-          <a:off x="0" y="0"/>
-          <a:ext cx="0" cy="0"/>
-          <a:chOff x="0" y="0"/>
-          <a:chExt cx="0" cy="0"/>
-        </a:xfrm>
-      </p:grpSpPr>
-      <p:sp>
-        <p:nvSpPr>
-          <p:cNvPr id="2" name="Slide Image Placeholder 1"/>
-          <p:cNvSpPr>
-            <a:spLocks noGrp="1" noRot="1" noChangeAspect="1"/>
-          </p:cNvSpPr>
-          <p:nvPr>
-            <p:ph type="sldImg"/>
-          </p:nvPr>
-        </p:nvSpPr>
-        <p:spPr/>
-      </p:sp>
-      <p:sp>
-        <p:nvSpPr>
-          <p:cNvPr id="3" name="Notes Placeholder 2"/>
-          <p:cNvSpPr>
-            <a:spLocks noGrp="1"/>
-          </p:cNvSpPr>
-          <p:nvPr>
-            <p:ph type="body" idx="1"/>
-          </p:nvPr>
-        </p:nvSpPr>
-        <p:spPr/>
-        <p:txBody>
-          <a:bodyPr/>
-          <a:lstStyle/>
-          <a:p>
-            <a:r>
-              <a:rPr lang="en-US" dirty="0"/>
-              <a:t>A resposta correta é a letra b: Aumentar o gasto e o investimento para compensar a queda da demanda. Para Keynes, a crise vem da falta de demanda efetiva; o gasto público (G) sustenta a produção e, pelo multiplicador, a renda.</a:t>
-            </a:r>
-            <a:endParaRPr lang="en-US" dirty="0"/>
-          </a:p>
-        </p:txBody>
-      </p:sp>
-      <p:sp>
-        <p:nvSpPr>
-          <p:cNvPr id="4" name="Slide Number Placeholder 3"/>
-          <p:cNvSpPr>
-            <a:spLocks noGrp="1"/>
-          </p:cNvSpPr>
-          <p:nvPr>
-            <p:ph type="sldNum" sz="quarter" idx="10"/>
-          </p:nvPr>
-        </p:nvSpPr>
-        <p:spPr/>
-        <p:txBody>
-          <a:bodyPr/>
-          <a:lstStyle/>
-          <a:p>
-            <a:fld id="{F7021451-1387-4CA6-816F-3879F97B5CBC}" type="slidenum">
-              <a:rPr lang="en-US"/>
-              <a:t>27</a:t>
-            </a:fld>
-            <a:endParaRPr lang="en-US"/>
-          </a:p>
-        </p:txBody>
-      </p:sp>
-    </p:spTree>
-    <p:extLst>
-      <p:ext uri="{BB962C8B-B14F-4D97-AF65-F5344CB8AC3E}">
-        <p14:creationId xmlns:p14="http://schemas.microsoft.com/office/powerpoint/2010/main" val="1024086991"/>
-      </p:ext>
-    </p:extLst>
-  </p:cSld>
-  <p:clrMapOvr>
-    <a:masterClrMapping/>
-  </p:clrMapOvr>
-</p:notes>
-</file>
-
-<file path=ppt/notesSlides/notesSlide28.xml><?xml version="1.0" encoding="utf-8"?>
-<p:notes xmlns:a="http://schemas.openxmlformats.org/drawingml/2006/main" xmlns:r="http://schemas.openxmlformats.org/officeDocument/2006/relationships" xmlns:p="http://schemas.openxmlformats.org/presentationml/2006/main">
-  <p:cSld>
-    <p:spTree>
-      <p:nvGrpSpPr>
-        <p:cNvPr id="1" name=""/>
-        <p:cNvGrpSpPr/>
-        <p:nvPr/>
-      </p:nvGrpSpPr>
-      <p:grpSpPr>
-        <a:xfrm>
-          <a:off x="0" y="0"/>
-          <a:ext cx="0" cy="0"/>
-          <a:chOff x="0" y="0"/>
-          <a:chExt cx="0" cy="0"/>
-        </a:xfrm>
-      </p:grpSpPr>
-      <p:sp>
-        <p:nvSpPr>
-          <p:cNvPr id="2" name="Slide Image Placeholder 1"/>
-          <p:cNvSpPr>
-            <a:spLocks noGrp="1" noRot="1" noChangeAspect="1"/>
-          </p:cNvSpPr>
-          <p:nvPr>
-            <p:ph type="sldImg"/>
-          </p:nvPr>
-        </p:nvSpPr>
-        <p:spPr/>
-      </p:sp>
-      <p:sp>
-        <p:nvSpPr>
-          <p:cNvPr id="3" name="Notes Placeholder 2"/>
-          <p:cNvSpPr>
-            <a:spLocks noGrp="1"/>
-          </p:cNvSpPr>
-          <p:nvPr>
-            <p:ph type="body" idx="1"/>
-          </p:nvPr>
-        </p:nvSpPr>
-        <p:spPr/>
-        <p:txBody>
-          <a:bodyPr/>
-          <a:lstStyle/>
-          <a:p>
-            <a:r>
-              <a:rPr lang="en-US" dirty="0"/>
-              <a:t>Pergunta 2. Direitos universais financiados por impostos, como na Suécia, caracterizam o regime de bem-estar: Letra a: Liberal. Letra b: Conservador-corporativo. Letra c: Social-democrata. Letra d: Neoliberal. Pause o vídeo e escolha a sua resposta.</a:t>
-            </a:r>
-            <a:endParaRPr lang="en-US" dirty="0"/>
-          </a:p>
-        </p:txBody>
-      </p:sp>
-      <p:sp>
-        <p:nvSpPr>
-          <p:cNvPr id="4" name="Slide Number Placeholder 3"/>
-          <p:cNvSpPr>
-            <a:spLocks noGrp="1"/>
-          </p:cNvSpPr>
-          <p:nvPr>
-            <p:ph type="sldNum" sz="quarter" idx="10"/>
-          </p:nvPr>
-        </p:nvSpPr>
-        <p:spPr/>
-        <p:txBody>
-          <a:bodyPr/>
-          <a:lstStyle/>
-          <a:p>
-            <a:fld id="{F7021451-1387-4CA6-816F-3879F97B5CBC}" type="slidenum">
-              <a:rPr lang="en-US"/>
-              <a:t>28</a:t>
-            </a:fld>
-            <a:endParaRPr lang="en-US"/>
-          </a:p>
-        </p:txBody>
-      </p:sp>
-    </p:spTree>
-    <p:extLst>
-      <p:ext uri="{BB962C8B-B14F-4D97-AF65-F5344CB8AC3E}">
-        <p14:creationId xmlns:p14="http://schemas.microsoft.com/office/powerpoint/2010/main" val="1024086991"/>
-      </p:ext>
-    </p:extLst>
-  </p:cSld>
-  <p:clrMapOvr>
-    <a:masterClrMapping/>
-  </p:clrMapOvr>
-</p:notes>
-</file>
-
-<file path=ppt/notesSlides/notesSlide29.xml><?xml version="1.0" encoding="utf-8"?>
-<p:notes xmlns:a="http://schemas.openxmlformats.org/drawingml/2006/main" xmlns:r="http://schemas.openxmlformats.org/officeDocument/2006/relationships" xmlns:p="http://schemas.openxmlformats.org/presentationml/2006/main">
-  <p:cSld>
-    <p:spTree>
-      <p:nvGrpSpPr>
-        <p:cNvPr id="1" name=""/>
-        <p:cNvGrpSpPr/>
-        <p:nvPr/>
-      </p:nvGrpSpPr>
-      <p:grpSpPr>
-        <a:xfrm>
-          <a:off x="0" y="0"/>
-          <a:ext cx="0" cy="0"/>
-          <a:chOff x="0" y="0"/>
-          <a:chExt cx="0" cy="0"/>
-        </a:xfrm>
-      </p:grpSpPr>
-      <p:sp>
-        <p:nvSpPr>
-          <p:cNvPr id="2" name="Slide Image Placeholder 1"/>
-          <p:cNvSpPr>
-            <a:spLocks noGrp="1" noRot="1" noChangeAspect="1"/>
-          </p:cNvSpPr>
-          <p:nvPr>
-            <p:ph type="sldImg"/>
-          </p:nvPr>
-        </p:nvSpPr>
-        <p:spPr/>
-      </p:sp>
-      <p:sp>
-        <p:nvSpPr>
-          <p:cNvPr id="3" name="Notes Placeholder 2"/>
-          <p:cNvSpPr>
-            <a:spLocks noGrp="1"/>
-          </p:cNvSpPr>
-          <p:nvPr>
-            <p:ph type="body" idx="1"/>
-          </p:nvPr>
-        </p:nvSpPr>
-        <p:spPr/>
-        <p:txBody>
-          <a:bodyPr/>
-          <a:lstStyle/>
-          <a:p>
-            <a:r>
-              <a:rPr lang="en-US" dirty="0"/>
-              <a:t>A resposta correta é a letra c: Social-democrata. No regime social-democrata (Esping-Andersen), a proteção é universal e financiada por tributos.</a:t>
-            </a:r>
-            <a:endParaRPr lang="en-US" dirty="0"/>
-          </a:p>
-        </p:txBody>
-      </p:sp>
-      <p:sp>
-        <p:nvSpPr>
-          <p:cNvPr id="4" name="Slide Number Placeholder 3"/>
-          <p:cNvSpPr>
-            <a:spLocks noGrp="1"/>
-          </p:cNvSpPr>
-          <p:nvPr>
-            <p:ph type="sldNum" sz="quarter" idx="10"/>
-          </p:nvPr>
-        </p:nvSpPr>
-        <p:spPr/>
-        <p:txBody>
-          <a:bodyPr/>
-          <a:lstStyle/>
-          <a:p>
-            <a:fld id="{F7021451-1387-4CA6-816F-3879F97B5CBC}" type="slidenum">
-              <a:rPr lang="en-US"/>
-              <a:t>29</a:t>
             </a:fld>
             <a:endParaRPr lang="en-US"/>
           </a:p>
@@ -3529,622 +3166,6 @@
             <a:fld id="{F7021451-1387-4CA6-816F-3879F97B5CBC}" type="slidenum">
               <a:rPr lang="en-US"/>
               <a:t>3</a:t>
-            </a:fld>
-            <a:endParaRPr lang="en-US"/>
-          </a:p>
-        </p:txBody>
-      </p:sp>
-    </p:spTree>
-    <p:extLst>
-      <p:ext uri="{BB962C8B-B14F-4D97-AF65-F5344CB8AC3E}">
-        <p14:creationId xmlns:p14="http://schemas.microsoft.com/office/powerpoint/2010/main" val="1024086991"/>
-      </p:ext>
-    </p:extLst>
-  </p:cSld>
-  <p:clrMapOvr>
-    <a:masterClrMapping/>
-  </p:clrMapOvr>
-</p:notes>
-</file>
-
-<file path=ppt/notesSlides/notesSlide30.xml><?xml version="1.0" encoding="utf-8"?>
-<p:notes xmlns:a="http://schemas.openxmlformats.org/drawingml/2006/main" xmlns:r="http://schemas.openxmlformats.org/officeDocument/2006/relationships" xmlns:p="http://schemas.openxmlformats.org/presentationml/2006/main">
-  <p:cSld>
-    <p:spTree>
-      <p:nvGrpSpPr>
-        <p:cNvPr id="1" name=""/>
-        <p:cNvGrpSpPr/>
-        <p:nvPr/>
-      </p:nvGrpSpPr>
-      <p:grpSpPr>
-        <a:xfrm>
-          <a:off x="0" y="0"/>
-          <a:ext cx="0" cy="0"/>
-          <a:chOff x="0" y="0"/>
-          <a:chExt cx="0" cy="0"/>
-        </a:xfrm>
-      </p:grpSpPr>
-      <p:sp>
-        <p:nvSpPr>
-          <p:cNvPr id="2" name="Slide Image Placeholder 1"/>
-          <p:cNvSpPr>
-            <a:spLocks noGrp="1" noRot="1" noChangeAspect="1"/>
-          </p:cNvSpPr>
-          <p:nvPr>
-            <p:ph type="sldImg"/>
-          </p:nvPr>
-        </p:nvSpPr>
-        <p:spPr/>
-      </p:sp>
-      <p:sp>
-        <p:nvSpPr>
-          <p:cNvPr id="3" name="Notes Placeholder 2"/>
-          <p:cNvSpPr>
-            <a:spLocks noGrp="1"/>
-          </p:cNvSpPr>
-          <p:nvPr>
-            <p:ph type="body" idx="1"/>
-          </p:nvPr>
-        </p:nvSpPr>
-        <p:spPr/>
-        <p:txBody>
-          <a:bodyPr/>
-          <a:lstStyle/>
-          <a:p>
-            <a:r>
-              <a:rPr lang="en-US" dirty="0"/>
-              <a:t>Pergunta 3. O que é estagflação? Letra a: Crescimento com preços estáveis. Letra b: Estagnação econômica com inflação alta. Letra c: Queda de preços com pleno emprego. Letra d: Crescimento acelerado com desemprego zero. Pause o vídeo e escolha a sua resposta.</a:t>
-            </a:r>
-            <a:endParaRPr lang="en-US" dirty="0"/>
-          </a:p>
-        </p:txBody>
-      </p:sp>
-      <p:sp>
-        <p:nvSpPr>
-          <p:cNvPr id="4" name="Slide Number Placeholder 3"/>
-          <p:cNvSpPr>
-            <a:spLocks noGrp="1"/>
-          </p:cNvSpPr>
-          <p:nvPr>
-            <p:ph type="sldNum" sz="quarter" idx="10"/>
-          </p:nvPr>
-        </p:nvSpPr>
-        <p:spPr/>
-        <p:txBody>
-          <a:bodyPr/>
-          <a:lstStyle/>
-          <a:p>
-            <a:fld id="{F7021451-1387-4CA6-816F-3879F97B5CBC}" type="slidenum">
-              <a:rPr lang="en-US"/>
-              <a:t>30</a:t>
-            </a:fld>
-            <a:endParaRPr lang="en-US"/>
-          </a:p>
-        </p:txBody>
-      </p:sp>
-    </p:spTree>
-    <p:extLst>
-      <p:ext uri="{BB962C8B-B14F-4D97-AF65-F5344CB8AC3E}">
-        <p14:creationId xmlns:p14="http://schemas.microsoft.com/office/powerpoint/2010/main" val="1024086991"/>
-      </p:ext>
-    </p:extLst>
-  </p:cSld>
-  <p:clrMapOvr>
-    <a:masterClrMapping/>
-  </p:clrMapOvr>
-</p:notes>
-</file>
-
-<file path=ppt/notesSlides/notesSlide31.xml><?xml version="1.0" encoding="utf-8"?>
-<p:notes xmlns:a="http://schemas.openxmlformats.org/drawingml/2006/main" xmlns:r="http://schemas.openxmlformats.org/officeDocument/2006/relationships" xmlns:p="http://schemas.openxmlformats.org/presentationml/2006/main">
-  <p:cSld>
-    <p:spTree>
-      <p:nvGrpSpPr>
-        <p:cNvPr id="1" name=""/>
-        <p:cNvGrpSpPr/>
-        <p:nvPr/>
-      </p:nvGrpSpPr>
-      <p:grpSpPr>
-        <a:xfrm>
-          <a:off x="0" y="0"/>
-          <a:ext cx="0" cy="0"/>
-          <a:chOff x="0" y="0"/>
-          <a:chExt cx="0" cy="0"/>
-        </a:xfrm>
-      </p:grpSpPr>
-      <p:sp>
-        <p:nvSpPr>
-          <p:cNvPr id="2" name="Slide Image Placeholder 1"/>
-          <p:cNvSpPr>
-            <a:spLocks noGrp="1" noRot="1" noChangeAspect="1"/>
-          </p:cNvSpPr>
-          <p:nvPr>
-            <p:ph type="sldImg"/>
-          </p:nvPr>
-        </p:nvSpPr>
-        <p:spPr/>
-      </p:sp>
-      <p:sp>
-        <p:nvSpPr>
-          <p:cNvPr id="3" name="Notes Placeholder 2"/>
-          <p:cNvSpPr>
-            <a:spLocks noGrp="1"/>
-          </p:cNvSpPr>
-          <p:nvPr>
-            <p:ph type="body" idx="1"/>
-          </p:nvPr>
-        </p:nvSpPr>
-        <p:spPr/>
-        <p:txBody>
-          <a:bodyPr/>
-          <a:lstStyle/>
-          <a:p>
-            <a:r>
-              <a:rPr lang="en-US" dirty="0"/>
-              <a:t>A resposta correta é a letra b: Estagnação econômica com inflação alta. Nos anos 1970, estagnação e inflação ocorreram juntas, o que abalou o receituário keynesiano e abriu espaço ao neoliberalismo.</a:t>
-            </a:r>
-            <a:endParaRPr lang="en-US" dirty="0"/>
-          </a:p>
-        </p:txBody>
-      </p:sp>
-      <p:sp>
-        <p:nvSpPr>
-          <p:cNvPr id="4" name="Slide Number Placeholder 3"/>
-          <p:cNvSpPr>
-            <a:spLocks noGrp="1"/>
-          </p:cNvSpPr>
-          <p:nvPr>
-            <p:ph type="sldNum" sz="quarter" idx="10"/>
-          </p:nvPr>
-        </p:nvSpPr>
-        <p:spPr/>
-        <p:txBody>
-          <a:bodyPr/>
-          <a:lstStyle/>
-          <a:p>
-            <a:fld id="{F7021451-1387-4CA6-816F-3879F97B5CBC}" type="slidenum">
-              <a:rPr lang="en-US"/>
-              <a:t>31</a:t>
-            </a:fld>
-            <a:endParaRPr lang="en-US"/>
-          </a:p>
-        </p:txBody>
-      </p:sp>
-    </p:spTree>
-    <p:extLst>
-      <p:ext uri="{BB962C8B-B14F-4D97-AF65-F5344CB8AC3E}">
-        <p14:creationId xmlns:p14="http://schemas.microsoft.com/office/powerpoint/2010/main" val="1024086991"/>
-      </p:ext>
-    </p:extLst>
-  </p:cSld>
-  <p:clrMapOvr>
-    <a:masterClrMapping/>
-  </p:clrMapOvr>
-</p:notes>
-</file>
-
-<file path=ppt/notesSlides/notesSlide32.xml><?xml version="1.0" encoding="utf-8"?>
-<p:notes xmlns:a="http://schemas.openxmlformats.org/drawingml/2006/main" xmlns:r="http://schemas.openxmlformats.org/officeDocument/2006/relationships" xmlns:p="http://schemas.openxmlformats.org/presentationml/2006/main">
-  <p:cSld>
-    <p:spTree>
-      <p:nvGrpSpPr>
-        <p:cNvPr id="1" name=""/>
-        <p:cNvGrpSpPr/>
-        <p:nvPr/>
-      </p:nvGrpSpPr>
-      <p:grpSpPr>
-        <a:xfrm>
-          <a:off x="0" y="0"/>
-          <a:ext cx="0" cy="0"/>
-          <a:chOff x="0" y="0"/>
-          <a:chExt cx="0" cy="0"/>
-        </a:xfrm>
-      </p:grpSpPr>
-      <p:sp>
-        <p:nvSpPr>
-          <p:cNvPr id="2" name="Slide Image Placeholder 1"/>
-          <p:cNvSpPr>
-            <a:spLocks noGrp="1" noRot="1" noChangeAspect="1"/>
-          </p:cNvSpPr>
-          <p:nvPr>
-            <p:ph type="sldImg"/>
-          </p:nvPr>
-        </p:nvSpPr>
-        <p:spPr/>
-      </p:sp>
-      <p:sp>
-        <p:nvSpPr>
-          <p:cNvPr id="3" name="Notes Placeholder 2"/>
-          <p:cNvSpPr>
-            <a:spLocks noGrp="1"/>
-          </p:cNvSpPr>
-          <p:nvPr>
-            <p:ph type="body" idx="1"/>
-          </p:nvPr>
-        </p:nvSpPr>
-        <p:spPr/>
-        <p:txBody>
-          <a:bodyPr/>
-          <a:lstStyle/>
-          <a:p>
-            <a:r>
-              <a:rPr lang="en-US" dirty="0"/>
-              <a:t>Pergunta 4. O Plano Diretor da Reforma do Aparelho do Estado (1995) propôs a passagem da administração: Letra a: Gerencial para patrimonialista. Letra b: Patrimonialista para socialista. Letra c: Gerencial para burocrática. Letra d: Burocrática para gerencial. Pause o vídeo e escolha a sua resposta.</a:t>
-            </a:r>
-            <a:endParaRPr lang="en-US" dirty="0"/>
-          </a:p>
-        </p:txBody>
-      </p:sp>
-      <p:sp>
-        <p:nvSpPr>
-          <p:cNvPr id="4" name="Slide Number Placeholder 3"/>
-          <p:cNvSpPr>
-            <a:spLocks noGrp="1"/>
-          </p:cNvSpPr>
-          <p:nvPr>
-            <p:ph type="sldNum" sz="quarter" idx="10"/>
-          </p:nvPr>
-        </p:nvSpPr>
-        <p:spPr/>
-        <p:txBody>
-          <a:bodyPr/>
-          <a:lstStyle/>
-          <a:p>
-            <a:fld id="{F7021451-1387-4CA6-816F-3879F97B5CBC}" type="slidenum">
-              <a:rPr lang="en-US"/>
-              <a:t>32</a:t>
-            </a:fld>
-            <a:endParaRPr lang="en-US"/>
-          </a:p>
-        </p:txBody>
-      </p:sp>
-    </p:spTree>
-    <p:extLst>
-      <p:ext uri="{BB962C8B-B14F-4D97-AF65-F5344CB8AC3E}">
-        <p14:creationId xmlns:p14="http://schemas.microsoft.com/office/powerpoint/2010/main" val="1024086991"/>
-      </p:ext>
-    </p:extLst>
-  </p:cSld>
-  <p:clrMapOvr>
-    <a:masterClrMapping/>
-  </p:clrMapOvr>
-</p:notes>
-</file>
-
-<file path=ppt/notesSlides/notesSlide33.xml><?xml version="1.0" encoding="utf-8"?>
-<p:notes xmlns:a="http://schemas.openxmlformats.org/drawingml/2006/main" xmlns:r="http://schemas.openxmlformats.org/officeDocument/2006/relationships" xmlns:p="http://schemas.openxmlformats.org/presentationml/2006/main">
-  <p:cSld>
-    <p:spTree>
-      <p:nvGrpSpPr>
-        <p:cNvPr id="1" name=""/>
-        <p:cNvGrpSpPr/>
-        <p:nvPr/>
-      </p:nvGrpSpPr>
-      <p:grpSpPr>
-        <a:xfrm>
-          <a:off x="0" y="0"/>
-          <a:ext cx="0" cy="0"/>
-          <a:chOff x="0" y="0"/>
-          <a:chExt cx="0" cy="0"/>
-        </a:xfrm>
-      </p:grpSpPr>
-      <p:sp>
-        <p:nvSpPr>
-          <p:cNvPr id="2" name="Slide Image Placeholder 1"/>
-          <p:cNvSpPr>
-            <a:spLocks noGrp="1" noRot="1" noChangeAspect="1"/>
-          </p:cNvSpPr>
-          <p:nvPr>
-            <p:ph type="sldImg"/>
-          </p:nvPr>
-        </p:nvSpPr>
-        <p:spPr/>
-      </p:sp>
-      <p:sp>
-        <p:nvSpPr>
-          <p:cNvPr id="3" name="Notes Placeholder 2"/>
-          <p:cNvSpPr>
-            <a:spLocks noGrp="1"/>
-          </p:cNvSpPr>
-          <p:nvPr>
-            <p:ph type="body" idx="1"/>
-          </p:nvPr>
-        </p:nvSpPr>
-        <p:spPr/>
-        <p:txBody>
-          <a:bodyPr/>
-          <a:lstStyle/>
-          <a:p>
-            <a:r>
-              <a:rPr lang="en-US" dirty="0"/>
-              <a:t>A resposta correta é a letra d: Burocrática para gerencial. A reforma de 1995 (Bresser-Pereira) buscou a administração gerencial, com foco em resultados e no cidadão.</a:t>
-            </a:r>
-            <a:endParaRPr lang="en-US" dirty="0"/>
-          </a:p>
-        </p:txBody>
-      </p:sp>
-      <p:sp>
-        <p:nvSpPr>
-          <p:cNvPr id="4" name="Slide Number Placeholder 3"/>
-          <p:cNvSpPr>
-            <a:spLocks noGrp="1"/>
-          </p:cNvSpPr>
-          <p:nvPr>
-            <p:ph type="sldNum" sz="quarter" idx="10"/>
-          </p:nvPr>
-        </p:nvSpPr>
-        <p:spPr/>
-        <p:txBody>
-          <a:bodyPr/>
-          <a:lstStyle/>
-          <a:p>
-            <a:fld id="{F7021451-1387-4CA6-816F-3879F97B5CBC}" type="slidenum">
-              <a:rPr lang="en-US"/>
-              <a:t>33</a:t>
-            </a:fld>
-            <a:endParaRPr lang="en-US"/>
-          </a:p>
-        </p:txBody>
-      </p:sp>
-    </p:spTree>
-    <p:extLst>
-      <p:ext uri="{BB962C8B-B14F-4D97-AF65-F5344CB8AC3E}">
-        <p14:creationId xmlns:p14="http://schemas.microsoft.com/office/powerpoint/2010/main" val="1024086991"/>
-      </p:ext>
-    </p:extLst>
-  </p:cSld>
-  <p:clrMapOvr>
-    <a:masterClrMapping/>
-  </p:clrMapOvr>
-</p:notes>
-</file>
-
-<file path=ppt/notesSlides/notesSlide34.xml><?xml version="1.0" encoding="utf-8"?>
-<p:notes xmlns:a="http://schemas.openxmlformats.org/drawingml/2006/main" xmlns:r="http://schemas.openxmlformats.org/officeDocument/2006/relationships" xmlns:p="http://schemas.openxmlformats.org/presentationml/2006/main">
-  <p:cSld>
-    <p:spTree>
-      <p:nvGrpSpPr>
-        <p:cNvPr id="1" name=""/>
-        <p:cNvGrpSpPr/>
-        <p:nvPr/>
-      </p:nvGrpSpPr>
-      <p:grpSpPr>
-        <a:xfrm>
-          <a:off x="0" y="0"/>
-          <a:ext cx="0" cy="0"/>
-          <a:chOff x="0" y="0"/>
-          <a:chExt cx="0" cy="0"/>
-        </a:xfrm>
-      </p:grpSpPr>
-      <p:sp>
-        <p:nvSpPr>
-          <p:cNvPr id="2" name="Slide Image Placeholder 1"/>
-          <p:cNvSpPr>
-            <a:spLocks noGrp="1" noRot="1" noChangeAspect="1"/>
-          </p:cNvSpPr>
-          <p:nvPr>
-            <p:ph type="sldImg"/>
-          </p:nvPr>
-        </p:nvSpPr>
-        <p:spPr/>
-      </p:sp>
-      <p:sp>
-        <p:nvSpPr>
-          <p:cNvPr id="3" name="Notes Placeholder 2"/>
-          <p:cNvSpPr>
-            <a:spLocks noGrp="1"/>
-          </p:cNvSpPr>
-          <p:nvPr>
-            <p:ph type="body" idx="1"/>
-          </p:nvPr>
-        </p:nvSpPr>
-        <p:spPr/>
-        <p:txBody>
-          <a:bodyPr/>
-          <a:lstStyle/>
-          <a:p>
-            <a:r>
-              <a:rPr lang="en-US" dirty="0"/>
-              <a:t>Pergunta 5. A criação da ANEEL, da ANATEL e da ANP, nos anos 1990, expressa qual papel do Estado? Letra a: Estado regulador. Letra b: Estado produtor. Letra c: Planejamento central. Letra d: Estado mínimo guarda-noturno. Pause o vídeo e escolha a sua resposta.</a:t>
-            </a:r>
-            <a:endParaRPr lang="en-US" dirty="0"/>
-          </a:p>
-        </p:txBody>
-      </p:sp>
-      <p:sp>
-        <p:nvSpPr>
-          <p:cNvPr id="4" name="Slide Number Placeholder 3"/>
-          <p:cNvSpPr>
-            <a:spLocks noGrp="1"/>
-          </p:cNvSpPr>
-          <p:nvPr>
-            <p:ph type="sldNum" sz="quarter" idx="10"/>
-          </p:nvPr>
-        </p:nvSpPr>
-        <p:spPr/>
-        <p:txBody>
-          <a:bodyPr/>
-          <a:lstStyle/>
-          <a:p>
-            <a:fld id="{F7021451-1387-4CA6-816F-3879F97B5CBC}" type="slidenum">
-              <a:rPr lang="en-US"/>
-              <a:t>34</a:t>
-            </a:fld>
-            <a:endParaRPr lang="en-US"/>
-          </a:p>
-        </p:txBody>
-      </p:sp>
-    </p:spTree>
-    <p:extLst>
-      <p:ext uri="{BB962C8B-B14F-4D97-AF65-F5344CB8AC3E}">
-        <p14:creationId xmlns:p14="http://schemas.microsoft.com/office/powerpoint/2010/main" val="1024086991"/>
-      </p:ext>
-    </p:extLst>
-  </p:cSld>
-  <p:clrMapOvr>
-    <a:masterClrMapping/>
-  </p:clrMapOvr>
-</p:notes>
-</file>
-
-<file path=ppt/notesSlides/notesSlide35.xml><?xml version="1.0" encoding="utf-8"?>
-<p:notes xmlns:a="http://schemas.openxmlformats.org/drawingml/2006/main" xmlns:r="http://schemas.openxmlformats.org/officeDocument/2006/relationships" xmlns:p="http://schemas.openxmlformats.org/presentationml/2006/main">
-  <p:cSld>
-    <p:spTree>
-      <p:nvGrpSpPr>
-        <p:cNvPr id="1" name=""/>
-        <p:cNvGrpSpPr/>
-        <p:nvPr/>
-      </p:nvGrpSpPr>
-      <p:grpSpPr>
-        <a:xfrm>
-          <a:off x="0" y="0"/>
-          <a:ext cx="0" cy="0"/>
-          <a:chOff x="0" y="0"/>
-          <a:chExt cx="0" cy="0"/>
-        </a:xfrm>
-      </p:grpSpPr>
-      <p:sp>
-        <p:nvSpPr>
-          <p:cNvPr id="2" name="Slide Image Placeholder 1"/>
-          <p:cNvSpPr>
-            <a:spLocks noGrp="1" noRot="1" noChangeAspect="1"/>
-          </p:cNvSpPr>
-          <p:nvPr>
-            <p:ph type="sldImg"/>
-          </p:nvPr>
-        </p:nvSpPr>
-        <p:spPr/>
-      </p:sp>
-      <p:sp>
-        <p:nvSpPr>
-          <p:cNvPr id="3" name="Notes Placeholder 2"/>
-          <p:cNvSpPr>
-            <a:spLocks noGrp="1"/>
-          </p:cNvSpPr>
-          <p:nvPr>
-            <p:ph type="body" idx="1"/>
-          </p:nvPr>
-        </p:nvSpPr>
-        <p:spPr/>
-        <p:txBody>
-          <a:bodyPr/>
-          <a:lstStyle/>
-          <a:p>
-            <a:r>
-              <a:rPr lang="en-US" dirty="0"/>
-              <a:t>A resposta correta é a letra a: Estado regulador. Com as privatizações e concessões, o Estado deixa de produzir diretamente e passa a regular os serviços por meio de agências.</a:t>
-            </a:r>
-            <a:endParaRPr lang="en-US" dirty="0"/>
-          </a:p>
-        </p:txBody>
-      </p:sp>
-      <p:sp>
-        <p:nvSpPr>
-          <p:cNvPr id="4" name="Slide Number Placeholder 3"/>
-          <p:cNvSpPr>
-            <a:spLocks noGrp="1"/>
-          </p:cNvSpPr>
-          <p:nvPr>
-            <p:ph type="sldNum" sz="quarter" idx="10"/>
-          </p:nvPr>
-        </p:nvSpPr>
-        <p:spPr/>
-        <p:txBody>
-          <a:bodyPr/>
-          <a:lstStyle/>
-          <a:p>
-            <a:fld id="{F7021451-1387-4CA6-816F-3879F97B5CBC}" type="slidenum">
-              <a:rPr lang="en-US"/>
-              <a:t>35</a:t>
-            </a:fld>
-            <a:endParaRPr lang="en-US"/>
-          </a:p>
-        </p:txBody>
-      </p:sp>
-    </p:spTree>
-    <p:extLst>
-      <p:ext uri="{BB962C8B-B14F-4D97-AF65-F5344CB8AC3E}">
-        <p14:creationId xmlns:p14="http://schemas.microsoft.com/office/powerpoint/2010/main" val="1024086991"/>
-      </p:ext>
-    </p:extLst>
-  </p:cSld>
-  <p:clrMapOvr>
-    <a:masterClrMapping/>
-  </p:clrMapOvr>
-</p:notes>
-</file>
-
-<file path=ppt/notesSlides/notesSlide36.xml><?xml version="1.0" encoding="utf-8"?>
-<p:notes xmlns:a="http://schemas.openxmlformats.org/drawingml/2006/main" xmlns:r="http://schemas.openxmlformats.org/officeDocument/2006/relationships" xmlns:p="http://schemas.openxmlformats.org/presentationml/2006/main">
-  <p:cSld>
-    <p:spTree>
-      <p:nvGrpSpPr>
-        <p:cNvPr id="1" name=""/>
-        <p:cNvGrpSpPr/>
-        <p:nvPr/>
-      </p:nvGrpSpPr>
-      <p:grpSpPr>
-        <a:xfrm>
-          <a:off x="0" y="0"/>
-          <a:ext cx="0" cy="0"/>
-          <a:chOff x="0" y="0"/>
-          <a:chExt cx="0" cy="0"/>
-        </a:xfrm>
-      </p:grpSpPr>
-      <p:sp>
-        <p:nvSpPr>
-          <p:cNvPr id="2" name="Slide Image Placeholder 1"/>
-          <p:cNvSpPr>
-            <a:spLocks noGrp="1" noRot="1" noChangeAspect="1"/>
-          </p:cNvSpPr>
-          <p:nvPr>
-            <p:ph type="sldImg"/>
-          </p:nvPr>
-        </p:nvSpPr>
-        <p:spPr/>
-      </p:sp>
-      <p:sp>
-        <p:nvSpPr>
-          <p:cNvPr id="3" name="Notes Placeholder 2"/>
-          <p:cNvSpPr>
-            <a:spLocks noGrp="1"/>
-          </p:cNvSpPr>
-          <p:nvPr>
-            <p:ph type="body" idx="1"/>
-          </p:nvPr>
-        </p:nvSpPr>
-        <p:spPr/>
-        <p:txBody>
-          <a:bodyPr/>
-          <a:lstStyle/>
-          <a:p>
-            <a:r>
-              <a:rPr lang="en-US" dirty="0"/>
-              <a:t>Para fechar a Unidade 4 e a disciplina, vamos recapitular. [Apontar para o quadro da esquerda.] No tópico 7, vimos os quatro modelos de Estado do século XX: o liberal, que entrou em crise em 1929; o socialista, com planejamento central, de 1917 a 1991; o de bem-estar social, com Keynes, o New Deal, Beveridge e os três regimes de Esping-Andersen; e, depois da crise dos anos 1970, o neoliberal, com Hayek, Friedman e o Consenso de Washington. [Apontar para o quadro da direita.] No tópico 8, vimos o Estado desenvolvimentista brasileiro, de 1930 a 1980, e a tensão entre a Constituição de 1988, com a seguridade universal, e as reformas dos anos 1990, com o Estado gerencial, as agências reguladoras e a LRF. Vimos também que patrimonialismo, burocracia e gerencialismo ainda convivem, e que, no século XXI, a pergunta é que Estado e que mercado queremos. Lembre: A2 até 8 de novembro e A3 até 15 de novembro, às 23h55. Obrigado pela dedicação ao longo destas semanas. Bons estudos, boas avaliações e até a próxima disciplina!</a:t>
-            </a:r>
-            <a:endParaRPr lang="en-US" dirty="0"/>
-          </a:p>
-        </p:txBody>
-      </p:sp>
-      <p:sp>
-        <p:nvSpPr>
-          <p:cNvPr id="4" name="Slide Number Placeholder 3"/>
-          <p:cNvSpPr>
-            <a:spLocks noGrp="1"/>
-          </p:cNvSpPr>
-          <p:nvPr>
-            <p:ph type="sldNum" sz="quarter" idx="10"/>
-          </p:nvPr>
-        </p:nvSpPr>
-        <p:spPr/>
-        <p:txBody>
-          <a:bodyPr/>
-          <a:lstStyle/>
-          <a:p>
-            <a:fld id="{F7021451-1387-4CA6-816F-3879F97B5CBC}" type="slidenum">
-              <a:rPr lang="en-US"/>
-              <a:t>36</a:t>
             </a:fld>
             <a:endParaRPr lang="en-US"/>
           </a:p>
@@ -15476,6 +14497,144 @@
                           <a:ea typeface="Calibri" pitchFamily="34" charset="-122"/>
                           <a:cs typeface="Calibri" pitchFamily="34" charset="-120"/>
                         </a:rPr>
+                        <a:t>Na página</a:t>
+                      </a:r>
+                      <a:endParaRPr lang="en-US" sz="1350" dirty="0">
+                        <a:latin typeface="Calibri" charset="0"/>
+                        <a:ea typeface="Calibri" charset="0"/>
+                        <a:cs typeface="Calibri" charset="0"/>
+                      </a:endParaRPr>
+                    </a:p>
+                  </a:txBody>
+                  <a:tcPr marL="50800" marR="50800" marT="50800" marB="50800" anchor="ctr">
+                    <a:lnL w="9525" cap="flat" cmpd="sng" algn="ctr">
+                      <a:solidFill>
+                        <a:srgbClr val="DCD5C1"/>
+                      </a:solidFill>
+                      <a:prstDash val="solid"/>
+                      <a:round/>
+                      <a:headEnd type="none" w="med" len="med"/>
+                      <a:tailEnd type="none" w="med" len="med"/>
+                    </a:lnL>
+                    <a:lnR w="9525" cap="flat" cmpd="sng" algn="ctr">
+                      <a:solidFill>
+                        <a:srgbClr val="DCD5C1"/>
+                      </a:solidFill>
+                      <a:prstDash val="solid"/>
+                      <a:round/>
+                      <a:headEnd type="none" w="med" len="med"/>
+                      <a:tailEnd type="none" w="med" len="med"/>
+                    </a:lnR>
+                    <a:lnT w="9525" cap="flat" cmpd="sng" algn="ctr">
+                      <a:solidFill>
+                        <a:srgbClr val="DCD5C1"/>
+                      </a:solidFill>
+                      <a:prstDash val="solid"/>
+                      <a:round/>
+                      <a:headEnd type="none" w="med" len="med"/>
+                      <a:tailEnd type="none" w="med" len="med"/>
+                    </a:lnT>
+                    <a:lnB w="9525" cap="flat" cmpd="sng" algn="ctr">
+                      <a:solidFill>
+                        <a:srgbClr val="DCD5C1"/>
+                      </a:solidFill>
+                      <a:prstDash val="solid"/>
+                      <a:round/>
+                      <a:headEnd type="none" w="med" len="med"/>
+                      <a:tailEnd type="none" w="med" len="med"/>
+                    </a:lnB>
+                    <a:solidFill>
+                      <a:srgbClr val="F4F7F8"/>
+                    </a:solidFill>
+                  </a:tcPr>
+                </a:tc>
+                <a:tc>
+                  <a:txBody>
+                    <a:bodyPr/>
+                    <a:lstStyle/>
+                    <a:p>
+                      <a:pPr indent="0" marL="0">
+                        <a:buNone/>
+                      </a:pPr>
+                      <a:r>
+                        <a:rPr lang="en-US" sz="1350" dirty="0">
+                          <a:solidFill>
+                            <a:srgbClr val="1F2A37"/>
+                          </a:solidFill>
+                          <a:latin typeface="Calibri" pitchFamily="34" charset="0"/>
+                          <a:ea typeface="Calibri" pitchFamily="34" charset="-122"/>
+                          <a:cs typeface="Calibri" pitchFamily="34" charset="-120"/>
+                        </a:rPr>
+                        <a:t>Quiz de revisão da Unidade 4: 5 perguntas com resposta comentada (sem nota)</a:t>
+                      </a:r>
+                      <a:endParaRPr lang="en-US" sz="1350" dirty="0">
+                        <a:latin typeface="Calibri" charset="0"/>
+                        <a:ea typeface="Calibri" charset="0"/>
+                        <a:cs typeface="Calibri" charset="0"/>
+                      </a:endParaRPr>
+                    </a:p>
+                  </a:txBody>
+                  <a:tcPr marL="50800" marR="50800" marT="50800" marB="50800" anchor="ctr">
+                    <a:lnL w="9525" cap="flat" cmpd="sng" algn="ctr">
+                      <a:solidFill>
+                        <a:srgbClr val="DCD5C1"/>
+                      </a:solidFill>
+                      <a:prstDash val="solid"/>
+                      <a:round/>
+                      <a:headEnd type="none" w="med" len="med"/>
+                      <a:tailEnd type="none" w="med" len="med"/>
+                    </a:lnL>
+                    <a:lnR w="9525" cap="flat" cmpd="sng" algn="ctr">
+                      <a:solidFill>
+                        <a:srgbClr val="DCD5C1"/>
+                      </a:solidFill>
+                      <a:prstDash val="solid"/>
+                      <a:round/>
+                      <a:headEnd type="none" w="med" len="med"/>
+                      <a:tailEnd type="none" w="med" len="med"/>
+                    </a:lnR>
+                    <a:lnT w="9525" cap="flat" cmpd="sng" algn="ctr">
+                      <a:solidFill>
+                        <a:srgbClr val="DCD5C1"/>
+                      </a:solidFill>
+                      <a:prstDash val="solid"/>
+                      <a:round/>
+                      <a:headEnd type="none" w="med" len="med"/>
+                      <a:tailEnd type="none" w="med" len="med"/>
+                    </a:lnT>
+                    <a:lnB w="9525" cap="flat" cmpd="sng" algn="ctr">
+                      <a:solidFill>
+                        <a:srgbClr val="DCD5C1"/>
+                      </a:solidFill>
+                      <a:prstDash val="solid"/>
+                      <a:round/>
+                      <a:headEnd type="none" w="med" len="med"/>
+                      <a:tailEnd type="none" w="med" len="med"/>
+                    </a:lnB>
+                    <a:solidFill>
+                      <a:srgbClr val="F4F7F8"/>
+                    </a:solidFill>
+                  </a:tcPr>
+                </a:tc>
+              </a:tr>
+              <a:tr h="0">
+                <a:tc>
+                  <a:txBody>
+                    <a:bodyPr/>
+                    <a:lstStyle/>
+                    <a:p>
+                      <a:pPr indent="0" marL="0">
+                        <a:buNone/>
+                      </a:pPr>
+                      <a:r>
+                        <a:rPr lang="en-US" sz="1350" dirty="0">
+                          <a:solidFill>
+                            <a:srgbClr val="1F2A37"/>
+                          </a:solidFill>
+                          <a:latin typeface="Calibri" pitchFamily="34" charset="0"/>
+                          <a:ea typeface="Calibri" pitchFamily="34" charset="-122"/>
+                          <a:cs typeface="Calibri" pitchFamily="34" charset="-120"/>
+                        </a:rPr>
                         <a:t>até 15/11</a:t>
                       </a:r>
                       <a:endParaRPr lang="en-US" sz="1350" dirty="0">
@@ -15523,7 +14682,7 @@
                       <a:tailEnd type="none" w="med" len="med"/>
                     </a:lnB>
                     <a:solidFill>
-                      <a:srgbClr val="F4F7F8"/>
+                      <a:srgbClr val="FFFFFF"/>
                     </a:solidFill>
                   </a:tcPr>
                 </a:tc>
@@ -15591,7 +14750,7 @@
                       <a:tailEnd type="none" w="med" len="med"/>
                     </a:lnB>
                     <a:solidFill>
-                      <a:srgbClr val="F4F7F8"/>
+                      <a:srgbClr val="FFFFFF"/>
                     </a:solidFill>
                   </a:tcPr>
                 </a:tc>
@@ -15729,313 +14888,102 @@
       </p:grpSpPr>
       <p:sp>
         <p:nvSpPr>
-          <p:cNvPr id="2" name="Shape 0"/>
-          <p:cNvSpPr/>
-          <p:nvPr/>
-        </p:nvSpPr>
-        <p:spPr>
-          <a:xfrm>
-            <a:off x="4069080" y="1097280"/>
-            <a:ext cx="1005840" cy="1005840"/>
+          <p:cNvPr id="2" name="Text 0"/>
+          <p:cNvSpPr txBox="1"/>
+          <p:nvPr/>
+        </p:nvSpPr>
+        <p:spPr>
+          <a:xfrm>
+            <a:off x="731520" y="256032"/>
+            <a:ext cx="7680960" cy="566928"/>
+          </a:xfrm>
+          <a:prstGeom prst="rect">
+            <a:avLst/>
+          </a:prstGeom>
+          <a:noFill/>
+          <a:ln/>
+        </p:spPr>
+        <p:txBody>
+          <a:bodyPr wrap="square" lIns="0" tIns="0" rIns="0" bIns="0" rtlCol="0" anchor="ctr"/>
+          <a:lstStyle/>
+          <a:p>
+            <a:pPr algn="ctr" indent="0" marL="0">
+              <a:lnSpc>
+                <a:spcPct val="100000"/>
+              </a:lnSpc>
+              <a:buNone/>
+            </a:pPr>
+            <a:r>
+              <a:rPr lang="en-US" sz="2800" b="1" dirty="0">
+                <a:solidFill>
+                  <a:srgbClr val="13294B"/>
+                </a:solidFill>
+                <a:latin typeface="Calibri" pitchFamily="34" charset="0"/>
+                <a:ea typeface="Calibri" pitchFamily="34" charset="-122"/>
+                <a:cs typeface="Calibri" pitchFamily="34" charset="-120"/>
+              </a:rPr>
+              <a:t>Resumo da Unidade 4</a:t>
+            </a:r>
+            <a:endParaRPr lang="en-US" sz="2800" dirty="0"/>
+          </a:p>
+        </p:txBody>
+      </p:sp>
+      <p:sp>
+        <p:nvSpPr>
+          <p:cNvPr id="3" name="Text 1"/>
+          <p:cNvSpPr txBox="1"/>
+          <p:nvPr/>
+        </p:nvSpPr>
+        <p:spPr>
+          <a:xfrm>
+            <a:off x="1005840" y="804672"/>
+            <a:ext cx="7132320" cy="329184"/>
+          </a:xfrm>
+          <a:prstGeom prst="rect">
+            <a:avLst/>
+          </a:prstGeom>
+          <a:noFill/>
+          <a:ln/>
+        </p:spPr>
+        <p:txBody>
+          <a:bodyPr wrap="square" lIns="0" tIns="0" rIns="0" bIns="0" rtlCol="0" anchor="ctr"/>
+          <a:lstStyle/>
+          <a:p>
+            <a:pPr algn="ctr" indent="0" marL="0">
+              <a:lnSpc>
+                <a:spcPct val="100000"/>
+              </a:lnSpc>
+              <a:buNone/>
+            </a:pPr>
+            <a:r>
+              <a:rPr lang="en-US" sz="1400" dirty="0">
+                <a:solidFill>
+                  <a:srgbClr val="5B6770"/>
+                </a:solidFill>
+                <a:latin typeface="Calibri" pitchFamily="34" charset="0"/>
+                <a:ea typeface="Calibri" pitchFamily="34" charset="-122"/>
+                <a:cs typeface="Calibri" pitchFamily="34" charset="-120"/>
+              </a:rPr>
+              <a:t>O que discutimos nesta unidade</a:t>
+            </a:r>
+            <a:endParaRPr lang="en-US" sz="1400" dirty="0"/>
+          </a:p>
+        </p:txBody>
+      </p:sp>
+      <p:sp>
+        <p:nvSpPr>
+          <p:cNvPr id="4" name="Text 2"/>
+          <p:cNvSpPr txBox="1"/>
+          <p:nvPr/>
+        </p:nvSpPr>
+        <p:spPr>
+          <a:xfrm>
+            <a:off x="685800" y="1170432"/>
+            <a:ext cx="3794760" cy="2743200"/>
           </a:xfrm>
           <a:prstGeom prst="roundRect">
             <a:avLst>
-              <a:gd name="adj" fmla="val 18182"/>
-            </a:avLst>
-          </a:prstGeom>
-          <a:solidFill>
-            <a:srgbClr val="2A8C85"/>
-          </a:solidFill>
-          <a:ln/>
-        </p:spPr>
-      </p:sp>
-      <p:pic>
-        <p:nvPicPr>
-          <p:cNvPr id="3" name="Image 0" descr="/tmp/claude-0/-home-user-zero-claude/d7e33190-c541-582c-a7cc-1156817732ce/scratchpad/deck/assets/icon_FaQuestion.png">    </p:cNvPr>
-          <p:cNvPicPr>
-            <a:picLocks noChangeAspect="1"/>
-          </p:cNvPicPr>
-          <p:nvPr/>
-        </p:nvPicPr>
-        <p:blipFill>
-          <a:blip r:embed="rId2"/>
-          <a:stretch>
-            <a:fillRect/>
-          </a:stretch>
-        </p:blipFill>
-        <p:spPr>
-          <a:xfrm>
-            <a:off x="4297680" y="1325880"/>
-            <a:ext cx="548640" cy="548640"/>
-          </a:xfrm>
-          <a:prstGeom prst="rect">
-            <a:avLst/>
-          </a:prstGeom>
-        </p:spPr>
-      </p:pic>
-      <p:sp>
-        <p:nvSpPr>
-          <p:cNvPr id="4" name="Text 1"/>
-          <p:cNvSpPr txBox="1"/>
-          <p:nvPr/>
-        </p:nvSpPr>
-        <p:spPr>
-          <a:xfrm>
-            <a:off x="731520" y="2240280"/>
-            <a:ext cx="7680960" cy="731520"/>
-          </a:xfrm>
-          <a:prstGeom prst="rect">
-            <a:avLst/>
-          </a:prstGeom>
-          <a:noFill/>
-          <a:ln/>
-        </p:spPr>
-        <p:txBody>
-          <a:bodyPr wrap="square" lIns="0" tIns="0" rIns="0" bIns="0" rtlCol="0" anchor="ctr"/>
-          <a:lstStyle/>
-          <a:p>
-            <a:pPr algn="ctr" indent="0" marL="0">
-              <a:lnSpc>
-                <a:spcPct val="100000"/>
-              </a:lnSpc>
-              <a:buNone/>
-            </a:pPr>
-            <a:r>
-              <a:rPr lang="en-US" sz="3600" b="1" dirty="0">
-                <a:solidFill>
-                  <a:srgbClr val="13294B"/>
-                </a:solidFill>
-                <a:latin typeface="Calibri" pitchFamily="34" charset="0"/>
-                <a:ea typeface="Calibri" pitchFamily="34" charset="-122"/>
-                <a:cs typeface="Calibri" pitchFamily="34" charset="-120"/>
-              </a:rPr>
-              <a:t>Quiz da Unidade 4</a:t>
-            </a:r>
-            <a:endParaRPr lang="en-US" sz="3600" dirty="0"/>
-          </a:p>
-        </p:txBody>
-      </p:sp>
-      <p:sp>
-        <p:nvSpPr>
-          <p:cNvPr id="5" name="Text 2"/>
-          <p:cNvSpPr txBox="1"/>
-          <p:nvPr/>
-        </p:nvSpPr>
-        <p:spPr>
-          <a:xfrm>
-            <a:off x="1188720" y="2926080"/>
-            <a:ext cx="6766560" cy="822960"/>
-          </a:xfrm>
-          <a:prstGeom prst="rect">
-            <a:avLst/>
-          </a:prstGeom>
-          <a:noFill/>
-          <a:ln/>
-        </p:spPr>
-        <p:txBody>
-          <a:bodyPr wrap="square" lIns="0" tIns="0" rIns="0" bIns="0" rtlCol="0" anchor="t"/>
-          <a:lstStyle/>
-          <a:p>
-            <a:pPr algn="ctr" indent="0" marL="0">
-              <a:lnSpc>
-                <a:spcPct val="100000"/>
-              </a:lnSpc>
-              <a:buNone/>
-            </a:pPr>
-            <a:r>
-              <a:rPr lang="en-US" sz="1600" dirty="0">
-                <a:solidFill>
-                  <a:srgbClr val="5B6770"/>
-                </a:solidFill>
-                <a:latin typeface="Calibri" pitchFamily="34" charset="0"/>
-                <a:ea typeface="Calibri" pitchFamily="34" charset="-122"/>
-                <a:cs typeface="Calibri" pitchFamily="34" charset="-120"/>
-              </a:rPr>
-              <a:t>5 perguntas para revisar a unidade. Pause o vídeo, escolha sua resposta e confira no slide seguinte.</a:t>
-            </a:r>
-            <a:endParaRPr lang="en-US" sz="1600" dirty="0"/>
-          </a:p>
-        </p:txBody>
-      </p:sp>
-      <p:sp>
-        <p:nvSpPr>
-          <p:cNvPr id="6" name="Text 3"/>
-          <p:cNvSpPr txBox="1"/>
-          <p:nvPr/>
-        </p:nvSpPr>
-        <p:spPr>
-          <a:xfrm>
-            <a:off x="4206240" y="36576"/>
-            <a:ext cx="4800600" cy="219456"/>
-          </a:xfrm>
-          <a:prstGeom prst="rect">
-            <a:avLst/>
-          </a:prstGeom>
-          <a:noFill/>
-          <a:ln/>
-        </p:spPr>
-        <p:txBody>
-          <a:bodyPr wrap="square" lIns="0" tIns="0" rIns="0" bIns="0" rtlCol="0" anchor="ctr"/>
-          <a:lstStyle/>
-          <a:p>
-            <a:pPr algn="r" indent="0" marL="0">
-              <a:lnSpc>
-                <a:spcPct val="100000"/>
-              </a:lnSpc>
-              <a:buNone/>
-            </a:pPr>
-            <a:r>
-              <a:rPr lang="en-US" sz="950" dirty="0">
-                <a:solidFill>
-                  <a:srgbClr val="5B6770"/>
-                </a:solidFill>
-                <a:latin typeface="Calibri" pitchFamily="34" charset="0"/>
-                <a:ea typeface="Calibri" pitchFamily="34" charset="-122"/>
-                <a:cs typeface="Calibri" pitchFamily="34" charset="-120"/>
-              </a:rPr>
-              <a:t>Estado, Governo e Mercado · Unidade 4</a:t>
-            </a:r>
-            <a:endParaRPr lang="en-US" sz="950" dirty="0"/>
-          </a:p>
-        </p:txBody>
-      </p:sp>
-    </p:spTree>
-  </p:cSld>
-  <p:clrMapOvr>
-    <a:masterClrMapping/>
-  </p:clrMapOvr>
-</p:sld>
-</file>
-
-<file path=ppt/slides/slide26.xml><?xml version="1.0" encoding="utf-8"?>
-<p:sld xmlns:a="http://schemas.openxmlformats.org/drawingml/2006/main" xmlns:r="http://schemas.openxmlformats.org/officeDocument/2006/relationships" xmlns:p="http://schemas.openxmlformats.org/presentationml/2006/main">
-  <p:cSld name="Slide 26">
-    <p:bg>
-      <p:bgPr>
-        <a:blipFill dpi="0" rotWithShape="1">
-          <a:blip r:embed="rId1">
-            <a:lum/>
-          </a:blip>
-          <a:srcRect/>
-          <a:stretch>
-            <a:fillRect/>
-          </a:stretch>
-        </a:blipFill>
-        <a:effectLst/>
-      </p:bgPr>
-    </p:bg>
-    <p:spTree>
-      <p:nvGrpSpPr>
-        <p:cNvPr id="1" name=""/>
-        <p:cNvGrpSpPr/>
-        <p:nvPr/>
-      </p:nvGrpSpPr>
-      <p:grpSpPr>
-        <a:xfrm>
-          <a:off x="0" y="0"/>
-          <a:ext cx="0" cy="0"/>
-          <a:chOff x="0" y="0"/>
-          <a:chExt cx="0" cy="0"/>
-        </a:xfrm>
-      </p:grpSpPr>
-      <p:sp>
-        <p:nvSpPr>
-          <p:cNvPr id="2" name="Text 0"/>
-          <p:cNvSpPr txBox="1"/>
-          <p:nvPr/>
-        </p:nvSpPr>
-        <p:spPr>
-          <a:xfrm>
-            <a:off x="731520" y="274320"/>
-            <a:ext cx="7680960" cy="365760"/>
-          </a:xfrm>
-          <a:prstGeom prst="rect">
-            <a:avLst/>
-          </a:prstGeom>
-          <a:noFill/>
-          <a:ln/>
-        </p:spPr>
-        <p:txBody>
-          <a:bodyPr wrap="square" lIns="0" tIns="0" rIns="0" bIns="0" rtlCol="0" anchor="ctr"/>
-          <a:lstStyle/>
-          <a:p>
-            <a:pPr algn="ctr" indent="0" marL="0">
-              <a:lnSpc>
-                <a:spcPct val="100000"/>
-              </a:lnSpc>
-              <a:buNone/>
-            </a:pPr>
-            <a:r>
-              <a:rPr lang="en-US" sz="1250" b="1" dirty="0">
-                <a:solidFill>
-                  <a:srgbClr val="2A8C85"/>
-                </a:solidFill>
-                <a:latin typeface="Calibri" pitchFamily="34" charset="0"/>
-                <a:ea typeface="Calibri" pitchFamily="34" charset="-122"/>
-                <a:cs typeface="Calibri" pitchFamily="34" charset="-120"/>
-              </a:rPr>
-              <a:t>QUIZ DA UNIDADE 4 · PERGUNTA 1 DE 5</a:t>
-            </a:r>
-            <a:endParaRPr lang="en-US" sz="1250" dirty="0"/>
-          </a:p>
-        </p:txBody>
-      </p:sp>
-      <p:sp>
-        <p:nvSpPr>
-          <p:cNvPr id="3" name="Text 1"/>
-          <p:cNvSpPr txBox="1"/>
-          <p:nvPr/>
-        </p:nvSpPr>
-        <p:spPr>
-          <a:xfrm>
-            <a:off x="731520" y="658368"/>
-            <a:ext cx="7680960" cy="960120"/>
-          </a:xfrm>
-          <a:prstGeom prst="rect">
-            <a:avLst/>
-          </a:prstGeom>
-          <a:noFill/>
-          <a:ln/>
-        </p:spPr>
-        <p:txBody>
-          <a:bodyPr wrap="square" lIns="0" tIns="0" rIns="0" bIns="0" rtlCol="0" anchor="ctr"/>
-          <a:lstStyle/>
-          <a:p>
-            <a:pPr algn="ctr" indent="0" marL="0">
-              <a:lnSpc>
-                <a:spcPct val="100000"/>
-              </a:lnSpc>
-              <a:buNone/>
-            </a:pPr>
-            <a:r>
-              <a:rPr lang="en-US" sz="1900" b="1" dirty="0">
-                <a:solidFill>
-                  <a:srgbClr val="13294B"/>
-                </a:solidFill>
-                <a:latin typeface="Calibri" pitchFamily="34" charset="0"/>
-                <a:ea typeface="Calibri" pitchFamily="34" charset="-122"/>
-                <a:cs typeface="Calibri" pitchFamily="34" charset="-120"/>
-              </a:rPr>
-              <a:t>Numa recessão, o que Keynes recomendaria ao governo?</a:t>
-            </a:r>
-            <a:endParaRPr lang="en-US" sz="1900" dirty="0"/>
-          </a:p>
-        </p:txBody>
-      </p:sp>
-      <p:sp>
-        <p:nvSpPr>
-          <p:cNvPr id="4" name="Shape 2"/>
-          <p:cNvSpPr/>
-          <p:nvPr/>
-        </p:nvSpPr>
-        <p:spPr>
-          <a:xfrm>
-            <a:off x="685800" y="1737360"/>
-            <a:ext cx="3794760" cy="914400"/>
-          </a:xfrm>
-          <a:prstGeom prst="roundRect">
-            <a:avLst>
-              <a:gd name="adj" fmla="val 8000"/>
+              <a:gd name="adj" fmla="val 2000"/>
             </a:avLst>
           </a:prstGeom>
           <a:solidFill>
@@ -16045,9 +14993,154 @@
             <a:solidFill>
               <a:srgbClr val="DCD5C1"/>
             </a:solidFill>
-            <a:prstDash val="solid"/>
           </a:ln>
         </p:spPr>
+        <p:txBody>
+          <a:bodyPr wrap="square" lIns="114300" tIns="114300" rIns="114300" bIns="114300" rtlCol="0" anchor="t"/>
+          <a:lstStyle/>
+          <a:p>
+            <a:pPr algn="l" indent="0" marL="0">
+              <a:lnSpc>
+                <a:spcPct val="100000"/>
+              </a:lnSpc>
+              <a:spcAft>
+                <a:spcPts val="200"/>
+              </a:spcAft>
+              <a:buNone/>
+            </a:pPr>
+            <a:r>
+              <a:rPr lang="en-US" sz="1100" b="1" dirty="0">
+                <a:solidFill>
+                  <a:srgbClr val="2A8C85"/>
+                </a:solidFill>
+                <a:latin typeface="Calibri" pitchFamily="34" charset="0"/>
+                <a:ea typeface="Calibri" pitchFamily="34" charset="-122"/>
+                <a:cs typeface="Calibri" pitchFamily="34" charset="-120"/>
+              </a:rPr>
+              <a:t>PARTE 1 · TÓPICO 7</a:t>
+            </a:r>
+            <a:endParaRPr lang="en-US" sz="1100" dirty="0"/>
+          </a:p>
+          <a:p>
+            <a:pPr algn="l" indent="0" marL="0">
+              <a:lnSpc>
+                <a:spcPct val="100000"/>
+              </a:lnSpc>
+              <a:spcAft>
+                <a:spcPts val="400"/>
+              </a:spcAft>
+              <a:buNone/>
+            </a:pPr>
+            <a:r>
+              <a:rPr lang="en-US" sz="1450" b="1" dirty="0">
+                <a:solidFill>
+                  <a:srgbClr val="13294B"/>
+                </a:solidFill>
+                <a:latin typeface="Calibri" pitchFamily="34" charset="0"/>
+                <a:ea typeface="Calibri" pitchFamily="34" charset="-122"/>
+                <a:cs typeface="Calibri" pitchFamily="34" charset="-120"/>
+              </a:rPr>
+              <a:t>Os modelos de Estado no século XX</a:t>
+            </a:r>
+            <a:endParaRPr lang="en-US" sz="1100" dirty="0"/>
+          </a:p>
+          <a:p>
+            <a:pPr algn="l" marL="177800" indent="-177800">
+              <a:lnSpc>
+                <a:spcPct val="100000"/>
+              </a:lnSpc>
+              <a:spcAft>
+                <a:spcPts val="300"/>
+              </a:spcAft>
+              <a:buSzPct val="100000"/>
+              <a:buChar char="•"/>
+            </a:pPr>
+            <a:r>
+              <a:rPr lang="en-US" sz="1200" dirty="0">
+                <a:solidFill>
+                  <a:srgbClr val="1F2A37"/>
+                </a:solidFill>
+                <a:latin typeface="Calibri" pitchFamily="34" charset="0"/>
+                <a:ea typeface="Calibri" pitchFamily="34" charset="-122"/>
+                <a:cs typeface="Calibri" pitchFamily="34" charset="-120"/>
+              </a:rPr>
+              <a:t>Estado liberal e a crise de 1929.</a:t>
+            </a:r>
+            <a:endParaRPr lang="en-US" sz="1100" dirty="0"/>
+          </a:p>
+          <a:p>
+            <a:pPr algn="l" marL="177800" indent="-177800">
+              <a:lnSpc>
+                <a:spcPct val="100000"/>
+              </a:lnSpc>
+              <a:spcAft>
+                <a:spcPts val="300"/>
+              </a:spcAft>
+              <a:buSzPct val="100000"/>
+              <a:buChar char="•"/>
+            </a:pPr>
+            <a:r>
+              <a:rPr lang="en-US" sz="1200" dirty="0">
+                <a:solidFill>
+                  <a:srgbClr val="1F2A37"/>
+                </a:solidFill>
+                <a:latin typeface="Calibri" pitchFamily="34" charset="0"/>
+                <a:ea typeface="Calibri" pitchFamily="34" charset="-122"/>
+                <a:cs typeface="Calibri" pitchFamily="34" charset="-120"/>
+              </a:rPr>
+              <a:t>Estado socialista: planejamento central (1917–1991).</a:t>
+            </a:r>
+            <a:endParaRPr lang="en-US" sz="1100" dirty="0"/>
+          </a:p>
+          <a:p>
+            <a:pPr algn="l" marL="177800" indent="-177800">
+              <a:lnSpc>
+                <a:spcPct val="100000"/>
+              </a:lnSpc>
+              <a:spcAft>
+                <a:spcPts val="300"/>
+              </a:spcAft>
+              <a:buSzPct val="100000"/>
+              <a:buChar char="•"/>
+            </a:pPr>
+            <a:r>
+              <a:rPr lang="en-US" sz="1200" dirty="0">
+                <a:solidFill>
+                  <a:srgbClr val="1F2A37"/>
+                </a:solidFill>
+                <a:latin typeface="Calibri" pitchFamily="34" charset="0"/>
+                <a:ea typeface="Calibri" pitchFamily="34" charset="-122"/>
+                <a:cs typeface="Calibri" pitchFamily="34" charset="-120"/>
+              </a:rPr>
+              <a:t>Bem-estar: Keynes, New Deal, Beveridge; três regimes (Esping-Andersen).</a:t>
+            </a:r>
+            <a:endParaRPr lang="en-US" sz="1100" dirty="0"/>
+          </a:p>
+          <a:p>
+            <a:pPr algn="l" marL="177800" indent="-177800">
+              <a:lnSpc>
+                <a:spcPct val="100000"/>
+              </a:lnSpc>
+              <a:spcAft>
+                <a:spcPts val="300"/>
+              </a:spcAft>
+              <a:buSzPct val="100000"/>
+              <a:buChar char="•"/>
+            </a:pPr>
+            <a:r>
+              <a:rPr lang="en-US" sz="1200" dirty="0">
+                <a:solidFill>
+                  <a:srgbClr val="1F2A37"/>
+                </a:solidFill>
+                <a:latin typeface="Calibri" pitchFamily="34" charset="0"/>
+                <a:ea typeface="Calibri" pitchFamily="34" charset="-122"/>
+                <a:cs typeface="Calibri" pitchFamily="34" charset="-120"/>
+              </a:rPr>
+              <a:t>Crise dos anos 1970 e Estado neoliberal: Hayek, Friedman e Consenso de Washington.</a:t>
+            </a:r>
+            <a:endParaRPr lang="en-US" sz="1100" dirty="0"/>
+          </a:p>
+        </p:txBody>
       </p:sp>
       <p:sp>
         <p:nvSpPr>
@@ -16057,1070 +15150,12 @@
         </p:nvSpPr>
         <p:spPr>
           <a:xfrm>
-            <a:off x="813816" y="1984248"/>
-            <a:ext cx="420624" cy="420624"/>
+            <a:off x="4663440" y="1170432"/>
+            <a:ext cx="3794760" cy="2743200"/>
           </a:xfrm>
           <a:prstGeom prst="roundRect">
             <a:avLst>
-              <a:gd name="adj" fmla="val 50000"/>
-            </a:avLst>
-          </a:prstGeom>
-          <a:solidFill>
-            <a:srgbClr val="13294B"/>
-          </a:solidFill>
-          <a:ln/>
-        </p:spPr>
-        <p:txBody>
-          <a:bodyPr wrap="square" lIns="0" tIns="0" rIns="0" bIns="0" rtlCol="0" anchor="ctr"/>
-          <a:lstStyle/>
-          <a:p>
-            <a:pPr algn="ctr" indent="0" marL="0">
-              <a:lnSpc>
-                <a:spcPct val="100000"/>
-              </a:lnSpc>
-              <a:buNone/>
-            </a:pPr>
-            <a:r>
-              <a:rPr lang="en-US" sz="1600" b="1" dirty="0">
-                <a:solidFill>
-                  <a:srgbClr val="FFFFFF"/>
-                </a:solidFill>
-                <a:latin typeface="Calibri" pitchFamily="34" charset="0"/>
-                <a:ea typeface="Calibri" pitchFamily="34" charset="-122"/>
-                <a:cs typeface="Calibri" pitchFamily="34" charset="-120"/>
-              </a:rPr>
-              <a:t>a</a:t>
-            </a:r>
-            <a:endParaRPr lang="en-US" sz="1600" dirty="0"/>
-          </a:p>
-        </p:txBody>
-      </p:sp>
-      <p:sp>
-        <p:nvSpPr>
-          <p:cNvPr id="6" name="Text 4"/>
-          <p:cNvSpPr txBox="1"/>
-          <p:nvPr/>
-        </p:nvSpPr>
-        <p:spPr>
-          <a:xfrm>
-            <a:off x="1344168" y="1773936"/>
-            <a:ext cx="3044952" cy="841248"/>
-          </a:xfrm>
-          <a:prstGeom prst="rect">
-            <a:avLst/>
-          </a:prstGeom>
-          <a:noFill/>
-          <a:ln/>
-        </p:spPr>
-        <p:txBody>
-          <a:bodyPr wrap="square" lIns="25400" tIns="25400" rIns="25400" bIns="25400" rtlCol="0" anchor="ctr"/>
-          <a:lstStyle/>
-          <a:p>
-            <a:pPr algn="l" indent="0" marL="0">
-              <a:lnSpc>
-                <a:spcPct val="100000"/>
-              </a:lnSpc>
-              <a:buNone/>
-            </a:pPr>
-            <a:r>
-              <a:rPr lang="en-US" sz="1400" dirty="0">
-                <a:solidFill>
-                  <a:srgbClr val="1F2A37"/>
-                </a:solidFill>
-                <a:latin typeface="Calibri" pitchFamily="34" charset="0"/>
-                <a:ea typeface="Calibri" pitchFamily="34" charset="-122"/>
-                <a:cs typeface="Calibri" pitchFamily="34" charset="-120"/>
-              </a:rPr>
-              <a:t>Cortar gastos para equilibrar o orçamento</a:t>
-            </a:r>
-            <a:endParaRPr lang="en-US" sz="1400" dirty="0"/>
-          </a:p>
-        </p:txBody>
-      </p:sp>
-      <p:sp>
-        <p:nvSpPr>
-          <p:cNvPr id="7" name="Shape 5"/>
-          <p:cNvSpPr/>
-          <p:nvPr/>
-        </p:nvSpPr>
-        <p:spPr>
-          <a:xfrm>
-            <a:off x="4663440" y="1737360"/>
-            <a:ext cx="3794760" cy="914400"/>
-          </a:xfrm>
-          <a:prstGeom prst="roundRect">
-            <a:avLst>
-              <a:gd name="adj" fmla="val 8000"/>
-            </a:avLst>
-          </a:prstGeom>
-          <a:solidFill>
-            <a:srgbClr val="FFFFFF"/>
-          </a:solidFill>
-          <a:ln w="12700">
-            <a:solidFill>
-              <a:srgbClr val="DCD5C1"/>
-            </a:solidFill>
-            <a:prstDash val="solid"/>
-          </a:ln>
-        </p:spPr>
-      </p:sp>
-      <p:sp>
-        <p:nvSpPr>
-          <p:cNvPr id="8" name="Text 6"/>
-          <p:cNvSpPr txBox="1"/>
-          <p:nvPr/>
-        </p:nvSpPr>
-        <p:spPr>
-          <a:xfrm>
-            <a:off x="4791456" y="1984248"/>
-            <a:ext cx="420624" cy="420624"/>
-          </a:xfrm>
-          <a:prstGeom prst="roundRect">
-            <a:avLst>
-              <a:gd name="adj" fmla="val 50000"/>
-            </a:avLst>
-          </a:prstGeom>
-          <a:solidFill>
-            <a:srgbClr val="13294B"/>
-          </a:solidFill>
-          <a:ln/>
-        </p:spPr>
-        <p:txBody>
-          <a:bodyPr wrap="square" lIns="0" tIns="0" rIns="0" bIns="0" rtlCol="0" anchor="ctr"/>
-          <a:lstStyle/>
-          <a:p>
-            <a:pPr algn="ctr" indent="0" marL="0">
-              <a:lnSpc>
-                <a:spcPct val="100000"/>
-              </a:lnSpc>
-              <a:buNone/>
-            </a:pPr>
-            <a:r>
-              <a:rPr lang="en-US" sz="1600" b="1" dirty="0">
-                <a:solidFill>
-                  <a:srgbClr val="FFFFFF"/>
-                </a:solidFill>
-                <a:latin typeface="Calibri" pitchFamily="34" charset="0"/>
-                <a:ea typeface="Calibri" pitchFamily="34" charset="-122"/>
-                <a:cs typeface="Calibri" pitchFamily="34" charset="-120"/>
-              </a:rPr>
-              <a:t>b</a:t>
-            </a:r>
-            <a:endParaRPr lang="en-US" sz="1600" dirty="0"/>
-          </a:p>
-        </p:txBody>
-      </p:sp>
-      <p:sp>
-        <p:nvSpPr>
-          <p:cNvPr id="9" name="Text 7"/>
-          <p:cNvSpPr txBox="1"/>
-          <p:nvPr/>
-        </p:nvSpPr>
-        <p:spPr>
-          <a:xfrm>
-            <a:off x="5321808" y="1773936"/>
-            <a:ext cx="3044952" cy="841248"/>
-          </a:xfrm>
-          <a:prstGeom prst="rect">
-            <a:avLst/>
-          </a:prstGeom>
-          <a:noFill/>
-          <a:ln/>
-        </p:spPr>
-        <p:txBody>
-          <a:bodyPr wrap="square" lIns="25400" tIns="25400" rIns="25400" bIns="25400" rtlCol="0" anchor="ctr"/>
-          <a:lstStyle/>
-          <a:p>
-            <a:pPr algn="l" indent="0" marL="0">
-              <a:lnSpc>
-                <a:spcPct val="100000"/>
-              </a:lnSpc>
-              <a:buNone/>
-            </a:pPr>
-            <a:r>
-              <a:rPr lang="en-US" sz="1400" dirty="0">
-                <a:solidFill>
-                  <a:srgbClr val="1F2A37"/>
-                </a:solidFill>
-                <a:latin typeface="Calibri" pitchFamily="34" charset="0"/>
-                <a:ea typeface="Calibri" pitchFamily="34" charset="-122"/>
-                <a:cs typeface="Calibri" pitchFamily="34" charset="-120"/>
-              </a:rPr>
-              <a:t>Aumentar o gasto e o investimento para compensar a queda da demanda</a:t>
-            </a:r>
-            <a:endParaRPr lang="en-US" sz="1400" dirty="0"/>
-          </a:p>
-        </p:txBody>
-      </p:sp>
-      <p:sp>
-        <p:nvSpPr>
-          <p:cNvPr id="10" name="Shape 8"/>
-          <p:cNvSpPr/>
-          <p:nvPr/>
-        </p:nvSpPr>
-        <p:spPr>
-          <a:xfrm>
-            <a:off x="685800" y="2798064"/>
-            <a:ext cx="3794760" cy="914400"/>
-          </a:xfrm>
-          <a:prstGeom prst="roundRect">
-            <a:avLst>
-              <a:gd name="adj" fmla="val 8000"/>
-            </a:avLst>
-          </a:prstGeom>
-          <a:solidFill>
-            <a:srgbClr val="FFFFFF"/>
-          </a:solidFill>
-          <a:ln w="12700">
-            <a:solidFill>
-              <a:srgbClr val="DCD5C1"/>
-            </a:solidFill>
-            <a:prstDash val="solid"/>
-          </a:ln>
-        </p:spPr>
-      </p:sp>
-      <p:sp>
-        <p:nvSpPr>
-          <p:cNvPr id="11" name="Text 9"/>
-          <p:cNvSpPr txBox="1"/>
-          <p:nvPr/>
-        </p:nvSpPr>
-        <p:spPr>
-          <a:xfrm>
-            <a:off x="813816" y="3044952"/>
-            <a:ext cx="420624" cy="420624"/>
-          </a:xfrm>
-          <a:prstGeom prst="roundRect">
-            <a:avLst>
-              <a:gd name="adj" fmla="val 50000"/>
-            </a:avLst>
-          </a:prstGeom>
-          <a:solidFill>
-            <a:srgbClr val="13294B"/>
-          </a:solidFill>
-          <a:ln/>
-        </p:spPr>
-        <p:txBody>
-          <a:bodyPr wrap="square" lIns="0" tIns="0" rIns="0" bIns="0" rtlCol="0" anchor="ctr"/>
-          <a:lstStyle/>
-          <a:p>
-            <a:pPr algn="ctr" indent="0" marL="0">
-              <a:lnSpc>
-                <a:spcPct val="100000"/>
-              </a:lnSpc>
-              <a:buNone/>
-            </a:pPr>
-            <a:r>
-              <a:rPr lang="en-US" sz="1600" b="1" dirty="0">
-                <a:solidFill>
-                  <a:srgbClr val="FFFFFF"/>
-                </a:solidFill>
-                <a:latin typeface="Calibri" pitchFamily="34" charset="0"/>
-                <a:ea typeface="Calibri" pitchFamily="34" charset="-122"/>
-                <a:cs typeface="Calibri" pitchFamily="34" charset="-120"/>
-              </a:rPr>
-              <a:t>c</a:t>
-            </a:r>
-            <a:endParaRPr lang="en-US" sz="1600" dirty="0"/>
-          </a:p>
-        </p:txBody>
-      </p:sp>
-      <p:sp>
-        <p:nvSpPr>
-          <p:cNvPr id="12" name="Text 10"/>
-          <p:cNvSpPr txBox="1"/>
-          <p:nvPr/>
-        </p:nvSpPr>
-        <p:spPr>
-          <a:xfrm>
-            <a:off x="1344168" y="2834640"/>
-            <a:ext cx="3044952" cy="841248"/>
-          </a:xfrm>
-          <a:prstGeom prst="rect">
-            <a:avLst/>
-          </a:prstGeom>
-          <a:noFill/>
-          <a:ln/>
-        </p:spPr>
-        <p:txBody>
-          <a:bodyPr wrap="square" lIns="25400" tIns="25400" rIns="25400" bIns="25400" rtlCol="0" anchor="ctr"/>
-          <a:lstStyle/>
-          <a:p>
-            <a:pPr algn="l" indent="0" marL="0">
-              <a:lnSpc>
-                <a:spcPct val="100000"/>
-              </a:lnSpc>
-              <a:buNone/>
-            </a:pPr>
-            <a:r>
-              <a:rPr lang="en-US" sz="1400" dirty="0">
-                <a:solidFill>
-                  <a:srgbClr val="1F2A37"/>
-                </a:solidFill>
-                <a:latin typeface="Calibri" pitchFamily="34" charset="0"/>
-                <a:ea typeface="Calibri" pitchFamily="34" charset="-122"/>
-                <a:cs typeface="Calibri" pitchFamily="34" charset="-120"/>
-              </a:rPr>
-              <a:t>Elevar os juros para conter o consumo</a:t>
-            </a:r>
-            <a:endParaRPr lang="en-US" sz="1400" dirty="0"/>
-          </a:p>
-        </p:txBody>
-      </p:sp>
-      <p:sp>
-        <p:nvSpPr>
-          <p:cNvPr id="13" name="Shape 11"/>
-          <p:cNvSpPr/>
-          <p:nvPr/>
-        </p:nvSpPr>
-        <p:spPr>
-          <a:xfrm>
-            <a:off x="4663440" y="2798064"/>
-            <a:ext cx="3794760" cy="914400"/>
-          </a:xfrm>
-          <a:prstGeom prst="roundRect">
-            <a:avLst>
-              <a:gd name="adj" fmla="val 8000"/>
-            </a:avLst>
-          </a:prstGeom>
-          <a:solidFill>
-            <a:srgbClr val="FFFFFF"/>
-          </a:solidFill>
-          <a:ln w="12700">
-            <a:solidFill>
-              <a:srgbClr val="DCD5C1"/>
-            </a:solidFill>
-            <a:prstDash val="solid"/>
-          </a:ln>
-        </p:spPr>
-      </p:sp>
-      <p:sp>
-        <p:nvSpPr>
-          <p:cNvPr id="14" name="Text 12"/>
-          <p:cNvSpPr txBox="1"/>
-          <p:nvPr/>
-        </p:nvSpPr>
-        <p:spPr>
-          <a:xfrm>
-            <a:off x="4791456" y="3044952"/>
-            <a:ext cx="420624" cy="420624"/>
-          </a:xfrm>
-          <a:prstGeom prst="roundRect">
-            <a:avLst>
-              <a:gd name="adj" fmla="val 50000"/>
-            </a:avLst>
-          </a:prstGeom>
-          <a:solidFill>
-            <a:srgbClr val="13294B"/>
-          </a:solidFill>
-          <a:ln/>
-        </p:spPr>
-        <p:txBody>
-          <a:bodyPr wrap="square" lIns="0" tIns="0" rIns="0" bIns="0" rtlCol="0" anchor="ctr"/>
-          <a:lstStyle/>
-          <a:p>
-            <a:pPr algn="ctr" indent="0" marL="0">
-              <a:lnSpc>
-                <a:spcPct val="100000"/>
-              </a:lnSpc>
-              <a:buNone/>
-            </a:pPr>
-            <a:r>
-              <a:rPr lang="en-US" sz="1600" b="1" dirty="0">
-                <a:solidFill>
-                  <a:srgbClr val="FFFFFF"/>
-                </a:solidFill>
-                <a:latin typeface="Calibri" pitchFamily="34" charset="0"/>
-                <a:ea typeface="Calibri" pitchFamily="34" charset="-122"/>
-                <a:cs typeface="Calibri" pitchFamily="34" charset="-120"/>
-              </a:rPr>
-              <a:t>d</a:t>
-            </a:r>
-            <a:endParaRPr lang="en-US" sz="1600" dirty="0"/>
-          </a:p>
-        </p:txBody>
-      </p:sp>
-      <p:sp>
-        <p:nvSpPr>
-          <p:cNvPr id="15" name="Text 13"/>
-          <p:cNvSpPr txBox="1"/>
-          <p:nvPr/>
-        </p:nvSpPr>
-        <p:spPr>
-          <a:xfrm>
-            <a:off x="5321808" y="2834640"/>
-            <a:ext cx="3044952" cy="841248"/>
-          </a:xfrm>
-          <a:prstGeom prst="rect">
-            <a:avLst/>
-          </a:prstGeom>
-          <a:noFill/>
-          <a:ln/>
-        </p:spPr>
-        <p:txBody>
-          <a:bodyPr wrap="square" lIns="25400" tIns="25400" rIns="25400" bIns="25400" rtlCol="0" anchor="ctr"/>
-          <a:lstStyle/>
-          <a:p>
-            <a:pPr algn="l" indent="0" marL="0">
-              <a:lnSpc>
-                <a:spcPct val="100000"/>
-              </a:lnSpc>
-              <a:buNone/>
-            </a:pPr>
-            <a:r>
-              <a:rPr lang="en-US" sz="1400" dirty="0">
-                <a:solidFill>
-                  <a:srgbClr val="1F2A37"/>
-                </a:solidFill>
-                <a:latin typeface="Calibri" pitchFamily="34" charset="0"/>
-                <a:ea typeface="Calibri" pitchFamily="34" charset="-122"/>
-                <a:cs typeface="Calibri" pitchFamily="34" charset="-120"/>
-              </a:rPr>
-              <a:t>Não intervir e esperar o ajuste do mercado</a:t>
-            </a:r>
-            <a:endParaRPr lang="en-US" sz="1400" dirty="0"/>
-          </a:p>
-        </p:txBody>
-      </p:sp>
-      <p:sp>
-        <p:nvSpPr>
-          <p:cNvPr id="16" name="Text 14"/>
-          <p:cNvSpPr txBox="1"/>
-          <p:nvPr/>
-        </p:nvSpPr>
-        <p:spPr>
-          <a:xfrm>
-            <a:off x="4206240" y="36576"/>
-            <a:ext cx="4800600" cy="219456"/>
-          </a:xfrm>
-          <a:prstGeom prst="rect">
-            <a:avLst/>
-          </a:prstGeom>
-          <a:noFill/>
-          <a:ln/>
-        </p:spPr>
-        <p:txBody>
-          <a:bodyPr wrap="square" lIns="0" tIns="0" rIns="0" bIns="0" rtlCol="0" anchor="ctr"/>
-          <a:lstStyle/>
-          <a:p>
-            <a:pPr algn="r" indent="0" marL="0">
-              <a:lnSpc>
-                <a:spcPct val="100000"/>
-              </a:lnSpc>
-              <a:buNone/>
-            </a:pPr>
-            <a:r>
-              <a:rPr lang="en-US" sz="950" dirty="0">
-                <a:solidFill>
-                  <a:srgbClr val="5B6770"/>
-                </a:solidFill>
-                <a:latin typeface="Calibri" pitchFamily="34" charset="0"/>
-                <a:ea typeface="Calibri" pitchFamily="34" charset="-122"/>
-                <a:cs typeface="Calibri" pitchFamily="34" charset="-120"/>
-              </a:rPr>
-              <a:t>Estado, Governo e Mercado · Unidade 4</a:t>
-            </a:r>
-            <a:endParaRPr lang="en-US" sz="950" dirty="0"/>
-          </a:p>
-        </p:txBody>
-      </p:sp>
-    </p:spTree>
-  </p:cSld>
-  <p:clrMapOvr>
-    <a:masterClrMapping/>
-  </p:clrMapOvr>
-</p:sld>
-</file>
-
-<file path=ppt/slides/slide27.xml><?xml version="1.0" encoding="utf-8"?>
-<p:sld xmlns:a="http://schemas.openxmlformats.org/drawingml/2006/main" xmlns:r="http://schemas.openxmlformats.org/officeDocument/2006/relationships" xmlns:p="http://schemas.openxmlformats.org/presentationml/2006/main">
-  <p:cSld name="Slide 27">
-    <p:bg>
-      <p:bgPr>
-        <a:blipFill dpi="0" rotWithShape="1">
-          <a:blip r:embed="rId1">
-            <a:lum/>
-          </a:blip>
-          <a:srcRect/>
-          <a:stretch>
-            <a:fillRect/>
-          </a:stretch>
-        </a:blipFill>
-        <a:effectLst/>
-      </p:bgPr>
-    </p:bg>
-    <p:spTree>
-      <p:nvGrpSpPr>
-        <p:cNvPr id="1" name=""/>
-        <p:cNvGrpSpPr/>
-        <p:nvPr/>
-      </p:nvGrpSpPr>
-      <p:grpSpPr>
-        <a:xfrm>
-          <a:off x="0" y="0"/>
-          <a:ext cx="0" cy="0"/>
-          <a:chOff x="0" y="0"/>
-          <a:chExt cx="0" cy="0"/>
-        </a:xfrm>
-      </p:grpSpPr>
-      <p:sp>
-        <p:nvSpPr>
-          <p:cNvPr id="2" name="Text 0"/>
-          <p:cNvSpPr txBox="1"/>
-          <p:nvPr/>
-        </p:nvSpPr>
-        <p:spPr>
-          <a:xfrm>
-            <a:off x="731520" y="274320"/>
-            <a:ext cx="7680960" cy="365760"/>
-          </a:xfrm>
-          <a:prstGeom prst="rect">
-            <a:avLst/>
-          </a:prstGeom>
-          <a:noFill/>
-          <a:ln/>
-        </p:spPr>
-        <p:txBody>
-          <a:bodyPr wrap="square" lIns="0" tIns="0" rIns="0" bIns="0" rtlCol="0" anchor="ctr"/>
-          <a:lstStyle/>
-          <a:p>
-            <a:pPr algn="ctr" indent="0" marL="0">
-              <a:lnSpc>
-                <a:spcPct val="100000"/>
-              </a:lnSpc>
-              <a:buNone/>
-            </a:pPr>
-            <a:r>
-              <a:rPr lang="en-US" sz="1250" b="1" dirty="0">
-                <a:solidFill>
-                  <a:srgbClr val="2A8C85"/>
-                </a:solidFill>
-                <a:latin typeface="Calibri" pitchFamily="34" charset="0"/>
-                <a:ea typeface="Calibri" pitchFamily="34" charset="-122"/>
-                <a:cs typeface="Calibri" pitchFamily="34" charset="-120"/>
-              </a:rPr>
-              <a:t>QUIZ DA UNIDADE 4 · PERGUNTA 1 DE 5 · RESPOSTA</a:t>
-            </a:r>
-            <a:endParaRPr lang="en-US" sz="1250" dirty="0"/>
-          </a:p>
-        </p:txBody>
-      </p:sp>
-      <p:sp>
-        <p:nvSpPr>
-          <p:cNvPr id="3" name="Text 1"/>
-          <p:cNvSpPr txBox="1"/>
-          <p:nvPr/>
-        </p:nvSpPr>
-        <p:spPr>
-          <a:xfrm>
-            <a:off x="731520" y="658368"/>
-            <a:ext cx="7680960" cy="960120"/>
-          </a:xfrm>
-          <a:prstGeom prst="rect">
-            <a:avLst/>
-          </a:prstGeom>
-          <a:noFill/>
-          <a:ln/>
-        </p:spPr>
-        <p:txBody>
-          <a:bodyPr wrap="square" lIns="0" tIns="0" rIns="0" bIns="0" rtlCol="0" anchor="ctr"/>
-          <a:lstStyle/>
-          <a:p>
-            <a:pPr algn="ctr" indent="0" marL="0">
-              <a:lnSpc>
-                <a:spcPct val="100000"/>
-              </a:lnSpc>
-              <a:buNone/>
-            </a:pPr>
-            <a:r>
-              <a:rPr lang="en-US" sz="1900" b="1" dirty="0">
-                <a:solidFill>
-                  <a:srgbClr val="13294B"/>
-                </a:solidFill>
-                <a:latin typeface="Calibri" pitchFamily="34" charset="0"/>
-                <a:ea typeface="Calibri" pitchFamily="34" charset="-122"/>
-                <a:cs typeface="Calibri" pitchFamily="34" charset="-120"/>
-              </a:rPr>
-              <a:t>Numa recessão, o que Keynes recomendaria ao governo?</a:t>
-            </a:r>
-            <a:endParaRPr lang="en-US" sz="1900" dirty="0"/>
-          </a:p>
-        </p:txBody>
-      </p:sp>
-      <p:sp>
-        <p:nvSpPr>
-          <p:cNvPr id="4" name="Shape 2"/>
-          <p:cNvSpPr/>
-          <p:nvPr/>
-        </p:nvSpPr>
-        <p:spPr>
-          <a:xfrm>
-            <a:off x="685800" y="1737360"/>
-            <a:ext cx="3794760" cy="749808"/>
-          </a:xfrm>
-          <a:prstGeom prst="roundRect">
-            <a:avLst>
-              <a:gd name="adj" fmla="val 9756"/>
-            </a:avLst>
-          </a:prstGeom>
-          <a:solidFill>
-            <a:srgbClr val="FFFFFF"/>
-          </a:solidFill>
-          <a:ln w="12700">
-            <a:solidFill>
-              <a:srgbClr val="DCD5C1"/>
-            </a:solidFill>
-            <a:prstDash val="solid"/>
-          </a:ln>
-        </p:spPr>
-      </p:sp>
-      <p:sp>
-        <p:nvSpPr>
-          <p:cNvPr id="5" name="Text 3"/>
-          <p:cNvSpPr txBox="1"/>
-          <p:nvPr/>
-        </p:nvSpPr>
-        <p:spPr>
-          <a:xfrm>
-            <a:off x="813816" y="1901952"/>
-            <a:ext cx="420624" cy="420624"/>
-          </a:xfrm>
-          <a:prstGeom prst="roundRect">
-            <a:avLst>
-              <a:gd name="adj" fmla="val 50000"/>
-            </a:avLst>
-          </a:prstGeom>
-          <a:solidFill>
-            <a:srgbClr val="9AA3AB"/>
-          </a:solidFill>
-          <a:ln/>
-        </p:spPr>
-        <p:txBody>
-          <a:bodyPr wrap="square" lIns="0" tIns="0" rIns="0" bIns="0" rtlCol="0" anchor="ctr"/>
-          <a:lstStyle/>
-          <a:p>
-            <a:pPr algn="ctr" indent="0" marL="0">
-              <a:lnSpc>
-                <a:spcPct val="100000"/>
-              </a:lnSpc>
-              <a:buNone/>
-            </a:pPr>
-            <a:r>
-              <a:rPr lang="en-US" sz="1600" b="1" dirty="0">
-                <a:solidFill>
-                  <a:srgbClr val="FFFFFF"/>
-                </a:solidFill>
-                <a:latin typeface="Calibri" pitchFamily="34" charset="0"/>
-                <a:ea typeface="Calibri" pitchFamily="34" charset="-122"/>
-                <a:cs typeface="Calibri" pitchFamily="34" charset="-120"/>
-              </a:rPr>
-              <a:t>a</a:t>
-            </a:r>
-            <a:endParaRPr lang="en-US" sz="1600" dirty="0"/>
-          </a:p>
-        </p:txBody>
-      </p:sp>
-      <p:sp>
-        <p:nvSpPr>
-          <p:cNvPr id="6" name="Text 4"/>
-          <p:cNvSpPr txBox="1"/>
-          <p:nvPr/>
-        </p:nvSpPr>
-        <p:spPr>
-          <a:xfrm>
-            <a:off x="1344168" y="1773936"/>
-            <a:ext cx="3044952" cy="676656"/>
-          </a:xfrm>
-          <a:prstGeom prst="rect">
-            <a:avLst/>
-          </a:prstGeom>
-          <a:noFill/>
-          <a:ln/>
-        </p:spPr>
-        <p:txBody>
-          <a:bodyPr wrap="square" lIns="25400" tIns="25400" rIns="25400" bIns="25400" rtlCol="0" anchor="ctr"/>
-          <a:lstStyle/>
-          <a:p>
-            <a:pPr algn="l" indent="0" marL="0">
-              <a:lnSpc>
-                <a:spcPct val="100000"/>
-              </a:lnSpc>
-              <a:buNone/>
-            </a:pPr>
-            <a:r>
-              <a:rPr lang="en-US" sz="1400" dirty="0">
-                <a:solidFill>
-                  <a:srgbClr val="5B6770"/>
-                </a:solidFill>
-                <a:latin typeface="Calibri" pitchFamily="34" charset="0"/>
-                <a:ea typeface="Calibri" pitchFamily="34" charset="-122"/>
-                <a:cs typeface="Calibri" pitchFamily="34" charset="-120"/>
-              </a:rPr>
-              <a:t>Cortar gastos para equilibrar o orçamento</a:t>
-            </a:r>
-            <a:endParaRPr lang="en-US" sz="1400" dirty="0"/>
-          </a:p>
-        </p:txBody>
-      </p:sp>
-      <p:sp>
-        <p:nvSpPr>
-          <p:cNvPr id="7" name="Shape 5"/>
-          <p:cNvSpPr/>
-          <p:nvPr/>
-        </p:nvSpPr>
-        <p:spPr>
-          <a:xfrm>
-            <a:off x="4663440" y="1737360"/>
-            <a:ext cx="3794760" cy="749808"/>
-          </a:xfrm>
-          <a:prstGeom prst="roundRect">
-            <a:avLst>
-              <a:gd name="adj" fmla="val 9756"/>
-            </a:avLst>
-          </a:prstGeom>
-          <a:solidFill>
-            <a:srgbClr val="E3F2E8"/>
-          </a:solidFill>
-          <a:ln w="25400">
-            <a:solidFill>
-              <a:srgbClr val="2E7D4F"/>
-            </a:solidFill>
-            <a:prstDash val="solid"/>
-          </a:ln>
-        </p:spPr>
-      </p:sp>
-      <p:sp>
-        <p:nvSpPr>
-          <p:cNvPr id="8" name="Text 6"/>
-          <p:cNvSpPr txBox="1"/>
-          <p:nvPr/>
-        </p:nvSpPr>
-        <p:spPr>
-          <a:xfrm>
-            <a:off x="4791456" y="1901952"/>
-            <a:ext cx="420624" cy="420624"/>
-          </a:xfrm>
-          <a:prstGeom prst="roundRect">
-            <a:avLst>
-              <a:gd name="adj" fmla="val 50000"/>
-            </a:avLst>
-          </a:prstGeom>
-          <a:solidFill>
-            <a:srgbClr val="2E7D4F"/>
-          </a:solidFill>
-          <a:ln/>
-        </p:spPr>
-        <p:txBody>
-          <a:bodyPr wrap="square" lIns="0" tIns="0" rIns="0" bIns="0" rtlCol="0" anchor="ctr"/>
-          <a:lstStyle/>
-          <a:p>
-            <a:pPr algn="ctr" indent="0" marL="0">
-              <a:lnSpc>
-                <a:spcPct val="100000"/>
-              </a:lnSpc>
-              <a:buNone/>
-            </a:pPr>
-            <a:r>
-              <a:rPr lang="en-US" sz="1600" b="1" dirty="0">
-                <a:solidFill>
-                  <a:srgbClr val="FFFFFF"/>
-                </a:solidFill>
-                <a:latin typeface="Calibri" pitchFamily="34" charset="0"/>
-                <a:ea typeface="Calibri" pitchFamily="34" charset="-122"/>
-                <a:cs typeface="Calibri" pitchFamily="34" charset="-120"/>
-              </a:rPr>
-              <a:t>b</a:t>
-            </a:r>
-            <a:endParaRPr lang="en-US" sz="1600" dirty="0"/>
-          </a:p>
-        </p:txBody>
-      </p:sp>
-      <p:sp>
-        <p:nvSpPr>
-          <p:cNvPr id="9" name="Text 7"/>
-          <p:cNvSpPr txBox="1"/>
-          <p:nvPr/>
-        </p:nvSpPr>
-        <p:spPr>
-          <a:xfrm>
-            <a:off x="5321808" y="1773936"/>
-            <a:ext cx="3044952" cy="676656"/>
-          </a:xfrm>
-          <a:prstGeom prst="rect">
-            <a:avLst/>
-          </a:prstGeom>
-          <a:noFill/>
-          <a:ln/>
-        </p:spPr>
-        <p:txBody>
-          <a:bodyPr wrap="square" lIns="25400" tIns="25400" rIns="25400" bIns="25400" rtlCol="0" anchor="ctr"/>
-          <a:lstStyle/>
-          <a:p>
-            <a:pPr algn="l" indent="0" marL="0">
-              <a:lnSpc>
-                <a:spcPct val="100000"/>
-              </a:lnSpc>
-              <a:buNone/>
-            </a:pPr>
-            <a:r>
-              <a:rPr lang="en-US" sz="1400" b="1" dirty="0">
-                <a:solidFill>
-                  <a:srgbClr val="1F2A37"/>
-                </a:solidFill>
-                <a:latin typeface="Calibri" pitchFamily="34" charset="0"/>
-                <a:ea typeface="Calibri" pitchFamily="34" charset="-122"/>
-                <a:cs typeface="Calibri" pitchFamily="34" charset="-120"/>
-              </a:rPr>
-              <a:t>Aumentar o gasto e o investimento para compensar a queda da demanda</a:t>
-            </a:r>
-            <a:endParaRPr lang="en-US" sz="1400" dirty="0"/>
-          </a:p>
-        </p:txBody>
-      </p:sp>
-      <p:sp>
-        <p:nvSpPr>
-          <p:cNvPr id="10" name="Shape 8"/>
-          <p:cNvSpPr/>
-          <p:nvPr/>
-        </p:nvSpPr>
-        <p:spPr>
-          <a:xfrm>
-            <a:off x="685800" y="2633472"/>
-            <a:ext cx="3794760" cy="749808"/>
-          </a:xfrm>
-          <a:prstGeom prst="roundRect">
-            <a:avLst>
-              <a:gd name="adj" fmla="val 9756"/>
-            </a:avLst>
-          </a:prstGeom>
-          <a:solidFill>
-            <a:srgbClr val="FFFFFF"/>
-          </a:solidFill>
-          <a:ln w="12700">
-            <a:solidFill>
-              <a:srgbClr val="DCD5C1"/>
-            </a:solidFill>
-            <a:prstDash val="solid"/>
-          </a:ln>
-        </p:spPr>
-      </p:sp>
-      <p:sp>
-        <p:nvSpPr>
-          <p:cNvPr id="11" name="Text 9"/>
-          <p:cNvSpPr txBox="1"/>
-          <p:nvPr/>
-        </p:nvSpPr>
-        <p:spPr>
-          <a:xfrm>
-            <a:off x="813816" y="2798064"/>
-            <a:ext cx="420624" cy="420624"/>
-          </a:xfrm>
-          <a:prstGeom prst="roundRect">
-            <a:avLst>
-              <a:gd name="adj" fmla="val 50000"/>
-            </a:avLst>
-          </a:prstGeom>
-          <a:solidFill>
-            <a:srgbClr val="9AA3AB"/>
-          </a:solidFill>
-          <a:ln/>
-        </p:spPr>
-        <p:txBody>
-          <a:bodyPr wrap="square" lIns="0" tIns="0" rIns="0" bIns="0" rtlCol="0" anchor="ctr"/>
-          <a:lstStyle/>
-          <a:p>
-            <a:pPr algn="ctr" indent="0" marL="0">
-              <a:lnSpc>
-                <a:spcPct val="100000"/>
-              </a:lnSpc>
-              <a:buNone/>
-            </a:pPr>
-            <a:r>
-              <a:rPr lang="en-US" sz="1600" b="1" dirty="0">
-                <a:solidFill>
-                  <a:srgbClr val="FFFFFF"/>
-                </a:solidFill>
-                <a:latin typeface="Calibri" pitchFamily="34" charset="0"/>
-                <a:ea typeface="Calibri" pitchFamily="34" charset="-122"/>
-                <a:cs typeface="Calibri" pitchFamily="34" charset="-120"/>
-              </a:rPr>
-              <a:t>c</a:t>
-            </a:r>
-            <a:endParaRPr lang="en-US" sz="1600" dirty="0"/>
-          </a:p>
-        </p:txBody>
-      </p:sp>
-      <p:sp>
-        <p:nvSpPr>
-          <p:cNvPr id="12" name="Text 10"/>
-          <p:cNvSpPr txBox="1"/>
-          <p:nvPr/>
-        </p:nvSpPr>
-        <p:spPr>
-          <a:xfrm>
-            <a:off x="1344168" y="2670048"/>
-            <a:ext cx="3044952" cy="676656"/>
-          </a:xfrm>
-          <a:prstGeom prst="rect">
-            <a:avLst/>
-          </a:prstGeom>
-          <a:noFill/>
-          <a:ln/>
-        </p:spPr>
-        <p:txBody>
-          <a:bodyPr wrap="square" lIns="25400" tIns="25400" rIns="25400" bIns="25400" rtlCol="0" anchor="ctr"/>
-          <a:lstStyle/>
-          <a:p>
-            <a:pPr algn="l" indent="0" marL="0">
-              <a:lnSpc>
-                <a:spcPct val="100000"/>
-              </a:lnSpc>
-              <a:buNone/>
-            </a:pPr>
-            <a:r>
-              <a:rPr lang="en-US" sz="1400" dirty="0">
-                <a:solidFill>
-                  <a:srgbClr val="5B6770"/>
-                </a:solidFill>
-                <a:latin typeface="Calibri" pitchFamily="34" charset="0"/>
-                <a:ea typeface="Calibri" pitchFamily="34" charset="-122"/>
-                <a:cs typeface="Calibri" pitchFamily="34" charset="-120"/>
-              </a:rPr>
-              <a:t>Elevar os juros para conter o consumo</a:t>
-            </a:r>
-            <a:endParaRPr lang="en-US" sz="1400" dirty="0"/>
-          </a:p>
-        </p:txBody>
-      </p:sp>
-      <p:sp>
-        <p:nvSpPr>
-          <p:cNvPr id="13" name="Shape 11"/>
-          <p:cNvSpPr/>
-          <p:nvPr/>
-        </p:nvSpPr>
-        <p:spPr>
-          <a:xfrm>
-            <a:off x="4663440" y="2633472"/>
-            <a:ext cx="3794760" cy="749808"/>
-          </a:xfrm>
-          <a:prstGeom prst="roundRect">
-            <a:avLst>
-              <a:gd name="adj" fmla="val 9756"/>
-            </a:avLst>
-          </a:prstGeom>
-          <a:solidFill>
-            <a:srgbClr val="FFFFFF"/>
-          </a:solidFill>
-          <a:ln w="12700">
-            <a:solidFill>
-              <a:srgbClr val="DCD5C1"/>
-            </a:solidFill>
-            <a:prstDash val="solid"/>
-          </a:ln>
-        </p:spPr>
-      </p:sp>
-      <p:sp>
-        <p:nvSpPr>
-          <p:cNvPr id="14" name="Text 12"/>
-          <p:cNvSpPr txBox="1"/>
-          <p:nvPr/>
-        </p:nvSpPr>
-        <p:spPr>
-          <a:xfrm>
-            <a:off x="4791456" y="2798064"/>
-            <a:ext cx="420624" cy="420624"/>
-          </a:xfrm>
-          <a:prstGeom prst="roundRect">
-            <a:avLst>
-              <a:gd name="adj" fmla="val 50000"/>
-            </a:avLst>
-          </a:prstGeom>
-          <a:solidFill>
-            <a:srgbClr val="9AA3AB"/>
-          </a:solidFill>
-          <a:ln/>
-        </p:spPr>
-        <p:txBody>
-          <a:bodyPr wrap="square" lIns="0" tIns="0" rIns="0" bIns="0" rtlCol="0" anchor="ctr"/>
-          <a:lstStyle/>
-          <a:p>
-            <a:pPr algn="ctr" indent="0" marL="0">
-              <a:lnSpc>
-                <a:spcPct val="100000"/>
-              </a:lnSpc>
-              <a:buNone/>
-            </a:pPr>
-            <a:r>
-              <a:rPr lang="en-US" sz="1600" b="1" dirty="0">
-                <a:solidFill>
-                  <a:srgbClr val="FFFFFF"/>
-                </a:solidFill>
-                <a:latin typeface="Calibri" pitchFamily="34" charset="0"/>
-                <a:ea typeface="Calibri" pitchFamily="34" charset="-122"/>
-                <a:cs typeface="Calibri" pitchFamily="34" charset="-120"/>
-              </a:rPr>
-              <a:t>d</a:t>
-            </a:r>
-            <a:endParaRPr lang="en-US" sz="1600" dirty="0"/>
-          </a:p>
-        </p:txBody>
-      </p:sp>
-      <p:sp>
-        <p:nvSpPr>
-          <p:cNvPr id="15" name="Text 13"/>
-          <p:cNvSpPr txBox="1"/>
-          <p:nvPr/>
-        </p:nvSpPr>
-        <p:spPr>
-          <a:xfrm>
-            <a:off x="5321808" y="2670048"/>
-            <a:ext cx="3044952" cy="676656"/>
-          </a:xfrm>
-          <a:prstGeom prst="rect">
-            <a:avLst/>
-          </a:prstGeom>
-          <a:noFill/>
-          <a:ln/>
-        </p:spPr>
-        <p:txBody>
-          <a:bodyPr wrap="square" lIns="25400" tIns="25400" rIns="25400" bIns="25400" rtlCol="0" anchor="ctr"/>
-          <a:lstStyle/>
-          <a:p>
-            <a:pPr algn="l" indent="0" marL="0">
-              <a:lnSpc>
-                <a:spcPct val="100000"/>
-              </a:lnSpc>
-              <a:buNone/>
-            </a:pPr>
-            <a:r>
-              <a:rPr lang="en-US" sz="1400" dirty="0">
-                <a:solidFill>
-                  <a:srgbClr val="5B6770"/>
-                </a:solidFill>
-                <a:latin typeface="Calibri" pitchFamily="34" charset="0"/>
-                <a:ea typeface="Calibri" pitchFamily="34" charset="-122"/>
-                <a:cs typeface="Calibri" pitchFamily="34" charset="-120"/>
-              </a:rPr>
-              <a:t>Não intervir e esperar o ajuste do mercado</a:t>
-            </a:r>
-            <a:endParaRPr lang="en-US" sz="1400" dirty="0"/>
-          </a:p>
-        </p:txBody>
-      </p:sp>
-      <p:sp>
-        <p:nvSpPr>
-          <p:cNvPr id="16" name="Text 14"/>
-          <p:cNvSpPr txBox="1"/>
-          <p:nvPr/>
-        </p:nvSpPr>
-        <p:spPr>
-          <a:xfrm>
-            <a:off x="685800" y="3566160"/>
-            <a:ext cx="7772400" cy="841248"/>
-          </a:xfrm>
-          <a:prstGeom prst="roundRect">
-            <a:avLst>
-              <a:gd name="adj" fmla="val 8696"/>
+              <a:gd name="adj" fmla="val 2000"/>
             </a:avLst>
           </a:prstGeom>
           <a:solidFill>
@@ -17129,34 +15164,67 @@
           <a:ln/>
         </p:spPr>
         <p:txBody>
-          <a:bodyPr wrap="square" lIns="114300" tIns="114300" rIns="114300" bIns="114300" rtlCol="0" anchor="ctr"/>
+          <a:bodyPr wrap="square" lIns="114300" tIns="114300" rIns="114300" bIns="114300" rtlCol="0" anchor="t"/>
           <a:lstStyle/>
           <a:p>
             <a:pPr algn="l" indent="0" marL="0">
               <a:lnSpc>
                 <a:spcPct val="100000"/>
               </a:lnSpc>
-              <a:buNone/>
-            </a:pPr>
-            <a:r>
-              <a:rPr lang="en-US" sz="1350" b="1" dirty="0">
-                <a:solidFill>
-                  <a:srgbClr val="2E7D4F"/>
-                </a:solidFill>
-                <a:latin typeface="Calibri" pitchFamily="34" charset="0"/>
-                <a:ea typeface="Calibri" pitchFamily="34" charset="-122"/>
-                <a:cs typeface="Calibri" pitchFamily="34" charset="-120"/>
-              </a:rPr>
-              <a:t>Resposta: b) </a:t>
-            </a:r>
+              <a:spcAft>
+                <a:spcPts val="200"/>
+              </a:spcAft>
+              <a:buNone/>
+            </a:pPr>
+            <a:r>
+              <a:rPr lang="en-US" sz="1100" b="1" dirty="0">
+                <a:solidFill>
+                  <a:srgbClr val="2A8C85"/>
+                </a:solidFill>
+                <a:latin typeface="Calibri" pitchFamily="34" charset="0"/>
+                <a:ea typeface="Calibri" pitchFamily="34" charset="-122"/>
+                <a:cs typeface="Calibri" pitchFamily="34" charset="-120"/>
+              </a:rPr>
+              <a:t>PARTE 2 · TÓPICO 8</a:t>
+            </a:r>
+            <a:endParaRPr lang="en-US" sz="1100" dirty="0"/>
+          </a:p>
+          <a:p>
             <a:pPr algn="l" indent="0" marL="0">
               <a:lnSpc>
                 <a:spcPct val="100000"/>
               </a:lnSpc>
-              <a:buNone/>
-            </a:pPr>
-            <a:r>
-              <a:rPr lang="en-US" sz="1350" dirty="0">
+              <a:spcAft>
+                <a:spcPts val="400"/>
+              </a:spcAft>
+              <a:buNone/>
+            </a:pPr>
+            <a:r>
+              <a:rPr lang="en-US" sz="1450" b="1" dirty="0">
+                <a:solidFill>
+                  <a:srgbClr val="13294B"/>
+                </a:solidFill>
+                <a:latin typeface="Calibri" pitchFamily="34" charset="0"/>
+                <a:ea typeface="Calibri" pitchFamily="34" charset="-122"/>
+                <a:cs typeface="Calibri" pitchFamily="34" charset="-120"/>
+              </a:rPr>
+              <a:t>Estado e capital no Brasil e no século XXI</a:t>
+            </a:r>
+            <a:endParaRPr lang="en-US" sz="1100" dirty="0"/>
+          </a:p>
+          <a:p>
+            <a:pPr algn="l" marL="177800" indent="-177800">
+              <a:lnSpc>
+                <a:spcPct val="100000"/>
+              </a:lnSpc>
+              <a:spcAft>
+                <a:spcPts val="300"/>
+              </a:spcAft>
+              <a:buSzPct val="100000"/>
+              <a:buChar char="•"/>
+            </a:pPr>
+            <a:r>
+              <a:rPr lang="en-US" sz="1200" dirty="0">
                 <a:solidFill>
                   <a:srgbClr val="1F2A37"/>
                 </a:solidFill>
@@ -17164,1276 +15232,98 @@
                 <a:ea typeface="Calibri" pitchFamily="34" charset="-122"/>
                 <a:cs typeface="Calibri" pitchFamily="34" charset="-120"/>
               </a:rPr>
-              <a:t>Para Keynes, a crise vem da falta de demanda efetiva; o gasto público (G) sustenta a produção e, pelo multiplicador, a renda.</a:t>
-            </a:r>
-            <a:endParaRPr lang="en-US" sz="1350" dirty="0"/>
-          </a:p>
-        </p:txBody>
-      </p:sp>
-      <p:sp>
-        <p:nvSpPr>
-          <p:cNvPr id="17" name="Text 15"/>
+              <a:t>Estado desenvolvimentista (1930–1980).</a:t>
+            </a:r>
+            <a:endParaRPr lang="en-US" sz="1100" dirty="0"/>
+          </a:p>
+          <a:p>
+            <a:pPr algn="l" marL="177800" indent="-177800">
+              <a:lnSpc>
+                <a:spcPct val="100000"/>
+              </a:lnSpc>
+              <a:spcAft>
+                <a:spcPts val="300"/>
+              </a:spcAft>
+              <a:buSzPct val="100000"/>
+              <a:buChar char="•"/>
+            </a:pPr>
+            <a:r>
+              <a:rPr lang="en-US" sz="1200" dirty="0">
+                <a:solidFill>
+                  <a:srgbClr val="1F2A37"/>
+                </a:solidFill>
+                <a:latin typeface="Calibri" pitchFamily="34" charset="0"/>
+                <a:ea typeface="Calibri" pitchFamily="34" charset="-122"/>
+                <a:cs typeface="Calibri" pitchFamily="34" charset="-120"/>
+              </a:rPr>
+              <a:t>Constituição de 1988 (seguridade universal) × reformas dos anos 1990 (gerencial, regulador, LRF).</a:t>
+            </a:r>
+            <a:endParaRPr lang="en-US" sz="1100" dirty="0"/>
+          </a:p>
+          <a:p>
+            <a:pPr algn="l" marL="177800" indent="-177800">
+              <a:lnSpc>
+                <a:spcPct val="100000"/>
+              </a:lnSpc>
+              <a:spcAft>
+                <a:spcPts val="300"/>
+              </a:spcAft>
+              <a:buSzPct val="100000"/>
+              <a:buChar char="•"/>
+            </a:pPr>
+            <a:r>
+              <a:rPr lang="en-US" sz="1200" dirty="0">
+                <a:solidFill>
+                  <a:srgbClr val="1F2A37"/>
+                </a:solidFill>
+                <a:latin typeface="Calibri" pitchFamily="34" charset="0"/>
+                <a:ea typeface="Calibri" pitchFamily="34" charset="-122"/>
+                <a:cs typeface="Calibri" pitchFamily="34" charset="-120"/>
+              </a:rPr>
+              <a:t>Patrimonialismo, burocracia e gerencialismo ainda convivem.</a:t>
+            </a:r>
+            <a:endParaRPr lang="en-US" sz="1100" dirty="0"/>
+          </a:p>
+          <a:p>
+            <a:pPr algn="l" marL="177800" indent="-177800">
+              <a:lnSpc>
+                <a:spcPct val="100000"/>
+              </a:lnSpc>
+              <a:spcAft>
+                <a:spcPts val="300"/>
+              </a:spcAft>
+              <a:buSzPct val="100000"/>
+              <a:buChar char="•"/>
+            </a:pPr>
+            <a:r>
+              <a:rPr lang="en-US" sz="1200" dirty="0">
+                <a:solidFill>
+                  <a:srgbClr val="1F2A37"/>
+                </a:solidFill>
+                <a:latin typeface="Calibri" pitchFamily="34" charset="0"/>
+                <a:ea typeface="Calibri" pitchFamily="34" charset="-122"/>
+                <a:cs typeface="Calibri" pitchFamily="34" charset="-120"/>
+              </a:rPr>
+              <a:t>Século XXI: 2008 e a pandemia; que Estado e que mercado?</a:t>
+            </a:r>
+            <a:endParaRPr lang="en-US" sz="1100" dirty="0"/>
+          </a:p>
+        </p:txBody>
+      </p:sp>
+      <p:sp>
+        <p:nvSpPr>
+          <p:cNvPr id="6" name="Text 4"/>
           <p:cNvSpPr txBox="1"/>
           <p:nvPr/>
         </p:nvSpPr>
         <p:spPr>
           <a:xfrm>
-            <a:off x="4206240" y="36576"/>
-            <a:ext cx="4800600" cy="219456"/>
-          </a:xfrm>
-          <a:prstGeom prst="rect">
-            <a:avLst/>
-          </a:prstGeom>
-          <a:noFill/>
-          <a:ln/>
-        </p:spPr>
-        <p:txBody>
-          <a:bodyPr wrap="square" lIns="0" tIns="0" rIns="0" bIns="0" rtlCol="0" anchor="ctr"/>
-          <a:lstStyle/>
-          <a:p>
-            <a:pPr algn="r" indent="0" marL="0">
-              <a:lnSpc>
-                <a:spcPct val="100000"/>
-              </a:lnSpc>
-              <a:buNone/>
-            </a:pPr>
-            <a:r>
-              <a:rPr lang="en-US" sz="950" dirty="0">
-                <a:solidFill>
-                  <a:srgbClr val="5B6770"/>
-                </a:solidFill>
-                <a:latin typeface="Calibri" pitchFamily="34" charset="0"/>
-                <a:ea typeface="Calibri" pitchFamily="34" charset="-122"/>
-                <a:cs typeface="Calibri" pitchFamily="34" charset="-120"/>
-              </a:rPr>
-              <a:t>Estado, Governo e Mercado · Unidade 4</a:t>
-            </a:r>
-            <a:endParaRPr lang="en-US" sz="950" dirty="0"/>
-          </a:p>
-        </p:txBody>
-      </p:sp>
-    </p:spTree>
-  </p:cSld>
-  <p:clrMapOvr>
-    <a:masterClrMapping/>
-  </p:clrMapOvr>
-</p:sld>
-</file>
-
-<file path=ppt/slides/slide28.xml><?xml version="1.0" encoding="utf-8"?>
-<p:sld xmlns:a="http://schemas.openxmlformats.org/drawingml/2006/main" xmlns:r="http://schemas.openxmlformats.org/officeDocument/2006/relationships" xmlns:p="http://schemas.openxmlformats.org/presentationml/2006/main">
-  <p:cSld name="Slide 28">
-    <p:bg>
-      <p:bgPr>
-        <a:blipFill dpi="0" rotWithShape="1">
-          <a:blip r:embed="rId1">
-            <a:lum/>
-          </a:blip>
-          <a:srcRect/>
-          <a:stretch>
-            <a:fillRect/>
-          </a:stretch>
-        </a:blipFill>
-        <a:effectLst/>
-      </p:bgPr>
-    </p:bg>
-    <p:spTree>
-      <p:nvGrpSpPr>
-        <p:cNvPr id="1" name=""/>
-        <p:cNvGrpSpPr/>
-        <p:nvPr/>
-      </p:nvGrpSpPr>
-      <p:grpSpPr>
-        <a:xfrm>
-          <a:off x="0" y="0"/>
-          <a:ext cx="0" cy="0"/>
-          <a:chOff x="0" y="0"/>
-          <a:chExt cx="0" cy="0"/>
-        </a:xfrm>
-      </p:grpSpPr>
-      <p:sp>
-        <p:nvSpPr>
-          <p:cNvPr id="2" name="Text 0"/>
-          <p:cNvSpPr txBox="1"/>
-          <p:nvPr/>
-        </p:nvSpPr>
-        <p:spPr>
-          <a:xfrm>
-            <a:off x="731520" y="274320"/>
-            <a:ext cx="7680960" cy="365760"/>
-          </a:xfrm>
-          <a:prstGeom prst="rect">
-            <a:avLst/>
-          </a:prstGeom>
-          <a:noFill/>
-          <a:ln/>
-        </p:spPr>
-        <p:txBody>
-          <a:bodyPr wrap="square" lIns="0" tIns="0" rIns="0" bIns="0" rtlCol="0" anchor="ctr"/>
-          <a:lstStyle/>
-          <a:p>
-            <a:pPr algn="ctr" indent="0" marL="0">
-              <a:lnSpc>
-                <a:spcPct val="100000"/>
-              </a:lnSpc>
-              <a:buNone/>
-            </a:pPr>
-            <a:r>
-              <a:rPr lang="en-US" sz="1250" b="1" dirty="0">
-                <a:solidFill>
-                  <a:srgbClr val="2A8C85"/>
-                </a:solidFill>
-                <a:latin typeface="Calibri" pitchFamily="34" charset="0"/>
-                <a:ea typeface="Calibri" pitchFamily="34" charset="-122"/>
-                <a:cs typeface="Calibri" pitchFamily="34" charset="-120"/>
-              </a:rPr>
-              <a:t>QUIZ DA UNIDADE 4 · PERGUNTA 2 DE 5</a:t>
-            </a:r>
-            <a:endParaRPr lang="en-US" sz="1250" dirty="0"/>
-          </a:p>
-        </p:txBody>
-      </p:sp>
-      <p:sp>
-        <p:nvSpPr>
-          <p:cNvPr id="3" name="Text 1"/>
-          <p:cNvSpPr txBox="1"/>
-          <p:nvPr/>
-        </p:nvSpPr>
-        <p:spPr>
-          <a:xfrm>
-            <a:off x="731520" y="658368"/>
-            <a:ext cx="7680960" cy="960120"/>
-          </a:xfrm>
-          <a:prstGeom prst="rect">
-            <a:avLst/>
-          </a:prstGeom>
-          <a:noFill/>
-          <a:ln/>
-        </p:spPr>
-        <p:txBody>
-          <a:bodyPr wrap="square" lIns="0" tIns="0" rIns="0" bIns="0" rtlCol="0" anchor="ctr"/>
-          <a:lstStyle/>
-          <a:p>
-            <a:pPr algn="ctr" indent="0" marL="0">
-              <a:lnSpc>
-                <a:spcPct val="100000"/>
-              </a:lnSpc>
-              <a:buNone/>
-            </a:pPr>
-            <a:r>
-              <a:rPr lang="en-US" sz="1900" b="1" dirty="0">
-                <a:solidFill>
-                  <a:srgbClr val="13294B"/>
-                </a:solidFill>
-                <a:latin typeface="Calibri" pitchFamily="34" charset="0"/>
-                <a:ea typeface="Calibri" pitchFamily="34" charset="-122"/>
-                <a:cs typeface="Calibri" pitchFamily="34" charset="-120"/>
-              </a:rPr>
-              <a:t>Direitos universais financiados por impostos, como na Suécia, caracterizam o regime de bem-estar:</a:t>
-            </a:r>
-            <a:endParaRPr lang="en-US" sz="1900" dirty="0"/>
-          </a:p>
-        </p:txBody>
-      </p:sp>
-      <p:sp>
-        <p:nvSpPr>
-          <p:cNvPr id="4" name="Shape 2"/>
-          <p:cNvSpPr/>
-          <p:nvPr/>
-        </p:nvSpPr>
-        <p:spPr>
-          <a:xfrm>
-            <a:off x="685800" y="1737360"/>
-            <a:ext cx="3794760" cy="914400"/>
+            <a:off x="685800" y="3995928"/>
+            <a:ext cx="7772400" cy="484632"/>
           </a:xfrm>
           <a:prstGeom prst="roundRect">
             <a:avLst>
-              <a:gd name="adj" fmla="val 8000"/>
-            </a:avLst>
-          </a:prstGeom>
-          <a:solidFill>
-            <a:srgbClr val="FFFFFF"/>
-          </a:solidFill>
-          <a:ln w="12700">
-            <a:solidFill>
-              <a:srgbClr val="DCD5C1"/>
-            </a:solidFill>
-            <a:prstDash val="solid"/>
-          </a:ln>
-        </p:spPr>
-      </p:sp>
-      <p:sp>
-        <p:nvSpPr>
-          <p:cNvPr id="5" name="Text 3"/>
-          <p:cNvSpPr txBox="1"/>
-          <p:nvPr/>
-        </p:nvSpPr>
-        <p:spPr>
-          <a:xfrm>
-            <a:off x="813816" y="1984248"/>
-            <a:ext cx="420624" cy="420624"/>
-          </a:xfrm>
-          <a:prstGeom prst="roundRect">
-            <a:avLst>
-              <a:gd name="adj" fmla="val 50000"/>
-            </a:avLst>
-          </a:prstGeom>
-          <a:solidFill>
-            <a:srgbClr val="13294B"/>
-          </a:solidFill>
-          <a:ln/>
-        </p:spPr>
-        <p:txBody>
-          <a:bodyPr wrap="square" lIns="0" tIns="0" rIns="0" bIns="0" rtlCol="0" anchor="ctr"/>
-          <a:lstStyle/>
-          <a:p>
-            <a:pPr algn="ctr" indent="0" marL="0">
-              <a:lnSpc>
-                <a:spcPct val="100000"/>
-              </a:lnSpc>
-              <a:buNone/>
-            </a:pPr>
-            <a:r>
-              <a:rPr lang="en-US" sz="1600" b="1" dirty="0">
-                <a:solidFill>
-                  <a:srgbClr val="FFFFFF"/>
-                </a:solidFill>
-                <a:latin typeface="Calibri" pitchFamily="34" charset="0"/>
-                <a:ea typeface="Calibri" pitchFamily="34" charset="-122"/>
-                <a:cs typeface="Calibri" pitchFamily="34" charset="-120"/>
-              </a:rPr>
-              <a:t>a</a:t>
-            </a:r>
-            <a:endParaRPr lang="en-US" sz="1600" dirty="0"/>
-          </a:p>
-        </p:txBody>
-      </p:sp>
-      <p:sp>
-        <p:nvSpPr>
-          <p:cNvPr id="6" name="Text 4"/>
-          <p:cNvSpPr txBox="1"/>
-          <p:nvPr/>
-        </p:nvSpPr>
-        <p:spPr>
-          <a:xfrm>
-            <a:off x="1344168" y="1773936"/>
-            <a:ext cx="3044952" cy="841248"/>
-          </a:xfrm>
-          <a:prstGeom prst="rect">
-            <a:avLst/>
-          </a:prstGeom>
-          <a:noFill/>
-          <a:ln/>
-        </p:spPr>
-        <p:txBody>
-          <a:bodyPr wrap="square" lIns="25400" tIns="25400" rIns="25400" bIns="25400" rtlCol="0" anchor="ctr"/>
-          <a:lstStyle/>
-          <a:p>
-            <a:pPr algn="l" indent="0" marL="0">
-              <a:lnSpc>
-                <a:spcPct val="100000"/>
-              </a:lnSpc>
-              <a:buNone/>
-            </a:pPr>
-            <a:r>
-              <a:rPr lang="en-US" sz="1400" dirty="0">
-                <a:solidFill>
-                  <a:srgbClr val="1F2A37"/>
-                </a:solidFill>
-                <a:latin typeface="Calibri" pitchFamily="34" charset="0"/>
-                <a:ea typeface="Calibri" pitchFamily="34" charset="-122"/>
-                <a:cs typeface="Calibri" pitchFamily="34" charset="-120"/>
-              </a:rPr>
-              <a:t>Liberal</a:t>
-            </a:r>
-            <a:endParaRPr lang="en-US" sz="1400" dirty="0"/>
-          </a:p>
-        </p:txBody>
-      </p:sp>
-      <p:sp>
-        <p:nvSpPr>
-          <p:cNvPr id="7" name="Shape 5"/>
-          <p:cNvSpPr/>
-          <p:nvPr/>
-        </p:nvSpPr>
-        <p:spPr>
-          <a:xfrm>
-            <a:off x="4663440" y="1737360"/>
-            <a:ext cx="3794760" cy="914400"/>
-          </a:xfrm>
-          <a:prstGeom prst="roundRect">
-            <a:avLst>
-              <a:gd name="adj" fmla="val 8000"/>
-            </a:avLst>
-          </a:prstGeom>
-          <a:solidFill>
-            <a:srgbClr val="FFFFFF"/>
-          </a:solidFill>
-          <a:ln w="12700">
-            <a:solidFill>
-              <a:srgbClr val="DCD5C1"/>
-            </a:solidFill>
-            <a:prstDash val="solid"/>
-          </a:ln>
-        </p:spPr>
-      </p:sp>
-      <p:sp>
-        <p:nvSpPr>
-          <p:cNvPr id="8" name="Text 6"/>
-          <p:cNvSpPr txBox="1"/>
-          <p:nvPr/>
-        </p:nvSpPr>
-        <p:spPr>
-          <a:xfrm>
-            <a:off x="4791456" y="1984248"/>
-            <a:ext cx="420624" cy="420624"/>
-          </a:xfrm>
-          <a:prstGeom prst="roundRect">
-            <a:avLst>
-              <a:gd name="adj" fmla="val 50000"/>
-            </a:avLst>
-          </a:prstGeom>
-          <a:solidFill>
-            <a:srgbClr val="13294B"/>
-          </a:solidFill>
-          <a:ln/>
-        </p:spPr>
-        <p:txBody>
-          <a:bodyPr wrap="square" lIns="0" tIns="0" rIns="0" bIns="0" rtlCol="0" anchor="ctr"/>
-          <a:lstStyle/>
-          <a:p>
-            <a:pPr algn="ctr" indent="0" marL="0">
-              <a:lnSpc>
-                <a:spcPct val="100000"/>
-              </a:lnSpc>
-              <a:buNone/>
-            </a:pPr>
-            <a:r>
-              <a:rPr lang="en-US" sz="1600" b="1" dirty="0">
-                <a:solidFill>
-                  <a:srgbClr val="FFFFFF"/>
-                </a:solidFill>
-                <a:latin typeface="Calibri" pitchFamily="34" charset="0"/>
-                <a:ea typeface="Calibri" pitchFamily="34" charset="-122"/>
-                <a:cs typeface="Calibri" pitchFamily="34" charset="-120"/>
-              </a:rPr>
-              <a:t>b</a:t>
-            </a:r>
-            <a:endParaRPr lang="en-US" sz="1600" dirty="0"/>
-          </a:p>
-        </p:txBody>
-      </p:sp>
-      <p:sp>
-        <p:nvSpPr>
-          <p:cNvPr id="9" name="Text 7"/>
-          <p:cNvSpPr txBox="1"/>
-          <p:nvPr/>
-        </p:nvSpPr>
-        <p:spPr>
-          <a:xfrm>
-            <a:off x="5321808" y="1773936"/>
-            <a:ext cx="3044952" cy="841248"/>
-          </a:xfrm>
-          <a:prstGeom prst="rect">
-            <a:avLst/>
-          </a:prstGeom>
-          <a:noFill/>
-          <a:ln/>
-        </p:spPr>
-        <p:txBody>
-          <a:bodyPr wrap="square" lIns="25400" tIns="25400" rIns="25400" bIns="25400" rtlCol="0" anchor="ctr"/>
-          <a:lstStyle/>
-          <a:p>
-            <a:pPr algn="l" indent="0" marL="0">
-              <a:lnSpc>
-                <a:spcPct val="100000"/>
-              </a:lnSpc>
-              <a:buNone/>
-            </a:pPr>
-            <a:r>
-              <a:rPr lang="en-US" sz="1400" dirty="0">
-                <a:solidFill>
-                  <a:srgbClr val="1F2A37"/>
-                </a:solidFill>
-                <a:latin typeface="Calibri" pitchFamily="34" charset="0"/>
-                <a:ea typeface="Calibri" pitchFamily="34" charset="-122"/>
-                <a:cs typeface="Calibri" pitchFamily="34" charset="-120"/>
-              </a:rPr>
-              <a:t>Conservador-corporativo</a:t>
-            </a:r>
-            <a:endParaRPr lang="en-US" sz="1400" dirty="0"/>
-          </a:p>
-        </p:txBody>
-      </p:sp>
-      <p:sp>
-        <p:nvSpPr>
-          <p:cNvPr id="10" name="Shape 8"/>
-          <p:cNvSpPr/>
-          <p:nvPr/>
-        </p:nvSpPr>
-        <p:spPr>
-          <a:xfrm>
-            <a:off x="685800" y="2798064"/>
-            <a:ext cx="3794760" cy="914400"/>
-          </a:xfrm>
-          <a:prstGeom prst="roundRect">
-            <a:avLst>
-              <a:gd name="adj" fmla="val 8000"/>
-            </a:avLst>
-          </a:prstGeom>
-          <a:solidFill>
-            <a:srgbClr val="FFFFFF"/>
-          </a:solidFill>
-          <a:ln w="12700">
-            <a:solidFill>
-              <a:srgbClr val="DCD5C1"/>
-            </a:solidFill>
-            <a:prstDash val="solid"/>
-          </a:ln>
-        </p:spPr>
-      </p:sp>
-      <p:sp>
-        <p:nvSpPr>
-          <p:cNvPr id="11" name="Text 9"/>
-          <p:cNvSpPr txBox="1"/>
-          <p:nvPr/>
-        </p:nvSpPr>
-        <p:spPr>
-          <a:xfrm>
-            <a:off x="813816" y="3044952"/>
-            <a:ext cx="420624" cy="420624"/>
-          </a:xfrm>
-          <a:prstGeom prst="roundRect">
-            <a:avLst>
-              <a:gd name="adj" fmla="val 50000"/>
-            </a:avLst>
-          </a:prstGeom>
-          <a:solidFill>
-            <a:srgbClr val="13294B"/>
-          </a:solidFill>
-          <a:ln/>
-        </p:spPr>
-        <p:txBody>
-          <a:bodyPr wrap="square" lIns="0" tIns="0" rIns="0" bIns="0" rtlCol="0" anchor="ctr"/>
-          <a:lstStyle/>
-          <a:p>
-            <a:pPr algn="ctr" indent="0" marL="0">
-              <a:lnSpc>
-                <a:spcPct val="100000"/>
-              </a:lnSpc>
-              <a:buNone/>
-            </a:pPr>
-            <a:r>
-              <a:rPr lang="en-US" sz="1600" b="1" dirty="0">
-                <a:solidFill>
-                  <a:srgbClr val="FFFFFF"/>
-                </a:solidFill>
-                <a:latin typeface="Calibri" pitchFamily="34" charset="0"/>
-                <a:ea typeface="Calibri" pitchFamily="34" charset="-122"/>
-                <a:cs typeface="Calibri" pitchFamily="34" charset="-120"/>
-              </a:rPr>
-              <a:t>c</a:t>
-            </a:r>
-            <a:endParaRPr lang="en-US" sz="1600" dirty="0"/>
-          </a:p>
-        </p:txBody>
-      </p:sp>
-      <p:sp>
-        <p:nvSpPr>
-          <p:cNvPr id="12" name="Text 10"/>
-          <p:cNvSpPr txBox="1"/>
-          <p:nvPr/>
-        </p:nvSpPr>
-        <p:spPr>
-          <a:xfrm>
-            <a:off x="1344168" y="2834640"/>
-            <a:ext cx="3044952" cy="841248"/>
-          </a:xfrm>
-          <a:prstGeom prst="rect">
-            <a:avLst/>
-          </a:prstGeom>
-          <a:noFill/>
-          <a:ln/>
-        </p:spPr>
-        <p:txBody>
-          <a:bodyPr wrap="square" lIns="25400" tIns="25400" rIns="25400" bIns="25400" rtlCol="0" anchor="ctr"/>
-          <a:lstStyle/>
-          <a:p>
-            <a:pPr algn="l" indent="0" marL="0">
-              <a:lnSpc>
-                <a:spcPct val="100000"/>
-              </a:lnSpc>
-              <a:buNone/>
-            </a:pPr>
-            <a:r>
-              <a:rPr lang="en-US" sz="1400" dirty="0">
-                <a:solidFill>
-                  <a:srgbClr val="1F2A37"/>
-                </a:solidFill>
-                <a:latin typeface="Calibri" pitchFamily="34" charset="0"/>
-                <a:ea typeface="Calibri" pitchFamily="34" charset="-122"/>
-                <a:cs typeface="Calibri" pitchFamily="34" charset="-120"/>
-              </a:rPr>
-              <a:t>Social-democrata</a:t>
-            </a:r>
-            <a:endParaRPr lang="en-US" sz="1400" dirty="0"/>
-          </a:p>
-        </p:txBody>
-      </p:sp>
-      <p:sp>
-        <p:nvSpPr>
-          <p:cNvPr id="13" name="Shape 11"/>
-          <p:cNvSpPr/>
-          <p:nvPr/>
-        </p:nvSpPr>
-        <p:spPr>
-          <a:xfrm>
-            <a:off x="4663440" y="2798064"/>
-            <a:ext cx="3794760" cy="914400"/>
-          </a:xfrm>
-          <a:prstGeom prst="roundRect">
-            <a:avLst>
-              <a:gd name="adj" fmla="val 8000"/>
-            </a:avLst>
-          </a:prstGeom>
-          <a:solidFill>
-            <a:srgbClr val="FFFFFF"/>
-          </a:solidFill>
-          <a:ln w="12700">
-            <a:solidFill>
-              <a:srgbClr val="DCD5C1"/>
-            </a:solidFill>
-            <a:prstDash val="solid"/>
-          </a:ln>
-        </p:spPr>
-      </p:sp>
-      <p:sp>
-        <p:nvSpPr>
-          <p:cNvPr id="14" name="Text 12"/>
-          <p:cNvSpPr txBox="1"/>
-          <p:nvPr/>
-        </p:nvSpPr>
-        <p:spPr>
-          <a:xfrm>
-            <a:off x="4791456" y="3044952"/>
-            <a:ext cx="420624" cy="420624"/>
-          </a:xfrm>
-          <a:prstGeom prst="roundRect">
-            <a:avLst>
-              <a:gd name="adj" fmla="val 50000"/>
-            </a:avLst>
-          </a:prstGeom>
-          <a:solidFill>
-            <a:srgbClr val="13294B"/>
-          </a:solidFill>
-          <a:ln/>
-        </p:spPr>
-        <p:txBody>
-          <a:bodyPr wrap="square" lIns="0" tIns="0" rIns="0" bIns="0" rtlCol="0" anchor="ctr"/>
-          <a:lstStyle/>
-          <a:p>
-            <a:pPr algn="ctr" indent="0" marL="0">
-              <a:lnSpc>
-                <a:spcPct val="100000"/>
-              </a:lnSpc>
-              <a:buNone/>
-            </a:pPr>
-            <a:r>
-              <a:rPr lang="en-US" sz="1600" b="1" dirty="0">
-                <a:solidFill>
-                  <a:srgbClr val="FFFFFF"/>
-                </a:solidFill>
-                <a:latin typeface="Calibri" pitchFamily="34" charset="0"/>
-                <a:ea typeface="Calibri" pitchFamily="34" charset="-122"/>
-                <a:cs typeface="Calibri" pitchFamily="34" charset="-120"/>
-              </a:rPr>
-              <a:t>d</a:t>
-            </a:r>
-            <a:endParaRPr lang="en-US" sz="1600" dirty="0"/>
-          </a:p>
-        </p:txBody>
-      </p:sp>
-      <p:sp>
-        <p:nvSpPr>
-          <p:cNvPr id="15" name="Text 13"/>
-          <p:cNvSpPr txBox="1"/>
-          <p:nvPr/>
-        </p:nvSpPr>
-        <p:spPr>
-          <a:xfrm>
-            <a:off x="5321808" y="2834640"/>
-            <a:ext cx="3044952" cy="841248"/>
-          </a:xfrm>
-          <a:prstGeom prst="rect">
-            <a:avLst/>
-          </a:prstGeom>
-          <a:noFill/>
-          <a:ln/>
-        </p:spPr>
-        <p:txBody>
-          <a:bodyPr wrap="square" lIns="25400" tIns="25400" rIns="25400" bIns="25400" rtlCol="0" anchor="ctr"/>
-          <a:lstStyle/>
-          <a:p>
-            <a:pPr algn="l" indent="0" marL="0">
-              <a:lnSpc>
-                <a:spcPct val="100000"/>
-              </a:lnSpc>
-              <a:buNone/>
-            </a:pPr>
-            <a:r>
-              <a:rPr lang="en-US" sz="1400" dirty="0">
-                <a:solidFill>
-                  <a:srgbClr val="1F2A37"/>
-                </a:solidFill>
-                <a:latin typeface="Calibri" pitchFamily="34" charset="0"/>
-                <a:ea typeface="Calibri" pitchFamily="34" charset="-122"/>
-                <a:cs typeface="Calibri" pitchFamily="34" charset="-120"/>
-              </a:rPr>
-              <a:t>Neoliberal</a:t>
-            </a:r>
-            <a:endParaRPr lang="en-US" sz="1400" dirty="0"/>
-          </a:p>
-        </p:txBody>
-      </p:sp>
-      <p:sp>
-        <p:nvSpPr>
-          <p:cNvPr id="16" name="Text 14"/>
-          <p:cNvSpPr txBox="1"/>
-          <p:nvPr/>
-        </p:nvSpPr>
-        <p:spPr>
-          <a:xfrm>
-            <a:off x="4206240" y="36576"/>
-            <a:ext cx="4800600" cy="219456"/>
-          </a:xfrm>
-          <a:prstGeom prst="rect">
-            <a:avLst/>
-          </a:prstGeom>
-          <a:noFill/>
-          <a:ln/>
-        </p:spPr>
-        <p:txBody>
-          <a:bodyPr wrap="square" lIns="0" tIns="0" rIns="0" bIns="0" rtlCol="0" anchor="ctr"/>
-          <a:lstStyle/>
-          <a:p>
-            <a:pPr algn="r" indent="0" marL="0">
-              <a:lnSpc>
-                <a:spcPct val="100000"/>
-              </a:lnSpc>
-              <a:buNone/>
-            </a:pPr>
-            <a:r>
-              <a:rPr lang="en-US" sz="950" dirty="0">
-                <a:solidFill>
-                  <a:srgbClr val="5B6770"/>
-                </a:solidFill>
-                <a:latin typeface="Calibri" pitchFamily="34" charset="0"/>
-                <a:ea typeface="Calibri" pitchFamily="34" charset="-122"/>
-                <a:cs typeface="Calibri" pitchFamily="34" charset="-120"/>
-              </a:rPr>
-              <a:t>Estado, Governo e Mercado · Unidade 4</a:t>
-            </a:r>
-            <a:endParaRPr lang="en-US" sz="950" dirty="0"/>
-          </a:p>
-        </p:txBody>
-      </p:sp>
-    </p:spTree>
-  </p:cSld>
-  <p:clrMapOvr>
-    <a:masterClrMapping/>
-  </p:clrMapOvr>
-</p:sld>
-</file>
-
-<file path=ppt/slides/slide29.xml><?xml version="1.0" encoding="utf-8"?>
-<p:sld xmlns:a="http://schemas.openxmlformats.org/drawingml/2006/main" xmlns:r="http://schemas.openxmlformats.org/officeDocument/2006/relationships" xmlns:p="http://schemas.openxmlformats.org/presentationml/2006/main">
-  <p:cSld name="Slide 29">
-    <p:bg>
-      <p:bgPr>
-        <a:blipFill dpi="0" rotWithShape="1">
-          <a:blip r:embed="rId1">
-            <a:lum/>
-          </a:blip>
-          <a:srcRect/>
-          <a:stretch>
-            <a:fillRect/>
-          </a:stretch>
-        </a:blipFill>
-        <a:effectLst/>
-      </p:bgPr>
-    </p:bg>
-    <p:spTree>
-      <p:nvGrpSpPr>
-        <p:cNvPr id="1" name=""/>
-        <p:cNvGrpSpPr/>
-        <p:nvPr/>
-      </p:nvGrpSpPr>
-      <p:grpSpPr>
-        <a:xfrm>
-          <a:off x="0" y="0"/>
-          <a:ext cx="0" cy="0"/>
-          <a:chOff x="0" y="0"/>
-          <a:chExt cx="0" cy="0"/>
-        </a:xfrm>
-      </p:grpSpPr>
-      <p:sp>
-        <p:nvSpPr>
-          <p:cNvPr id="2" name="Text 0"/>
-          <p:cNvSpPr txBox="1"/>
-          <p:nvPr/>
-        </p:nvSpPr>
-        <p:spPr>
-          <a:xfrm>
-            <a:off x="731520" y="274320"/>
-            <a:ext cx="7680960" cy="365760"/>
-          </a:xfrm>
-          <a:prstGeom prst="rect">
-            <a:avLst/>
-          </a:prstGeom>
-          <a:noFill/>
-          <a:ln/>
-        </p:spPr>
-        <p:txBody>
-          <a:bodyPr wrap="square" lIns="0" tIns="0" rIns="0" bIns="0" rtlCol="0" anchor="ctr"/>
-          <a:lstStyle/>
-          <a:p>
-            <a:pPr algn="ctr" indent="0" marL="0">
-              <a:lnSpc>
-                <a:spcPct val="100000"/>
-              </a:lnSpc>
-              <a:buNone/>
-            </a:pPr>
-            <a:r>
-              <a:rPr lang="en-US" sz="1250" b="1" dirty="0">
-                <a:solidFill>
-                  <a:srgbClr val="2A8C85"/>
-                </a:solidFill>
-                <a:latin typeface="Calibri" pitchFamily="34" charset="0"/>
-                <a:ea typeface="Calibri" pitchFamily="34" charset="-122"/>
-                <a:cs typeface="Calibri" pitchFamily="34" charset="-120"/>
-              </a:rPr>
-              <a:t>QUIZ DA UNIDADE 4 · PERGUNTA 2 DE 5 · RESPOSTA</a:t>
-            </a:r>
-            <a:endParaRPr lang="en-US" sz="1250" dirty="0"/>
-          </a:p>
-        </p:txBody>
-      </p:sp>
-      <p:sp>
-        <p:nvSpPr>
-          <p:cNvPr id="3" name="Text 1"/>
-          <p:cNvSpPr txBox="1"/>
-          <p:nvPr/>
-        </p:nvSpPr>
-        <p:spPr>
-          <a:xfrm>
-            <a:off x="731520" y="658368"/>
-            <a:ext cx="7680960" cy="960120"/>
-          </a:xfrm>
-          <a:prstGeom prst="rect">
-            <a:avLst/>
-          </a:prstGeom>
-          <a:noFill/>
-          <a:ln/>
-        </p:spPr>
-        <p:txBody>
-          <a:bodyPr wrap="square" lIns="0" tIns="0" rIns="0" bIns="0" rtlCol="0" anchor="ctr"/>
-          <a:lstStyle/>
-          <a:p>
-            <a:pPr algn="ctr" indent="0" marL="0">
-              <a:lnSpc>
-                <a:spcPct val="100000"/>
-              </a:lnSpc>
-              <a:buNone/>
-            </a:pPr>
-            <a:r>
-              <a:rPr lang="en-US" sz="1900" b="1" dirty="0">
-                <a:solidFill>
-                  <a:srgbClr val="13294B"/>
-                </a:solidFill>
-                <a:latin typeface="Calibri" pitchFamily="34" charset="0"/>
-                <a:ea typeface="Calibri" pitchFamily="34" charset="-122"/>
-                <a:cs typeface="Calibri" pitchFamily="34" charset="-120"/>
-              </a:rPr>
-              <a:t>Direitos universais financiados por impostos, como na Suécia, caracterizam o regime de bem-estar:</a:t>
-            </a:r>
-            <a:endParaRPr lang="en-US" sz="1900" dirty="0"/>
-          </a:p>
-        </p:txBody>
-      </p:sp>
-      <p:sp>
-        <p:nvSpPr>
-          <p:cNvPr id="4" name="Shape 2"/>
-          <p:cNvSpPr/>
-          <p:nvPr/>
-        </p:nvSpPr>
-        <p:spPr>
-          <a:xfrm>
-            <a:off x="685800" y="1737360"/>
-            <a:ext cx="3794760" cy="749808"/>
-          </a:xfrm>
-          <a:prstGeom prst="roundRect">
-            <a:avLst>
-              <a:gd name="adj" fmla="val 9756"/>
-            </a:avLst>
-          </a:prstGeom>
-          <a:solidFill>
-            <a:srgbClr val="FFFFFF"/>
-          </a:solidFill>
-          <a:ln w="12700">
-            <a:solidFill>
-              <a:srgbClr val="DCD5C1"/>
-            </a:solidFill>
-            <a:prstDash val="solid"/>
-          </a:ln>
-        </p:spPr>
-      </p:sp>
-      <p:sp>
-        <p:nvSpPr>
-          <p:cNvPr id="5" name="Text 3"/>
-          <p:cNvSpPr txBox="1"/>
-          <p:nvPr/>
-        </p:nvSpPr>
-        <p:spPr>
-          <a:xfrm>
-            <a:off x="813816" y="1901952"/>
-            <a:ext cx="420624" cy="420624"/>
-          </a:xfrm>
-          <a:prstGeom prst="roundRect">
-            <a:avLst>
-              <a:gd name="adj" fmla="val 50000"/>
-            </a:avLst>
-          </a:prstGeom>
-          <a:solidFill>
-            <a:srgbClr val="9AA3AB"/>
-          </a:solidFill>
-          <a:ln/>
-        </p:spPr>
-        <p:txBody>
-          <a:bodyPr wrap="square" lIns="0" tIns="0" rIns="0" bIns="0" rtlCol="0" anchor="ctr"/>
-          <a:lstStyle/>
-          <a:p>
-            <a:pPr algn="ctr" indent="0" marL="0">
-              <a:lnSpc>
-                <a:spcPct val="100000"/>
-              </a:lnSpc>
-              <a:buNone/>
-            </a:pPr>
-            <a:r>
-              <a:rPr lang="en-US" sz="1600" b="1" dirty="0">
-                <a:solidFill>
-                  <a:srgbClr val="FFFFFF"/>
-                </a:solidFill>
-                <a:latin typeface="Calibri" pitchFamily="34" charset="0"/>
-                <a:ea typeface="Calibri" pitchFamily="34" charset="-122"/>
-                <a:cs typeface="Calibri" pitchFamily="34" charset="-120"/>
-              </a:rPr>
-              <a:t>a</a:t>
-            </a:r>
-            <a:endParaRPr lang="en-US" sz="1600" dirty="0"/>
-          </a:p>
-        </p:txBody>
-      </p:sp>
-      <p:sp>
-        <p:nvSpPr>
-          <p:cNvPr id="6" name="Text 4"/>
-          <p:cNvSpPr txBox="1"/>
-          <p:nvPr/>
-        </p:nvSpPr>
-        <p:spPr>
-          <a:xfrm>
-            <a:off x="1344168" y="1773936"/>
-            <a:ext cx="3044952" cy="676656"/>
-          </a:xfrm>
-          <a:prstGeom prst="rect">
-            <a:avLst/>
-          </a:prstGeom>
-          <a:noFill/>
-          <a:ln/>
-        </p:spPr>
-        <p:txBody>
-          <a:bodyPr wrap="square" lIns="25400" tIns="25400" rIns="25400" bIns="25400" rtlCol="0" anchor="ctr"/>
-          <a:lstStyle/>
-          <a:p>
-            <a:pPr algn="l" indent="0" marL="0">
-              <a:lnSpc>
-                <a:spcPct val="100000"/>
-              </a:lnSpc>
-              <a:buNone/>
-            </a:pPr>
-            <a:r>
-              <a:rPr lang="en-US" sz="1400" dirty="0">
-                <a:solidFill>
-                  <a:srgbClr val="5B6770"/>
-                </a:solidFill>
-                <a:latin typeface="Calibri" pitchFamily="34" charset="0"/>
-                <a:ea typeface="Calibri" pitchFamily="34" charset="-122"/>
-                <a:cs typeface="Calibri" pitchFamily="34" charset="-120"/>
-              </a:rPr>
-              <a:t>Liberal</a:t>
-            </a:r>
-            <a:endParaRPr lang="en-US" sz="1400" dirty="0"/>
-          </a:p>
-        </p:txBody>
-      </p:sp>
-      <p:sp>
-        <p:nvSpPr>
-          <p:cNvPr id="7" name="Shape 5"/>
-          <p:cNvSpPr/>
-          <p:nvPr/>
-        </p:nvSpPr>
-        <p:spPr>
-          <a:xfrm>
-            <a:off x="4663440" y="1737360"/>
-            <a:ext cx="3794760" cy="749808"/>
-          </a:xfrm>
-          <a:prstGeom prst="roundRect">
-            <a:avLst>
-              <a:gd name="adj" fmla="val 9756"/>
-            </a:avLst>
-          </a:prstGeom>
-          <a:solidFill>
-            <a:srgbClr val="FFFFFF"/>
-          </a:solidFill>
-          <a:ln w="12700">
-            <a:solidFill>
-              <a:srgbClr val="DCD5C1"/>
-            </a:solidFill>
-            <a:prstDash val="solid"/>
-          </a:ln>
-        </p:spPr>
-      </p:sp>
-      <p:sp>
-        <p:nvSpPr>
-          <p:cNvPr id="8" name="Text 6"/>
-          <p:cNvSpPr txBox="1"/>
-          <p:nvPr/>
-        </p:nvSpPr>
-        <p:spPr>
-          <a:xfrm>
-            <a:off x="4791456" y="1901952"/>
-            <a:ext cx="420624" cy="420624"/>
-          </a:xfrm>
-          <a:prstGeom prst="roundRect">
-            <a:avLst>
-              <a:gd name="adj" fmla="val 50000"/>
-            </a:avLst>
-          </a:prstGeom>
-          <a:solidFill>
-            <a:srgbClr val="9AA3AB"/>
-          </a:solidFill>
-          <a:ln/>
-        </p:spPr>
-        <p:txBody>
-          <a:bodyPr wrap="square" lIns="0" tIns="0" rIns="0" bIns="0" rtlCol="0" anchor="ctr"/>
-          <a:lstStyle/>
-          <a:p>
-            <a:pPr algn="ctr" indent="0" marL="0">
-              <a:lnSpc>
-                <a:spcPct val="100000"/>
-              </a:lnSpc>
-              <a:buNone/>
-            </a:pPr>
-            <a:r>
-              <a:rPr lang="en-US" sz="1600" b="1" dirty="0">
-                <a:solidFill>
-                  <a:srgbClr val="FFFFFF"/>
-                </a:solidFill>
-                <a:latin typeface="Calibri" pitchFamily="34" charset="0"/>
-                <a:ea typeface="Calibri" pitchFamily="34" charset="-122"/>
-                <a:cs typeface="Calibri" pitchFamily="34" charset="-120"/>
-              </a:rPr>
-              <a:t>b</a:t>
-            </a:r>
-            <a:endParaRPr lang="en-US" sz="1600" dirty="0"/>
-          </a:p>
-        </p:txBody>
-      </p:sp>
-      <p:sp>
-        <p:nvSpPr>
-          <p:cNvPr id="9" name="Text 7"/>
-          <p:cNvSpPr txBox="1"/>
-          <p:nvPr/>
-        </p:nvSpPr>
-        <p:spPr>
-          <a:xfrm>
-            <a:off x="5321808" y="1773936"/>
-            <a:ext cx="3044952" cy="676656"/>
-          </a:xfrm>
-          <a:prstGeom prst="rect">
-            <a:avLst/>
-          </a:prstGeom>
-          <a:noFill/>
-          <a:ln/>
-        </p:spPr>
-        <p:txBody>
-          <a:bodyPr wrap="square" lIns="25400" tIns="25400" rIns="25400" bIns="25400" rtlCol="0" anchor="ctr"/>
-          <a:lstStyle/>
-          <a:p>
-            <a:pPr algn="l" indent="0" marL="0">
-              <a:lnSpc>
-                <a:spcPct val="100000"/>
-              </a:lnSpc>
-              <a:buNone/>
-            </a:pPr>
-            <a:r>
-              <a:rPr lang="en-US" sz="1400" dirty="0">
-                <a:solidFill>
-                  <a:srgbClr val="5B6770"/>
-                </a:solidFill>
-                <a:latin typeface="Calibri" pitchFamily="34" charset="0"/>
-                <a:ea typeface="Calibri" pitchFamily="34" charset="-122"/>
-                <a:cs typeface="Calibri" pitchFamily="34" charset="-120"/>
-              </a:rPr>
-              <a:t>Conservador-corporativo</a:t>
-            </a:r>
-            <a:endParaRPr lang="en-US" sz="1400" dirty="0"/>
-          </a:p>
-        </p:txBody>
-      </p:sp>
-      <p:sp>
-        <p:nvSpPr>
-          <p:cNvPr id="10" name="Shape 8"/>
-          <p:cNvSpPr/>
-          <p:nvPr/>
-        </p:nvSpPr>
-        <p:spPr>
-          <a:xfrm>
-            <a:off x="685800" y="2633472"/>
-            <a:ext cx="3794760" cy="749808"/>
-          </a:xfrm>
-          <a:prstGeom prst="roundRect">
-            <a:avLst>
-              <a:gd name="adj" fmla="val 9756"/>
-            </a:avLst>
-          </a:prstGeom>
-          <a:solidFill>
-            <a:srgbClr val="E3F2E8"/>
-          </a:solidFill>
-          <a:ln w="25400">
-            <a:solidFill>
-              <a:srgbClr val="2E7D4F"/>
-            </a:solidFill>
-            <a:prstDash val="solid"/>
-          </a:ln>
-        </p:spPr>
-      </p:sp>
-      <p:sp>
-        <p:nvSpPr>
-          <p:cNvPr id="11" name="Text 9"/>
-          <p:cNvSpPr txBox="1"/>
-          <p:nvPr/>
-        </p:nvSpPr>
-        <p:spPr>
-          <a:xfrm>
-            <a:off x="813816" y="2798064"/>
-            <a:ext cx="420624" cy="420624"/>
-          </a:xfrm>
-          <a:prstGeom prst="roundRect">
-            <a:avLst>
-              <a:gd name="adj" fmla="val 50000"/>
-            </a:avLst>
-          </a:prstGeom>
-          <a:solidFill>
-            <a:srgbClr val="2E7D4F"/>
-          </a:solidFill>
-          <a:ln/>
-        </p:spPr>
-        <p:txBody>
-          <a:bodyPr wrap="square" lIns="0" tIns="0" rIns="0" bIns="0" rtlCol="0" anchor="ctr"/>
-          <a:lstStyle/>
-          <a:p>
-            <a:pPr algn="ctr" indent="0" marL="0">
-              <a:lnSpc>
-                <a:spcPct val="100000"/>
-              </a:lnSpc>
-              <a:buNone/>
-            </a:pPr>
-            <a:r>
-              <a:rPr lang="en-US" sz="1600" b="1" dirty="0">
-                <a:solidFill>
-                  <a:srgbClr val="FFFFFF"/>
-                </a:solidFill>
-                <a:latin typeface="Calibri" pitchFamily="34" charset="0"/>
-                <a:ea typeface="Calibri" pitchFamily="34" charset="-122"/>
-                <a:cs typeface="Calibri" pitchFamily="34" charset="-120"/>
-              </a:rPr>
-              <a:t>c</a:t>
-            </a:r>
-            <a:endParaRPr lang="en-US" sz="1600" dirty="0"/>
-          </a:p>
-        </p:txBody>
-      </p:sp>
-      <p:sp>
-        <p:nvSpPr>
-          <p:cNvPr id="12" name="Text 10"/>
-          <p:cNvSpPr txBox="1"/>
-          <p:nvPr/>
-        </p:nvSpPr>
-        <p:spPr>
-          <a:xfrm>
-            <a:off x="1344168" y="2670048"/>
-            <a:ext cx="3044952" cy="676656"/>
-          </a:xfrm>
-          <a:prstGeom prst="rect">
-            <a:avLst/>
-          </a:prstGeom>
-          <a:noFill/>
-          <a:ln/>
-        </p:spPr>
-        <p:txBody>
-          <a:bodyPr wrap="square" lIns="25400" tIns="25400" rIns="25400" bIns="25400" rtlCol="0" anchor="ctr"/>
-          <a:lstStyle/>
-          <a:p>
-            <a:pPr algn="l" indent="0" marL="0">
-              <a:lnSpc>
-                <a:spcPct val="100000"/>
-              </a:lnSpc>
-              <a:buNone/>
-            </a:pPr>
-            <a:r>
-              <a:rPr lang="en-US" sz="1400" b="1" dirty="0">
-                <a:solidFill>
-                  <a:srgbClr val="1F2A37"/>
-                </a:solidFill>
-                <a:latin typeface="Calibri" pitchFamily="34" charset="0"/>
-                <a:ea typeface="Calibri" pitchFamily="34" charset="-122"/>
-                <a:cs typeface="Calibri" pitchFamily="34" charset="-120"/>
-              </a:rPr>
-              <a:t>Social-democrata</a:t>
-            </a:r>
-            <a:endParaRPr lang="en-US" sz="1400" dirty="0"/>
-          </a:p>
-        </p:txBody>
-      </p:sp>
-      <p:sp>
-        <p:nvSpPr>
-          <p:cNvPr id="13" name="Shape 11"/>
-          <p:cNvSpPr/>
-          <p:nvPr/>
-        </p:nvSpPr>
-        <p:spPr>
-          <a:xfrm>
-            <a:off x="4663440" y="2633472"/>
-            <a:ext cx="3794760" cy="749808"/>
-          </a:xfrm>
-          <a:prstGeom prst="roundRect">
-            <a:avLst>
-              <a:gd name="adj" fmla="val 9756"/>
-            </a:avLst>
-          </a:prstGeom>
-          <a:solidFill>
-            <a:srgbClr val="FFFFFF"/>
-          </a:solidFill>
-          <a:ln w="12700">
-            <a:solidFill>
-              <a:srgbClr val="DCD5C1"/>
-            </a:solidFill>
-            <a:prstDash val="solid"/>
-          </a:ln>
-        </p:spPr>
-      </p:sp>
-      <p:sp>
-        <p:nvSpPr>
-          <p:cNvPr id="14" name="Text 12"/>
-          <p:cNvSpPr txBox="1"/>
-          <p:nvPr/>
-        </p:nvSpPr>
-        <p:spPr>
-          <a:xfrm>
-            <a:off x="4791456" y="2798064"/>
-            <a:ext cx="420624" cy="420624"/>
-          </a:xfrm>
-          <a:prstGeom prst="roundRect">
-            <a:avLst>
-              <a:gd name="adj" fmla="val 50000"/>
-            </a:avLst>
-          </a:prstGeom>
-          <a:solidFill>
-            <a:srgbClr val="9AA3AB"/>
-          </a:solidFill>
-          <a:ln/>
-        </p:spPr>
-        <p:txBody>
-          <a:bodyPr wrap="square" lIns="0" tIns="0" rIns="0" bIns="0" rtlCol="0" anchor="ctr"/>
-          <a:lstStyle/>
-          <a:p>
-            <a:pPr algn="ctr" indent="0" marL="0">
-              <a:lnSpc>
-                <a:spcPct val="100000"/>
-              </a:lnSpc>
-              <a:buNone/>
-            </a:pPr>
-            <a:r>
-              <a:rPr lang="en-US" sz="1600" b="1" dirty="0">
-                <a:solidFill>
-                  <a:srgbClr val="FFFFFF"/>
-                </a:solidFill>
-                <a:latin typeface="Calibri" pitchFamily="34" charset="0"/>
-                <a:ea typeface="Calibri" pitchFamily="34" charset="-122"/>
-                <a:cs typeface="Calibri" pitchFamily="34" charset="-120"/>
-              </a:rPr>
-              <a:t>d</a:t>
-            </a:r>
-            <a:endParaRPr lang="en-US" sz="1600" dirty="0"/>
-          </a:p>
-        </p:txBody>
-      </p:sp>
-      <p:sp>
-        <p:nvSpPr>
-          <p:cNvPr id="15" name="Text 13"/>
-          <p:cNvSpPr txBox="1"/>
-          <p:nvPr/>
-        </p:nvSpPr>
-        <p:spPr>
-          <a:xfrm>
-            <a:off x="5321808" y="2670048"/>
-            <a:ext cx="3044952" cy="676656"/>
-          </a:xfrm>
-          <a:prstGeom prst="rect">
-            <a:avLst/>
-          </a:prstGeom>
-          <a:noFill/>
-          <a:ln/>
-        </p:spPr>
-        <p:txBody>
-          <a:bodyPr wrap="square" lIns="25400" tIns="25400" rIns="25400" bIns="25400" rtlCol="0" anchor="ctr"/>
-          <a:lstStyle/>
-          <a:p>
-            <a:pPr algn="l" indent="0" marL="0">
-              <a:lnSpc>
-                <a:spcPct val="100000"/>
-              </a:lnSpc>
-              <a:buNone/>
-            </a:pPr>
-            <a:r>
-              <a:rPr lang="en-US" sz="1400" dirty="0">
-                <a:solidFill>
-                  <a:srgbClr val="5B6770"/>
-                </a:solidFill>
-                <a:latin typeface="Calibri" pitchFamily="34" charset="0"/>
-                <a:ea typeface="Calibri" pitchFamily="34" charset="-122"/>
-                <a:cs typeface="Calibri" pitchFamily="34" charset="-120"/>
-              </a:rPr>
-              <a:t>Neoliberal</a:t>
-            </a:r>
-            <a:endParaRPr lang="en-US" sz="1400" dirty="0"/>
-          </a:p>
-        </p:txBody>
-      </p:sp>
-      <p:sp>
-        <p:nvSpPr>
-          <p:cNvPr id="16" name="Text 14"/>
-          <p:cNvSpPr txBox="1"/>
-          <p:nvPr/>
-        </p:nvSpPr>
-        <p:spPr>
-          <a:xfrm>
-            <a:off x="685800" y="3566160"/>
-            <a:ext cx="7772400" cy="841248"/>
-          </a:xfrm>
-          <a:prstGeom prst="roundRect">
-            <a:avLst>
-              <a:gd name="adj" fmla="val 8696"/>
+              <a:gd name="adj" fmla="val 15094"/>
             </a:avLst>
           </a:prstGeom>
           <a:solidFill>
@@ -18442,50 +15332,33 @@
           <a:ln/>
         </p:spPr>
         <p:txBody>
-          <a:bodyPr wrap="square" lIns="114300" tIns="114300" rIns="114300" bIns="114300" rtlCol="0" anchor="ctr"/>
-          <a:lstStyle/>
-          <a:p>
-            <a:pPr algn="l" indent="0" marL="0">
-              <a:lnSpc>
-                <a:spcPct val="100000"/>
-              </a:lnSpc>
-              <a:buNone/>
-            </a:pPr>
-            <a:r>
-              <a:rPr lang="en-US" sz="1350" b="1" dirty="0">
-                <a:solidFill>
-                  <a:srgbClr val="2E7D4F"/>
-                </a:solidFill>
-                <a:latin typeface="Calibri" pitchFamily="34" charset="0"/>
-                <a:ea typeface="Calibri" pitchFamily="34" charset="-122"/>
-                <a:cs typeface="Calibri" pitchFamily="34" charset="-120"/>
-              </a:rPr>
-              <a:t>Resposta: c) </a:t>
-            </a:r>
-            <a:pPr algn="l" indent="0" marL="0">
-              <a:lnSpc>
-                <a:spcPct val="100000"/>
-              </a:lnSpc>
-              <a:buNone/>
-            </a:pPr>
-            <a:r>
-              <a:rPr lang="en-US" sz="1350" dirty="0">
-                <a:solidFill>
-                  <a:srgbClr val="1F2A37"/>
-                </a:solidFill>
-                <a:latin typeface="Calibri" pitchFamily="34" charset="0"/>
-                <a:ea typeface="Calibri" pitchFamily="34" charset="-122"/>
-                <a:cs typeface="Calibri" pitchFamily="34" charset="-120"/>
-              </a:rPr>
-              <a:t>No regime social-democrata (Esping-Andersen), a proteção é universal e financiada por tributos.</a:t>
-            </a:r>
-            <a:endParaRPr lang="en-US" sz="1350" dirty="0"/>
-          </a:p>
-        </p:txBody>
-      </p:sp>
-      <p:sp>
-        <p:nvSpPr>
-          <p:cNvPr id="17" name="Text 15"/>
+          <a:bodyPr wrap="square" lIns="127000" tIns="127000" rIns="127000" bIns="127000" rtlCol="0" anchor="ctr"/>
+          <a:lstStyle/>
+          <a:p>
+            <a:pPr algn="ctr" indent="0" marL="0">
+              <a:lnSpc>
+                <a:spcPct val="100000"/>
+              </a:lnSpc>
+              <a:buNone/>
+            </a:pPr>
+            <a:r>
+              <a:rPr lang="en-US" sz="1300" b="1" dirty="0">
+                <a:solidFill>
+                  <a:srgbClr val="13294B"/>
+                </a:solidFill>
+                <a:latin typeface="Calibri" pitchFamily="34" charset="0"/>
+                <a:ea typeface="Calibri" pitchFamily="34" charset="-122"/>
+                <a:cs typeface="Calibri" pitchFamily="34" charset="-120"/>
+              </a:rPr>
+              <a:t>Avaliações: A2 até 08/11 e A3 até 15/11, às 23h55. Bons estudos!</a:t>
+            </a:r>
+            <a:endParaRPr lang="en-US" sz="1300" dirty="0"/>
+          </a:p>
+        </p:txBody>
+      </p:sp>
+      <p:sp>
+        <p:nvSpPr>
+          <p:cNvPr id="7" name="Text 5"/>
           <p:cNvSpPr txBox="1"/>
           <p:nvPr/>
         </p:nvSpPr>
@@ -18727,4496 +15600,6 @@
                 <a:cs typeface="Calibri" pitchFamily="34" charset="-120"/>
               </a:rPr>
               <a:t>Estado, Governo e Mercado · Unidade 4 · Tópico 7 do sumário</a:t>
-            </a:r>
-            <a:endParaRPr lang="en-US" sz="950" dirty="0"/>
-          </a:p>
-        </p:txBody>
-      </p:sp>
-    </p:spTree>
-  </p:cSld>
-  <p:clrMapOvr>
-    <a:masterClrMapping/>
-  </p:clrMapOvr>
-</p:sld>
-</file>
-
-<file path=ppt/slides/slide30.xml><?xml version="1.0" encoding="utf-8"?>
-<p:sld xmlns:a="http://schemas.openxmlformats.org/drawingml/2006/main" xmlns:r="http://schemas.openxmlformats.org/officeDocument/2006/relationships" xmlns:p="http://schemas.openxmlformats.org/presentationml/2006/main">
-  <p:cSld name="Slide 30">
-    <p:bg>
-      <p:bgPr>
-        <a:blipFill dpi="0" rotWithShape="1">
-          <a:blip r:embed="rId1">
-            <a:lum/>
-          </a:blip>
-          <a:srcRect/>
-          <a:stretch>
-            <a:fillRect/>
-          </a:stretch>
-        </a:blipFill>
-        <a:effectLst/>
-      </p:bgPr>
-    </p:bg>
-    <p:spTree>
-      <p:nvGrpSpPr>
-        <p:cNvPr id="1" name=""/>
-        <p:cNvGrpSpPr/>
-        <p:nvPr/>
-      </p:nvGrpSpPr>
-      <p:grpSpPr>
-        <a:xfrm>
-          <a:off x="0" y="0"/>
-          <a:ext cx="0" cy="0"/>
-          <a:chOff x="0" y="0"/>
-          <a:chExt cx="0" cy="0"/>
-        </a:xfrm>
-      </p:grpSpPr>
-      <p:sp>
-        <p:nvSpPr>
-          <p:cNvPr id="2" name="Text 0"/>
-          <p:cNvSpPr txBox="1"/>
-          <p:nvPr/>
-        </p:nvSpPr>
-        <p:spPr>
-          <a:xfrm>
-            <a:off x="731520" y="274320"/>
-            <a:ext cx="7680960" cy="365760"/>
-          </a:xfrm>
-          <a:prstGeom prst="rect">
-            <a:avLst/>
-          </a:prstGeom>
-          <a:noFill/>
-          <a:ln/>
-        </p:spPr>
-        <p:txBody>
-          <a:bodyPr wrap="square" lIns="0" tIns="0" rIns="0" bIns="0" rtlCol="0" anchor="ctr"/>
-          <a:lstStyle/>
-          <a:p>
-            <a:pPr algn="ctr" indent="0" marL="0">
-              <a:lnSpc>
-                <a:spcPct val="100000"/>
-              </a:lnSpc>
-              <a:buNone/>
-            </a:pPr>
-            <a:r>
-              <a:rPr lang="en-US" sz="1250" b="1" dirty="0">
-                <a:solidFill>
-                  <a:srgbClr val="2A8C85"/>
-                </a:solidFill>
-                <a:latin typeface="Calibri" pitchFamily="34" charset="0"/>
-                <a:ea typeface="Calibri" pitchFamily="34" charset="-122"/>
-                <a:cs typeface="Calibri" pitchFamily="34" charset="-120"/>
-              </a:rPr>
-              <a:t>QUIZ DA UNIDADE 4 · PERGUNTA 3 DE 5</a:t>
-            </a:r>
-            <a:endParaRPr lang="en-US" sz="1250" dirty="0"/>
-          </a:p>
-        </p:txBody>
-      </p:sp>
-      <p:sp>
-        <p:nvSpPr>
-          <p:cNvPr id="3" name="Text 1"/>
-          <p:cNvSpPr txBox="1"/>
-          <p:nvPr/>
-        </p:nvSpPr>
-        <p:spPr>
-          <a:xfrm>
-            <a:off x="731520" y="658368"/>
-            <a:ext cx="7680960" cy="960120"/>
-          </a:xfrm>
-          <a:prstGeom prst="rect">
-            <a:avLst/>
-          </a:prstGeom>
-          <a:noFill/>
-          <a:ln/>
-        </p:spPr>
-        <p:txBody>
-          <a:bodyPr wrap="square" lIns="0" tIns="0" rIns="0" bIns="0" rtlCol="0" anchor="ctr"/>
-          <a:lstStyle/>
-          <a:p>
-            <a:pPr algn="ctr" indent="0" marL="0">
-              <a:lnSpc>
-                <a:spcPct val="100000"/>
-              </a:lnSpc>
-              <a:buNone/>
-            </a:pPr>
-            <a:r>
-              <a:rPr lang="en-US" sz="1900" b="1" dirty="0">
-                <a:solidFill>
-                  <a:srgbClr val="13294B"/>
-                </a:solidFill>
-                <a:latin typeface="Calibri" pitchFamily="34" charset="0"/>
-                <a:ea typeface="Calibri" pitchFamily="34" charset="-122"/>
-                <a:cs typeface="Calibri" pitchFamily="34" charset="-120"/>
-              </a:rPr>
-              <a:t>O que é estagflação?</a:t>
-            </a:r>
-            <a:endParaRPr lang="en-US" sz="1900" dirty="0"/>
-          </a:p>
-        </p:txBody>
-      </p:sp>
-      <p:sp>
-        <p:nvSpPr>
-          <p:cNvPr id="4" name="Shape 2"/>
-          <p:cNvSpPr/>
-          <p:nvPr/>
-        </p:nvSpPr>
-        <p:spPr>
-          <a:xfrm>
-            <a:off x="685800" y="1737360"/>
-            <a:ext cx="3794760" cy="914400"/>
-          </a:xfrm>
-          <a:prstGeom prst="roundRect">
-            <a:avLst>
-              <a:gd name="adj" fmla="val 8000"/>
-            </a:avLst>
-          </a:prstGeom>
-          <a:solidFill>
-            <a:srgbClr val="FFFFFF"/>
-          </a:solidFill>
-          <a:ln w="12700">
-            <a:solidFill>
-              <a:srgbClr val="DCD5C1"/>
-            </a:solidFill>
-            <a:prstDash val="solid"/>
-          </a:ln>
-        </p:spPr>
-      </p:sp>
-      <p:sp>
-        <p:nvSpPr>
-          <p:cNvPr id="5" name="Text 3"/>
-          <p:cNvSpPr txBox="1"/>
-          <p:nvPr/>
-        </p:nvSpPr>
-        <p:spPr>
-          <a:xfrm>
-            <a:off x="813816" y="1984248"/>
-            <a:ext cx="420624" cy="420624"/>
-          </a:xfrm>
-          <a:prstGeom prst="roundRect">
-            <a:avLst>
-              <a:gd name="adj" fmla="val 50000"/>
-            </a:avLst>
-          </a:prstGeom>
-          <a:solidFill>
-            <a:srgbClr val="13294B"/>
-          </a:solidFill>
-          <a:ln/>
-        </p:spPr>
-        <p:txBody>
-          <a:bodyPr wrap="square" lIns="0" tIns="0" rIns="0" bIns="0" rtlCol="0" anchor="ctr"/>
-          <a:lstStyle/>
-          <a:p>
-            <a:pPr algn="ctr" indent="0" marL="0">
-              <a:lnSpc>
-                <a:spcPct val="100000"/>
-              </a:lnSpc>
-              <a:buNone/>
-            </a:pPr>
-            <a:r>
-              <a:rPr lang="en-US" sz="1600" b="1" dirty="0">
-                <a:solidFill>
-                  <a:srgbClr val="FFFFFF"/>
-                </a:solidFill>
-                <a:latin typeface="Calibri" pitchFamily="34" charset="0"/>
-                <a:ea typeface="Calibri" pitchFamily="34" charset="-122"/>
-                <a:cs typeface="Calibri" pitchFamily="34" charset="-120"/>
-              </a:rPr>
-              <a:t>a</a:t>
-            </a:r>
-            <a:endParaRPr lang="en-US" sz="1600" dirty="0"/>
-          </a:p>
-        </p:txBody>
-      </p:sp>
-      <p:sp>
-        <p:nvSpPr>
-          <p:cNvPr id="6" name="Text 4"/>
-          <p:cNvSpPr txBox="1"/>
-          <p:nvPr/>
-        </p:nvSpPr>
-        <p:spPr>
-          <a:xfrm>
-            <a:off x="1344168" y="1773936"/>
-            <a:ext cx="3044952" cy="841248"/>
-          </a:xfrm>
-          <a:prstGeom prst="rect">
-            <a:avLst/>
-          </a:prstGeom>
-          <a:noFill/>
-          <a:ln/>
-        </p:spPr>
-        <p:txBody>
-          <a:bodyPr wrap="square" lIns="25400" tIns="25400" rIns="25400" bIns="25400" rtlCol="0" anchor="ctr"/>
-          <a:lstStyle/>
-          <a:p>
-            <a:pPr algn="l" indent="0" marL="0">
-              <a:lnSpc>
-                <a:spcPct val="100000"/>
-              </a:lnSpc>
-              <a:buNone/>
-            </a:pPr>
-            <a:r>
-              <a:rPr lang="en-US" sz="1400" dirty="0">
-                <a:solidFill>
-                  <a:srgbClr val="1F2A37"/>
-                </a:solidFill>
-                <a:latin typeface="Calibri" pitchFamily="34" charset="0"/>
-                <a:ea typeface="Calibri" pitchFamily="34" charset="-122"/>
-                <a:cs typeface="Calibri" pitchFamily="34" charset="-120"/>
-              </a:rPr>
-              <a:t>Crescimento com preços estáveis</a:t>
-            </a:r>
-            <a:endParaRPr lang="en-US" sz="1400" dirty="0"/>
-          </a:p>
-        </p:txBody>
-      </p:sp>
-      <p:sp>
-        <p:nvSpPr>
-          <p:cNvPr id="7" name="Shape 5"/>
-          <p:cNvSpPr/>
-          <p:nvPr/>
-        </p:nvSpPr>
-        <p:spPr>
-          <a:xfrm>
-            <a:off x="4663440" y="1737360"/>
-            <a:ext cx="3794760" cy="914400"/>
-          </a:xfrm>
-          <a:prstGeom prst="roundRect">
-            <a:avLst>
-              <a:gd name="adj" fmla="val 8000"/>
-            </a:avLst>
-          </a:prstGeom>
-          <a:solidFill>
-            <a:srgbClr val="FFFFFF"/>
-          </a:solidFill>
-          <a:ln w="12700">
-            <a:solidFill>
-              <a:srgbClr val="DCD5C1"/>
-            </a:solidFill>
-            <a:prstDash val="solid"/>
-          </a:ln>
-        </p:spPr>
-      </p:sp>
-      <p:sp>
-        <p:nvSpPr>
-          <p:cNvPr id="8" name="Text 6"/>
-          <p:cNvSpPr txBox="1"/>
-          <p:nvPr/>
-        </p:nvSpPr>
-        <p:spPr>
-          <a:xfrm>
-            <a:off x="4791456" y="1984248"/>
-            <a:ext cx="420624" cy="420624"/>
-          </a:xfrm>
-          <a:prstGeom prst="roundRect">
-            <a:avLst>
-              <a:gd name="adj" fmla="val 50000"/>
-            </a:avLst>
-          </a:prstGeom>
-          <a:solidFill>
-            <a:srgbClr val="13294B"/>
-          </a:solidFill>
-          <a:ln/>
-        </p:spPr>
-        <p:txBody>
-          <a:bodyPr wrap="square" lIns="0" tIns="0" rIns="0" bIns="0" rtlCol="0" anchor="ctr"/>
-          <a:lstStyle/>
-          <a:p>
-            <a:pPr algn="ctr" indent="0" marL="0">
-              <a:lnSpc>
-                <a:spcPct val="100000"/>
-              </a:lnSpc>
-              <a:buNone/>
-            </a:pPr>
-            <a:r>
-              <a:rPr lang="en-US" sz="1600" b="1" dirty="0">
-                <a:solidFill>
-                  <a:srgbClr val="FFFFFF"/>
-                </a:solidFill>
-                <a:latin typeface="Calibri" pitchFamily="34" charset="0"/>
-                <a:ea typeface="Calibri" pitchFamily="34" charset="-122"/>
-                <a:cs typeface="Calibri" pitchFamily="34" charset="-120"/>
-              </a:rPr>
-              <a:t>b</a:t>
-            </a:r>
-            <a:endParaRPr lang="en-US" sz="1600" dirty="0"/>
-          </a:p>
-        </p:txBody>
-      </p:sp>
-      <p:sp>
-        <p:nvSpPr>
-          <p:cNvPr id="9" name="Text 7"/>
-          <p:cNvSpPr txBox="1"/>
-          <p:nvPr/>
-        </p:nvSpPr>
-        <p:spPr>
-          <a:xfrm>
-            <a:off x="5321808" y="1773936"/>
-            <a:ext cx="3044952" cy="841248"/>
-          </a:xfrm>
-          <a:prstGeom prst="rect">
-            <a:avLst/>
-          </a:prstGeom>
-          <a:noFill/>
-          <a:ln/>
-        </p:spPr>
-        <p:txBody>
-          <a:bodyPr wrap="square" lIns="25400" tIns="25400" rIns="25400" bIns="25400" rtlCol="0" anchor="ctr"/>
-          <a:lstStyle/>
-          <a:p>
-            <a:pPr algn="l" indent="0" marL="0">
-              <a:lnSpc>
-                <a:spcPct val="100000"/>
-              </a:lnSpc>
-              <a:buNone/>
-            </a:pPr>
-            <a:r>
-              <a:rPr lang="en-US" sz="1400" dirty="0">
-                <a:solidFill>
-                  <a:srgbClr val="1F2A37"/>
-                </a:solidFill>
-                <a:latin typeface="Calibri" pitchFamily="34" charset="0"/>
-                <a:ea typeface="Calibri" pitchFamily="34" charset="-122"/>
-                <a:cs typeface="Calibri" pitchFamily="34" charset="-120"/>
-              </a:rPr>
-              <a:t>Estagnação econômica com inflação alta</a:t>
-            </a:r>
-            <a:endParaRPr lang="en-US" sz="1400" dirty="0"/>
-          </a:p>
-        </p:txBody>
-      </p:sp>
-      <p:sp>
-        <p:nvSpPr>
-          <p:cNvPr id="10" name="Shape 8"/>
-          <p:cNvSpPr/>
-          <p:nvPr/>
-        </p:nvSpPr>
-        <p:spPr>
-          <a:xfrm>
-            <a:off x="685800" y="2798064"/>
-            <a:ext cx="3794760" cy="914400"/>
-          </a:xfrm>
-          <a:prstGeom prst="roundRect">
-            <a:avLst>
-              <a:gd name="adj" fmla="val 8000"/>
-            </a:avLst>
-          </a:prstGeom>
-          <a:solidFill>
-            <a:srgbClr val="FFFFFF"/>
-          </a:solidFill>
-          <a:ln w="12700">
-            <a:solidFill>
-              <a:srgbClr val="DCD5C1"/>
-            </a:solidFill>
-            <a:prstDash val="solid"/>
-          </a:ln>
-        </p:spPr>
-      </p:sp>
-      <p:sp>
-        <p:nvSpPr>
-          <p:cNvPr id="11" name="Text 9"/>
-          <p:cNvSpPr txBox="1"/>
-          <p:nvPr/>
-        </p:nvSpPr>
-        <p:spPr>
-          <a:xfrm>
-            <a:off x="813816" y="3044952"/>
-            <a:ext cx="420624" cy="420624"/>
-          </a:xfrm>
-          <a:prstGeom prst="roundRect">
-            <a:avLst>
-              <a:gd name="adj" fmla="val 50000"/>
-            </a:avLst>
-          </a:prstGeom>
-          <a:solidFill>
-            <a:srgbClr val="13294B"/>
-          </a:solidFill>
-          <a:ln/>
-        </p:spPr>
-        <p:txBody>
-          <a:bodyPr wrap="square" lIns="0" tIns="0" rIns="0" bIns="0" rtlCol="0" anchor="ctr"/>
-          <a:lstStyle/>
-          <a:p>
-            <a:pPr algn="ctr" indent="0" marL="0">
-              <a:lnSpc>
-                <a:spcPct val="100000"/>
-              </a:lnSpc>
-              <a:buNone/>
-            </a:pPr>
-            <a:r>
-              <a:rPr lang="en-US" sz="1600" b="1" dirty="0">
-                <a:solidFill>
-                  <a:srgbClr val="FFFFFF"/>
-                </a:solidFill>
-                <a:latin typeface="Calibri" pitchFamily="34" charset="0"/>
-                <a:ea typeface="Calibri" pitchFamily="34" charset="-122"/>
-                <a:cs typeface="Calibri" pitchFamily="34" charset="-120"/>
-              </a:rPr>
-              <a:t>c</a:t>
-            </a:r>
-            <a:endParaRPr lang="en-US" sz="1600" dirty="0"/>
-          </a:p>
-        </p:txBody>
-      </p:sp>
-      <p:sp>
-        <p:nvSpPr>
-          <p:cNvPr id="12" name="Text 10"/>
-          <p:cNvSpPr txBox="1"/>
-          <p:nvPr/>
-        </p:nvSpPr>
-        <p:spPr>
-          <a:xfrm>
-            <a:off x="1344168" y="2834640"/>
-            <a:ext cx="3044952" cy="841248"/>
-          </a:xfrm>
-          <a:prstGeom prst="rect">
-            <a:avLst/>
-          </a:prstGeom>
-          <a:noFill/>
-          <a:ln/>
-        </p:spPr>
-        <p:txBody>
-          <a:bodyPr wrap="square" lIns="25400" tIns="25400" rIns="25400" bIns="25400" rtlCol="0" anchor="ctr"/>
-          <a:lstStyle/>
-          <a:p>
-            <a:pPr algn="l" indent="0" marL="0">
-              <a:lnSpc>
-                <a:spcPct val="100000"/>
-              </a:lnSpc>
-              <a:buNone/>
-            </a:pPr>
-            <a:r>
-              <a:rPr lang="en-US" sz="1400" dirty="0">
-                <a:solidFill>
-                  <a:srgbClr val="1F2A37"/>
-                </a:solidFill>
-                <a:latin typeface="Calibri" pitchFamily="34" charset="0"/>
-                <a:ea typeface="Calibri" pitchFamily="34" charset="-122"/>
-                <a:cs typeface="Calibri" pitchFamily="34" charset="-120"/>
-              </a:rPr>
-              <a:t>Queda de preços com pleno emprego</a:t>
-            </a:r>
-            <a:endParaRPr lang="en-US" sz="1400" dirty="0"/>
-          </a:p>
-        </p:txBody>
-      </p:sp>
-      <p:sp>
-        <p:nvSpPr>
-          <p:cNvPr id="13" name="Shape 11"/>
-          <p:cNvSpPr/>
-          <p:nvPr/>
-        </p:nvSpPr>
-        <p:spPr>
-          <a:xfrm>
-            <a:off x="4663440" y="2798064"/>
-            <a:ext cx="3794760" cy="914400"/>
-          </a:xfrm>
-          <a:prstGeom prst="roundRect">
-            <a:avLst>
-              <a:gd name="adj" fmla="val 8000"/>
-            </a:avLst>
-          </a:prstGeom>
-          <a:solidFill>
-            <a:srgbClr val="FFFFFF"/>
-          </a:solidFill>
-          <a:ln w="12700">
-            <a:solidFill>
-              <a:srgbClr val="DCD5C1"/>
-            </a:solidFill>
-            <a:prstDash val="solid"/>
-          </a:ln>
-        </p:spPr>
-      </p:sp>
-      <p:sp>
-        <p:nvSpPr>
-          <p:cNvPr id="14" name="Text 12"/>
-          <p:cNvSpPr txBox="1"/>
-          <p:nvPr/>
-        </p:nvSpPr>
-        <p:spPr>
-          <a:xfrm>
-            <a:off x="4791456" y="3044952"/>
-            <a:ext cx="420624" cy="420624"/>
-          </a:xfrm>
-          <a:prstGeom prst="roundRect">
-            <a:avLst>
-              <a:gd name="adj" fmla="val 50000"/>
-            </a:avLst>
-          </a:prstGeom>
-          <a:solidFill>
-            <a:srgbClr val="13294B"/>
-          </a:solidFill>
-          <a:ln/>
-        </p:spPr>
-        <p:txBody>
-          <a:bodyPr wrap="square" lIns="0" tIns="0" rIns="0" bIns="0" rtlCol="0" anchor="ctr"/>
-          <a:lstStyle/>
-          <a:p>
-            <a:pPr algn="ctr" indent="0" marL="0">
-              <a:lnSpc>
-                <a:spcPct val="100000"/>
-              </a:lnSpc>
-              <a:buNone/>
-            </a:pPr>
-            <a:r>
-              <a:rPr lang="en-US" sz="1600" b="1" dirty="0">
-                <a:solidFill>
-                  <a:srgbClr val="FFFFFF"/>
-                </a:solidFill>
-                <a:latin typeface="Calibri" pitchFamily="34" charset="0"/>
-                <a:ea typeface="Calibri" pitchFamily="34" charset="-122"/>
-                <a:cs typeface="Calibri" pitchFamily="34" charset="-120"/>
-              </a:rPr>
-              <a:t>d</a:t>
-            </a:r>
-            <a:endParaRPr lang="en-US" sz="1600" dirty="0"/>
-          </a:p>
-        </p:txBody>
-      </p:sp>
-      <p:sp>
-        <p:nvSpPr>
-          <p:cNvPr id="15" name="Text 13"/>
-          <p:cNvSpPr txBox="1"/>
-          <p:nvPr/>
-        </p:nvSpPr>
-        <p:spPr>
-          <a:xfrm>
-            <a:off x="5321808" y="2834640"/>
-            <a:ext cx="3044952" cy="841248"/>
-          </a:xfrm>
-          <a:prstGeom prst="rect">
-            <a:avLst/>
-          </a:prstGeom>
-          <a:noFill/>
-          <a:ln/>
-        </p:spPr>
-        <p:txBody>
-          <a:bodyPr wrap="square" lIns="25400" tIns="25400" rIns="25400" bIns="25400" rtlCol="0" anchor="ctr"/>
-          <a:lstStyle/>
-          <a:p>
-            <a:pPr algn="l" indent="0" marL="0">
-              <a:lnSpc>
-                <a:spcPct val="100000"/>
-              </a:lnSpc>
-              <a:buNone/>
-            </a:pPr>
-            <a:r>
-              <a:rPr lang="en-US" sz="1400" dirty="0">
-                <a:solidFill>
-                  <a:srgbClr val="1F2A37"/>
-                </a:solidFill>
-                <a:latin typeface="Calibri" pitchFamily="34" charset="0"/>
-                <a:ea typeface="Calibri" pitchFamily="34" charset="-122"/>
-                <a:cs typeface="Calibri" pitchFamily="34" charset="-120"/>
-              </a:rPr>
-              <a:t>Crescimento acelerado com desemprego zero</a:t>
-            </a:r>
-            <a:endParaRPr lang="en-US" sz="1400" dirty="0"/>
-          </a:p>
-        </p:txBody>
-      </p:sp>
-      <p:sp>
-        <p:nvSpPr>
-          <p:cNvPr id="16" name="Text 14"/>
-          <p:cNvSpPr txBox="1"/>
-          <p:nvPr/>
-        </p:nvSpPr>
-        <p:spPr>
-          <a:xfrm>
-            <a:off x="4206240" y="36576"/>
-            <a:ext cx="4800600" cy="219456"/>
-          </a:xfrm>
-          <a:prstGeom prst="rect">
-            <a:avLst/>
-          </a:prstGeom>
-          <a:noFill/>
-          <a:ln/>
-        </p:spPr>
-        <p:txBody>
-          <a:bodyPr wrap="square" lIns="0" tIns="0" rIns="0" bIns="0" rtlCol="0" anchor="ctr"/>
-          <a:lstStyle/>
-          <a:p>
-            <a:pPr algn="r" indent="0" marL="0">
-              <a:lnSpc>
-                <a:spcPct val="100000"/>
-              </a:lnSpc>
-              <a:buNone/>
-            </a:pPr>
-            <a:r>
-              <a:rPr lang="en-US" sz="950" dirty="0">
-                <a:solidFill>
-                  <a:srgbClr val="5B6770"/>
-                </a:solidFill>
-                <a:latin typeface="Calibri" pitchFamily="34" charset="0"/>
-                <a:ea typeface="Calibri" pitchFamily="34" charset="-122"/>
-                <a:cs typeface="Calibri" pitchFamily="34" charset="-120"/>
-              </a:rPr>
-              <a:t>Estado, Governo e Mercado · Unidade 4</a:t>
-            </a:r>
-            <a:endParaRPr lang="en-US" sz="950" dirty="0"/>
-          </a:p>
-        </p:txBody>
-      </p:sp>
-    </p:spTree>
-  </p:cSld>
-  <p:clrMapOvr>
-    <a:masterClrMapping/>
-  </p:clrMapOvr>
-</p:sld>
-</file>
-
-<file path=ppt/slides/slide31.xml><?xml version="1.0" encoding="utf-8"?>
-<p:sld xmlns:a="http://schemas.openxmlformats.org/drawingml/2006/main" xmlns:r="http://schemas.openxmlformats.org/officeDocument/2006/relationships" xmlns:p="http://schemas.openxmlformats.org/presentationml/2006/main">
-  <p:cSld name="Slide 31">
-    <p:bg>
-      <p:bgPr>
-        <a:blipFill dpi="0" rotWithShape="1">
-          <a:blip r:embed="rId1">
-            <a:lum/>
-          </a:blip>
-          <a:srcRect/>
-          <a:stretch>
-            <a:fillRect/>
-          </a:stretch>
-        </a:blipFill>
-        <a:effectLst/>
-      </p:bgPr>
-    </p:bg>
-    <p:spTree>
-      <p:nvGrpSpPr>
-        <p:cNvPr id="1" name=""/>
-        <p:cNvGrpSpPr/>
-        <p:nvPr/>
-      </p:nvGrpSpPr>
-      <p:grpSpPr>
-        <a:xfrm>
-          <a:off x="0" y="0"/>
-          <a:ext cx="0" cy="0"/>
-          <a:chOff x="0" y="0"/>
-          <a:chExt cx="0" cy="0"/>
-        </a:xfrm>
-      </p:grpSpPr>
-      <p:sp>
-        <p:nvSpPr>
-          <p:cNvPr id="2" name="Text 0"/>
-          <p:cNvSpPr txBox="1"/>
-          <p:nvPr/>
-        </p:nvSpPr>
-        <p:spPr>
-          <a:xfrm>
-            <a:off x="731520" y="274320"/>
-            <a:ext cx="7680960" cy="365760"/>
-          </a:xfrm>
-          <a:prstGeom prst="rect">
-            <a:avLst/>
-          </a:prstGeom>
-          <a:noFill/>
-          <a:ln/>
-        </p:spPr>
-        <p:txBody>
-          <a:bodyPr wrap="square" lIns="0" tIns="0" rIns="0" bIns="0" rtlCol="0" anchor="ctr"/>
-          <a:lstStyle/>
-          <a:p>
-            <a:pPr algn="ctr" indent="0" marL="0">
-              <a:lnSpc>
-                <a:spcPct val="100000"/>
-              </a:lnSpc>
-              <a:buNone/>
-            </a:pPr>
-            <a:r>
-              <a:rPr lang="en-US" sz="1250" b="1" dirty="0">
-                <a:solidFill>
-                  <a:srgbClr val="2A8C85"/>
-                </a:solidFill>
-                <a:latin typeface="Calibri" pitchFamily="34" charset="0"/>
-                <a:ea typeface="Calibri" pitchFamily="34" charset="-122"/>
-                <a:cs typeface="Calibri" pitchFamily="34" charset="-120"/>
-              </a:rPr>
-              <a:t>QUIZ DA UNIDADE 4 · PERGUNTA 3 DE 5 · RESPOSTA</a:t>
-            </a:r>
-            <a:endParaRPr lang="en-US" sz="1250" dirty="0"/>
-          </a:p>
-        </p:txBody>
-      </p:sp>
-      <p:sp>
-        <p:nvSpPr>
-          <p:cNvPr id="3" name="Text 1"/>
-          <p:cNvSpPr txBox="1"/>
-          <p:nvPr/>
-        </p:nvSpPr>
-        <p:spPr>
-          <a:xfrm>
-            <a:off x="731520" y="658368"/>
-            <a:ext cx="7680960" cy="960120"/>
-          </a:xfrm>
-          <a:prstGeom prst="rect">
-            <a:avLst/>
-          </a:prstGeom>
-          <a:noFill/>
-          <a:ln/>
-        </p:spPr>
-        <p:txBody>
-          <a:bodyPr wrap="square" lIns="0" tIns="0" rIns="0" bIns="0" rtlCol="0" anchor="ctr"/>
-          <a:lstStyle/>
-          <a:p>
-            <a:pPr algn="ctr" indent="0" marL="0">
-              <a:lnSpc>
-                <a:spcPct val="100000"/>
-              </a:lnSpc>
-              <a:buNone/>
-            </a:pPr>
-            <a:r>
-              <a:rPr lang="en-US" sz="1900" b="1" dirty="0">
-                <a:solidFill>
-                  <a:srgbClr val="13294B"/>
-                </a:solidFill>
-                <a:latin typeface="Calibri" pitchFamily="34" charset="0"/>
-                <a:ea typeface="Calibri" pitchFamily="34" charset="-122"/>
-                <a:cs typeface="Calibri" pitchFamily="34" charset="-120"/>
-              </a:rPr>
-              <a:t>O que é estagflação?</a:t>
-            </a:r>
-            <a:endParaRPr lang="en-US" sz="1900" dirty="0"/>
-          </a:p>
-        </p:txBody>
-      </p:sp>
-      <p:sp>
-        <p:nvSpPr>
-          <p:cNvPr id="4" name="Shape 2"/>
-          <p:cNvSpPr/>
-          <p:nvPr/>
-        </p:nvSpPr>
-        <p:spPr>
-          <a:xfrm>
-            <a:off x="685800" y="1737360"/>
-            <a:ext cx="3794760" cy="749808"/>
-          </a:xfrm>
-          <a:prstGeom prst="roundRect">
-            <a:avLst>
-              <a:gd name="adj" fmla="val 9756"/>
-            </a:avLst>
-          </a:prstGeom>
-          <a:solidFill>
-            <a:srgbClr val="FFFFFF"/>
-          </a:solidFill>
-          <a:ln w="12700">
-            <a:solidFill>
-              <a:srgbClr val="DCD5C1"/>
-            </a:solidFill>
-            <a:prstDash val="solid"/>
-          </a:ln>
-        </p:spPr>
-      </p:sp>
-      <p:sp>
-        <p:nvSpPr>
-          <p:cNvPr id="5" name="Text 3"/>
-          <p:cNvSpPr txBox="1"/>
-          <p:nvPr/>
-        </p:nvSpPr>
-        <p:spPr>
-          <a:xfrm>
-            <a:off x="813816" y="1901952"/>
-            <a:ext cx="420624" cy="420624"/>
-          </a:xfrm>
-          <a:prstGeom prst="roundRect">
-            <a:avLst>
-              <a:gd name="adj" fmla="val 50000"/>
-            </a:avLst>
-          </a:prstGeom>
-          <a:solidFill>
-            <a:srgbClr val="9AA3AB"/>
-          </a:solidFill>
-          <a:ln/>
-        </p:spPr>
-        <p:txBody>
-          <a:bodyPr wrap="square" lIns="0" tIns="0" rIns="0" bIns="0" rtlCol="0" anchor="ctr"/>
-          <a:lstStyle/>
-          <a:p>
-            <a:pPr algn="ctr" indent="0" marL="0">
-              <a:lnSpc>
-                <a:spcPct val="100000"/>
-              </a:lnSpc>
-              <a:buNone/>
-            </a:pPr>
-            <a:r>
-              <a:rPr lang="en-US" sz="1600" b="1" dirty="0">
-                <a:solidFill>
-                  <a:srgbClr val="FFFFFF"/>
-                </a:solidFill>
-                <a:latin typeface="Calibri" pitchFamily="34" charset="0"/>
-                <a:ea typeface="Calibri" pitchFamily="34" charset="-122"/>
-                <a:cs typeface="Calibri" pitchFamily="34" charset="-120"/>
-              </a:rPr>
-              <a:t>a</a:t>
-            </a:r>
-            <a:endParaRPr lang="en-US" sz="1600" dirty="0"/>
-          </a:p>
-        </p:txBody>
-      </p:sp>
-      <p:sp>
-        <p:nvSpPr>
-          <p:cNvPr id="6" name="Text 4"/>
-          <p:cNvSpPr txBox="1"/>
-          <p:nvPr/>
-        </p:nvSpPr>
-        <p:spPr>
-          <a:xfrm>
-            <a:off x="1344168" y="1773936"/>
-            <a:ext cx="3044952" cy="676656"/>
-          </a:xfrm>
-          <a:prstGeom prst="rect">
-            <a:avLst/>
-          </a:prstGeom>
-          <a:noFill/>
-          <a:ln/>
-        </p:spPr>
-        <p:txBody>
-          <a:bodyPr wrap="square" lIns="25400" tIns="25400" rIns="25400" bIns="25400" rtlCol="0" anchor="ctr"/>
-          <a:lstStyle/>
-          <a:p>
-            <a:pPr algn="l" indent="0" marL="0">
-              <a:lnSpc>
-                <a:spcPct val="100000"/>
-              </a:lnSpc>
-              <a:buNone/>
-            </a:pPr>
-            <a:r>
-              <a:rPr lang="en-US" sz="1400" dirty="0">
-                <a:solidFill>
-                  <a:srgbClr val="5B6770"/>
-                </a:solidFill>
-                <a:latin typeface="Calibri" pitchFamily="34" charset="0"/>
-                <a:ea typeface="Calibri" pitchFamily="34" charset="-122"/>
-                <a:cs typeface="Calibri" pitchFamily="34" charset="-120"/>
-              </a:rPr>
-              <a:t>Crescimento com preços estáveis</a:t>
-            </a:r>
-            <a:endParaRPr lang="en-US" sz="1400" dirty="0"/>
-          </a:p>
-        </p:txBody>
-      </p:sp>
-      <p:sp>
-        <p:nvSpPr>
-          <p:cNvPr id="7" name="Shape 5"/>
-          <p:cNvSpPr/>
-          <p:nvPr/>
-        </p:nvSpPr>
-        <p:spPr>
-          <a:xfrm>
-            <a:off x="4663440" y="1737360"/>
-            <a:ext cx="3794760" cy="749808"/>
-          </a:xfrm>
-          <a:prstGeom prst="roundRect">
-            <a:avLst>
-              <a:gd name="adj" fmla="val 9756"/>
-            </a:avLst>
-          </a:prstGeom>
-          <a:solidFill>
-            <a:srgbClr val="E3F2E8"/>
-          </a:solidFill>
-          <a:ln w="25400">
-            <a:solidFill>
-              <a:srgbClr val="2E7D4F"/>
-            </a:solidFill>
-            <a:prstDash val="solid"/>
-          </a:ln>
-        </p:spPr>
-      </p:sp>
-      <p:sp>
-        <p:nvSpPr>
-          <p:cNvPr id="8" name="Text 6"/>
-          <p:cNvSpPr txBox="1"/>
-          <p:nvPr/>
-        </p:nvSpPr>
-        <p:spPr>
-          <a:xfrm>
-            <a:off x="4791456" y="1901952"/>
-            <a:ext cx="420624" cy="420624"/>
-          </a:xfrm>
-          <a:prstGeom prst="roundRect">
-            <a:avLst>
-              <a:gd name="adj" fmla="val 50000"/>
-            </a:avLst>
-          </a:prstGeom>
-          <a:solidFill>
-            <a:srgbClr val="2E7D4F"/>
-          </a:solidFill>
-          <a:ln/>
-        </p:spPr>
-        <p:txBody>
-          <a:bodyPr wrap="square" lIns="0" tIns="0" rIns="0" bIns="0" rtlCol="0" anchor="ctr"/>
-          <a:lstStyle/>
-          <a:p>
-            <a:pPr algn="ctr" indent="0" marL="0">
-              <a:lnSpc>
-                <a:spcPct val="100000"/>
-              </a:lnSpc>
-              <a:buNone/>
-            </a:pPr>
-            <a:r>
-              <a:rPr lang="en-US" sz="1600" b="1" dirty="0">
-                <a:solidFill>
-                  <a:srgbClr val="FFFFFF"/>
-                </a:solidFill>
-                <a:latin typeface="Calibri" pitchFamily="34" charset="0"/>
-                <a:ea typeface="Calibri" pitchFamily="34" charset="-122"/>
-                <a:cs typeface="Calibri" pitchFamily="34" charset="-120"/>
-              </a:rPr>
-              <a:t>b</a:t>
-            </a:r>
-            <a:endParaRPr lang="en-US" sz="1600" dirty="0"/>
-          </a:p>
-        </p:txBody>
-      </p:sp>
-      <p:sp>
-        <p:nvSpPr>
-          <p:cNvPr id="9" name="Text 7"/>
-          <p:cNvSpPr txBox="1"/>
-          <p:nvPr/>
-        </p:nvSpPr>
-        <p:spPr>
-          <a:xfrm>
-            <a:off x="5321808" y="1773936"/>
-            <a:ext cx="3044952" cy="676656"/>
-          </a:xfrm>
-          <a:prstGeom prst="rect">
-            <a:avLst/>
-          </a:prstGeom>
-          <a:noFill/>
-          <a:ln/>
-        </p:spPr>
-        <p:txBody>
-          <a:bodyPr wrap="square" lIns="25400" tIns="25400" rIns="25400" bIns="25400" rtlCol="0" anchor="ctr"/>
-          <a:lstStyle/>
-          <a:p>
-            <a:pPr algn="l" indent="0" marL="0">
-              <a:lnSpc>
-                <a:spcPct val="100000"/>
-              </a:lnSpc>
-              <a:buNone/>
-            </a:pPr>
-            <a:r>
-              <a:rPr lang="en-US" sz="1400" b="1" dirty="0">
-                <a:solidFill>
-                  <a:srgbClr val="1F2A37"/>
-                </a:solidFill>
-                <a:latin typeface="Calibri" pitchFamily="34" charset="0"/>
-                <a:ea typeface="Calibri" pitchFamily="34" charset="-122"/>
-                <a:cs typeface="Calibri" pitchFamily="34" charset="-120"/>
-              </a:rPr>
-              <a:t>Estagnação econômica com inflação alta</a:t>
-            </a:r>
-            <a:endParaRPr lang="en-US" sz="1400" dirty="0"/>
-          </a:p>
-        </p:txBody>
-      </p:sp>
-      <p:sp>
-        <p:nvSpPr>
-          <p:cNvPr id="10" name="Shape 8"/>
-          <p:cNvSpPr/>
-          <p:nvPr/>
-        </p:nvSpPr>
-        <p:spPr>
-          <a:xfrm>
-            <a:off x="685800" y="2633472"/>
-            <a:ext cx="3794760" cy="749808"/>
-          </a:xfrm>
-          <a:prstGeom prst="roundRect">
-            <a:avLst>
-              <a:gd name="adj" fmla="val 9756"/>
-            </a:avLst>
-          </a:prstGeom>
-          <a:solidFill>
-            <a:srgbClr val="FFFFFF"/>
-          </a:solidFill>
-          <a:ln w="12700">
-            <a:solidFill>
-              <a:srgbClr val="DCD5C1"/>
-            </a:solidFill>
-            <a:prstDash val="solid"/>
-          </a:ln>
-        </p:spPr>
-      </p:sp>
-      <p:sp>
-        <p:nvSpPr>
-          <p:cNvPr id="11" name="Text 9"/>
-          <p:cNvSpPr txBox="1"/>
-          <p:nvPr/>
-        </p:nvSpPr>
-        <p:spPr>
-          <a:xfrm>
-            <a:off x="813816" y="2798064"/>
-            <a:ext cx="420624" cy="420624"/>
-          </a:xfrm>
-          <a:prstGeom prst="roundRect">
-            <a:avLst>
-              <a:gd name="adj" fmla="val 50000"/>
-            </a:avLst>
-          </a:prstGeom>
-          <a:solidFill>
-            <a:srgbClr val="9AA3AB"/>
-          </a:solidFill>
-          <a:ln/>
-        </p:spPr>
-        <p:txBody>
-          <a:bodyPr wrap="square" lIns="0" tIns="0" rIns="0" bIns="0" rtlCol="0" anchor="ctr"/>
-          <a:lstStyle/>
-          <a:p>
-            <a:pPr algn="ctr" indent="0" marL="0">
-              <a:lnSpc>
-                <a:spcPct val="100000"/>
-              </a:lnSpc>
-              <a:buNone/>
-            </a:pPr>
-            <a:r>
-              <a:rPr lang="en-US" sz="1600" b="1" dirty="0">
-                <a:solidFill>
-                  <a:srgbClr val="FFFFFF"/>
-                </a:solidFill>
-                <a:latin typeface="Calibri" pitchFamily="34" charset="0"/>
-                <a:ea typeface="Calibri" pitchFamily="34" charset="-122"/>
-                <a:cs typeface="Calibri" pitchFamily="34" charset="-120"/>
-              </a:rPr>
-              <a:t>c</a:t>
-            </a:r>
-            <a:endParaRPr lang="en-US" sz="1600" dirty="0"/>
-          </a:p>
-        </p:txBody>
-      </p:sp>
-      <p:sp>
-        <p:nvSpPr>
-          <p:cNvPr id="12" name="Text 10"/>
-          <p:cNvSpPr txBox="1"/>
-          <p:nvPr/>
-        </p:nvSpPr>
-        <p:spPr>
-          <a:xfrm>
-            <a:off x="1344168" y="2670048"/>
-            <a:ext cx="3044952" cy="676656"/>
-          </a:xfrm>
-          <a:prstGeom prst="rect">
-            <a:avLst/>
-          </a:prstGeom>
-          <a:noFill/>
-          <a:ln/>
-        </p:spPr>
-        <p:txBody>
-          <a:bodyPr wrap="square" lIns="25400" tIns="25400" rIns="25400" bIns="25400" rtlCol="0" anchor="ctr"/>
-          <a:lstStyle/>
-          <a:p>
-            <a:pPr algn="l" indent="0" marL="0">
-              <a:lnSpc>
-                <a:spcPct val="100000"/>
-              </a:lnSpc>
-              <a:buNone/>
-            </a:pPr>
-            <a:r>
-              <a:rPr lang="en-US" sz="1400" dirty="0">
-                <a:solidFill>
-                  <a:srgbClr val="5B6770"/>
-                </a:solidFill>
-                <a:latin typeface="Calibri" pitchFamily="34" charset="0"/>
-                <a:ea typeface="Calibri" pitchFamily="34" charset="-122"/>
-                <a:cs typeface="Calibri" pitchFamily="34" charset="-120"/>
-              </a:rPr>
-              <a:t>Queda de preços com pleno emprego</a:t>
-            </a:r>
-            <a:endParaRPr lang="en-US" sz="1400" dirty="0"/>
-          </a:p>
-        </p:txBody>
-      </p:sp>
-      <p:sp>
-        <p:nvSpPr>
-          <p:cNvPr id="13" name="Shape 11"/>
-          <p:cNvSpPr/>
-          <p:nvPr/>
-        </p:nvSpPr>
-        <p:spPr>
-          <a:xfrm>
-            <a:off x="4663440" y="2633472"/>
-            <a:ext cx="3794760" cy="749808"/>
-          </a:xfrm>
-          <a:prstGeom prst="roundRect">
-            <a:avLst>
-              <a:gd name="adj" fmla="val 9756"/>
-            </a:avLst>
-          </a:prstGeom>
-          <a:solidFill>
-            <a:srgbClr val="FFFFFF"/>
-          </a:solidFill>
-          <a:ln w="12700">
-            <a:solidFill>
-              <a:srgbClr val="DCD5C1"/>
-            </a:solidFill>
-            <a:prstDash val="solid"/>
-          </a:ln>
-        </p:spPr>
-      </p:sp>
-      <p:sp>
-        <p:nvSpPr>
-          <p:cNvPr id="14" name="Text 12"/>
-          <p:cNvSpPr txBox="1"/>
-          <p:nvPr/>
-        </p:nvSpPr>
-        <p:spPr>
-          <a:xfrm>
-            <a:off x="4791456" y="2798064"/>
-            <a:ext cx="420624" cy="420624"/>
-          </a:xfrm>
-          <a:prstGeom prst="roundRect">
-            <a:avLst>
-              <a:gd name="adj" fmla="val 50000"/>
-            </a:avLst>
-          </a:prstGeom>
-          <a:solidFill>
-            <a:srgbClr val="9AA3AB"/>
-          </a:solidFill>
-          <a:ln/>
-        </p:spPr>
-        <p:txBody>
-          <a:bodyPr wrap="square" lIns="0" tIns="0" rIns="0" bIns="0" rtlCol="0" anchor="ctr"/>
-          <a:lstStyle/>
-          <a:p>
-            <a:pPr algn="ctr" indent="0" marL="0">
-              <a:lnSpc>
-                <a:spcPct val="100000"/>
-              </a:lnSpc>
-              <a:buNone/>
-            </a:pPr>
-            <a:r>
-              <a:rPr lang="en-US" sz="1600" b="1" dirty="0">
-                <a:solidFill>
-                  <a:srgbClr val="FFFFFF"/>
-                </a:solidFill>
-                <a:latin typeface="Calibri" pitchFamily="34" charset="0"/>
-                <a:ea typeface="Calibri" pitchFamily="34" charset="-122"/>
-                <a:cs typeface="Calibri" pitchFamily="34" charset="-120"/>
-              </a:rPr>
-              <a:t>d</a:t>
-            </a:r>
-            <a:endParaRPr lang="en-US" sz="1600" dirty="0"/>
-          </a:p>
-        </p:txBody>
-      </p:sp>
-      <p:sp>
-        <p:nvSpPr>
-          <p:cNvPr id="15" name="Text 13"/>
-          <p:cNvSpPr txBox="1"/>
-          <p:nvPr/>
-        </p:nvSpPr>
-        <p:spPr>
-          <a:xfrm>
-            <a:off x="5321808" y="2670048"/>
-            <a:ext cx="3044952" cy="676656"/>
-          </a:xfrm>
-          <a:prstGeom prst="rect">
-            <a:avLst/>
-          </a:prstGeom>
-          <a:noFill/>
-          <a:ln/>
-        </p:spPr>
-        <p:txBody>
-          <a:bodyPr wrap="square" lIns="25400" tIns="25400" rIns="25400" bIns="25400" rtlCol="0" anchor="ctr"/>
-          <a:lstStyle/>
-          <a:p>
-            <a:pPr algn="l" indent="0" marL="0">
-              <a:lnSpc>
-                <a:spcPct val="100000"/>
-              </a:lnSpc>
-              <a:buNone/>
-            </a:pPr>
-            <a:r>
-              <a:rPr lang="en-US" sz="1400" dirty="0">
-                <a:solidFill>
-                  <a:srgbClr val="5B6770"/>
-                </a:solidFill>
-                <a:latin typeface="Calibri" pitchFamily="34" charset="0"/>
-                <a:ea typeface="Calibri" pitchFamily="34" charset="-122"/>
-                <a:cs typeface="Calibri" pitchFamily="34" charset="-120"/>
-              </a:rPr>
-              <a:t>Crescimento acelerado com desemprego zero</a:t>
-            </a:r>
-            <a:endParaRPr lang="en-US" sz="1400" dirty="0"/>
-          </a:p>
-        </p:txBody>
-      </p:sp>
-      <p:sp>
-        <p:nvSpPr>
-          <p:cNvPr id="16" name="Text 14"/>
-          <p:cNvSpPr txBox="1"/>
-          <p:nvPr/>
-        </p:nvSpPr>
-        <p:spPr>
-          <a:xfrm>
-            <a:off x="685800" y="3566160"/>
-            <a:ext cx="7772400" cy="841248"/>
-          </a:xfrm>
-          <a:prstGeom prst="roundRect">
-            <a:avLst>
-              <a:gd name="adj" fmla="val 8696"/>
-            </a:avLst>
-          </a:prstGeom>
-          <a:solidFill>
-            <a:srgbClr val="E6F2F0"/>
-          </a:solidFill>
-          <a:ln/>
-        </p:spPr>
-        <p:txBody>
-          <a:bodyPr wrap="square" lIns="114300" tIns="114300" rIns="114300" bIns="114300" rtlCol="0" anchor="ctr"/>
-          <a:lstStyle/>
-          <a:p>
-            <a:pPr algn="l" indent="0" marL="0">
-              <a:lnSpc>
-                <a:spcPct val="100000"/>
-              </a:lnSpc>
-              <a:buNone/>
-            </a:pPr>
-            <a:r>
-              <a:rPr lang="en-US" sz="1350" b="1" dirty="0">
-                <a:solidFill>
-                  <a:srgbClr val="2E7D4F"/>
-                </a:solidFill>
-                <a:latin typeface="Calibri" pitchFamily="34" charset="0"/>
-                <a:ea typeface="Calibri" pitchFamily="34" charset="-122"/>
-                <a:cs typeface="Calibri" pitchFamily="34" charset="-120"/>
-              </a:rPr>
-              <a:t>Resposta: b) </a:t>
-            </a:r>
-            <a:pPr algn="l" indent="0" marL="0">
-              <a:lnSpc>
-                <a:spcPct val="100000"/>
-              </a:lnSpc>
-              <a:buNone/>
-            </a:pPr>
-            <a:r>
-              <a:rPr lang="en-US" sz="1350" dirty="0">
-                <a:solidFill>
-                  <a:srgbClr val="1F2A37"/>
-                </a:solidFill>
-                <a:latin typeface="Calibri" pitchFamily="34" charset="0"/>
-                <a:ea typeface="Calibri" pitchFamily="34" charset="-122"/>
-                <a:cs typeface="Calibri" pitchFamily="34" charset="-120"/>
-              </a:rPr>
-              <a:t>Nos anos 1970, estagnação e inflação ocorreram juntas, o que abalou o receituário keynesiano e abriu espaço ao neoliberalismo.</a:t>
-            </a:r>
-            <a:endParaRPr lang="en-US" sz="1350" dirty="0"/>
-          </a:p>
-        </p:txBody>
-      </p:sp>
-      <p:sp>
-        <p:nvSpPr>
-          <p:cNvPr id="17" name="Text 15"/>
-          <p:cNvSpPr txBox="1"/>
-          <p:nvPr/>
-        </p:nvSpPr>
-        <p:spPr>
-          <a:xfrm>
-            <a:off x="4206240" y="36576"/>
-            <a:ext cx="4800600" cy="219456"/>
-          </a:xfrm>
-          <a:prstGeom prst="rect">
-            <a:avLst/>
-          </a:prstGeom>
-          <a:noFill/>
-          <a:ln/>
-        </p:spPr>
-        <p:txBody>
-          <a:bodyPr wrap="square" lIns="0" tIns="0" rIns="0" bIns="0" rtlCol="0" anchor="ctr"/>
-          <a:lstStyle/>
-          <a:p>
-            <a:pPr algn="r" indent="0" marL="0">
-              <a:lnSpc>
-                <a:spcPct val="100000"/>
-              </a:lnSpc>
-              <a:buNone/>
-            </a:pPr>
-            <a:r>
-              <a:rPr lang="en-US" sz="950" dirty="0">
-                <a:solidFill>
-                  <a:srgbClr val="5B6770"/>
-                </a:solidFill>
-                <a:latin typeface="Calibri" pitchFamily="34" charset="0"/>
-                <a:ea typeface="Calibri" pitchFamily="34" charset="-122"/>
-                <a:cs typeface="Calibri" pitchFamily="34" charset="-120"/>
-              </a:rPr>
-              <a:t>Estado, Governo e Mercado · Unidade 4</a:t>
-            </a:r>
-            <a:endParaRPr lang="en-US" sz="950" dirty="0"/>
-          </a:p>
-        </p:txBody>
-      </p:sp>
-    </p:spTree>
-  </p:cSld>
-  <p:clrMapOvr>
-    <a:masterClrMapping/>
-  </p:clrMapOvr>
-</p:sld>
-</file>
-
-<file path=ppt/slides/slide32.xml><?xml version="1.0" encoding="utf-8"?>
-<p:sld xmlns:a="http://schemas.openxmlformats.org/drawingml/2006/main" xmlns:r="http://schemas.openxmlformats.org/officeDocument/2006/relationships" xmlns:p="http://schemas.openxmlformats.org/presentationml/2006/main">
-  <p:cSld name="Slide 32">
-    <p:bg>
-      <p:bgPr>
-        <a:blipFill dpi="0" rotWithShape="1">
-          <a:blip r:embed="rId1">
-            <a:lum/>
-          </a:blip>
-          <a:srcRect/>
-          <a:stretch>
-            <a:fillRect/>
-          </a:stretch>
-        </a:blipFill>
-        <a:effectLst/>
-      </p:bgPr>
-    </p:bg>
-    <p:spTree>
-      <p:nvGrpSpPr>
-        <p:cNvPr id="1" name=""/>
-        <p:cNvGrpSpPr/>
-        <p:nvPr/>
-      </p:nvGrpSpPr>
-      <p:grpSpPr>
-        <a:xfrm>
-          <a:off x="0" y="0"/>
-          <a:ext cx="0" cy="0"/>
-          <a:chOff x="0" y="0"/>
-          <a:chExt cx="0" cy="0"/>
-        </a:xfrm>
-      </p:grpSpPr>
-      <p:sp>
-        <p:nvSpPr>
-          <p:cNvPr id="2" name="Text 0"/>
-          <p:cNvSpPr txBox="1"/>
-          <p:nvPr/>
-        </p:nvSpPr>
-        <p:spPr>
-          <a:xfrm>
-            <a:off x="731520" y="274320"/>
-            <a:ext cx="7680960" cy="365760"/>
-          </a:xfrm>
-          <a:prstGeom prst="rect">
-            <a:avLst/>
-          </a:prstGeom>
-          <a:noFill/>
-          <a:ln/>
-        </p:spPr>
-        <p:txBody>
-          <a:bodyPr wrap="square" lIns="0" tIns="0" rIns="0" bIns="0" rtlCol="0" anchor="ctr"/>
-          <a:lstStyle/>
-          <a:p>
-            <a:pPr algn="ctr" indent="0" marL="0">
-              <a:lnSpc>
-                <a:spcPct val="100000"/>
-              </a:lnSpc>
-              <a:buNone/>
-            </a:pPr>
-            <a:r>
-              <a:rPr lang="en-US" sz="1250" b="1" dirty="0">
-                <a:solidFill>
-                  <a:srgbClr val="2A8C85"/>
-                </a:solidFill>
-                <a:latin typeface="Calibri" pitchFamily="34" charset="0"/>
-                <a:ea typeface="Calibri" pitchFamily="34" charset="-122"/>
-                <a:cs typeface="Calibri" pitchFamily="34" charset="-120"/>
-              </a:rPr>
-              <a:t>QUIZ DA UNIDADE 4 · PERGUNTA 4 DE 5</a:t>
-            </a:r>
-            <a:endParaRPr lang="en-US" sz="1250" dirty="0"/>
-          </a:p>
-        </p:txBody>
-      </p:sp>
-      <p:sp>
-        <p:nvSpPr>
-          <p:cNvPr id="3" name="Text 1"/>
-          <p:cNvSpPr txBox="1"/>
-          <p:nvPr/>
-        </p:nvSpPr>
-        <p:spPr>
-          <a:xfrm>
-            <a:off x="731520" y="658368"/>
-            <a:ext cx="7680960" cy="960120"/>
-          </a:xfrm>
-          <a:prstGeom prst="rect">
-            <a:avLst/>
-          </a:prstGeom>
-          <a:noFill/>
-          <a:ln/>
-        </p:spPr>
-        <p:txBody>
-          <a:bodyPr wrap="square" lIns="0" tIns="0" rIns="0" bIns="0" rtlCol="0" anchor="ctr"/>
-          <a:lstStyle/>
-          <a:p>
-            <a:pPr algn="ctr" indent="0" marL="0">
-              <a:lnSpc>
-                <a:spcPct val="100000"/>
-              </a:lnSpc>
-              <a:buNone/>
-            </a:pPr>
-            <a:r>
-              <a:rPr lang="en-US" sz="1900" b="1" dirty="0">
-                <a:solidFill>
-                  <a:srgbClr val="13294B"/>
-                </a:solidFill>
-                <a:latin typeface="Calibri" pitchFamily="34" charset="0"/>
-                <a:ea typeface="Calibri" pitchFamily="34" charset="-122"/>
-                <a:cs typeface="Calibri" pitchFamily="34" charset="-120"/>
-              </a:rPr>
-              <a:t>O Plano Diretor da Reforma do Aparelho do Estado (1995) propôs a passagem da administração:</a:t>
-            </a:r>
-            <a:endParaRPr lang="en-US" sz="1900" dirty="0"/>
-          </a:p>
-        </p:txBody>
-      </p:sp>
-      <p:sp>
-        <p:nvSpPr>
-          <p:cNvPr id="4" name="Shape 2"/>
-          <p:cNvSpPr/>
-          <p:nvPr/>
-        </p:nvSpPr>
-        <p:spPr>
-          <a:xfrm>
-            <a:off x="685800" y="1737360"/>
-            <a:ext cx="3794760" cy="914400"/>
-          </a:xfrm>
-          <a:prstGeom prst="roundRect">
-            <a:avLst>
-              <a:gd name="adj" fmla="val 8000"/>
-            </a:avLst>
-          </a:prstGeom>
-          <a:solidFill>
-            <a:srgbClr val="FFFFFF"/>
-          </a:solidFill>
-          <a:ln w="12700">
-            <a:solidFill>
-              <a:srgbClr val="DCD5C1"/>
-            </a:solidFill>
-            <a:prstDash val="solid"/>
-          </a:ln>
-        </p:spPr>
-      </p:sp>
-      <p:sp>
-        <p:nvSpPr>
-          <p:cNvPr id="5" name="Text 3"/>
-          <p:cNvSpPr txBox="1"/>
-          <p:nvPr/>
-        </p:nvSpPr>
-        <p:spPr>
-          <a:xfrm>
-            <a:off x="813816" y="1984248"/>
-            <a:ext cx="420624" cy="420624"/>
-          </a:xfrm>
-          <a:prstGeom prst="roundRect">
-            <a:avLst>
-              <a:gd name="adj" fmla="val 50000"/>
-            </a:avLst>
-          </a:prstGeom>
-          <a:solidFill>
-            <a:srgbClr val="13294B"/>
-          </a:solidFill>
-          <a:ln/>
-        </p:spPr>
-        <p:txBody>
-          <a:bodyPr wrap="square" lIns="0" tIns="0" rIns="0" bIns="0" rtlCol="0" anchor="ctr"/>
-          <a:lstStyle/>
-          <a:p>
-            <a:pPr algn="ctr" indent="0" marL="0">
-              <a:lnSpc>
-                <a:spcPct val="100000"/>
-              </a:lnSpc>
-              <a:buNone/>
-            </a:pPr>
-            <a:r>
-              <a:rPr lang="en-US" sz="1600" b="1" dirty="0">
-                <a:solidFill>
-                  <a:srgbClr val="FFFFFF"/>
-                </a:solidFill>
-                <a:latin typeface="Calibri" pitchFamily="34" charset="0"/>
-                <a:ea typeface="Calibri" pitchFamily="34" charset="-122"/>
-                <a:cs typeface="Calibri" pitchFamily="34" charset="-120"/>
-              </a:rPr>
-              <a:t>a</a:t>
-            </a:r>
-            <a:endParaRPr lang="en-US" sz="1600" dirty="0"/>
-          </a:p>
-        </p:txBody>
-      </p:sp>
-      <p:sp>
-        <p:nvSpPr>
-          <p:cNvPr id="6" name="Text 4"/>
-          <p:cNvSpPr txBox="1"/>
-          <p:nvPr/>
-        </p:nvSpPr>
-        <p:spPr>
-          <a:xfrm>
-            <a:off x="1344168" y="1773936"/>
-            <a:ext cx="3044952" cy="841248"/>
-          </a:xfrm>
-          <a:prstGeom prst="rect">
-            <a:avLst/>
-          </a:prstGeom>
-          <a:noFill/>
-          <a:ln/>
-        </p:spPr>
-        <p:txBody>
-          <a:bodyPr wrap="square" lIns="25400" tIns="25400" rIns="25400" bIns="25400" rtlCol="0" anchor="ctr"/>
-          <a:lstStyle/>
-          <a:p>
-            <a:pPr algn="l" indent="0" marL="0">
-              <a:lnSpc>
-                <a:spcPct val="100000"/>
-              </a:lnSpc>
-              <a:buNone/>
-            </a:pPr>
-            <a:r>
-              <a:rPr lang="en-US" sz="1400" dirty="0">
-                <a:solidFill>
-                  <a:srgbClr val="1F2A37"/>
-                </a:solidFill>
-                <a:latin typeface="Calibri" pitchFamily="34" charset="0"/>
-                <a:ea typeface="Calibri" pitchFamily="34" charset="-122"/>
-                <a:cs typeface="Calibri" pitchFamily="34" charset="-120"/>
-              </a:rPr>
-              <a:t>Gerencial para patrimonialista</a:t>
-            </a:r>
-            <a:endParaRPr lang="en-US" sz="1400" dirty="0"/>
-          </a:p>
-        </p:txBody>
-      </p:sp>
-      <p:sp>
-        <p:nvSpPr>
-          <p:cNvPr id="7" name="Shape 5"/>
-          <p:cNvSpPr/>
-          <p:nvPr/>
-        </p:nvSpPr>
-        <p:spPr>
-          <a:xfrm>
-            <a:off x="4663440" y="1737360"/>
-            <a:ext cx="3794760" cy="914400"/>
-          </a:xfrm>
-          <a:prstGeom prst="roundRect">
-            <a:avLst>
-              <a:gd name="adj" fmla="val 8000"/>
-            </a:avLst>
-          </a:prstGeom>
-          <a:solidFill>
-            <a:srgbClr val="FFFFFF"/>
-          </a:solidFill>
-          <a:ln w="12700">
-            <a:solidFill>
-              <a:srgbClr val="DCD5C1"/>
-            </a:solidFill>
-            <a:prstDash val="solid"/>
-          </a:ln>
-        </p:spPr>
-      </p:sp>
-      <p:sp>
-        <p:nvSpPr>
-          <p:cNvPr id="8" name="Text 6"/>
-          <p:cNvSpPr txBox="1"/>
-          <p:nvPr/>
-        </p:nvSpPr>
-        <p:spPr>
-          <a:xfrm>
-            <a:off x="4791456" y="1984248"/>
-            <a:ext cx="420624" cy="420624"/>
-          </a:xfrm>
-          <a:prstGeom prst="roundRect">
-            <a:avLst>
-              <a:gd name="adj" fmla="val 50000"/>
-            </a:avLst>
-          </a:prstGeom>
-          <a:solidFill>
-            <a:srgbClr val="13294B"/>
-          </a:solidFill>
-          <a:ln/>
-        </p:spPr>
-        <p:txBody>
-          <a:bodyPr wrap="square" lIns="0" tIns="0" rIns="0" bIns="0" rtlCol="0" anchor="ctr"/>
-          <a:lstStyle/>
-          <a:p>
-            <a:pPr algn="ctr" indent="0" marL="0">
-              <a:lnSpc>
-                <a:spcPct val="100000"/>
-              </a:lnSpc>
-              <a:buNone/>
-            </a:pPr>
-            <a:r>
-              <a:rPr lang="en-US" sz="1600" b="1" dirty="0">
-                <a:solidFill>
-                  <a:srgbClr val="FFFFFF"/>
-                </a:solidFill>
-                <a:latin typeface="Calibri" pitchFamily="34" charset="0"/>
-                <a:ea typeface="Calibri" pitchFamily="34" charset="-122"/>
-                <a:cs typeface="Calibri" pitchFamily="34" charset="-120"/>
-              </a:rPr>
-              <a:t>b</a:t>
-            </a:r>
-            <a:endParaRPr lang="en-US" sz="1600" dirty="0"/>
-          </a:p>
-        </p:txBody>
-      </p:sp>
-      <p:sp>
-        <p:nvSpPr>
-          <p:cNvPr id="9" name="Text 7"/>
-          <p:cNvSpPr txBox="1"/>
-          <p:nvPr/>
-        </p:nvSpPr>
-        <p:spPr>
-          <a:xfrm>
-            <a:off x="5321808" y="1773936"/>
-            <a:ext cx="3044952" cy="841248"/>
-          </a:xfrm>
-          <a:prstGeom prst="rect">
-            <a:avLst/>
-          </a:prstGeom>
-          <a:noFill/>
-          <a:ln/>
-        </p:spPr>
-        <p:txBody>
-          <a:bodyPr wrap="square" lIns="25400" tIns="25400" rIns="25400" bIns="25400" rtlCol="0" anchor="ctr"/>
-          <a:lstStyle/>
-          <a:p>
-            <a:pPr algn="l" indent="0" marL="0">
-              <a:lnSpc>
-                <a:spcPct val="100000"/>
-              </a:lnSpc>
-              <a:buNone/>
-            </a:pPr>
-            <a:r>
-              <a:rPr lang="en-US" sz="1400" dirty="0">
-                <a:solidFill>
-                  <a:srgbClr val="1F2A37"/>
-                </a:solidFill>
-                <a:latin typeface="Calibri" pitchFamily="34" charset="0"/>
-                <a:ea typeface="Calibri" pitchFamily="34" charset="-122"/>
-                <a:cs typeface="Calibri" pitchFamily="34" charset="-120"/>
-              </a:rPr>
-              <a:t>Patrimonialista para socialista</a:t>
-            </a:r>
-            <a:endParaRPr lang="en-US" sz="1400" dirty="0"/>
-          </a:p>
-        </p:txBody>
-      </p:sp>
-      <p:sp>
-        <p:nvSpPr>
-          <p:cNvPr id="10" name="Shape 8"/>
-          <p:cNvSpPr/>
-          <p:nvPr/>
-        </p:nvSpPr>
-        <p:spPr>
-          <a:xfrm>
-            <a:off x="685800" y="2798064"/>
-            <a:ext cx="3794760" cy="914400"/>
-          </a:xfrm>
-          <a:prstGeom prst="roundRect">
-            <a:avLst>
-              <a:gd name="adj" fmla="val 8000"/>
-            </a:avLst>
-          </a:prstGeom>
-          <a:solidFill>
-            <a:srgbClr val="FFFFFF"/>
-          </a:solidFill>
-          <a:ln w="12700">
-            <a:solidFill>
-              <a:srgbClr val="DCD5C1"/>
-            </a:solidFill>
-            <a:prstDash val="solid"/>
-          </a:ln>
-        </p:spPr>
-      </p:sp>
-      <p:sp>
-        <p:nvSpPr>
-          <p:cNvPr id="11" name="Text 9"/>
-          <p:cNvSpPr txBox="1"/>
-          <p:nvPr/>
-        </p:nvSpPr>
-        <p:spPr>
-          <a:xfrm>
-            <a:off x="813816" y="3044952"/>
-            <a:ext cx="420624" cy="420624"/>
-          </a:xfrm>
-          <a:prstGeom prst="roundRect">
-            <a:avLst>
-              <a:gd name="adj" fmla="val 50000"/>
-            </a:avLst>
-          </a:prstGeom>
-          <a:solidFill>
-            <a:srgbClr val="13294B"/>
-          </a:solidFill>
-          <a:ln/>
-        </p:spPr>
-        <p:txBody>
-          <a:bodyPr wrap="square" lIns="0" tIns="0" rIns="0" bIns="0" rtlCol="0" anchor="ctr"/>
-          <a:lstStyle/>
-          <a:p>
-            <a:pPr algn="ctr" indent="0" marL="0">
-              <a:lnSpc>
-                <a:spcPct val="100000"/>
-              </a:lnSpc>
-              <a:buNone/>
-            </a:pPr>
-            <a:r>
-              <a:rPr lang="en-US" sz="1600" b="1" dirty="0">
-                <a:solidFill>
-                  <a:srgbClr val="FFFFFF"/>
-                </a:solidFill>
-                <a:latin typeface="Calibri" pitchFamily="34" charset="0"/>
-                <a:ea typeface="Calibri" pitchFamily="34" charset="-122"/>
-                <a:cs typeface="Calibri" pitchFamily="34" charset="-120"/>
-              </a:rPr>
-              <a:t>c</a:t>
-            </a:r>
-            <a:endParaRPr lang="en-US" sz="1600" dirty="0"/>
-          </a:p>
-        </p:txBody>
-      </p:sp>
-      <p:sp>
-        <p:nvSpPr>
-          <p:cNvPr id="12" name="Text 10"/>
-          <p:cNvSpPr txBox="1"/>
-          <p:nvPr/>
-        </p:nvSpPr>
-        <p:spPr>
-          <a:xfrm>
-            <a:off x="1344168" y="2834640"/>
-            <a:ext cx="3044952" cy="841248"/>
-          </a:xfrm>
-          <a:prstGeom prst="rect">
-            <a:avLst/>
-          </a:prstGeom>
-          <a:noFill/>
-          <a:ln/>
-        </p:spPr>
-        <p:txBody>
-          <a:bodyPr wrap="square" lIns="25400" tIns="25400" rIns="25400" bIns="25400" rtlCol="0" anchor="ctr"/>
-          <a:lstStyle/>
-          <a:p>
-            <a:pPr algn="l" indent="0" marL="0">
-              <a:lnSpc>
-                <a:spcPct val="100000"/>
-              </a:lnSpc>
-              <a:buNone/>
-            </a:pPr>
-            <a:r>
-              <a:rPr lang="en-US" sz="1400" dirty="0">
-                <a:solidFill>
-                  <a:srgbClr val="1F2A37"/>
-                </a:solidFill>
-                <a:latin typeface="Calibri" pitchFamily="34" charset="0"/>
-                <a:ea typeface="Calibri" pitchFamily="34" charset="-122"/>
-                <a:cs typeface="Calibri" pitchFamily="34" charset="-120"/>
-              </a:rPr>
-              <a:t>Gerencial para burocrática</a:t>
-            </a:r>
-            <a:endParaRPr lang="en-US" sz="1400" dirty="0"/>
-          </a:p>
-        </p:txBody>
-      </p:sp>
-      <p:sp>
-        <p:nvSpPr>
-          <p:cNvPr id="13" name="Shape 11"/>
-          <p:cNvSpPr/>
-          <p:nvPr/>
-        </p:nvSpPr>
-        <p:spPr>
-          <a:xfrm>
-            <a:off x="4663440" y="2798064"/>
-            <a:ext cx="3794760" cy="914400"/>
-          </a:xfrm>
-          <a:prstGeom prst="roundRect">
-            <a:avLst>
-              <a:gd name="adj" fmla="val 8000"/>
-            </a:avLst>
-          </a:prstGeom>
-          <a:solidFill>
-            <a:srgbClr val="FFFFFF"/>
-          </a:solidFill>
-          <a:ln w="12700">
-            <a:solidFill>
-              <a:srgbClr val="DCD5C1"/>
-            </a:solidFill>
-            <a:prstDash val="solid"/>
-          </a:ln>
-        </p:spPr>
-      </p:sp>
-      <p:sp>
-        <p:nvSpPr>
-          <p:cNvPr id="14" name="Text 12"/>
-          <p:cNvSpPr txBox="1"/>
-          <p:nvPr/>
-        </p:nvSpPr>
-        <p:spPr>
-          <a:xfrm>
-            <a:off x="4791456" y="3044952"/>
-            <a:ext cx="420624" cy="420624"/>
-          </a:xfrm>
-          <a:prstGeom prst="roundRect">
-            <a:avLst>
-              <a:gd name="adj" fmla="val 50000"/>
-            </a:avLst>
-          </a:prstGeom>
-          <a:solidFill>
-            <a:srgbClr val="13294B"/>
-          </a:solidFill>
-          <a:ln/>
-        </p:spPr>
-        <p:txBody>
-          <a:bodyPr wrap="square" lIns="0" tIns="0" rIns="0" bIns="0" rtlCol="0" anchor="ctr"/>
-          <a:lstStyle/>
-          <a:p>
-            <a:pPr algn="ctr" indent="0" marL="0">
-              <a:lnSpc>
-                <a:spcPct val="100000"/>
-              </a:lnSpc>
-              <a:buNone/>
-            </a:pPr>
-            <a:r>
-              <a:rPr lang="en-US" sz="1600" b="1" dirty="0">
-                <a:solidFill>
-                  <a:srgbClr val="FFFFFF"/>
-                </a:solidFill>
-                <a:latin typeface="Calibri" pitchFamily="34" charset="0"/>
-                <a:ea typeface="Calibri" pitchFamily="34" charset="-122"/>
-                <a:cs typeface="Calibri" pitchFamily="34" charset="-120"/>
-              </a:rPr>
-              <a:t>d</a:t>
-            </a:r>
-            <a:endParaRPr lang="en-US" sz="1600" dirty="0"/>
-          </a:p>
-        </p:txBody>
-      </p:sp>
-      <p:sp>
-        <p:nvSpPr>
-          <p:cNvPr id="15" name="Text 13"/>
-          <p:cNvSpPr txBox="1"/>
-          <p:nvPr/>
-        </p:nvSpPr>
-        <p:spPr>
-          <a:xfrm>
-            <a:off x="5321808" y="2834640"/>
-            <a:ext cx="3044952" cy="841248"/>
-          </a:xfrm>
-          <a:prstGeom prst="rect">
-            <a:avLst/>
-          </a:prstGeom>
-          <a:noFill/>
-          <a:ln/>
-        </p:spPr>
-        <p:txBody>
-          <a:bodyPr wrap="square" lIns="25400" tIns="25400" rIns="25400" bIns="25400" rtlCol="0" anchor="ctr"/>
-          <a:lstStyle/>
-          <a:p>
-            <a:pPr algn="l" indent="0" marL="0">
-              <a:lnSpc>
-                <a:spcPct val="100000"/>
-              </a:lnSpc>
-              <a:buNone/>
-            </a:pPr>
-            <a:r>
-              <a:rPr lang="en-US" sz="1400" dirty="0">
-                <a:solidFill>
-                  <a:srgbClr val="1F2A37"/>
-                </a:solidFill>
-                <a:latin typeface="Calibri" pitchFamily="34" charset="0"/>
-                <a:ea typeface="Calibri" pitchFamily="34" charset="-122"/>
-                <a:cs typeface="Calibri" pitchFamily="34" charset="-120"/>
-              </a:rPr>
-              <a:t>Burocrática para gerencial</a:t>
-            </a:r>
-            <a:endParaRPr lang="en-US" sz="1400" dirty="0"/>
-          </a:p>
-        </p:txBody>
-      </p:sp>
-      <p:sp>
-        <p:nvSpPr>
-          <p:cNvPr id="16" name="Text 14"/>
-          <p:cNvSpPr txBox="1"/>
-          <p:nvPr/>
-        </p:nvSpPr>
-        <p:spPr>
-          <a:xfrm>
-            <a:off x="4206240" y="36576"/>
-            <a:ext cx="4800600" cy="219456"/>
-          </a:xfrm>
-          <a:prstGeom prst="rect">
-            <a:avLst/>
-          </a:prstGeom>
-          <a:noFill/>
-          <a:ln/>
-        </p:spPr>
-        <p:txBody>
-          <a:bodyPr wrap="square" lIns="0" tIns="0" rIns="0" bIns="0" rtlCol="0" anchor="ctr"/>
-          <a:lstStyle/>
-          <a:p>
-            <a:pPr algn="r" indent="0" marL="0">
-              <a:lnSpc>
-                <a:spcPct val="100000"/>
-              </a:lnSpc>
-              <a:buNone/>
-            </a:pPr>
-            <a:r>
-              <a:rPr lang="en-US" sz="950" dirty="0">
-                <a:solidFill>
-                  <a:srgbClr val="5B6770"/>
-                </a:solidFill>
-                <a:latin typeface="Calibri" pitchFamily="34" charset="0"/>
-                <a:ea typeface="Calibri" pitchFamily="34" charset="-122"/>
-                <a:cs typeface="Calibri" pitchFamily="34" charset="-120"/>
-              </a:rPr>
-              <a:t>Estado, Governo e Mercado · Unidade 4</a:t>
-            </a:r>
-            <a:endParaRPr lang="en-US" sz="950" dirty="0"/>
-          </a:p>
-        </p:txBody>
-      </p:sp>
-    </p:spTree>
-  </p:cSld>
-  <p:clrMapOvr>
-    <a:masterClrMapping/>
-  </p:clrMapOvr>
-</p:sld>
-</file>
-
-<file path=ppt/slides/slide33.xml><?xml version="1.0" encoding="utf-8"?>
-<p:sld xmlns:a="http://schemas.openxmlformats.org/drawingml/2006/main" xmlns:r="http://schemas.openxmlformats.org/officeDocument/2006/relationships" xmlns:p="http://schemas.openxmlformats.org/presentationml/2006/main">
-  <p:cSld name="Slide 33">
-    <p:bg>
-      <p:bgPr>
-        <a:blipFill dpi="0" rotWithShape="1">
-          <a:blip r:embed="rId1">
-            <a:lum/>
-          </a:blip>
-          <a:srcRect/>
-          <a:stretch>
-            <a:fillRect/>
-          </a:stretch>
-        </a:blipFill>
-        <a:effectLst/>
-      </p:bgPr>
-    </p:bg>
-    <p:spTree>
-      <p:nvGrpSpPr>
-        <p:cNvPr id="1" name=""/>
-        <p:cNvGrpSpPr/>
-        <p:nvPr/>
-      </p:nvGrpSpPr>
-      <p:grpSpPr>
-        <a:xfrm>
-          <a:off x="0" y="0"/>
-          <a:ext cx="0" cy="0"/>
-          <a:chOff x="0" y="0"/>
-          <a:chExt cx="0" cy="0"/>
-        </a:xfrm>
-      </p:grpSpPr>
-      <p:sp>
-        <p:nvSpPr>
-          <p:cNvPr id="2" name="Text 0"/>
-          <p:cNvSpPr txBox="1"/>
-          <p:nvPr/>
-        </p:nvSpPr>
-        <p:spPr>
-          <a:xfrm>
-            <a:off x="731520" y="274320"/>
-            <a:ext cx="7680960" cy="365760"/>
-          </a:xfrm>
-          <a:prstGeom prst="rect">
-            <a:avLst/>
-          </a:prstGeom>
-          <a:noFill/>
-          <a:ln/>
-        </p:spPr>
-        <p:txBody>
-          <a:bodyPr wrap="square" lIns="0" tIns="0" rIns="0" bIns="0" rtlCol="0" anchor="ctr"/>
-          <a:lstStyle/>
-          <a:p>
-            <a:pPr algn="ctr" indent="0" marL="0">
-              <a:lnSpc>
-                <a:spcPct val="100000"/>
-              </a:lnSpc>
-              <a:buNone/>
-            </a:pPr>
-            <a:r>
-              <a:rPr lang="en-US" sz="1250" b="1" dirty="0">
-                <a:solidFill>
-                  <a:srgbClr val="2A8C85"/>
-                </a:solidFill>
-                <a:latin typeface="Calibri" pitchFamily="34" charset="0"/>
-                <a:ea typeface="Calibri" pitchFamily="34" charset="-122"/>
-                <a:cs typeface="Calibri" pitchFamily="34" charset="-120"/>
-              </a:rPr>
-              <a:t>QUIZ DA UNIDADE 4 · PERGUNTA 4 DE 5 · RESPOSTA</a:t>
-            </a:r>
-            <a:endParaRPr lang="en-US" sz="1250" dirty="0"/>
-          </a:p>
-        </p:txBody>
-      </p:sp>
-      <p:sp>
-        <p:nvSpPr>
-          <p:cNvPr id="3" name="Text 1"/>
-          <p:cNvSpPr txBox="1"/>
-          <p:nvPr/>
-        </p:nvSpPr>
-        <p:spPr>
-          <a:xfrm>
-            <a:off x="731520" y="658368"/>
-            <a:ext cx="7680960" cy="960120"/>
-          </a:xfrm>
-          <a:prstGeom prst="rect">
-            <a:avLst/>
-          </a:prstGeom>
-          <a:noFill/>
-          <a:ln/>
-        </p:spPr>
-        <p:txBody>
-          <a:bodyPr wrap="square" lIns="0" tIns="0" rIns="0" bIns="0" rtlCol="0" anchor="ctr"/>
-          <a:lstStyle/>
-          <a:p>
-            <a:pPr algn="ctr" indent="0" marL="0">
-              <a:lnSpc>
-                <a:spcPct val="100000"/>
-              </a:lnSpc>
-              <a:buNone/>
-            </a:pPr>
-            <a:r>
-              <a:rPr lang="en-US" sz="1900" b="1" dirty="0">
-                <a:solidFill>
-                  <a:srgbClr val="13294B"/>
-                </a:solidFill>
-                <a:latin typeface="Calibri" pitchFamily="34" charset="0"/>
-                <a:ea typeface="Calibri" pitchFamily="34" charset="-122"/>
-                <a:cs typeface="Calibri" pitchFamily="34" charset="-120"/>
-              </a:rPr>
-              <a:t>O Plano Diretor da Reforma do Aparelho do Estado (1995) propôs a passagem da administração:</a:t>
-            </a:r>
-            <a:endParaRPr lang="en-US" sz="1900" dirty="0"/>
-          </a:p>
-        </p:txBody>
-      </p:sp>
-      <p:sp>
-        <p:nvSpPr>
-          <p:cNvPr id="4" name="Shape 2"/>
-          <p:cNvSpPr/>
-          <p:nvPr/>
-        </p:nvSpPr>
-        <p:spPr>
-          <a:xfrm>
-            <a:off x="685800" y="1737360"/>
-            <a:ext cx="3794760" cy="749808"/>
-          </a:xfrm>
-          <a:prstGeom prst="roundRect">
-            <a:avLst>
-              <a:gd name="adj" fmla="val 9756"/>
-            </a:avLst>
-          </a:prstGeom>
-          <a:solidFill>
-            <a:srgbClr val="FFFFFF"/>
-          </a:solidFill>
-          <a:ln w="12700">
-            <a:solidFill>
-              <a:srgbClr val="DCD5C1"/>
-            </a:solidFill>
-            <a:prstDash val="solid"/>
-          </a:ln>
-        </p:spPr>
-      </p:sp>
-      <p:sp>
-        <p:nvSpPr>
-          <p:cNvPr id="5" name="Text 3"/>
-          <p:cNvSpPr txBox="1"/>
-          <p:nvPr/>
-        </p:nvSpPr>
-        <p:spPr>
-          <a:xfrm>
-            <a:off x="813816" y="1901952"/>
-            <a:ext cx="420624" cy="420624"/>
-          </a:xfrm>
-          <a:prstGeom prst="roundRect">
-            <a:avLst>
-              <a:gd name="adj" fmla="val 50000"/>
-            </a:avLst>
-          </a:prstGeom>
-          <a:solidFill>
-            <a:srgbClr val="9AA3AB"/>
-          </a:solidFill>
-          <a:ln/>
-        </p:spPr>
-        <p:txBody>
-          <a:bodyPr wrap="square" lIns="0" tIns="0" rIns="0" bIns="0" rtlCol="0" anchor="ctr"/>
-          <a:lstStyle/>
-          <a:p>
-            <a:pPr algn="ctr" indent="0" marL="0">
-              <a:lnSpc>
-                <a:spcPct val="100000"/>
-              </a:lnSpc>
-              <a:buNone/>
-            </a:pPr>
-            <a:r>
-              <a:rPr lang="en-US" sz="1600" b="1" dirty="0">
-                <a:solidFill>
-                  <a:srgbClr val="FFFFFF"/>
-                </a:solidFill>
-                <a:latin typeface="Calibri" pitchFamily="34" charset="0"/>
-                <a:ea typeface="Calibri" pitchFamily="34" charset="-122"/>
-                <a:cs typeface="Calibri" pitchFamily="34" charset="-120"/>
-              </a:rPr>
-              <a:t>a</a:t>
-            </a:r>
-            <a:endParaRPr lang="en-US" sz="1600" dirty="0"/>
-          </a:p>
-        </p:txBody>
-      </p:sp>
-      <p:sp>
-        <p:nvSpPr>
-          <p:cNvPr id="6" name="Text 4"/>
-          <p:cNvSpPr txBox="1"/>
-          <p:nvPr/>
-        </p:nvSpPr>
-        <p:spPr>
-          <a:xfrm>
-            <a:off x="1344168" y="1773936"/>
-            <a:ext cx="3044952" cy="676656"/>
-          </a:xfrm>
-          <a:prstGeom prst="rect">
-            <a:avLst/>
-          </a:prstGeom>
-          <a:noFill/>
-          <a:ln/>
-        </p:spPr>
-        <p:txBody>
-          <a:bodyPr wrap="square" lIns="25400" tIns="25400" rIns="25400" bIns="25400" rtlCol="0" anchor="ctr"/>
-          <a:lstStyle/>
-          <a:p>
-            <a:pPr algn="l" indent="0" marL="0">
-              <a:lnSpc>
-                <a:spcPct val="100000"/>
-              </a:lnSpc>
-              <a:buNone/>
-            </a:pPr>
-            <a:r>
-              <a:rPr lang="en-US" sz="1400" dirty="0">
-                <a:solidFill>
-                  <a:srgbClr val="5B6770"/>
-                </a:solidFill>
-                <a:latin typeface="Calibri" pitchFamily="34" charset="0"/>
-                <a:ea typeface="Calibri" pitchFamily="34" charset="-122"/>
-                <a:cs typeface="Calibri" pitchFamily="34" charset="-120"/>
-              </a:rPr>
-              <a:t>Gerencial para patrimonialista</a:t>
-            </a:r>
-            <a:endParaRPr lang="en-US" sz="1400" dirty="0"/>
-          </a:p>
-        </p:txBody>
-      </p:sp>
-      <p:sp>
-        <p:nvSpPr>
-          <p:cNvPr id="7" name="Shape 5"/>
-          <p:cNvSpPr/>
-          <p:nvPr/>
-        </p:nvSpPr>
-        <p:spPr>
-          <a:xfrm>
-            <a:off x="4663440" y="1737360"/>
-            <a:ext cx="3794760" cy="749808"/>
-          </a:xfrm>
-          <a:prstGeom prst="roundRect">
-            <a:avLst>
-              <a:gd name="adj" fmla="val 9756"/>
-            </a:avLst>
-          </a:prstGeom>
-          <a:solidFill>
-            <a:srgbClr val="FFFFFF"/>
-          </a:solidFill>
-          <a:ln w="12700">
-            <a:solidFill>
-              <a:srgbClr val="DCD5C1"/>
-            </a:solidFill>
-            <a:prstDash val="solid"/>
-          </a:ln>
-        </p:spPr>
-      </p:sp>
-      <p:sp>
-        <p:nvSpPr>
-          <p:cNvPr id="8" name="Text 6"/>
-          <p:cNvSpPr txBox="1"/>
-          <p:nvPr/>
-        </p:nvSpPr>
-        <p:spPr>
-          <a:xfrm>
-            <a:off x="4791456" y="1901952"/>
-            <a:ext cx="420624" cy="420624"/>
-          </a:xfrm>
-          <a:prstGeom prst="roundRect">
-            <a:avLst>
-              <a:gd name="adj" fmla="val 50000"/>
-            </a:avLst>
-          </a:prstGeom>
-          <a:solidFill>
-            <a:srgbClr val="9AA3AB"/>
-          </a:solidFill>
-          <a:ln/>
-        </p:spPr>
-        <p:txBody>
-          <a:bodyPr wrap="square" lIns="0" tIns="0" rIns="0" bIns="0" rtlCol="0" anchor="ctr"/>
-          <a:lstStyle/>
-          <a:p>
-            <a:pPr algn="ctr" indent="0" marL="0">
-              <a:lnSpc>
-                <a:spcPct val="100000"/>
-              </a:lnSpc>
-              <a:buNone/>
-            </a:pPr>
-            <a:r>
-              <a:rPr lang="en-US" sz="1600" b="1" dirty="0">
-                <a:solidFill>
-                  <a:srgbClr val="FFFFFF"/>
-                </a:solidFill>
-                <a:latin typeface="Calibri" pitchFamily="34" charset="0"/>
-                <a:ea typeface="Calibri" pitchFamily="34" charset="-122"/>
-                <a:cs typeface="Calibri" pitchFamily="34" charset="-120"/>
-              </a:rPr>
-              <a:t>b</a:t>
-            </a:r>
-            <a:endParaRPr lang="en-US" sz="1600" dirty="0"/>
-          </a:p>
-        </p:txBody>
-      </p:sp>
-      <p:sp>
-        <p:nvSpPr>
-          <p:cNvPr id="9" name="Text 7"/>
-          <p:cNvSpPr txBox="1"/>
-          <p:nvPr/>
-        </p:nvSpPr>
-        <p:spPr>
-          <a:xfrm>
-            <a:off x="5321808" y="1773936"/>
-            <a:ext cx="3044952" cy="676656"/>
-          </a:xfrm>
-          <a:prstGeom prst="rect">
-            <a:avLst/>
-          </a:prstGeom>
-          <a:noFill/>
-          <a:ln/>
-        </p:spPr>
-        <p:txBody>
-          <a:bodyPr wrap="square" lIns="25400" tIns="25400" rIns="25400" bIns="25400" rtlCol="0" anchor="ctr"/>
-          <a:lstStyle/>
-          <a:p>
-            <a:pPr algn="l" indent="0" marL="0">
-              <a:lnSpc>
-                <a:spcPct val="100000"/>
-              </a:lnSpc>
-              <a:buNone/>
-            </a:pPr>
-            <a:r>
-              <a:rPr lang="en-US" sz="1400" dirty="0">
-                <a:solidFill>
-                  <a:srgbClr val="5B6770"/>
-                </a:solidFill>
-                <a:latin typeface="Calibri" pitchFamily="34" charset="0"/>
-                <a:ea typeface="Calibri" pitchFamily="34" charset="-122"/>
-                <a:cs typeface="Calibri" pitchFamily="34" charset="-120"/>
-              </a:rPr>
-              <a:t>Patrimonialista para socialista</a:t>
-            </a:r>
-            <a:endParaRPr lang="en-US" sz="1400" dirty="0"/>
-          </a:p>
-        </p:txBody>
-      </p:sp>
-      <p:sp>
-        <p:nvSpPr>
-          <p:cNvPr id="10" name="Shape 8"/>
-          <p:cNvSpPr/>
-          <p:nvPr/>
-        </p:nvSpPr>
-        <p:spPr>
-          <a:xfrm>
-            <a:off x="685800" y="2633472"/>
-            <a:ext cx="3794760" cy="749808"/>
-          </a:xfrm>
-          <a:prstGeom prst="roundRect">
-            <a:avLst>
-              <a:gd name="adj" fmla="val 9756"/>
-            </a:avLst>
-          </a:prstGeom>
-          <a:solidFill>
-            <a:srgbClr val="FFFFFF"/>
-          </a:solidFill>
-          <a:ln w="12700">
-            <a:solidFill>
-              <a:srgbClr val="DCD5C1"/>
-            </a:solidFill>
-            <a:prstDash val="solid"/>
-          </a:ln>
-        </p:spPr>
-      </p:sp>
-      <p:sp>
-        <p:nvSpPr>
-          <p:cNvPr id="11" name="Text 9"/>
-          <p:cNvSpPr txBox="1"/>
-          <p:nvPr/>
-        </p:nvSpPr>
-        <p:spPr>
-          <a:xfrm>
-            <a:off x="813816" y="2798064"/>
-            <a:ext cx="420624" cy="420624"/>
-          </a:xfrm>
-          <a:prstGeom prst="roundRect">
-            <a:avLst>
-              <a:gd name="adj" fmla="val 50000"/>
-            </a:avLst>
-          </a:prstGeom>
-          <a:solidFill>
-            <a:srgbClr val="9AA3AB"/>
-          </a:solidFill>
-          <a:ln/>
-        </p:spPr>
-        <p:txBody>
-          <a:bodyPr wrap="square" lIns="0" tIns="0" rIns="0" bIns="0" rtlCol="0" anchor="ctr"/>
-          <a:lstStyle/>
-          <a:p>
-            <a:pPr algn="ctr" indent="0" marL="0">
-              <a:lnSpc>
-                <a:spcPct val="100000"/>
-              </a:lnSpc>
-              <a:buNone/>
-            </a:pPr>
-            <a:r>
-              <a:rPr lang="en-US" sz="1600" b="1" dirty="0">
-                <a:solidFill>
-                  <a:srgbClr val="FFFFFF"/>
-                </a:solidFill>
-                <a:latin typeface="Calibri" pitchFamily="34" charset="0"/>
-                <a:ea typeface="Calibri" pitchFamily="34" charset="-122"/>
-                <a:cs typeface="Calibri" pitchFamily="34" charset="-120"/>
-              </a:rPr>
-              <a:t>c</a:t>
-            </a:r>
-            <a:endParaRPr lang="en-US" sz="1600" dirty="0"/>
-          </a:p>
-        </p:txBody>
-      </p:sp>
-      <p:sp>
-        <p:nvSpPr>
-          <p:cNvPr id="12" name="Text 10"/>
-          <p:cNvSpPr txBox="1"/>
-          <p:nvPr/>
-        </p:nvSpPr>
-        <p:spPr>
-          <a:xfrm>
-            <a:off x="1344168" y="2670048"/>
-            <a:ext cx="3044952" cy="676656"/>
-          </a:xfrm>
-          <a:prstGeom prst="rect">
-            <a:avLst/>
-          </a:prstGeom>
-          <a:noFill/>
-          <a:ln/>
-        </p:spPr>
-        <p:txBody>
-          <a:bodyPr wrap="square" lIns="25400" tIns="25400" rIns="25400" bIns="25400" rtlCol="0" anchor="ctr"/>
-          <a:lstStyle/>
-          <a:p>
-            <a:pPr algn="l" indent="0" marL="0">
-              <a:lnSpc>
-                <a:spcPct val="100000"/>
-              </a:lnSpc>
-              <a:buNone/>
-            </a:pPr>
-            <a:r>
-              <a:rPr lang="en-US" sz="1400" dirty="0">
-                <a:solidFill>
-                  <a:srgbClr val="5B6770"/>
-                </a:solidFill>
-                <a:latin typeface="Calibri" pitchFamily="34" charset="0"/>
-                <a:ea typeface="Calibri" pitchFamily="34" charset="-122"/>
-                <a:cs typeface="Calibri" pitchFamily="34" charset="-120"/>
-              </a:rPr>
-              <a:t>Gerencial para burocrática</a:t>
-            </a:r>
-            <a:endParaRPr lang="en-US" sz="1400" dirty="0"/>
-          </a:p>
-        </p:txBody>
-      </p:sp>
-      <p:sp>
-        <p:nvSpPr>
-          <p:cNvPr id="13" name="Shape 11"/>
-          <p:cNvSpPr/>
-          <p:nvPr/>
-        </p:nvSpPr>
-        <p:spPr>
-          <a:xfrm>
-            <a:off x="4663440" y="2633472"/>
-            <a:ext cx="3794760" cy="749808"/>
-          </a:xfrm>
-          <a:prstGeom prst="roundRect">
-            <a:avLst>
-              <a:gd name="adj" fmla="val 9756"/>
-            </a:avLst>
-          </a:prstGeom>
-          <a:solidFill>
-            <a:srgbClr val="E3F2E8"/>
-          </a:solidFill>
-          <a:ln w="25400">
-            <a:solidFill>
-              <a:srgbClr val="2E7D4F"/>
-            </a:solidFill>
-            <a:prstDash val="solid"/>
-          </a:ln>
-        </p:spPr>
-      </p:sp>
-      <p:sp>
-        <p:nvSpPr>
-          <p:cNvPr id="14" name="Text 12"/>
-          <p:cNvSpPr txBox="1"/>
-          <p:nvPr/>
-        </p:nvSpPr>
-        <p:spPr>
-          <a:xfrm>
-            <a:off x="4791456" y="2798064"/>
-            <a:ext cx="420624" cy="420624"/>
-          </a:xfrm>
-          <a:prstGeom prst="roundRect">
-            <a:avLst>
-              <a:gd name="adj" fmla="val 50000"/>
-            </a:avLst>
-          </a:prstGeom>
-          <a:solidFill>
-            <a:srgbClr val="2E7D4F"/>
-          </a:solidFill>
-          <a:ln/>
-        </p:spPr>
-        <p:txBody>
-          <a:bodyPr wrap="square" lIns="0" tIns="0" rIns="0" bIns="0" rtlCol="0" anchor="ctr"/>
-          <a:lstStyle/>
-          <a:p>
-            <a:pPr algn="ctr" indent="0" marL="0">
-              <a:lnSpc>
-                <a:spcPct val="100000"/>
-              </a:lnSpc>
-              <a:buNone/>
-            </a:pPr>
-            <a:r>
-              <a:rPr lang="en-US" sz="1600" b="1" dirty="0">
-                <a:solidFill>
-                  <a:srgbClr val="FFFFFF"/>
-                </a:solidFill>
-                <a:latin typeface="Calibri" pitchFamily="34" charset="0"/>
-                <a:ea typeface="Calibri" pitchFamily="34" charset="-122"/>
-                <a:cs typeface="Calibri" pitchFamily="34" charset="-120"/>
-              </a:rPr>
-              <a:t>d</a:t>
-            </a:r>
-            <a:endParaRPr lang="en-US" sz="1600" dirty="0"/>
-          </a:p>
-        </p:txBody>
-      </p:sp>
-      <p:sp>
-        <p:nvSpPr>
-          <p:cNvPr id="15" name="Text 13"/>
-          <p:cNvSpPr txBox="1"/>
-          <p:nvPr/>
-        </p:nvSpPr>
-        <p:spPr>
-          <a:xfrm>
-            <a:off x="5321808" y="2670048"/>
-            <a:ext cx="3044952" cy="676656"/>
-          </a:xfrm>
-          <a:prstGeom prst="rect">
-            <a:avLst/>
-          </a:prstGeom>
-          <a:noFill/>
-          <a:ln/>
-        </p:spPr>
-        <p:txBody>
-          <a:bodyPr wrap="square" lIns="25400" tIns="25400" rIns="25400" bIns="25400" rtlCol="0" anchor="ctr"/>
-          <a:lstStyle/>
-          <a:p>
-            <a:pPr algn="l" indent="0" marL="0">
-              <a:lnSpc>
-                <a:spcPct val="100000"/>
-              </a:lnSpc>
-              <a:buNone/>
-            </a:pPr>
-            <a:r>
-              <a:rPr lang="en-US" sz="1400" b="1" dirty="0">
-                <a:solidFill>
-                  <a:srgbClr val="1F2A37"/>
-                </a:solidFill>
-                <a:latin typeface="Calibri" pitchFamily="34" charset="0"/>
-                <a:ea typeface="Calibri" pitchFamily="34" charset="-122"/>
-                <a:cs typeface="Calibri" pitchFamily="34" charset="-120"/>
-              </a:rPr>
-              <a:t>Burocrática para gerencial</a:t>
-            </a:r>
-            <a:endParaRPr lang="en-US" sz="1400" dirty="0"/>
-          </a:p>
-        </p:txBody>
-      </p:sp>
-      <p:sp>
-        <p:nvSpPr>
-          <p:cNvPr id="16" name="Text 14"/>
-          <p:cNvSpPr txBox="1"/>
-          <p:nvPr/>
-        </p:nvSpPr>
-        <p:spPr>
-          <a:xfrm>
-            <a:off x="685800" y="3566160"/>
-            <a:ext cx="7772400" cy="841248"/>
-          </a:xfrm>
-          <a:prstGeom prst="roundRect">
-            <a:avLst>
-              <a:gd name="adj" fmla="val 8696"/>
-            </a:avLst>
-          </a:prstGeom>
-          <a:solidFill>
-            <a:srgbClr val="E6F2F0"/>
-          </a:solidFill>
-          <a:ln/>
-        </p:spPr>
-        <p:txBody>
-          <a:bodyPr wrap="square" lIns="114300" tIns="114300" rIns="114300" bIns="114300" rtlCol="0" anchor="ctr"/>
-          <a:lstStyle/>
-          <a:p>
-            <a:pPr algn="l" indent="0" marL="0">
-              <a:lnSpc>
-                <a:spcPct val="100000"/>
-              </a:lnSpc>
-              <a:buNone/>
-            </a:pPr>
-            <a:r>
-              <a:rPr lang="en-US" sz="1350" b="1" dirty="0">
-                <a:solidFill>
-                  <a:srgbClr val="2E7D4F"/>
-                </a:solidFill>
-                <a:latin typeface="Calibri" pitchFamily="34" charset="0"/>
-                <a:ea typeface="Calibri" pitchFamily="34" charset="-122"/>
-                <a:cs typeface="Calibri" pitchFamily="34" charset="-120"/>
-              </a:rPr>
-              <a:t>Resposta: d) </a:t>
-            </a:r>
-            <a:pPr algn="l" indent="0" marL="0">
-              <a:lnSpc>
-                <a:spcPct val="100000"/>
-              </a:lnSpc>
-              <a:buNone/>
-            </a:pPr>
-            <a:r>
-              <a:rPr lang="en-US" sz="1350" dirty="0">
-                <a:solidFill>
-                  <a:srgbClr val="1F2A37"/>
-                </a:solidFill>
-                <a:latin typeface="Calibri" pitchFamily="34" charset="0"/>
-                <a:ea typeface="Calibri" pitchFamily="34" charset="-122"/>
-                <a:cs typeface="Calibri" pitchFamily="34" charset="-120"/>
-              </a:rPr>
-              <a:t>A reforma de 1995 (Bresser-Pereira) buscou a administração gerencial, com foco em resultados e no cidadão.</a:t>
-            </a:r>
-            <a:endParaRPr lang="en-US" sz="1350" dirty="0"/>
-          </a:p>
-        </p:txBody>
-      </p:sp>
-      <p:sp>
-        <p:nvSpPr>
-          <p:cNvPr id="17" name="Text 15"/>
-          <p:cNvSpPr txBox="1"/>
-          <p:nvPr/>
-        </p:nvSpPr>
-        <p:spPr>
-          <a:xfrm>
-            <a:off x="4206240" y="36576"/>
-            <a:ext cx="4800600" cy="219456"/>
-          </a:xfrm>
-          <a:prstGeom prst="rect">
-            <a:avLst/>
-          </a:prstGeom>
-          <a:noFill/>
-          <a:ln/>
-        </p:spPr>
-        <p:txBody>
-          <a:bodyPr wrap="square" lIns="0" tIns="0" rIns="0" bIns="0" rtlCol="0" anchor="ctr"/>
-          <a:lstStyle/>
-          <a:p>
-            <a:pPr algn="r" indent="0" marL="0">
-              <a:lnSpc>
-                <a:spcPct val="100000"/>
-              </a:lnSpc>
-              <a:buNone/>
-            </a:pPr>
-            <a:r>
-              <a:rPr lang="en-US" sz="950" dirty="0">
-                <a:solidFill>
-                  <a:srgbClr val="5B6770"/>
-                </a:solidFill>
-                <a:latin typeface="Calibri" pitchFamily="34" charset="0"/>
-                <a:ea typeface="Calibri" pitchFamily="34" charset="-122"/>
-                <a:cs typeface="Calibri" pitchFamily="34" charset="-120"/>
-              </a:rPr>
-              <a:t>Estado, Governo e Mercado · Unidade 4</a:t>
-            </a:r>
-            <a:endParaRPr lang="en-US" sz="950" dirty="0"/>
-          </a:p>
-        </p:txBody>
-      </p:sp>
-    </p:spTree>
-  </p:cSld>
-  <p:clrMapOvr>
-    <a:masterClrMapping/>
-  </p:clrMapOvr>
-</p:sld>
-</file>
-
-<file path=ppt/slides/slide34.xml><?xml version="1.0" encoding="utf-8"?>
-<p:sld xmlns:a="http://schemas.openxmlformats.org/drawingml/2006/main" xmlns:r="http://schemas.openxmlformats.org/officeDocument/2006/relationships" xmlns:p="http://schemas.openxmlformats.org/presentationml/2006/main">
-  <p:cSld name="Slide 34">
-    <p:bg>
-      <p:bgPr>
-        <a:blipFill dpi="0" rotWithShape="1">
-          <a:blip r:embed="rId1">
-            <a:lum/>
-          </a:blip>
-          <a:srcRect/>
-          <a:stretch>
-            <a:fillRect/>
-          </a:stretch>
-        </a:blipFill>
-        <a:effectLst/>
-      </p:bgPr>
-    </p:bg>
-    <p:spTree>
-      <p:nvGrpSpPr>
-        <p:cNvPr id="1" name=""/>
-        <p:cNvGrpSpPr/>
-        <p:nvPr/>
-      </p:nvGrpSpPr>
-      <p:grpSpPr>
-        <a:xfrm>
-          <a:off x="0" y="0"/>
-          <a:ext cx="0" cy="0"/>
-          <a:chOff x="0" y="0"/>
-          <a:chExt cx="0" cy="0"/>
-        </a:xfrm>
-      </p:grpSpPr>
-      <p:sp>
-        <p:nvSpPr>
-          <p:cNvPr id="2" name="Text 0"/>
-          <p:cNvSpPr txBox="1"/>
-          <p:nvPr/>
-        </p:nvSpPr>
-        <p:spPr>
-          <a:xfrm>
-            <a:off x="731520" y="274320"/>
-            <a:ext cx="7680960" cy="365760"/>
-          </a:xfrm>
-          <a:prstGeom prst="rect">
-            <a:avLst/>
-          </a:prstGeom>
-          <a:noFill/>
-          <a:ln/>
-        </p:spPr>
-        <p:txBody>
-          <a:bodyPr wrap="square" lIns="0" tIns="0" rIns="0" bIns="0" rtlCol="0" anchor="ctr"/>
-          <a:lstStyle/>
-          <a:p>
-            <a:pPr algn="ctr" indent="0" marL="0">
-              <a:lnSpc>
-                <a:spcPct val="100000"/>
-              </a:lnSpc>
-              <a:buNone/>
-            </a:pPr>
-            <a:r>
-              <a:rPr lang="en-US" sz="1250" b="1" dirty="0">
-                <a:solidFill>
-                  <a:srgbClr val="2A8C85"/>
-                </a:solidFill>
-                <a:latin typeface="Calibri" pitchFamily="34" charset="0"/>
-                <a:ea typeface="Calibri" pitchFamily="34" charset="-122"/>
-                <a:cs typeface="Calibri" pitchFamily="34" charset="-120"/>
-              </a:rPr>
-              <a:t>QUIZ DA UNIDADE 4 · PERGUNTA 5 DE 5</a:t>
-            </a:r>
-            <a:endParaRPr lang="en-US" sz="1250" dirty="0"/>
-          </a:p>
-        </p:txBody>
-      </p:sp>
-      <p:sp>
-        <p:nvSpPr>
-          <p:cNvPr id="3" name="Text 1"/>
-          <p:cNvSpPr txBox="1"/>
-          <p:nvPr/>
-        </p:nvSpPr>
-        <p:spPr>
-          <a:xfrm>
-            <a:off x="731520" y="658368"/>
-            <a:ext cx="7680960" cy="960120"/>
-          </a:xfrm>
-          <a:prstGeom prst="rect">
-            <a:avLst/>
-          </a:prstGeom>
-          <a:noFill/>
-          <a:ln/>
-        </p:spPr>
-        <p:txBody>
-          <a:bodyPr wrap="square" lIns="0" tIns="0" rIns="0" bIns="0" rtlCol="0" anchor="ctr"/>
-          <a:lstStyle/>
-          <a:p>
-            <a:pPr algn="ctr" indent="0" marL="0">
-              <a:lnSpc>
-                <a:spcPct val="100000"/>
-              </a:lnSpc>
-              <a:buNone/>
-            </a:pPr>
-            <a:r>
-              <a:rPr lang="en-US" sz="1900" b="1" dirty="0">
-                <a:solidFill>
-                  <a:srgbClr val="13294B"/>
-                </a:solidFill>
-                <a:latin typeface="Calibri" pitchFamily="34" charset="0"/>
-                <a:ea typeface="Calibri" pitchFamily="34" charset="-122"/>
-                <a:cs typeface="Calibri" pitchFamily="34" charset="-120"/>
-              </a:rPr>
-              <a:t>A criação da ANEEL, da ANATEL e da ANP, nos anos 1990, expressa qual papel do Estado?</a:t>
-            </a:r>
-            <a:endParaRPr lang="en-US" sz="1900" dirty="0"/>
-          </a:p>
-        </p:txBody>
-      </p:sp>
-      <p:sp>
-        <p:nvSpPr>
-          <p:cNvPr id="4" name="Shape 2"/>
-          <p:cNvSpPr/>
-          <p:nvPr/>
-        </p:nvSpPr>
-        <p:spPr>
-          <a:xfrm>
-            <a:off x="685800" y="1737360"/>
-            <a:ext cx="3794760" cy="914400"/>
-          </a:xfrm>
-          <a:prstGeom prst="roundRect">
-            <a:avLst>
-              <a:gd name="adj" fmla="val 8000"/>
-            </a:avLst>
-          </a:prstGeom>
-          <a:solidFill>
-            <a:srgbClr val="FFFFFF"/>
-          </a:solidFill>
-          <a:ln w="12700">
-            <a:solidFill>
-              <a:srgbClr val="DCD5C1"/>
-            </a:solidFill>
-            <a:prstDash val="solid"/>
-          </a:ln>
-        </p:spPr>
-      </p:sp>
-      <p:sp>
-        <p:nvSpPr>
-          <p:cNvPr id="5" name="Text 3"/>
-          <p:cNvSpPr txBox="1"/>
-          <p:nvPr/>
-        </p:nvSpPr>
-        <p:spPr>
-          <a:xfrm>
-            <a:off x="813816" y="1984248"/>
-            <a:ext cx="420624" cy="420624"/>
-          </a:xfrm>
-          <a:prstGeom prst="roundRect">
-            <a:avLst>
-              <a:gd name="adj" fmla="val 50000"/>
-            </a:avLst>
-          </a:prstGeom>
-          <a:solidFill>
-            <a:srgbClr val="13294B"/>
-          </a:solidFill>
-          <a:ln/>
-        </p:spPr>
-        <p:txBody>
-          <a:bodyPr wrap="square" lIns="0" tIns="0" rIns="0" bIns="0" rtlCol="0" anchor="ctr"/>
-          <a:lstStyle/>
-          <a:p>
-            <a:pPr algn="ctr" indent="0" marL="0">
-              <a:lnSpc>
-                <a:spcPct val="100000"/>
-              </a:lnSpc>
-              <a:buNone/>
-            </a:pPr>
-            <a:r>
-              <a:rPr lang="en-US" sz="1600" b="1" dirty="0">
-                <a:solidFill>
-                  <a:srgbClr val="FFFFFF"/>
-                </a:solidFill>
-                <a:latin typeface="Calibri" pitchFamily="34" charset="0"/>
-                <a:ea typeface="Calibri" pitchFamily="34" charset="-122"/>
-                <a:cs typeface="Calibri" pitchFamily="34" charset="-120"/>
-              </a:rPr>
-              <a:t>a</a:t>
-            </a:r>
-            <a:endParaRPr lang="en-US" sz="1600" dirty="0"/>
-          </a:p>
-        </p:txBody>
-      </p:sp>
-      <p:sp>
-        <p:nvSpPr>
-          <p:cNvPr id="6" name="Text 4"/>
-          <p:cNvSpPr txBox="1"/>
-          <p:nvPr/>
-        </p:nvSpPr>
-        <p:spPr>
-          <a:xfrm>
-            <a:off x="1344168" y="1773936"/>
-            <a:ext cx="3044952" cy="841248"/>
-          </a:xfrm>
-          <a:prstGeom prst="rect">
-            <a:avLst/>
-          </a:prstGeom>
-          <a:noFill/>
-          <a:ln/>
-        </p:spPr>
-        <p:txBody>
-          <a:bodyPr wrap="square" lIns="25400" tIns="25400" rIns="25400" bIns="25400" rtlCol="0" anchor="ctr"/>
-          <a:lstStyle/>
-          <a:p>
-            <a:pPr algn="l" indent="0" marL="0">
-              <a:lnSpc>
-                <a:spcPct val="100000"/>
-              </a:lnSpc>
-              <a:buNone/>
-            </a:pPr>
-            <a:r>
-              <a:rPr lang="en-US" sz="1400" dirty="0">
-                <a:solidFill>
-                  <a:srgbClr val="1F2A37"/>
-                </a:solidFill>
-                <a:latin typeface="Calibri" pitchFamily="34" charset="0"/>
-                <a:ea typeface="Calibri" pitchFamily="34" charset="-122"/>
-                <a:cs typeface="Calibri" pitchFamily="34" charset="-120"/>
-              </a:rPr>
-              <a:t>Estado regulador</a:t>
-            </a:r>
-            <a:endParaRPr lang="en-US" sz="1400" dirty="0"/>
-          </a:p>
-        </p:txBody>
-      </p:sp>
-      <p:sp>
-        <p:nvSpPr>
-          <p:cNvPr id="7" name="Shape 5"/>
-          <p:cNvSpPr/>
-          <p:nvPr/>
-        </p:nvSpPr>
-        <p:spPr>
-          <a:xfrm>
-            <a:off x="4663440" y="1737360"/>
-            <a:ext cx="3794760" cy="914400"/>
-          </a:xfrm>
-          <a:prstGeom prst="roundRect">
-            <a:avLst>
-              <a:gd name="adj" fmla="val 8000"/>
-            </a:avLst>
-          </a:prstGeom>
-          <a:solidFill>
-            <a:srgbClr val="FFFFFF"/>
-          </a:solidFill>
-          <a:ln w="12700">
-            <a:solidFill>
-              <a:srgbClr val="DCD5C1"/>
-            </a:solidFill>
-            <a:prstDash val="solid"/>
-          </a:ln>
-        </p:spPr>
-      </p:sp>
-      <p:sp>
-        <p:nvSpPr>
-          <p:cNvPr id="8" name="Text 6"/>
-          <p:cNvSpPr txBox="1"/>
-          <p:nvPr/>
-        </p:nvSpPr>
-        <p:spPr>
-          <a:xfrm>
-            <a:off x="4791456" y="1984248"/>
-            <a:ext cx="420624" cy="420624"/>
-          </a:xfrm>
-          <a:prstGeom prst="roundRect">
-            <a:avLst>
-              <a:gd name="adj" fmla="val 50000"/>
-            </a:avLst>
-          </a:prstGeom>
-          <a:solidFill>
-            <a:srgbClr val="13294B"/>
-          </a:solidFill>
-          <a:ln/>
-        </p:spPr>
-        <p:txBody>
-          <a:bodyPr wrap="square" lIns="0" tIns="0" rIns="0" bIns="0" rtlCol="0" anchor="ctr"/>
-          <a:lstStyle/>
-          <a:p>
-            <a:pPr algn="ctr" indent="0" marL="0">
-              <a:lnSpc>
-                <a:spcPct val="100000"/>
-              </a:lnSpc>
-              <a:buNone/>
-            </a:pPr>
-            <a:r>
-              <a:rPr lang="en-US" sz="1600" b="1" dirty="0">
-                <a:solidFill>
-                  <a:srgbClr val="FFFFFF"/>
-                </a:solidFill>
-                <a:latin typeface="Calibri" pitchFamily="34" charset="0"/>
-                <a:ea typeface="Calibri" pitchFamily="34" charset="-122"/>
-                <a:cs typeface="Calibri" pitchFamily="34" charset="-120"/>
-              </a:rPr>
-              <a:t>b</a:t>
-            </a:r>
-            <a:endParaRPr lang="en-US" sz="1600" dirty="0"/>
-          </a:p>
-        </p:txBody>
-      </p:sp>
-      <p:sp>
-        <p:nvSpPr>
-          <p:cNvPr id="9" name="Text 7"/>
-          <p:cNvSpPr txBox="1"/>
-          <p:nvPr/>
-        </p:nvSpPr>
-        <p:spPr>
-          <a:xfrm>
-            <a:off x="5321808" y="1773936"/>
-            <a:ext cx="3044952" cy="841248"/>
-          </a:xfrm>
-          <a:prstGeom prst="rect">
-            <a:avLst/>
-          </a:prstGeom>
-          <a:noFill/>
-          <a:ln/>
-        </p:spPr>
-        <p:txBody>
-          <a:bodyPr wrap="square" lIns="25400" tIns="25400" rIns="25400" bIns="25400" rtlCol="0" anchor="ctr"/>
-          <a:lstStyle/>
-          <a:p>
-            <a:pPr algn="l" indent="0" marL="0">
-              <a:lnSpc>
-                <a:spcPct val="100000"/>
-              </a:lnSpc>
-              <a:buNone/>
-            </a:pPr>
-            <a:r>
-              <a:rPr lang="en-US" sz="1400" dirty="0">
-                <a:solidFill>
-                  <a:srgbClr val="1F2A37"/>
-                </a:solidFill>
-                <a:latin typeface="Calibri" pitchFamily="34" charset="0"/>
-                <a:ea typeface="Calibri" pitchFamily="34" charset="-122"/>
-                <a:cs typeface="Calibri" pitchFamily="34" charset="-120"/>
-              </a:rPr>
-              <a:t>Estado produtor</a:t>
-            </a:r>
-            <a:endParaRPr lang="en-US" sz="1400" dirty="0"/>
-          </a:p>
-        </p:txBody>
-      </p:sp>
-      <p:sp>
-        <p:nvSpPr>
-          <p:cNvPr id="10" name="Shape 8"/>
-          <p:cNvSpPr/>
-          <p:nvPr/>
-        </p:nvSpPr>
-        <p:spPr>
-          <a:xfrm>
-            <a:off x="685800" y="2798064"/>
-            <a:ext cx="3794760" cy="914400"/>
-          </a:xfrm>
-          <a:prstGeom prst="roundRect">
-            <a:avLst>
-              <a:gd name="adj" fmla="val 8000"/>
-            </a:avLst>
-          </a:prstGeom>
-          <a:solidFill>
-            <a:srgbClr val="FFFFFF"/>
-          </a:solidFill>
-          <a:ln w="12700">
-            <a:solidFill>
-              <a:srgbClr val="DCD5C1"/>
-            </a:solidFill>
-            <a:prstDash val="solid"/>
-          </a:ln>
-        </p:spPr>
-      </p:sp>
-      <p:sp>
-        <p:nvSpPr>
-          <p:cNvPr id="11" name="Text 9"/>
-          <p:cNvSpPr txBox="1"/>
-          <p:nvPr/>
-        </p:nvSpPr>
-        <p:spPr>
-          <a:xfrm>
-            <a:off x="813816" y="3044952"/>
-            <a:ext cx="420624" cy="420624"/>
-          </a:xfrm>
-          <a:prstGeom prst="roundRect">
-            <a:avLst>
-              <a:gd name="adj" fmla="val 50000"/>
-            </a:avLst>
-          </a:prstGeom>
-          <a:solidFill>
-            <a:srgbClr val="13294B"/>
-          </a:solidFill>
-          <a:ln/>
-        </p:spPr>
-        <p:txBody>
-          <a:bodyPr wrap="square" lIns="0" tIns="0" rIns="0" bIns="0" rtlCol="0" anchor="ctr"/>
-          <a:lstStyle/>
-          <a:p>
-            <a:pPr algn="ctr" indent="0" marL="0">
-              <a:lnSpc>
-                <a:spcPct val="100000"/>
-              </a:lnSpc>
-              <a:buNone/>
-            </a:pPr>
-            <a:r>
-              <a:rPr lang="en-US" sz="1600" b="1" dirty="0">
-                <a:solidFill>
-                  <a:srgbClr val="FFFFFF"/>
-                </a:solidFill>
-                <a:latin typeface="Calibri" pitchFamily="34" charset="0"/>
-                <a:ea typeface="Calibri" pitchFamily="34" charset="-122"/>
-                <a:cs typeface="Calibri" pitchFamily="34" charset="-120"/>
-              </a:rPr>
-              <a:t>c</a:t>
-            </a:r>
-            <a:endParaRPr lang="en-US" sz="1600" dirty="0"/>
-          </a:p>
-        </p:txBody>
-      </p:sp>
-      <p:sp>
-        <p:nvSpPr>
-          <p:cNvPr id="12" name="Text 10"/>
-          <p:cNvSpPr txBox="1"/>
-          <p:nvPr/>
-        </p:nvSpPr>
-        <p:spPr>
-          <a:xfrm>
-            <a:off x="1344168" y="2834640"/>
-            <a:ext cx="3044952" cy="841248"/>
-          </a:xfrm>
-          <a:prstGeom prst="rect">
-            <a:avLst/>
-          </a:prstGeom>
-          <a:noFill/>
-          <a:ln/>
-        </p:spPr>
-        <p:txBody>
-          <a:bodyPr wrap="square" lIns="25400" tIns="25400" rIns="25400" bIns="25400" rtlCol="0" anchor="ctr"/>
-          <a:lstStyle/>
-          <a:p>
-            <a:pPr algn="l" indent="0" marL="0">
-              <a:lnSpc>
-                <a:spcPct val="100000"/>
-              </a:lnSpc>
-              <a:buNone/>
-            </a:pPr>
-            <a:r>
-              <a:rPr lang="en-US" sz="1400" dirty="0">
-                <a:solidFill>
-                  <a:srgbClr val="1F2A37"/>
-                </a:solidFill>
-                <a:latin typeface="Calibri" pitchFamily="34" charset="0"/>
-                <a:ea typeface="Calibri" pitchFamily="34" charset="-122"/>
-                <a:cs typeface="Calibri" pitchFamily="34" charset="-120"/>
-              </a:rPr>
-              <a:t>Planejamento central</a:t>
-            </a:r>
-            <a:endParaRPr lang="en-US" sz="1400" dirty="0"/>
-          </a:p>
-        </p:txBody>
-      </p:sp>
-      <p:sp>
-        <p:nvSpPr>
-          <p:cNvPr id="13" name="Shape 11"/>
-          <p:cNvSpPr/>
-          <p:nvPr/>
-        </p:nvSpPr>
-        <p:spPr>
-          <a:xfrm>
-            <a:off x="4663440" y="2798064"/>
-            <a:ext cx="3794760" cy="914400"/>
-          </a:xfrm>
-          <a:prstGeom prst="roundRect">
-            <a:avLst>
-              <a:gd name="adj" fmla="val 8000"/>
-            </a:avLst>
-          </a:prstGeom>
-          <a:solidFill>
-            <a:srgbClr val="FFFFFF"/>
-          </a:solidFill>
-          <a:ln w="12700">
-            <a:solidFill>
-              <a:srgbClr val="DCD5C1"/>
-            </a:solidFill>
-            <a:prstDash val="solid"/>
-          </a:ln>
-        </p:spPr>
-      </p:sp>
-      <p:sp>
-        <p:nvSpPr>
-          <p:cNvPr id="14" name="Text 12"/>
-          <p:cNvSpPr txBox="1"/>
-          <p:nvPr/>
-        </p:nvSpPr>
-        <p:spPr>
-          <a:xfrm>
-            <a:off x="4791456" y="3044952"/>
-            <a:ext cx="420624" cy="420624"/>
-          </a:xfrm>
-          <a:prstGeom prst="roundRect">
-            <a:avLst>
-              <a:gd name="adj" fmla="val 50000"/>
-            </a:avLst>
-          </a:prstGeom>
-          <a:solidFill>
-            <a:srgbClr val="13294B"/>
-          </a:solidFill>
-          <a:ln/>
-        </p:spPr>
-        <p:txBody>
-          <a:bodyPr wrap="square" lIns="0" tIns="0" rIns="0" bIns="0" rtlCol="0" anchor="ctr"/>
-          <a:lstStyle/>
-          <a:p>
-            <a:pPr algn="ctr" indent="0" marL="0">
-              <a:lnSpc>
-                <a:spcPct val="100000"/>
-              </a:lnSpc>
-              <a:buNone/>
-            </a:pPr>
-            <a:r>
-              <a:rPr lang="en-US" sz="1600" b="1" dirty="0">
-                <a:solidFill>
-                  <a:srgbClr val="FFFFFF"/>
-                </a:solidFill>
-                <a:latin typeface="Calibri" pitchFamily="34" charset="0"/>
-                <a:ea typeface="Calibri" pitchFamily="34" charset="-122"/>
-                <a:cs typeface="Calibri" pitchFamily="34" charset="-120"/>
-              </a:rPr>
-              <a:t>d</a:t>
-            </a:r>
-            <a:endParaRPr lang="en-US" sz="1600" dirty="0"/>
-          </a:p>
-        </p:txBody>
-      </p:sp>
-      <p:sp>
-        <p:nvSpPr>
-          <p:cNvPr id="15" name="Text 13"/>
-          <p:cNvSpPr txBox="1"/>
-          <p:nvPr/>
-        </p:nvSpPr>
-        <p:spPr>
-          <a:xfrm>
-            <a:off x="5321808" y="2834640"/>
-            <a:ext cx="3044952" cy="841248"/>
-          </a:xfrm>
-          <a:prstGeom prst="rect">
-            <a:avLst/>
-          </a:prstGeom>
-          <a:noFill/>
-          <a:ln/>
-        </p:spPr>
-        <p:txBody>
-          <a:bodyPr wrap="square" lIns="25400" tIns="25400" rIns="25400" bIns="25400" rtlCol="0" anchor="ctr"/>
-          <a:lstStyle/>
-          <a:p>
-            <a:pPr algn="l" indent="0" marL="0">
-              <a:lnSpc>
-                <a:spcPct val="100000"/>
-              </a:lnSpc>
-              <a:buNone/>
-            </a:pPr>
-            <a:r>
-              <a:rPr lang="en-US" sz="1400" dirty="0">
-                <a:solidFill>
-                  <a:srgbClr val="1F2A37"/>
-                </a:solidFill>
-                <a:latin typeface="Calibri" pitchFamily="34" charset="0"/>
-                <a:ea typeface="Calibri" pitchFamily="34" charset="-122"/>
-                <a:cs typeface="Calibri" pitchFamily="34" charset="-120"/>
-              </a:rPr>
-              <a:t>Estado mínimo guarda-noturno</a:t>
-            </a:r>
-            <a:endParaRPr lang="en-US" sz="1400" dirty="0"/>
-          </a:p>
-        </p:txBody>
-      </p:sp>
-      <p:sp>
-        <p:nvSpPr>
-          <p:cNvPr id="16" name="Text 14"/>
-          <p:cNvSpPr txBox="1"/>
-          <p:nvPr/>
-        </p:nvSpPr>
-        <p:spPr>
-          <a:xfrm>
-            <a:off x="4206240" y="36576"/>
-            <a:ext cx="4800600" cy="219456"/>
-          </a:xfrm>
-          <a:prstGeom prst="rect">
-            <a:avLst/>
-          </a:prstGeom>
-          <a:noFill/>
-          <a:ln/>
-        </p:spPr>
-        <p:txBody>
-          <a:bodyPr wrap="square" lIns="0" tIns="0" rIns="0" bIns="0" rtlCol="0" anchor="ctr"/>
-          <a:lstStyle/>
-          <a:p>
-            <a:pPr algn="r" indent="0" marL="0">
-              <a:lnSpc>
-                <a:spcPct val="100000"/>
-              </a:lnSpc>
-              <a:buNone/>
-            </a:pPr>
-            <a:r>
-              <a:rPr lang="en-US" sz="950" dirty="0">
-                <a:solidFill>
-                  <a:srgbClr val="5B6770"/>
-                </a:solidFill>
-                <a:latin typeface="Calibri" pitchFamily="34" charset="0"/>
-                <a:ea typeface="Calibri" pitchFamily="34" charset="-122"/>
-                <a:cs typeface="Calibri" pitchFamily="34" charset="-120"/>
-              </a:rPr>
-              <a:t>Estado, Governo e Mercado · Unidade 4</a:t>
-            </a:r>
-            <a:endParaRPr lang="en-US" sz="950" dirty="0"/>
-          </a:p>
-        </p:txBody>
-      </p:sp>
-    </p:spTree>
-  </p:cSld>
-  <p:clrMapOvr>
-    <a:masterClrMapping/>
-  </p:clrMapOvr>
-</p:sld>
-</file>
-
-<file path=ppt/slides/slide35.xml><?xml version="1.0" encoding="utf-8"?>
-<p:sld xmlns:a="http://schemas.openxmlformats.org/drawingml/2006/main" xmlns:r="http://schemas.openxmlformats.org/officeDocument/2006/relationships" xmlns:p="http://schemas.openxmlformats.org/presentationml/2006/main">
-  <p:cSld name="Slide 35">
-    <p:bg>
-      <p:bgPr>
-        <a:blipFill dpi="0" rotWithShape="1">
-          <a:blip r:embed="rId1">
-            <a:lum/>
-          </a:blip>
-          <a:srcRect/>
-          <a:stretch>
-            <a:fillRect/>
-          </a:stretch>
-        </a:blipFill>
-        <a:effectLst/>
-      </p:bgPr>
-    </p:bg>
-    <p:spTree>
-      <p:nvGrpSpPr>
-        <p:cNvPr id="1" name=""/>
-        <p:cNvGrpSpPr/>
-        <p:nvPr/>
-      </p:nvGrpSpPr>
-      <p:grpSpPr>
-        <a:xfrm>
-          <a:off x="0" y="0"/>
-          <a:ext cx="0" cy="0"/>
-          <a:chOff x="0" y="0"/>
-          <a:chExt cx="0" cy="0"/>
-        </a:xfrm>
-      </p:grpSpPr>
-      <p:sp>
-        <p:nvSpPr>
-          <p:cNvPr id="2" name="Text 0"/>
-          <p:cNvSpPr txBox="1"/>
-          <p:nvPr/>
-        </p:nvSpPr>
-        <p:spPr>
-          <a:xfrm>
-            <a:off x="731520" y="274320"/>
-            <a:ext cx="7680960" cy="365760"/>
-          </a:xfrm>
-          <a:prstGeom prst="rect">
-            <a:avLst/>
-          </a:prstGeom>
-          <a:noFill/>
-          <a:ln/>
-        </p:spPr>
-        <p:txBody>
-          <a:bodyPr wrap="square" lIns="0" tIns="0" rIns="0" bIns="0" rtlCol="0" anchor="ctr"/>
-          <a:lstStyle/>
-          <a:p>
-            <a:pPr algn="ctr" indent="0" marL="0">
-              <a:lnSpc>
-                <a:spcPct val="100000"/>
-              </a:lnSpc>
-              <a:buNone/>
-            </a:pPr>
-            <a:r>
-              <a:rPr lang="en-US" sz="1250" b="1" dirty="0">
-                <a:solidFill>
-                  <a:srgbClr val="2A8C85"/>
-                </a:solidFill>
-                <a:latin typeface="Calibri" pitchFamily="34" charset="0"/>
-                <a:ea typeface="Calibri" pitchFamily="34" charset="-122"/>
-                <a:cs typeface="Calibri" pitchFamily="34" charset="-120"/>
-              </a:rPr>
-              <a:t>QUIZ DA UNIDADE 4 · PERGUNTA 5 DE 5 · RESPOSTA</a:t>
-            </a:r>
-            <a:endParaRPr lang="en-US" sz="1250" dirty="0"/>
-          </a:p>
-        </p:txBody>
-      </p:sp>
-      <p:sp>
-        <p:nvSpPr>
-          <p:cNvPr id="3" name="Text 1"/>
-          <p:cNvSpPr txBox="1"/>
-          <p:nvPr/>
-        </p:nvSpPr>
-        <p:spPr>
-          <a:xfrm>
-            <a:off x="731520" y="658368"/>
-            <a:ext cx="7680960" cy="960120"/>
-          </a:xfrm>
-          <a:prstGeom prst="rect">
-            <a:avLst/>
-          </a:prstGeom>
-          <a:noFill/>
-          <a:ln/>
-        </p:spPr>
-        <p:txBody>
-          <a:bodyPr wrap="square" lIns="0" tIns="0" rIns="0" bIns="0" rtlCol="0" anchor="ctr"/>
-          <a:lstStyle/>
-          <a:p>
-            <a:pPr algn="ctr" indent="0" marL="0">
-              <a:lnSpc>
-                <a:spcPct val="100000"/>
-              </a:lnSpc>
-              <a:buNone/>
-            </a:pPr>
-            <a:r>
-              <a:rPr lang="en-US" sz="1900" b="1" dirty="0">
-                <a:solidFill>
-                  <a:srgbClr val="13294B"/>
-                </a:solidFill>
-                <a:latin typeface="Calibri" pitchFamily="34" charset="0"/>
-                <a:ea typeface="Calibri" pitchFamily="34" charset="-122"/>
-                <a:cs typeface="Calibri" pitchFamily="34" charset="-120"/>
-              </a:rPr>
-              <a:t>A criação da ANEEL, da ANATEL e da ANP, nos anos 1990, expressa qual papel do Estado?</a:t>
-            </a:r>
-            <a:endParaRPr lang="en-US" sz="1900" dirty="0"/>
-          </a:p>
-        </p:txBody>
-      </p:sp>
-      <p:sp>
-        <p:nvSpPr>
-          <p:cNvPr id="4" name="Shape 2"/>
-          <p:cNvSpPr/>
-          <p:nvPr/>
-        </p:nvSpPr>
-        <p:spPr>
-          <a:xfrm>
-            <a:off x="685800" y="1737360"/>
-            <a:ext cx="3794760" cy="749808"/>
-          </a:xfrm>
-          <a:prstGeom prst="roundRect">
-            <a:avLst>
-              <a:gd name="adj" fmla="val 9756"/>
-            </a:avLst>
-          </a:prstGeom>
-          <a:solidFill>
-            <a:srgbClr val="E3F2E8"/>
-          </a:solidFill>
-          <a:ln w="25400">
-            <a:solidFill>
-              <a:srgbClr val="2E7D4F"/>
-            </a:solidFill>
-            <a:prstDash val="solid"/>
-          </a:ln>
-        </p:spPr>
-      </p:sp>
-      <p:sp>
-        <p:nvSpPr>
-          <p:cNvPr id="5" name="Text 3"/>
-          <p:cNvSpPr txBox="1"/>
-          <p:nvPr/>
-        </p:nvSpPr>
-        <p:spPr>
-          <a:xfrm>
-            <a:off x="813816" y="1901952"/>
-            <a:ext cx="420624" cy="420624"/>
-          </a:xfrm>
-          <a:prstGeom prst="roundRect">
-            <a:avLst>
-              <a:gd name="adj" fmla="val 50000"/>
-            </a:avLst>
-          </a:prstGeom>
-          <a:solidFill>
-            <a:srgbClr val="2E7D4F"/>
-          </a:solidFill>
-          <a:ln/>
-        </p:spPr>
-        <p:txBody>
-          <a:bodyPr wrap="square" lIns="0" tIns="0" rIns="0" bIns="0" rtlCol="0" anchor="ctr"/>
-          <a:lstStyle/>
-          <a:p>
-            <a:pPr algn="ctr" indent="0" marL="0">
-              <a:lnSpc>
-                <a:spcPct val="100000"/>
-              </a:lnSpc>
-              <a:buNone/>
-            </a:pPr>
-            <a:r>
-              <a:rPr lang="en-US" sz="1600" b="1" dirty="0">
-                <a:solidFill>
-                  <a:srgbClr val="FFFFFF"/>
-                </a:solidFill>
-                <a:latin typeface="Calibri" pitchFamily="34" charset="0"/>
-                <a:ea typeface="Calibri" pitchFamily="34" charset="-122"/>
-                <a:cs typeface="Calibri" pitchFamily="34" charset="-120"/>
-              </a:rPr>
-              <a:t>a</a:t>
-            </a:r>
-            <a:endParaRPr lang="en-US" sz="1600" dirty="0"/>
-          </a:p>
-        </p:txBody>
-      </p:sp>
-      <p:sp>
-        <p:nvSpPr>
-          <p:cNvPr id="6" name="Text 4"/>
-          <p:cNvSpPr txBox="1"/>
-          <p:nvPr/>
-        </p:nvSpPr>
-        <p:spPr>
-          <a:xfrm>
-            <a:off x="1344168" y="1773936"/>
-            <a:ext cx="3044952" cy="676656"/>
-          </a:xfrm>
-          <a:prstGeom prst="rect">
-            <a:avLst/>
-          </a:prstGeom>
-          <a:noFill/>
-          <a:ln/>
-        </p:spPr>
-        <p:txBody>
-          <a:bodyPr wrap="square" lIns="25400" tIns="25400" rIns="25400" bIns="25400" rtlCol="0" anchor="ctr"/>
-          <a:lstStyle/>
-          <a:p>
-            <a:pPr algn="l" indent="0" marL="0">
-              <a:lnSpc>
-                <a:spcPct val="100000"/>
-              </a:lnSpc>
-              <a:buNone/>
-            </a:pPr>
-            <a:r>
-              <a:rPr lang="en-US" sz="1400" b="1" dirty="0">
-                <a:solidFill>
-                  <a:srgbClr val="1F2A37"/>
-                </a:solidFill>
-                <a:latin typeface="Calibri" pitchFamily="34" charset="0"/>
-                <a:ea typeface="Calibri" pitchFamily="34" charset="-122"/>
-                <a:cs typeface="Calibri" pitchFamily="34" charset="-120"/>
-              </a:rPr>
-              <a:t>Estado regulador</a:t>
-            </a:r>
-            <a:endParaRPr lang="en-US" sz="1400" dirty="0"/>
-          </a:p>
-        </p:txBody>
-      </p:sp>
-      <p:sp>
-        <p:nvSpPr>
-          <p:cNvPr id="7" name="Shape 5"/>
-          <p:cNvSpPr/>
-          <p:nvPr/>
-        </p:nvSpPr>
-        <p:spPr>
-          <a:xfrm>
-            <a:off x="4663440" y="1737360"/>
-            <a:ext cx="3794760" cy="749808"/>
-          </a:xfrm>
-          <a:prstGeom prst="roundRect">
-            <a:avLst>
-              <a:gd name="adj" fmla="val 9756"/>
-            </a:avLst>
-          </a:prstGeom>
-          <a:solidFill>
-            <a:srgbClr val="FFFFFF"/>
-          </a:solidFill>
-          <a:ln w="12700">
-            <a:solidFill>
-              <a:srgbClr val="DCD5C1"/>
-            </a:solidFill>
-            <a:prstDash val="solid"/>
-          </a:ln>
-        </p:spPr>
-      </p:sp>
-      <p:sp>
-        <p:nvSpPr>
-          <p:cNvPr id="8" name="Text 6"/>
-          <p:cNvSpPr txBox="1"/>
-          <p:nvPr/>
-        </p:nvSpPr>
-        <p:spPr>
-          <a:xfrm>
-            <a:off x="4791456" y="1901952"/>
-            <a:ext cx="420624" cy="420624"/>
-          </a:xfrm>
-          <a:prstGeom prst="roundRect">
-            <a:avLst>
-              <a:gd name="adj" fmla="val 50000"/>
-            </a:avLst>
-          </a:prstGeom>
-          <a:solidFill>
-            <a:srgbClr val="9AA3AB"/>
-          </a:solidFill>
-          <a:ln/>
-        </p:spPr>
-        <p:txBody>
-          <a:bodyPr wrap="square" lIns="0" tIns="0" rIns="0" bIns="0" rtlCol="0" anchor="ctr"/>
-          <a:lstStyle/>
-          <a:p>
-            <a:pPr algn="ctr" indent="0" marL="0">
-              <a:lnSpc>
-                <a:spcPct val="100000"/>
-              </a:lnSpc>
-              <a:buNone/>
-            </a:pPr>
-            <a:r>
-              <a:rPr lang="en-US" sz="1600" b="1" dirty="0">
-                <a:solidFill>
-                  <a:srgbClr val="FFFFFF"/>
-                </a:solidFill>
-                <a:latin typeface="Calibri" pitchFamily="34" charset="0"/>
-                <a:ea typeface="Calibri" pitchFamily="34" charset="-122"/>
-                <a:cs typeface="Calibri" pitchFamily="34" charset="-120"/>
-              </a:rPr>
-              <a:t>b</a:t>
-            </a:r>
-            <a:endParaRPr lang="en-US" sz="1600" dirty="0"/>
-          </a:p>
-        </p:txBody>
-      </p:sp>
-      <p:sp>
-        <p:nvSpPr>
-          <p:cNvPr id="9" name="Text 7"/>
-          <p:cNvSpPr txBox="1"/>
-          <p:nvPr/>
-        </p:nvSpPr>
-        <p:spPr>
-          <a:xfrm>
-            <a:off x="5321808" y="1773936"/>
-            <a:ext cx="3044952" cy="676656"/>
-          </a:xfrm>
-          <a:prstGeom prst="rect">
-            <a:avLst/>
-          </a:prstGeom>
-          <a:noFill/>
-          <a:ln/>
-        </p:spPr>
-        <p:txBody>
-          <a:bodyPr wrap="square" lIns="25400" tIns="25400" rIns="25400" bIns="25400" rtlCol="0" anchor="ctr"/>
-          <a:lstStyle/>
-          <a:p>
-            <a:pPr algn="l" indent="0" marL="0">
-              <a:lnSpc>
-                <a:spcPct val="100000"/>
-              </a:lnSpc>
-              <a:buNone/>
-            </a:pPr>
-            <a:r>
-              <a:rPr lang="en-US" sz="1400" dirty="0">
-                <a:solidFill>
-                  <a:srgbClr val="5B6770"/>
-                </a:solidFill>
-                <a:latin typeface="Calibri" pitchFamily="34" charset="0"/>
-                <a:ea typeface="Calibri" pitchFamily="34" charset="-122"/>
-                <a:cs typeface="Calibri" pitchFamily="34" charset="-120"/>
-              </a:rPr>
-              <a:t>Estado produtor</a:t>
-            </a:r>
-            <a:endParaRPr lang="en-US" sz="1400" dirty="0"/>
-          </a:p>
-        </p:txBody>
-      </p:sp>
-      <p:sp>
-        <p:nvSpPr>
-          <p:cNvPr id="10" name="Shape 8"/>
-          <p:cNvSpPr/>
-          <p:nvPr/>
-        </p:nvSpPr>
-        <p:spPr>
-          <a:xfrm>
-            <a:off x="685800" y="2633472"/>
-            <a:ext cx="3794760" cy="749808"/>
-          </a:xfrm>
-          <a:prstGeom prst="roundRect">
-            <a:avLst>
-              <a:gd name="adj" fmla="val 9756"/>
-            </a:avLst>
-          </a:prstGeom>
-          <a:solidFill>
-            <a:srgbClr val="FFFFFF"/>
-          </a:solidFill>
-          <a:ln w="12700">
-            <a:solidFill>
-              <a:srgbClr val="DCD5C1"/>
-            </a:solidFill>
-            <a:prstDash val="solid"/>
-          </a:ln>
-        </p:spPr>
-      </p:sp>
-      <p:sp>
-        <p:nvSpPr>
-          <p:cNvPr id="11" name="Text 9"/>
-          <p:cNvSpPr txBox="1"/>
-          <p:nvPr/>
-        </p:nvSpPr>
-        <p:spPr>
-          <a:xfrm>
-            <a:off x="813816" y="2798064"/>
-            <a:ext cx="420624" cy="420624"/>
-          </a:xfrm>
-          <a:prstGeom prst="roundRect">
-            <a:avLst>
-              <a:gd name="adj" fmla="val 50000"/>
-            </a:avLst>
-          </a:prstGeom>
-          <a:solidFill>
-            <a:srgbClr val="9AA3AB"/>
-          </a:solidFill>
-          <a:ln/>
-        </p:spPr>
-        <p:txBody>
-          <a:bodyPr wrap="square" lIns="0" tIns="0" rIns="0" bIns="0" rtlCol="0" anchor="ctr"/>
-          <a:lstStyle/>
-          <a:p>
-            <a:pPr algn="ctr" indent="0" marL="0">
-              <a:lnSpc>
-                <a:spcPct val="100000"/>
-              </a:lnSpc>
-              <a:buNone/>
-            </a:pPr>
-            <a:r>
-              <a:rPr lang="en-US" sz="1600" b="1" dirty="0">
-                <a:solidFill>
-                  <a:srgbClr val="FFFFFF"/>
-                </a:solidFill>
-                <a:latin typeface="Calibri" pitchFamily="34" charset="0"/>
-                <a:ea typeface="Calibri" pitchFamily="34" charset="-122"/>
-                <a:cs typeface="Calibri" pitchFamily="34" charset="-120"/>
-              </a:rPr>
-              <a:t>c</a:t>
-            </a:r>
-            <a:endParaRPr lang="en-US" sz="1600" dirty="0"/>
-          </a:p>
-        </p:txBody>
-      </p:sp>
-      <p:sp>
-        <p:nvSpPr>
-          <p:cNvPr id="12" name="Text 10"/>
-          <p:cNvSpPr txBox="1"/>
-          <p:nvPr/>
-        </p:nvSpPr>
-        <p:spPr>
-          <a:xfrm>
-            <a:off x="1344168" y="2670048"/>
-            <a:ext cx="3044952" cy="676656"/>
-          </a:xfrm>
-          <a:prstGeom prst="rect">
-            <a:avLst/>
-          </a:prstGeom>
-          <a:noFill/>
-          <a:ln/>
-        </p:spPr>
-        <p:txBody>
-          <a:bodyPr wrap="square" lIns="25400" tIns="25400" rIns="25400" bIns="25400" rtlCol="0" anchor="ctr"/>
-          <a:lstStyle/>
-          <a:p>
-            <a:pPr algn="l" indent="0" marL="0">
-              <a:lnSpc>
-                <a:spcPct val="100000"/>
-              </a:lnSpc>
-              <a:buNone/>
-            </a:pPr>
-            <a:r>
-              <a:rPr lang="en-US" sz="1400" dirty="0">
-                <a:solidFill>
-                  <a:srgbClr val="5B6770"/>
-                </a:solidFill>
-                <a:latin typeface="Calibri" pitchFamily="34" charset="0"/>
-                <a:ea typeface="Calibri" pitchFamily="34" charset="-122"/>
-                <a:cs typeface="Calibri" pitchFamily="34" charset="-120"/>
-              </a:rPr>
-              <a:t>Planejamento central</a:t>
-            </a:r>
-            <a:endParaRPr lang="en-US" sz="1400" dirty="0"/>
-          </a:p>
-        </p:txBody>
-      </p:sp>
-      <p:sp>
-        <p:nvSpPr>
-          <p:cNvPr id="13" name="Shape 11"/>
-          <p:cNvSpPr/>
-          <p:nvPr/>
-        </p:nvSpPr>
-        <p:spPr>
-          <a:xfrm>
-            <a:off x="4663440" y="2633472"/>
-            <a:ext cx="3794760" cy="749808"/>
-          </a:xfrm>
-          <a:prstGeom prst="roundRect">
-            <a:avLst>
-              <a:gd name="adj" fmla="val 9756"/>
-            </a:avLst>
-          </a:prstGeom>
-          <a:solidFill>
-            <a:srgbClr val="FFFFFF"/>
-          </a:solidFill>
-          <a:ln w="12700">
-            <a:solidFill>
-              <a:srgbClr val="DCD5C1"/>
-            </a:solidFill>
-            <a:prstDash val="solid"/>
-          </a:ln>
-        </p:spPr>
-      </p:sp>
-      <p:sp>
-        <p:nvSpPr>
-          <p:cNvPr id="14" name="Text 12"/>
-          <p:cNvSpPr txBox="1"/>
-          <p:nvPr/>
-        </p:nvSpPr>
-        <p:spPr>
-          <a:xfrm>
-            <a:off x="4791456" y="2798064"/>
-            <a:ext cx="420624" cy="420624"/>
-          </a:xfrm>
-          <a:prstGeom prst="roundRect">
-            <a:avLst>
-              <a:gd name="adj" fmla="val 50000"/>
-            </a:avLst>
-          </a:prstGeom>
-          <a:solidFill>
-            <a:srgbClr val="9AA3AB"/>
-          </a:solidFill>
-          <a:ln/>
-        </p:spPr>
-        <p:txBody>
-          <a:bodyPr wrap="square" lIns="0" tIns="0" rIns="0" bIns="0" rtlCol="0" anchor="ctr"/>
-          <a:lstStyle/>
-          <a:p>
-            <a:pPr algn="ctr" indent="0" marL="0">
-              <a:lnSpc>
-                <a:spcPct val="100000"/>
-              </a:lnSpc>
-              <a:buNone/>
-            </a:pPr>
-            <a:r>
-              <a:rPr lang="en-US" sz="1600" b="1" dirty="0">
-                <a:solidFill>
-                  <a:srgbClr val="FFFFFF"/>
-                </a:solidFill>
-                <a:latin typeface="Calibri" pitchFamily="34" charset="0"/>
-                <a:ea typeface="Calibri" pitchFamily="34" charset="-122"/>
-                <a:cs typeface="Calibri" pitchFamily="34" charset="-120"/>
-              </a:rPr>
-              <a:t>d</a:t>
-            </a:r>
-            <a:endParaRPr lang="en-US" sz="1600" dirty="0"/>
-          </a:p>
-        </p:txBody>
-      </p:sp>
-      <p:sp>
-        <p:nvSpPr>
-          <p:cNvPr id="15" name="Text 13"/>
-          <p:cNvSpPr txBox="1"/>
-          <p:nvPr/>
-        </p:nvSpPr>
-        <p:spPr>
-          <a:xfrm>
-            <a:off x="5321808" y="2670048"/>
-            <a:ext cx="3044952" cy="676656"/>
-          </a:xfrm>
-          <a:prstGeom prst="rect">
-            <a:avLst/>
-          </a:prstGeom>
-          <a:noFill/>
-          <a:ln/>
-        </p:spPr>
-        <p:txBody>
-          <a:bodyPr wrap="square" lIns="25400" tIns="25400" rIns="25400" bIns="25400" rtlCol="0" anchor="ctr"/>
-          <a:lstStyle/>
-          <a:p>
-            <a:pPr algn="l" indent="0" marL="0">
-              <a:lnSpc>
-                <a:spcPct val="100000"/>
-              </a:lnSpc>
-              <a:buNone/>
-            </a:pPr>
-            <a:r>
-              <a:rPr lang="en-US" sz="1400" dirty="0">
-                <a:solidFill>
-                  <a:srgbClr val="5B6770"/>
-                </a:solidFill>
-                <a:latin typeface="Calibri" pitchFamily="34" charset="0"/>
-                <a:ea typeface="Calibri" pitchFamily="34" charset="-122"/>
-                <a:cs typeface="Calibri" pitchFamily="34" charset="-120"/>
-              </a:rPr>
-              <a:t>Estado mínimo guarda-noturno</a:t>
-            </a:r>
-            <a:endParaRPr lang="en-US" sz="1400" dirty="0"/>
-          </a:p>
-        </p:txBody>
-      </p:sp>
-      <p:sp>
-        <p:nvSpPr>
-          <p:cNvPr id="16" name="Text 14"/>
-          <p:cNvSpPr txBox="1"/>
-          <p:nvPr/>
-        </p:nvSpPr>
-        <p:spPr>
-          <a:xfrm>
-            <a:off x="685800" y="3566160"/>
-            <a:ext cx="7772400" cy="841248"/>
-          </a:xfrm>
-          <a:prstGeom prst="roundRect">
-            <a:avLst>
-              <a:gd name="adj" fmla="val 8696"/>
-            </a:avLst>
-          </a:prstGeom>
-          <a:solidFill>
-            <a:srgbClr val="E6F2F0"/>
-          </a:solidFill>
-          <a:ln/>
-        </p:spPr>
-        <p:txBody>
-          <a:bodyPr wrap="square" lIns="114300" tIns="114300" rIns="114300" bIns="114300" rtlCol="0" anchor="ctr"/>
-          <a:lstStyle/>
-          <a:p>
-            <a:pPr algn="l" indent="0" marL="0">
-              <a:lnSpc>
-                <a:spcPct val="100000"/>
-              </a:lnSpc>
-              <a:buNone/>
-            </a:pPr>
-            <a:r>
-              <a:rPr lang="en-US" sz="1350" b="1" dirty="0">
-                <a:solidFill>
-                  <a:srgbClr val="2E7D4F"/>
-                </a:solidFill>
-                <a:latin typeface="Calibri" pitchFamily="34" charset="0"/>
-                <a:ea typeface="Calibri" pitchFamily="34" charset="-122"/>
-                <a:cs typeface="Calibri" pitchFamily="34" charset="-120"/>
-              </a:rPr>
-              <a:t>Resposta: a) </a:t>
-            </a:r>
-            <a:pPr algn="l" indent="0" marL="0">
-              <a:lnSpc>
-                <a:spcPct val="100000"/>
-              </a:lnSpc>
-              <a:buNone/>
-            </a:pPr>
-            <a:r>
-              <a:rPr lang="en-US" sz="1350" dirty="0">
-                <a:solidFill>
-                  <a:srgbClr val="1F2A37"/>
-                </a:solidFill>
-                <a:latin typeface="Calibri" pitchFamily="34" charset="0"/>
-                <a:ea typeface="Calibri" pitchFamily="34" charset="-122"/>
-                <a:cs typeface="Calibri" pitchFamily="34" charset="-120"/>
-              </a:rPr>
-              <a:t>Com as privatizações e concessões, o Estado deixa de produzir diretamente e passa a regular os serviços por meio de agências.</a:t>
-            </a:r>
-            <a:endParaRPr lang="en-US" sz="1350" dirty="0"/>
-          </a:p>
-        </p:txBody>
-      </p:sp>
-      <p:sp>
-        <p:nvSpPr>
-          <p:cNvPr id="17" name="Text 15"/>
-          <p:cNvSpPr txBox="1"/>
-          <p:nvPr/>
-        </p:nvSpPr>
-        <p:spPr>
-          <a:xfrm>
-            <a:off x="4206240" y="36576"/>
-            <a:ext cx="4800600" cy="219456"/>
-          </a:xfrm>
-          <a:prstGeom prst="rect">
-            <a:avLst/>
-          </a:prstGeom>
-          <a:noFill/>
-          <a:ln/>
-        </p:spPr>
-        <p:txBody>
-          <a:bodyPr wrap="square" lIns="0" tIns="0" rIns="0" bIns="0" rtlCol="0" anchor="ctr"/>
-          <a:lstStyle/>
-          <a:p>
-            <a:pPr algn="r" indent="0" marL="0">
-              <a:lnSpc>
-                <a:spcPct val="100000"/>
-              </a:lnSpc>
-              <a:buNone/>
-            </a:pPr>
-            <a:r>
-              <a:rPr lang="en-US" sz="950" dirty="0">
-                <a:solidFill>
-                  <a:srgbClr val="5B6770"/>
-                </a:solidFill>
-                <a:latin typeface="Calibri" pitchFamily="34" charset="0"/>
-                <a:ea typeface="Calibri" pitchFamily="34" charset="-122"/>
-                <a:cs typeface="Calibri" pitchFamily="34" charset="-120"/>
-              </a:rPr>
-              <a:t>Estado, Governo e Mercado · Unidade 4</a:t>
-            </a:r>
-            <a:endParaRPr lang="en-US" sz="950" dirty="0"/>
-          </a:p>
-        </p:txBody>
-      </p:sp>
-    </p:spTree>
-  </p:cSld>
-  <p:clrMapOvr>
-    <a:masterClrMapping/>
-  </p:clrMapOvr>
-</p:sld>
-</file>
-
-<file path=ppt/slides/slide36.xml><?xml version="1.0" encoding="utf-8"?>
-<p:sld xmlns:a="http://schemas.openxmlformats.org/drawingml/2006/main" xmlns:r="http://schemas.openxmlformats.org/officeDocument/2006/relationships" xmlns:p="http://schemas.openxmlformats.org/presentationml/2006/main">
-  <p:cSld name="Slide 36">
-    <p:bg>
-      <p:bgPr>
-        <a:blipFill dpi="0" rotWithShape="1">
-          <a:blip r:embed="rId1">
-            <a:lum/>
-          </a:blip>
-          <a:srcRect/>
-          <a:stretch>
-            <a:fillRect/>
-          </a:stretch>
-        </a:blipFill>
-        <a:effectLst/>
-      </p:bgPr>
-    </p:bg>
-    <p:spTree>
-      <p:nvGrpSpPr>
-        <p:cNvPr id="1" name=""/>
-        <p:cNvGrpSpPr/>
-        <p:nvPr/>
-      </p:nvGrpSpPr>
-      <p:grpSpPr>
-        <a:xfrm>
-          <a:off x="0" y="0"/>
-          <a:ext cx="0" cy="0"/>
-          <a:chOff x="0" y="0"/>
-          <a:chExt cx="0" cy="0"/>
-        </a:xfrm>
-      </p:grpSpPr>
-      <p:sp>
-        <p:nvSpPr>
-          <p:cNvPr id="2" name="Text 0"/>
-          <p:cNvSpPr txBox="1"/>
-          <p:nvPr/>
-        </p:nvSpPr>
-        <p:spPr>
-          <a:xfrm>
-            <a:off x="731520" y="256032"/>
-            <a:ext cx="7680960" cy="566928"/>
-          </a:xfrm>
-          <a:prstGeom prst="rect">
-            <a:avLst/>
-          </a:prstGeom>
-          <a:noFill/>
-          <a:ln/>
-        </p:spPr>
-        <p:txBody>
-          <a:bodyPr wrap="square" lIns="0" tIns="0" rIns="0" bIns="0" rtlCol="0" anchor="ctr"/>
-          <a:lstStyle/>
-          <a:p>
-            <a:pPr algn="ctr" indent="0" marL="0">
-              <a:lnSpc>
-                <a:spcPct val="100000"/>
-              </a:lnSpc>
-              <a:buNone/>
-            </a:pPr>
-            <a:r>
-              <a:rPr lang="en-US" sz="2800" b="1" dirty="0">
-                <a:solidFill>
-                  <a:srgbClr val="13294B"/>
-                </a:solidFill>
-                <a:latin typeface="Calibri" pitchFamily="34" charset="0"/>
-                <a:ea typeface="Calibri" pitchFamily="34" charset="-122"/>
-                <a:cs typeface="Calibri" pitchFamily="34" charset="-120"/>
-              </a:rPr>
-              <a:t>Resumo da Unidade 4</a:t>
-            </a:r>
-            <a:endParaRPr lang="en-US" sz="2800" dirty="0"/>
-          </a:p>
-        </p:txBody>
-      </p:sp>
-      <p:sp>
-        <p:nvSpPr>
-          <p:cNvPr id="3" name="Text 1"/>
-          <p:cNvSpPr txBox="1"/>
-          <p:nvPr/>
-        </p:nvSpPr>
-        <p:spPr>
-          <a:xfrm>
-            <a:off x="1005840" y="804672"/>
-            <a:ext cx="7132320" cy="329184"/>
-          </a:xfrm>
-          <a:prstGeom prst="rect">
-            <a:avLst/>
-          </a:prstGeom>
-          <a:noFill/>
-          <a:ln/>
-        </p:spPr>
-        <p:txBody>
-          <a:bodyPr wrap="square" lIns="0" tIns="0" rIns="0" bIns="0" rtlCol="0" anchor="ctr"/>
-          <a:lstStyle/>
-          <a:p>
-            <a:pPr algn="ctr" indent="0" marL="0">
-              <a:lnSpc>
-                <a:spcPct val="100000"/>
-              </a:lnSpc>
-              <a:buNone/>
-            </a:pPr>
-            <a:r>
-              <a:rPr lang="en-US" sz="1400" dirty="0">
-                <a:solidFill>
-                  <a:srgbClr val="5B6770"/>
-                </a:solidFill>
-                <a:latin typeface="Calibri" pitchFamily="34" charset="0"/>
-                <a:ea typeface="Calibri" pitchFamily="34" charset="-122"/>
-                <a:cs typeface="Calibri" pitchFamily="34" charset="-120"/>
-              </a:rPr>
-              <a:t>O que discutimos nesta unidade</a:t>
-            </a:r>
-            <a:endParaRPr lang="en-US" sz="1400" dirty="0"/>
-          </a:p>
-        </p:txBody>
-      </p:sp>
-      <p:sp>
-        <p:nvSpPr>
-          <p:cNvPr id="4" name="Text 2"/>
-          <p:cNvSpPr txBox="1"/>
-          <p:nvPr/>
-        </p:nvSpPr>
-        <p:spPr>
-          <a:xfrm>
-            <a:off x="685800" y="1170432"/>
-            <a:ext cx="3794760" cy="2743200"/>
-          </a:xfrm>
-          <a:prstGeom prst="roundRect">
-            <a:avLst>
-              <a:gd name="adj" fmla="val 2000"/>
-            </a:avLst>
-          </a:prstGeom>
-          <a:solidFill>
-            <a:srgbClr val="FFFFFF"/>
-          </a:solidFill>
-          <a:ln w="12700">
-            <a:solidFill>
-              <a:srgbClr val="DCD5C1"/>
-            </a:solidFill>
-          </a:ln>
-        </p:spPr>
-        <p:txBody>
-          <a:bodyPr wrap="square" lIns="114300" tIns="114300" rIns="114300" bIns="114300" rtlCol="0" anchor="t"/>
-          <a:lstStyle/>
-          <a:p>
-            <a:pPr algn="l" indent="0" marL="0">
-              <a:lnSpc>
-                <a:spcPct val="100000"/>
-              </a:lnSpc>
-              <a:spcAft>
-                <a:spcPts val="200"/>
-              </a:spcAft>
-              <a:buNone/>
-            </a:pPr>
-            <a:r>
-              <a:rPr lang="en-US" sz="1100" b="1" dirty="0">
-                <a:solidFill>
-                  <a:srgbClr val="2A8C85"/>
-                </a:solidFill>
-                <a:latin typeface="Calibri" pitchFamily="34" charset="0"/>
-                <a:ea typeface="Calibri" pitchFamily="34" charset="-122"/>
-                <a:cs typeface="Calibri" pitchFamily="34" charset="-120"/>
-              </a:rPr>
-              <a:t>PARTE 1 · TÓPICO 7</a:t>
-            </a:r>
-            <a:endParaRPr lang="en-US" sz="1100" dirty="0"/>
-          </a:p>
-          <a:p>
-            <a:pPr algn="l" indent="0" marL="0">
-              <a:lnSpc>
-                <a:spcPct val="100000"/>
-              </a:lnSpc>
-              <a:spcAft>
-                <a:spcPts val="400"/>
-              </a:spcAft>
-              <a:buNone/>
-            </a:pPr>
-            <a:r>
-              <a:rPr lang="en-US" sz="1450" b="1" dirty="0">
-                <a:solidFill>
-                  <a:srgbClr val="13294B"/>
-                </a:solidFill>
-                <a:latin typeface="Calibri" pitchFamily="34" charset="0"/>
-                <a:ea typeface="Calibri" pitchFamily="34" charset="-122"/>
-                <a:cs typeface="Calibri" pitchFamily="34" charset="-120"/>
-              </a:rPr>
-              <a:t>Os modelos de Estado no século XX</a:t>
-            </a:r>
-            <a:endParaRPr lang="en-US" sz="1100" dirty="0"/>
-          </a:p>
-          <a:p>
-            <a:pPr algn="l" marL="177800" indent="-177800">
-              <a:lnSpc>
-                <a:spcPct val="100000"/>
-              </a:lnSpc>
-              <a:spcAft>
-                <a:spcPts val="300"/>
-              </a:spcAft>
-              <a:buSzPct val="100000"/>
-              <a:buChar char="•"/>
-            </a:pPr>
-            <a:r>
-              <a:rPr lang="en-US" sz="1200" dirty="0">
-                <a:solidFill>
-                  <a:srgbClr val="1F2A37"/>
-                </a:solidFill>
-                <a:latin typeface="Calibri" pitchFamily="34" charset="0"/>
-                <a:ea typeface="Calibri" pitchFamily="34" charset="-122"/>
-                <a:cs typeface="Calibri" pitchFamily="34" charset="-120"/>
-              </a:rPr>
-              <a:t>Estado liberal e a crise de 1929.</a:t>
-            </a:r>
-            <a:endParaRPr lang="en-US" sz="1100" dirty="0"/>
-          </a:p>
-          <a:p>
-            <a:pPr algn="l" marL="177800" indent="-177800">
-              <a:lnSpc>
-                <a:spcPct val="100000"/>
-              </a:lnSpc>
-              <a:spcAft>
-                <a:spcPts val="300"/>
-              </a:spcAft>
-              <a:buSzPct val="100000"/>
-              <a:buChar char="•"/>
-            </a:pPr>
-            <a:r>
-              <a:rPr lang="en-US" sz="1200" dirty="0">
-                <a:solidFill>
-                  <a:srgbClr val="1F2A37"/>
-                </a:solidFill>
-                <a:latin typeface="Calibri" pitchFamily="34" charset="0"/>
-                <a:ea typeface="Calibri" pitchFamily="34" charset="-122"/>
-                <a:cs typeface="Calibri" pitchFamily="34" charset="-120"/>
-              </a:rPr>
-              <a:t>Estado socialista: planejamento central (1917–1991).</a:t>
-            </a:r>
-            <a:endParaRPr lang="en-US" sz="1100" dirty="0"/>
-          </a:p>
-          <a:p>
-            <a:pPr algn="l" marL="177800" indent="-177800">
-              <a:lnSpc>
-                <a:spcPct val="100000"/>
-              </a:lnSpc>
-              <a:spcAft>
-                <a:spcPts val="300"/>
-              </a:spcAft>
-              <a:buSzPct val="100000"/>
-              <a:buChar char="•"/>
-            </a:pPr>
-            <a:r>
-              <a:rPr lang="en-US" sz="1200" dirty="0">
-                <a:solidFill>
-                  <a:srgbClr val="1F2A37"/>
-                </a:solidFill>
-                <a:latin typeface="Calibri" pitchFamily="34" charset="0"/>
-                <a:ea typeface="Calibri" pitchFamily="34" charset="-122"/>
-                <a:cs typeface="Calibri" pitchFamily="34" charset="-120"/>
-              </a:rPr>
-              <a:t>Bem-estar: Keynes, New Deal, Beveridge; três regimes (Esping-Andersen).</a:t>
-            </a:r>
-            <a:endParaRPr lang="en-US" sz="1100" dirty="0"/>
-          </a:p>
-          <a:p>
-            <a:pPr algn="l" marL="177800" indent="-177800">
-              <a:lnSpc>
-                <a:spcPct val="100000"/>
-              </a:lnSpc>
-              <a:spcAft>
-                <a:spcPts val="300"/>
-              </a:spcAft>
-              <a:buSzPct val="100000"/>
-              <a:buChar char="•"/>
-            </a:pPr>
-            <a:r>
-              <a:rPr lang="en-US" sz="1200" dirty="0">
-                <a:solidFill>
-                  <a:srgbClr val="1F2A37"/>
-                </a:solidFill>
-                <a:latin typeface="Calibri" pitchFamily="34" charset="0"/>
-                <a:ea typeface="Calibri" pitchFamily="34" charset="-122"/>
-                <a:cs typeface="Calibri" pitchFamily="34" charset="-120"/>
-              </a:rPr>
-              <a:t>Crise dos anos 1970 e Estado neoliberal: Hayek, Friedman e Consenso de Washington.</a:t>
-            </a:r>
-            <a:endParaRPr lang="en-US" sz="1100" dirty="0"/>
-          </a:p>
-        </p:txBody>
-      </p:sp>
-      <p:sp>
-        <p:nvSpPr>
-          <p:cNvPr id="5" name="Text 3"/>
-          <p:cNvSpPr txBox="1"/>
-          <p:nvPr/>
-        </p:nvSpPr>
-        <p:spPr>
-          <a:xfrm>
-            <a:off x="4663440" y="1170432"/>
-            <a:ext cx="3794760" cy="2743200"/>
-          </a:xfrm>
-          <a:prstGeom prst="roundRect">
-            <a:avLst>
-              <a:gd name="adj" fmla="val 2000"/>
-            </a:avLst>
-          </a:prstGeom>
-          <a:solidFill>
-            <a:srgbClr val="E6F2F0"/>
-          </a:solidFill>
-          <a:ln/>
-        </p:spPr>
-        <p:txBody>
-          <a:bodyPr wrap="square" lIns="114300" tIns="114300" rIns="114300" bIns="114300" rtlCol="0" anchor="t"/>
-          <a:lstStyle/>
-          <a:p>
-            <a:pPr algn="l" indent="0" marL="0">
-              <a:lnSpc>
-                <a:spcPct val="100000"/>
-              </a:lnSpc>
-              <a:spcAft>
-                <a:spcPts val="200"/>
-              </a:spcAft>
-              <a:buNone/>
-            </a:pPr>
-            <a:r>
-              <a:rPr lang="en-US" sz="1100" b="1" dirty="0">
-                <a:solidFill>
-                  <a:srgbClr val="2A8C85"/>
-                </a:solidFill>
-                <a:latin typeface="Calibri" pitchFamily="34" charset="0"/>
-                <a:ea typeface="Calibri" pitchFamily="34" charset="-122"/>
-                <a:cs typeface="Calibri" pitchFamily="34" charset="-120"/>
-              </a:rPr>
-              <a:t>PARTE 2 · TÓPICO 8</a:t>
-            </a:r>
-            <a:endParaRPr lang="en-US" sz="1100" dirty="0"/>
-          </a:p>
-          <a:p>
-            <a:pPr algn="l" indent="0" marL="0">
-              <a:lnSpc>
-                <a:spcPct val="100000"/>
-              </a:lnSpc>
-              <a:spcAft>
-                <a:spcPts val="400"/>
-              </a:spcAft>
-              <a:buNone/>
-            </a:pPr>
-            <a:r>
-              <a:rPr lang="en-US" sz="1450" b="1" dirty="0">
-                <a:solidFill>
-                  <a:srgbClr val="13294B"/>
-                </a:solidFill>
-                <a:latin typeface="Calibri" pitchFamily="34" charset="0"/>
-                <a:ea typeface="Calibri" pitchFamily="34" charset="-122"/>
-                <a:cs typeface="Calibri" pitchFamily="34" charset="-120"/>
-              </a:rPr>
-              <a:t>Estado e capital no Brasil e no século XXI</a:t>
-            </a:r>
-            <a:endParaRPr lang="en-US" sz="1100" dirty="0"/>
-          </a:p>
-          <a:p>
-            <a:pPr algn="l" marL="177800" indent="-177800">
-              <a:lnSpc>
-                <a:spcPct val="100000"/>
-              </a:lnSpc>
-              <a:spcAft>
-                <a:spcPts val="300"/>
-              </a:spcAft>
-              <a:buSzPct val="100000"/>
-              <a:buChar char="•"/>
-            </a:pPr>
-            <a:r>
-              <a:rPr lang="en-US" sz="1200" dirty="0">
-                <a:solidFill>
-                  <a:srgbClr val="1F2A37"/>
-                </a:solidFill>
-                <a:latin typeface="Calibri" pitchFamily="34" charset="0"/>
-                <a:ea typeface="Calibri" pitchFamily="34" charset="-122"/>
-                <a:cs typeface="Calibri" pitchFamily="34" charset="-120"/>
-              </a:rPr>
-              <a:t>Estado desenvolvimentista (1930–1980).</a:t>
-            </a:r>
-            <a:endParaRPr lang="en-US" sz="1100" dirty="0"/>
-          </a:p>
-          <a:p>
-            <a:pPr algn="l" marL="177800" indent="-177800">
-              <a:lnSpc>
-                <a:spcPct val="100000"/>
-              </a:lnSpc>
-              <a:spcAft>
-                <a:spcPts val="300"/>
-              </a:spcAft>
-              <a:buSzPct val="100000"/>
-              <a:buChar char="•"/>
-            </a:pPr>
-            <a:r>
-              <a:rPr lang="en-US" sz="1200" dirty="0">
-                <a:solidFill>
-                  <a:srgbClr val="1F2A37"/>
-                </a:solidFill>
-                <a:latin typeface="Calibri" pitchFamily="34" charset="0"/>
-                <a:ea typeface="Calibri" pitchFamily="34" charset="-122"/>
-                <a:cs typeface="Calibri" pitchFamily="34" charset="-120"/>
-              </a:rPr>
-              <a:t>Constituição de 1988 (seguridade universal) × reformas dos anos 1990 (gerencial, regulador, LRF).</a:t>
-            </a:r>
-            <a:endParaRPr lang="en-US" sz="1100" dirty="0"/>
-          </a:p>
-          <a:p>
-            <a:pPr algn="l" marL="177800" indent="-177800">
-              <a:lnSpc>
-                <a:spcPct val="100000"/>
-              </a:lnSpc>
-              <a:spcAft>
-                <a:spcPts val="300"/>
-              </a:spcAft>
-              <a:buSzPct val="100000"/>
-              <a:buChar char="•"/>
-            </a:pPr>
-            <a:r>
-              <a:rPr lang="en-US" sz="1200" dirty="0">
-                <a:solidFill>
-                  <a:srgbClr val="1F2A37"/>
-                </a:solidFill>
-                <a:latin typeface="Calibri" pitchFamily="34" charset="0"/>
-                <a:ea typeface="Calibri" pitchFamily="34" charset="-122"/>
-                <a:cs typeface="Calibri" pitchFamily="34" charset="-120"/>
-              </a:rPr>
-              <a:t>Patrimonialismo, burocracia e gerencialismo ainda convivem.</a:t>
-            </a:r>
-            <a:endParaRPr lang="en-US" sz="1100" dirty="0"/>
-          </a:p>
-          <a:p>
-            <a:pPr algn="l" marL="177800" indent="-177800">
-              <a:lnSpc>
-                <a:spcPct val="100000"/>
-              </a:lnSpc>
-              <a:spcAft>
-                <a:spcPts val="300"/>
-              </a:spcAft>
-              <a:buSzPct val="100000"/>
-              <a:buChar char="•"/>
-            </a:pPr>
-            <a:r>
-              <a:rPr lang="en-US" sz="1200" dirty="0">
-                <a:solidFill>
-                  <a:srgbClr val="1F2A37"/>
-                </a:solidFill>
-                <a:latin typeface="Calibri" pitchFamily="34" charset="0"/>
-                <a:ea typeface="Calibri" pitchFamily="34" charset="-122"/>
-                <a:cs typeface="Calibri" pitchFamily="34" charset="-120"/>
-              </a:rPr>
-              <a:t>Século XXI: 2008 e a pandemia; que Estado e que mercado?</a:t>
-            </a:r>
-            <a:endParaRPr lang="en-US" sz="1100" dirty="0"/>
-          </a:p>
-        </p:txBody>
-      </p:sp>
-      <p:sp>
-        <p:nvSpPr>
-          <p:cNvPr id="6" name="Text 4"/>
-          <p:cNvSpPr txBox="1"/>
-          <p:nvPr/>
-        </p:nvSpPr>
-        <p:spPr>
-          <a:xfrm>
-            <a:off x="685800" y="3995928"/>
-            <a:ext cx="7772400" cy="484632"/>
-          </a:xfrm>
-          <a:prstGeom prst="roundRect">
-            <a:avLst>
-              <a:gd name="adj" fmla="val 15094"/>
-            </a:avLst>
-          </a:prstGeom>
-          <a:solidFill>
-            <a:srgbClr val="E6F2F0"/>
-          </a:solidFill>
-          <a:ln/>
-        </p:spPr>
-        <p:txBody>
-          <a:bodyPr wrap="square" lIns="127000" tIns="127000" rIns="127000" bIns="127000" rtlCol="0" anchor="ctr"/>
-          <a:lstStyle/>
-          <a:p>
-            <a:pPr algn="ctr" indent="0" marL="0">
-              <a:lnSpc>
-                <a:spcPct val="100000"/>
-              </a:lnSpc>
-              <a:buNone/>
-            </a:pPr>
-            <a:r>
-              <a:rPr lang="en-US" sz="1300" b="1" dirty="0">
-                <a:solidFill>
-                  <a:srgbClr val="13294B"/>
-                </a:solidFill>
-                <a:latin typeface="Calibri" pitchFamily="34" charset="0"/>
-                <a:ea typeface="Calibri" pitchFamily="34" charset="-122"/>
-                <a:cs typeface="Calibri" pitchFamily="34" charset="-120"/>
-              </a:rPr>
-              <a:t>Avaliações: A2 até 08/11 e A3 até 15/11, às 23h55. Bons estudos!</a:t>
-            </a:r>
-            <a:endParaRPr lang="en-US" sz="1300" dirty="0"/>
-          </a:p>
-        </p:txBody>
-      </p:sp>
-      <p:sp>
-        <p:nvSpPr>
-          <p:cNvPr id="7" name="Text 5"/>
-          <p:cNvSpPr txBox="1"/>
-          <p:nvPr/>
-        </p:nvSpPr>
-        <p:spPr>
-          <a:xfrm>
-            <a:off x="4206240" y="36576"/>
-            <a:ext cx="4800600" cy="219456"/>
-          </a:xfrm>
-          <a:prstGeom prst="rect">
-            <a:avLst/>
-          </a:prstGeom>
-          <a:noFill/>
-          <a:ln/>
-        </p:spPr>
-        <p:txBody>
-          <a:bodyPr wrap="square" lIns="0" tIns="0" rIns="0" bIns="0" rtlCol="0" anchor="ctr"/>
-          <a:lstStyle/>
-          <a:p>
-            <a:pPr algn="r" indent="0" marL="0">
-              <a:lnSpc>
-                <a:spcPct val="100000"/>
-              </a:lnSpc>
-              <a:buNone/>
-            </a:pPr>
-            <a:r>
-              <a:rPr lang="en-US" sz="950" dirty="0">
-                <a:solidFill>
-                  <a:srgbClr val="5B6770"/>
-                </a:solidFill>
-                <a:latin typeface="Calibri" pitchFamily="34" charset="0"/>
-                <a:ea typeface="Calibri" pitchFamily="34" charset="-122"/>
-                <a:cs typeface="Calibri" pitchFamily="34" charset="-120"/>
-              </a:rPr>
-              <a:t>Estado, Governo e Mercado · Unidade 4</a:t>
             </a:r>
             <a:endParaRPr lang="en-US" sz="950" dirty="0"/>
           </a:p>
